--- a/status_ceo/Stormberg_Status_CEO_Oct2026_ES.pptx
+++ b/status_ceo/Stormberg_Status_CEO_Oct2026_ES.pptx
@@ -11,9 +11,10 @@
     <p:sldId id="259" r:id="rId5"/>
     <p:sldId id="260" r:id="rId6"/>
     <p:sldId id="261" r:id="rId7"/>
+    <p:sldId id="262" r:id="rId8"/>
   </p:sldIdLst>
   <p:notesMasterIdLst>
-    <p:notesMasterId r:id="rId8"/>
+    <p:notesMasterId r:id="rId9"/>
   </p:notesMasterIdLst>
   <p:sldSz cx="9144000" cy="5143500"/>
   <p:notesSz cx="5143500" cy="9144000"/>
@@ -112,22 +113,23 @@
   <p:extLst>
     <p:ext uri="{521415D9-36F7-43E2-AB2F-B90AF26B5E84}">
       <p14:sectionLst xmlns:p14="http://schemas.microsoft.com/office/powerpoint/2010/main">
-        <p14:section name="Resumen" id="{86abd0c7-36a2-290b-a3e2-19a8f3365bb5}">
+        <p14:section name="Resumen" id="{d0653caf-6330-0383-0609-7ad77b5b1810}">
           <p14:sldIdLst>
             <p14:sldId id="256"/>
             <p14:sldId id="257"/>
+            <p14:sldId id="258"/>
           </p14:sldIdLst>
         </p14:section>
-        <p14:section name="Avances" id="{eae4ad8b-85fb-b294-6cd4-ced0c47a5d0d}">
+        <p14:section name="Avances" id="{e4ca8ef7-515d-e99b-9f36-3175c2df1973}">
           <p14:sldIdLst>
-            <p14:sldId id="258"/>
             <p14:sldId id="259"/>
             <p14:sldId id="260"/>
+            <p14:sldId id="261"/>
           </p14:sldIdLst>
         </p14:section>
-        <p14:section name="Próximos pasos" id="{fdd2d61a-9a61-8efa-c2c9-d9321dd7d10c}">
+        <p14:section name="Próximos pasos" id="{956ceead-70c4-aa53-7e9b-a491e4a594e6}">
           <p14:sldIdLst>
-            <p14:sldId id="261"/>
+            <p14:sldId id="262"/>
           </p14:sldIdLst>
         </p14:section>
       </p14:sectionLst>
@@ -140,6 +142,480 @@
 </file>
 
 <file path=ppt/charts/chart1.xml><?xml version="1.0" encoding="utf-8"?>
+<c:chartSpace xmlns:c="http://schemas.openxmlformats.org/drawingml/2006/chart" xmlns:a="http://schemas.openxmlformats.org/drawingml/2006/main" xmlns:r="http://schemas.openxmlformats.org/officeDocument/2006/relationships">
+  <c:date1904 val="0"/>
+  <c:roundedCorners val="1"/>
+  <c:chart>
+    <c:title>
+      <c:tx>
+        <c:rich>
+          <a:bodyPr/>
+          <a:lstStyle/>
+          <a:p>
+            <a:pPr>
+              <a:defRPr sz="1200" b="0" i="0" u="none" strike="noStrike">
+                <a:solidFill>
+                  <a:srgbClr val="2A1F1C"/>
+                </a:solidFill>
+                <a:latin typeface="+mn-lt"/>
+              </a:defRPr>
+            </a:pPr>
+            <a:r>
+              <a:rPr sz="1200" b="0" i="0" u="none" strike="noStrike">
+                <a:solidFill>
+                  <a:srgbClr val="2A1F1C"/>
+                </a:solidFill>
+                <a:latin typeface="+mn-lt"/>
+              </a:rPr>
+              <a:t>Venta diaria de la tienda Brooklyn (USD)</a:t>
+            </a:r>
+          </a:p>
+        </c:rich>
+      </c:tx>
+      <c:layout/>
+      <c:overlay val="0"/>
+    </c:title>
+    <c:autoTitleDeleted val="0"/>
+    <c:plotArea>
+      <c:layout/>
+      <c:barChart>
+        <c:barDir val="col"/>
+        <c:grouping val="stacked"/>
+        <c:varyColors val="0"/>
+        <c:ser>
+          <c:idx val="0"/>
+          <c:order val="0"/>
+          <c:tx>
+            <c:strRef>
+              <c:f>Sheet1!$B$1</c:f>
+              <c:strCache>
+                <c:ptCount val="1"/>
+                <c:pt idx="0">
+                  <c:v>base</c:v>
+                </c:pt>
+              </c:strCache>
+            </c:strRef>
+          </c:tx>
+          <c:spPr>
+            <a:solidFill>
+              <a:srgbClr val="C9B8A6"/>
+            </a:solidFill>
+            <a:effectLst/>
+          </c:spPr>
+          <c:invertIfNegative val="0"/>
+          <c:dLbls>
+            <c:numFmt formatCode="#,##0" sourceLinked="0"/>
+            <c:txPr>
+              <a:bodyPr/>
+              <a:lstStyle/>
+              <a:p>
+                <a:pPr>
+                  <a:defRPr b="0" i="0" strike="noStrike" sz="1200" u="none">
+                    <a:solidFill>
+                      <a:srgbClr val="000000"/>
+                    </a:solidFill>
+                    <a:latin typeface="Arial"/>
+                  </a:defRPr>
+                </a:pPr>
+              </a:p>
+            </c:txPr>
+            <c:showLegendKey val="0"/>
+            <c:showVal val="0"/>
+            <c:showCatName val="0"/>
+            <c:showSerName val="0"/>
+            <c:showPercent val="0"/>
+            <c:showBubbleSize val="0"/>
+            <c:showLeaderLines val="0"/>
+          </c:dLbls>
+          <c:cat>
+            <c:multiLvlStrRef>
+              <c:f>Sheet1!$A$2:$A$14</c:f>
+              <c:multiLvlStrCache>
+                <c:ptCount val="13"/>
+                <c:lvl>
+                  <c:pt idx="0">
+                    <c:v>1</c:v>
+                  </c:pt>
+                  <c:pt idx="1">
+                    <c:v>2</c:v>
+                  </c:pt>
+                  <c:pt idx="2">
+                    <c:v>3</c:v>
+                  </c:pt>
+                  <c:pt idx="3">
+                    <c:v>4</c:v>
+                  </c:pt>
+                  <c:pt idx="4">
+                    <c:v>5</c:v>
+                  </c:pt>
+                  <c:pt idx="5">
+                    <c:v>6</c:v>
+                  </c:pt>
+                  <c:pt idx="6">
+                    <c:v>7</c:v>
+                  </c:pt>
+                  <c:pt idx="7">
+                    <c:v>8</c:v>
+                  </c:pt>
+                  <c:pt idx="8">
+                    <c:v>9</c:v>
+                  </c:pt>
+                  <c:pt idx="9">
+                    <c:v>10</c:v>
+                  </c:pt>
+                  <c:pt idx="10">
+                    <c:v>11</c:v>
+                  </c:pt>
+                  <c:pt idx="11">
+                    <c:v>12</c:v>
+                  </c:pt>
+                  <c:pt idx="12">
+                    <c:v>13</c:v>
+                  </c:pt>
+                </c:lvl>
+              </c:multiLvlStrCache>
+            </c:multiLvlStrRef>
+          </c:cat>
+          <c:val>
+            <c:numRef>
+              <c:f>Sheet1!$B$2:$B$14</c:f>
+              <c:numCache>
+                <c:formatCode>General</c:formatCode>
+                <c:ptCount val="13"/>
+                <c:pt idx="0">
+                  <c:v>1375</c:v>
+                </c:pt>
+                <c:pt idx="1">
+                  <c:v>525</c:v>
+                </c:pt>
+                <c:pt idx="2">
+                  <c:v>854</c:v>
+                </c:pt>
+                <c:pt idx="3">
+                  <c:v>931</c:v>
+                </c:pt>
+                <c:pt idx="4">
+                  <c:v>698</c:v>
+                </c:pt>
+                <c:pt idx="5">
+                  <c:v>1485</c:v>
+                </c:pt>
+                <c:pt idx="6">
+                  <c:v>739</c:v>
+                </c:pt>
+                <c:pt idx="7">
+                  <c:v>777</c:v>
+                </c:pt>
+                <c:pt idx="8">
+                  <c:v>885</c:v>
+                </c:pt>
+                <c:pt idx="9">
+                  <c:v>0</c:v>
+                </c:pt>
+                <c:pt idx="10">
+                  <c:v>0</c:v>
+                </c:pt>
+                <c:pt idx="11">
+                  <c:v>0</c:v>
+                </c:pt>
+                <c:pt idx="12">
+                  <c:v>866</c:v>
+                </c:pt>
+              </c:numCache>
+            </c:numRef>
+          </c:val>
+        </c:ser>
+        <c:ser>
+          <c:idx val="1"/>
+          <c:order val="1"/>
+          <c:tx>
+            <c:strRef>
+              <c:f>Sheet1!$C$1</c:f>
+              <c:strCache>
+                <c:ptCount val="1"/>
+                <c:pt idx="0">
+                  <c:v>hl</c:v>
+                </c:pt>
+              </c:strCache>
+            </c:strRef>
+          </c:tx>
+          <c:spPr>
+            <a:solidFill>
+              <a:srgbClr val="2E6B4F"/>
+            </a:solidFill>
+            <a:effectLst/>
+          </c:spPr>
+          <c:invertIfNegative val="0"/>
+          <c:dLbls>
+            <c:numFmt formatCode="#,##0" sourceLinked="0"/>
+            <c:txPr>
+              <a:bodyPr/>
+              <a:lstStyle/>
+              <a:p>
+                <a:pPr>
+                  <a:defRPr b="0" i="0" strike="noStrike" sz="1200" u="none">
+                    <a:solidFill>
+                      <a:srgbClr val="000000"/>
+                    </a:solidFill>
+                    <a:latin typeface="Arial"/>
+                  </a:defRPr>
+                </a:pPr>
+              </a:p>
+            </c:txPr>
+            <c:showLegendKey val="0"/>
+            <c:showVal val="0"/>
+            <c:showCatName val="0"/>
+            <c:showSerName val="0"/>
+            <c:showPercent val="0"/>
+            <c:showBubbleSize val="0"/>
+            <c:showLeaderLines val="0"/>
+          </c:dLbls>
+          <c:cat>
+            <c:multiLvlStrRef>
+              <c:f>Sheet1!$A$2:$A$14</c:f>
+              <c:multiLvlStrCache>
+                <c:ptCount val="13"/>
+                <c:lvl>
+                  <c:pt idx="0">
+                    <c:v>1</c:v>
+                  </c:pt>
+                  <c:pt idx="1">
+                    <c:v>2</c:v>
+                  </c:pt>
+                  <c:pt idx="2">
+                    <c:v>3</c:v>
+                  </c:pt>
+                  <c:pt idx="3">
+                    <c:v>4</c:v>
+                  </c:pt>
+                  <c:pt idx="4">
+                    <c:v>5</c:v>
+                  </c:pt>
+                  <c:pt idx="5">
+                    <c:v>6</c:v>
+                  </c:pt>
+                  <c:pt idx="6">
+                    <c:v>7</c:v>
+                  </c:pt>
+                  <c:pt idx="7">
+                    <c:v>8</c:v>
+                  </c:pt>
+                  <c:pt idx="8">
+                    <c:v>9</c:v>
+                  </c:pt>
+                  <c:pt idx="9">
+                    <c:v>10</c:v>
+                  </c:pt>
+                  <c:pt idx="10">
+                    <c:v>11</c:v>
+                  </c:pt>
+                  <c:pt idx="11">
+                    <c:v>12</c:v>
+                  </c:pt>
+                  <c:pt idx="12">
+                    <c:v>13</c:v>
+                  </c:pt>
+                </c:lvl>
+              </c:multiLvlStrCache>
+            </c:multiLvlStrRef>
+          </c:cat>
+          <c:val>
+            <c:numRef>
+              <c:f>Sheet1!$C$2:$C$14</c:f>
+              <c:numCache>
+                <c:formatCode>General</c:formatCode>
+                <c:ptCount val="13"/>
+                <c:pt idx="0">
+                  <c:v>0</c:v>
+                </c:pt>
+                <c:pt idx="1">
+                  <c:v>0</c:v>
+                </c:pt>
+                <c:pt idx="2">
+                  <c:v>0</c:v>
+                </c:pt>
+                <c:pt idx="3">
+                  <c:v>0</c:v>
+                </c:pt>
+                <c:pt idx="4">
+                  <c:v>0</c:v>
+                </c:pt>
+                <c:pt idx="5">
+                  <c:v>0</c:v>
+                </c:pt>
+                <c:pt idx="6">
+                  <c:v>0</c:v>
+                </c:pt>
+                <c:pt idx="7">
+                  <c:v>0</c:v>
+                </c:pt>
+                <c:pt idx="8">
+                  <c:v>0</c:v>
+                </c:pt>
+                <c:pt idx="9">
+                  <c:v>1569</c:v>
+                </c:pt>
+                <c:pt idx="10">
+                  <c:v>1637</c:v>
+                </c:pt>
+                <c:pt idx="11">
+                  <c:v>2030</c:v>
+                </c:pt>
+                <c:pt idx="12">
+                  <c:v>0</c:v>
+                </c:pt>
+              </c:numCache>
+            </c:numRef>
+          </c:val>
+        </c:ser>
+        <c:dLbls>
+          <c:numFmt formatCode="#,##0" sourceLinked="0"/>
+          <c:txPr>
+            <a:bodyPr/>
+            <a:lstStyle/>
+            <a:p>
+              <a:pPr>
+                <a:defRPr b="0" i="0" strike="noStrike" sz="1200" u="none">
+                  <a:solidFill>
+                    <a:srgbClr val="000000"/>
+                  </a:solidFill>
+                  <a:latin typeface="Arial"/>
+                </a:defRPr>
+              </a:pPr>
+            </a:p>
+          </c:txPr>
+          <c:showLegendKey val="0"/>
+          <c:showVal val="0"/>
+          <c:showCatName val="0"/>
+          <c:showSerName val="0"/>
+          <c:showPercent val="0"/>
+          <c:showBubbleSize val="0"/>
+          <c:showLeaderLines val="0"/>
+        </c:dLbls>
+        <c:gapWidth val="35"/>
+        <c:overlap val="100"/>
+        <c:axId val="2094734554"/>
+        <c:axId val="2094734552"/>
+        <c:axId val="2094734556"/>
+      </c:barChart>
+      <c:catAx>
+        <c:axId val="2094734554"/>
+        <c:scaling>
+          <c:orientation val="minMax"/>
+        </c:scaling>
+        <c:delete val="0"/>
+        <c:axPos val="b"/>
+        <c:numFmt formatCode="General" sourceLinked="1"/>
+        <c:majorTickMark val="out"/>
+        <c:minorTickMark val="none"/>
+        <c:tickLblPos val="low"/>
+        <c:spPr>
+          <a:ln w="12700" cap="flat">
+            <a:solidFill>
+              <a:srgbClr val="888888"/>
+            </a:solidFill>
+            <a:prstDash val="solid"/>
+            <a:round/>
+          </a:ln>
+        </c:spPr>
+        <c:txPr>
+          <a:bodyPr/>
+          <a:lstStyle/>
+          <a:p>
+            <a:pPr>
+              <a:defRPr sz="1000" b="0" i="0" u="none" strike="noStrike">
+                <a:solidFill>
+                  <a:srgbClr val="2A1F1C"/>
+                </a:solidFill>
+                <a:latin typeface="+mn-lt"/>
+              </a:defRPr>
+            </a:pPr>
+            <a:endParaRPr lang="en-US"/>
+          </a:p>
+        </c:txPr>
+        <c:crossAx val="2094734552"/>
+        <c:crosses val="autoZero"/>
+        <c:auto val="1"/>
+        <c:lblAlgn val="ctr"/>
+        <c:noMultiLvlLbl val="1"/>
+      </c:catAx>
+      <c:valAx>
+        <c:axId val="2094734552"/>
+        <c:scaling>
+          <c:orientation val="minMax"/>
+          <c:max val="2500"/>
+        </c:scaling>
+        <c:delete val="0"/>
+        <c:axPos val="l"/>
+        <c:majorGridlines>
+          <c:spPr>
+            <a:ln w="9525" cap="flat">
+              <a:solidFill>
+                <a:srgbClr val="F3EEE9"/>
+              </a:solidFill>
+              <a:prstDash val="solid"/>
+              <a:round/>
+            </a:ln>
+          </c:spPr>
+        </c:majorGridlines>
+        <c:numFmt formatCode="$#,##0" sourceLinked="0"/>
+        <c:majorTickMark val="out"/>
+        <c:minorTickMark val="none"/>
+        <c:tickLblPos val="nextTo"/>
+        <c:spPr>
+          <a:ln w="12700" cap="flat">
+            <a:solidFill>
+              <a:srgbClr val="888888"/>
+            </a:solidFill>
+            <a:prstDash val="solid"/>
+            <a:round/>
+          </a:ln>
+        </c:spPr>
+        <c:txPr>
+          <a:bodyPr/>
+          <a:lstStyle/>
+          <a:p>
+            <a:pPr>
+              <a:defRPr sz="900" b="0" i="0" u="none" strike="noStrike">
+                <a:solidFill>
+                  <a:srgbClr val="8C7B70"/>
+                </a:solidFill>
+                <a:latin typeface="+mn-lt"/>
+              </a:defRPr>
+            </a:pPr>
+            <a:endParaRPr lang="en-US"/>
+          </a:p>
+        </c:txPr>
+        <c:crossAx val="2094734554"/>
+        <c:crosses val="autoZero"/>
+        <c:crossBetween val="between"/>
+        <c:majorUnit val="500"/>
+      </c:valAx>
+      <c:spPr>
+        <a:noFill/>
+        <a:ln>
+          <a:noFill/>
+        </a:ln>
+        <a:effectLst/>
+      </c:spPr>
+    </c:plotArea>
+    <c:plotVisOnly val="1"/>
+    <c:dispBlanksAs val="span"/>
+  </c:chart>
+  <c:spPr>
+    <a:noFill/>
+    <a:ln>
+      <a:noFill/>
+    </a:ln>
+    <a:effectLst/>
+  </c:spPr>
+  <c:externalData r:id="rId1">
+    <c:autoUpdate val="0"/>
+  </c:externalData>
+</c:chartSpace>
+</file>
+
+<file path=ppt/charts/chart2.xml><?xml version="1.0" encoding="utf-8"?>
 <c:chartSpace xmlns:c="http://schemas.openxmlformats.org/drawingml/2006/chart" xmlns:a="http://schemas.openxmlformats.org/drawingml/2006/main" xmlns:r="http://schemas.openxmlformats.org/officeDocument/2006/relationships">
   <c:date1904 val="0"/>
   <c:roundedCorners val="1"/>
@@ -500,7 +976,7 @@
 </c:chartSpace>
 </file>
 
-<file path=ppt/charts/chart2.xml><?xml version="1.0" encoding="utf-8"?>
+<file path=ppt/charts/chart3.xml><?xml version="1.0" encoding="utf-8"?>
 <c:chartSpace xmlns:c="http://schemas.openxmlformats.org/drawingml/2006/chart" xmlns:a="http://schemas.openxmlformats.org/drawingml/2006/main" xmlns:r="http://schemas.openxmlformats.org/officeDocument/2006/relationships">
   <c:date1904 val="0"/>
   <c:roundedCorners val="1"/>
@@ -1635,6 +2111,94 @@
             <a:fld id="{F7021451-1387-4CA6-816F-3879F97B5CBC}" type="slidenum">
               <a:rPr lang="en-US"/>
               <a:t>6</a:t>
+            </a:fld>
+            <a:endParaRPr lang="en-US"/>
+          </a:p>
+        </p:txBody>
+      </p:sp>
+    </p:spTree>
+    <p:extLst>
+      <p:ext uri="{BB962C8B-B14F-4D97-AF65-F5344CB8AC3E}">
+        <p14:creationId xmlns:p14="http://schemas.microsoft.com/office/powerpoint/2010/main" val="1024086991"/>
+      </p:ext>
+    </p:extLst>
+  </p:cSld>
+  <p:clrMapOvr>
+    <a:masterClrMapping/>
+  </p:clrMapOvr>
+</p:notes>
+</file>
+
+<file path=ppt/notesSlides/notesSlide7.xml><?xml version="1.0" encoding="utf-8"?>
+<p:notes xmlns:a="http://schemas.openxmlformats.org/drawingml/2006/main" xmlns:r="http://schemas.openxmlformats.org/officeDocument/2006/relationships" xmlns:p="http://schemas.openxmlformats.org/presentationml/2006/main">
+  <p:cSld>
+    <p:spTree>
+      <p:nvGrpSpPr>
+        <p:cNvPr id="1" name=""/>
+        <p:cNvGrpSpPr/>
+        <p:nvPr/>
+      </p:nvGrpSpPr>
+      <p:grpSpPr>
+        <a:xfrm>
+          <a:off x="0" y="0"/>
+          <a:ext cx="0" cy="0"/>
+          <a:chOff x="0" y="0"/>
+          <a:chExt cx="0" cy="0"/>
+        </a:xfrm>
+      </p:grpSpPr>
+      <p:sp>
+        <p:nvSpPr>
+          <p:cNvPr id="2" name="Slide Image Placeholder 1"/>
+          <p:cNvSpPr>
+            <a:spLocks noGrp="1" noRot="1" noChangeAspect="1"/>
+          </p:cNvSpPr>
+          <p:nvPr>
+            <p:ph type="sldImg"/>
+          </p:nvPr>
+        </p:nvSpPr>
+        <p:spPr/>
+      </p:sp>
+      <p:sp>
+        <p:nvSpPr>
+          <p:cNvPr id="3" name="Notes Placeholder 2"/>
+          <p:cNvSpPr>
+            <a:spLocks noGrp="1"/>
+          </p:cNvSpPr>
+          <p:nvPr>
+            <p:ph type="body" idx="1"/>
+          </p:nvPr>
+        </p:nvSpPr>
+        <p:spPr/>
+        <p:txBody>
+          <a:bodyPr/>
+          <a:lstStyle/>
+          <a:p>
+            <a:r>
+              <a:rPr lang="en-US" dirty="0"/>
+              <a:t/>
+            </a:r>
+            <a:endParaRPr lang="en-US" dirty="0"/>
+          </a:p>
+        </p:txBody>
+      </p:sp>
+      <p:sp>
+        <p:nvSpPr>
+          <p:cNvPr id="4" name="Slide Number Placeholder 3"/>
+          <p:cNvSpPr>
+            <a:spLocks noGrp="1"/>
+          </p:cNvSpPr>
+          <p:nvPr>
+            <p:ph type="sldNum" sz="quarter" idx="10"/>
+          </p:nvPr>
+        </p:nvSpPr>
+        <p:spPr/>
+        <p:txBody>
+          <a:bodyPr/>
+          <a:lstStyle/>
+          <a:p>
+            <a:fld id="{F7021451-1387-4CA6-816F-3879F97B5CBC}" type="slidenum">
+              <a:rPr lang="en-US"/>
+              <a:t>7</a:t>
             </a:fld>
             <a:endParaRPr lang="en-US"/>
           </a:p>
@@ -2639,7 +3203,7 @@
                 <a:ea typeface="Cambria" pitchFamily="34" charset="-122"/>
                 <a:cs typeface="Cambria" pitchFamily="34" charset="-120"/>
               </a:rPr>
-              <a:t>Las acciones ya están corriendo y las compras repuntan</a:t>
+              <a:t>Las ventas repuntan: tres días seguidos sobre $1.500</a:t>
             </a:r>
             <a:endParaRPr lang="en-US" sz="2600" dirty="0"/>
           </a:p>
@@ -2815,7 +3379,7 @@
                 <a:ea typeface="Cambria" pitchFamily="34" charset="-122"/>
                 <a:cs typeface="Cambria" pitchFamily="34" charset="-120"/>
               </a:rPr>
-              <a:t>2,3x</a:t>
+              <a:t>+90%</a:t>
             </a:r>
             <a:endParaRPr lang="en-US" sz="2800" dirty="0"/>
           </a:p>
@@ -2851,7 +3415,7 @@
                   <a:schemeClr val="tx1"/>
                 </a:solidFill>
               </a:rPr>
-              <a:t>Inversión diaria en Meta</a:t>
+              <a:t>Venta diaria de Brooklyn</a:t>
             </a:r>
             <a:endParaRPr lang="en-US" sz="1100" dirty="0"/>
           </a:p>
@@ -2865,7 +3429,7 @@
                   <a:schemeClr val="tx1"/>
                 </a:solidFill>
               </a:rPr>
-              <a:t>$72 → $166 por día</a:t>
+              <a:t>10–12 oct vs. 1–9 oct</a:t>
             </a:r>
             <a:endParaRPr lang="en-US" sz="1100" dirty="0"/>
           </a:p>
@@ -3057,7 +3621,7 @@
                   <a:schemeClr val="accent1"/>
                 </a:solidFill>
               </a:rPr>
-              <a:t>Ejecución: </a:t>
+              <a:t>Tracción: </a:t>
             </a:r>
             <a:pPr indent="0" marL="0">
               <a:buNone/>
@@ -3068,7 +3632,7 @@
                   <a:schemeClr val="tx1"/>
                 </a:solidFill>
               </a:rPr>
-              <a:t>todo lo comprometido en Meta ya está en el aire en las 3 marcas, y el 10 de octubre reestructuramos el retargeting.</a:t>
+              <a:t>Brooklyn vendió $1.745 diarios del 10 al 12 de octubre, casi el doble que en los primeros nueve días del mes, justo cuando se encendió Meta.</a:t>
             </a:r>
             <a:endParaRPr lang="en-US" sz="1400" dirty="0"/>
           </a:p>
@@ -3086,7 +3650,7 @@
                   <a:schemeClr val="accent1"/>
                 </a:solidFill>
               </a:rPr>
-              <a:t>Resultado: </a:t>
+              <a:t>Ejecución: </a:t>
             </a:r>
             <a:pPr indent="0" marL="0">
               <a:buNone/>
@@ -3097,7 +3661,36 @@
                   <a:schemeClr val="tx1"/>
                 </a:solidFill>
               </a:rPr>
-              <a:t>las compras se multiplicaron, pero el retorno en Meta (0,76x) sigue por debajo del punto de equilibrio. Ya movimos presupuesto hacia lo que mejor convierte.</a:t>
+              <a:t>todo lo comprometido en Meta ya está en el aire en las 3 marcas.</a:t>
+            </a:r>
+            <a:endParaRPr lang="en-US" sz="1400" dirty="0"/>
+          </a:p>
+          <a:p>
+            <a:pPr marL="342900" indent="-342900">
+              <a:spcAft>
+                <a:spcPts val="1000"/>
+              </a:spcAft>
+              <a:buSzPct val="100000"/>
+              <a:buChar char="•"/>
+            </a:pPr>
+            <a:r>
+              <a:rPr lang="en-US" sz="1400" b="1" dirty="0">
+                <a:solidFill>
+                  <a:schemeClr val="accent1"/>
+                </a:solidFill>
+              </a:rPr>
+              <a:t>A cuidar: </a:t>
+            </a:r>
+            <a:pPr indent="0" marL="0">
+              <a:buNone/>
+            </a:pPr>
+            <a:r>
+              <a:rPr lang="en-US" sz="1400" dirty="0">
+                <a:solidFill>
+                  <a:schemeClr val="tx1"/>
+                </a:solidFill>
+              </a:rPr>
+              <a:t>el retorno directo de Meta (0,76x) aún está en construcción; ya movimos presupuesto a lo que mejor convierte.</a:t>
             </a:r>
             <a:endParaRPr lang="en-US" sz="1400" dirty="0"/>
           </a:p>
@@ -3237,6 +3830,720 @@
                 <a:ea typeface="Cambria" pitchFamily="34" charset="-122"/>
                 <a:cs typeface="Cambria" pitchFamily="34" charset="-120"/>
               </a:rPr>
+              <a:t>Señales positivas de la última semana</a:t>
+            </a:r>
+            <a:endParaRPr lang="en-US" sz="2600" dirty="0"/>
+          </a:p>
+        </p:txBody>
+      </p:sp>
+      <p:graphicFrame>
+        <p:nvGraphicFramePr>
+          <p:cNvPr id="3" name="Daily sales chart" descr=""/>
+          <p:cNvGraphicFramePr/>
+          <p:nvPr/>
+        </p:nvGraphicFramePr>
+        <p:xfrm>
+          <a:off x="457200" y="960120"/>
+          <a:ext cx="4297680" cy="2514600"/>
+        </p:xfrm>
+        <a:graphic xmlns:a="http://schemas.openxmlformats.org/drawingml/2006/main">
+          <a:graphicData uri="http://schemas.openxmlformats.org/drawingml/2006/chart">
+            <c:chart xmlns:c="http://schemas.openxmlformats.org/drawingml/2006/chart" r:id="rId1"/>
+          </a:graphicData>
+        </a:graphic>
+      </p:graphicFrame>
+      <p:sp>
+        <p:nvSpPr>
+          <p:cNvPr id="4" name="Text 1"/>
+          <p:cNvSpPr txBox="1"/>
+          <p:nvPr/>
+        </p:nvSpPr>
+        <p:spPr>
+          <a:xfrm>
+            <a:off x="457200" y="3611880"/>
+            <a:ext cx="1737360" cy="685800"/>
+          </a:xfrm>
+          <a:prstGeom prst="rect">
+            <a:avLst/>
+          </a:prstGeom>
+          <a:noFill/>
+          <a:ln/>
+        </p:spPr>
+        <p:txBody>
+          <a:bodyPr wrap="square" lIns="0" tIns="0" rIns="0" bIns="0" rtlCol="0" anchor="ctr"/>
+          <a:lstStyle/>
+          <a:p>
+            <a:pPr indent="0" marL="0">
+              <a:buNone/>
+            </a:pPr>
+            <a:r>
+              <a:rPr lang="en-US" sz="3200" b="1" dirty="0">
+                <a:solidFill>
+                  <a:schemeClr val="accent2"/>
+                </a:solidFill>
+                <a:latin typeface="Cambria" pitchFamily="34" charset="0"/>
+                <a:ea typeface="Cambria" pitchFamily="34" charset="-122"/>
+                <a:cs typeface="Cambria" pitchFamily="34" charset="-120"/>
+              </a:rPr>
+              <a:t>$1.745</a:t>
+            </a:r>
+            <a:endParaRPr lang="en-US" sz="3200" dirty="0"/>
+          </a:p>
+        </p:txBody>
+      </p:sp>
+      <p:sp>
+        <p:nvSpPr>
+          <p:cNvPr id="5" name="Text 2"/>
+          <p:cNvSpPr txBox="1"/>
+          <p:nvPr/>
+        </p:nvSpPr>
+        <p:spPr>
+          <a:xfrm>
+            <a:off x="2240280" y="3611880"/>
+            <a:ext cx="2514600" cy="685800"/>
+          </a:xfrm>
+          <a:prstGeom prst="rect">
+            <a:avLst/>
+          </a:prstGeom>
+          <a:noFill/>
+          <a:ln/>
+        </p:spPr>
+        <p:txBody>
+          <a:bodyPr wrap="square" lIns="0" tIns="0" rIns="0" bIns="0" rtlCol="0" anchor="ctr"/>
+          <a:lstStyle/>
+          <a:p>
+            <a:pPr indent="0" marL="0">
+              <a:buNone/>
+            </a:pPr>
+            <a:r>
+              <a:rPr lang="en-US" sz="1200" dirty="0">
+                <a:solidFill>
+                  <a:schemeClr val="tx1"/>
+                </a:solidFill>
+              </a:rPr>
+              <a:t>venta diaria promedio del 10 al 12 de octubre, vs. $919 del 1 al 9</a:t>
+            </a:r>
+            <a:endParaRPr lang="en-US" sz="1200" dirty="0"/>
+          </a:p>
+        </p:txBody>
+      </p:sp>
+      <p:sp>
+        <p:nvSpPr>
+          <p:cNvPr id="6" name="Positive card 1"/>
+          <p:cNvSpPr/>
+          <p:nvPr/>
+        </p:nvSpPr>
+        <p:spPr>
+          <a:xfrm>
+            <a:off x="5029200" y="1005840"/>
+            <a:ext cx="1783080" cy="1554480"/>
+          </a:xfrm>
+          <a:prstGeom prst="roundRect">
+            <a:avLst>
+              <a:gd name="adj" fmla="val 4706"/>
+            </a:avLst>
+          </a:prstGeom>
+          <a:solidFill>
+            <a:schemeClr val="bg2"/>
+          </a:solidFill>
+          <a:ln/>
+        </p:spPr>
+      </p:sp>
+      <p:sp>
+        <p:nvSpPr>
+          <p:cNvPr id="7" name="Positive dot 1"/>
+          <p:cNvSpPr/>
+          <p:nvPr/>
+        </p:nvSpPr>
+        <p:spPr>
+          <a:xfrm>
+            <a:off x="5166360" y="1143000"/>
+            <a:ext cx="256032" cy="256032"/>
+          </a:xfrm>
+          <a:prstGeom prst="ellipse">
+            <a:avLst/>
+          </a:prstGeom>
+          <a:solidFill>
+            <a:schemeClr val="accent2"/>
+          </a:solidFill>
+          <a:ln/>
+        </p:spPr>
+      </p:sp>
+      <p:sp>
+        <p:nvSpPr>
+          <p:cNvPr id="8" name="Text 5"/>
+          <p:cNvSpPr txBox="1"/>
+          <p:nvPr/>
+        </p:nvSpPr>
+        <p:spPr>
+          <a:xfrm>
+            <a:off x="5486400" y="1097280"/>
+            <a:ext cx="1261872" cy="365760"/>
+          </a:xfrm>
+          <a:prstGeom prst="rect">
+            <a:avLst/>
+          </a:prstGeom>
+          <a:noFill/>
+          <a:ln/>
+        </p:spPr>
+        <p:txBody>
+          <a:bodyPr wrap="square" lIns="0" tIns="0" rIns="0" bIns="0" rtlCol="0" anchor="ctr">
+            <a:normAutofit/>
+          </a:bodyPr>
+          <a:lstStyle/>
+          <a:p>
+            <a:pPr indent="0" marL="0">
+              <a:buNone/>
+            </a:pPr>
+            <a:r>
+              <a:rPr lang="en-US" sz="1200" b="1" dirty="0">
+                <a:solidFill>
+                  <a:schemeClr val="tx1"/>
+                </a:solidFill>
+                <a:latin typeface="Cambria" pitchFamily="34" charset="0"/>
+                <a:ea typeface="Cambria" pitchFamily="34" charset="-122"/>
+                <a:cs typeface="Cambria" pitchFamily="34" charset="-120"/>
+              </a:rPr>
+              <a:t>Flujos más rentables</a:t>
+            </a:r>
+            <a:endParaRPr lang="en-US" sz="1200" dirty="0"/>
+          </a:p>
+        </p:txBody>
+      </p:sp>
+      <p:sp>
+        <p:nvSpPr>
+          <p:cNvPr id="9" name="Text 6"/>
+          <p:cNvSpPr txBox="1"/>
+          <p:nvPr/>
+        </p:nvSpPr>
+        <p:spPr>
+          <a:xfrm>
+            <a:off x="5166360" y="1508760"/>
+            <a:ext cx="1536192" cy="987552"/>
+          </a:xfrm>
+          <a:prstGeom prst="rect">
+            <a:avLst/>
+          </a:prstGeom>
+          <a:noFill/>
+          <a:ln/>
+        </p:spPr>
+        <p:txBody>
+          <a:bodyPr wrap="square" lIns="0" tIns="0" rIns="0" bIns="0" rtlCol="0" anchor="t"/>
+          <a:lstStyle/>
+          <a:p>
+            <a:pPr indent="0" marL="0">
+              <a:buNone/>
+            </a:pPr>
+            <a:r>
+              <a:rPr lang="en-US" sz="1050" dirty="0">
+                <a:solidFill>
+                  <a:schemeClr val="tx1"/>
+                </a:solidFill>
+              </a:rPr>
+              <a:t>Tras los ajustes, los flujos generan $1,04 por receptor (vs. $0,21 en septiembre) y $80 diarios (+40%)</a:t>
+            </a:r>
+            <a:endParaRPr lang="en-US" sz="1050" dirty="0"/>
+          </a:p>
+        </p:txBody>
+      </p:sp>
+      <p:sp>
+        <p:nvSpPr>
+          <p:cNvPr id="10" name="Positive card 2"/>
+          <p:cNvSpPr/>
+          <p:nvPr/>
+        </p:nvSpPr>
+        <p:spPr>
+          <a:xfrm>
+            <a:off x="6903720" y="1005840"/>
+            <a:ext cx="1783080" cy="1554480"/>
+          </a:xfrm>
+          <a:prstGeom prst="roundRect">
+            <a:avLst>
+              <a:gd name="adj" fmla="val 4706"/>
+            </a:avLst>
+          </a:prstGeom>
+          <a:solidFill>
+            <a:schemeClr val="bg2"/>
+          </a:solidFill>
+          <a:ln/>
+        </p:spPr>
+      </p:sp>
+      <p:sp>
+        <p:nvSpPr>
+          <p:cNvPr id="11" name="Positive dot 2"/>
+          <p:cNvSpPr/>
+          <p:nvPr/>
+        </p:nvSpPr>
+        <p:spPr>
+          <a:xfrm>
+            <a:off x="7040880" y="1143000"/>
+            <a:ext cx="256032" cy="256032"/>
+          </a:xfrm>
+          <a:prstGeom prst="ellipse">
+            <a:avLst/>
+          </a:prstGeom>
+          <a:solidFill>
+            <a:schemeClr val="accent2"/>
+          </a:solidFill>
+          <a:ln/>
+        </p:spPr>
+      </p:sp>
+      <p:sp>
+        <p:nvSpPr>
+          <p:cNvPr id="12" name="Text 9"/>
+          <p:cNvSpPr txBox="1"/>
+          <p:nvPr/>
+        </p:nvSpPr>
+        <p:spPr>
+          <a:xfrm>
+            <a:off x="7360920" y="1097280"/>
+            <a:ext cx="1261872" cy="365760"/>
+          </a:xfrm>
+          <a:prstGeom prst="rect">
+            <a:avLst/>
+          </a:prstGeom>
+          <a:noFill/>
+          <a:ln/>
+        </p:spPr>
+        <p:txBody>
+          <a:bodyPr wrap="square" lIns="0" tIns="0" rIns="0" bIns="0" rtlCol="0" anchor="ctr">
+            <a:normAutofit/>
+          </a:bodyPr>
+          <a:lstStyle/>
+          <a:p>
+            <a:pPr indent="0" marL="0">
+              <a:buNone/>
+            </a:pPr>
+            <a:r>
+              <a:rPr lang="en-US" sz="1200" b="1" dirty="0">
+                <a:solidFill>
+                  <a:schemeClr val="tx1"/>
+                </a:solidFill>
+                <a:latin typeface="Cambria" pitchFamily="34" charset="0"/>
+                <a:ea typeface="Cambria" pitchFamily="34" charset="-122"/>
+                <a:cs typeface="Cambria" pitchFamily="34" charset="-120"/>
+              </a:rPr>
+              <a:t>Smile en crecimiento</a:t>
+            </a:r>
+            <a:endParaRPr lang="en-US" sz="1200" dirty="0"/>
+          </a:p>
+        </p:txBody>
+      </p:sp>
+      <p:sp>
+        <p:nvSpPr>
+          <p:cNvPr id="13" name="Text 10"/>
+          <p:cNvSpPr txBox="1"/>
+          <p:nvPr/>
+        </p:nvSpPr>
+        <p:spPr>
+          <a:xfrm>
+            <a:off x="7040880" y="1508760"/>
+            <a:ext cx="1536192" cy="987552"/>
+          </a:xfrm>
+          <a:prstGeom prst="rect">
+            <a:avLst/>
+          </a:prstGeom>
+          <a:noFill/>
+          <a:ln/>
+        </p:spPr>
+        <p:txBody>
+          <a:bodyPr wrap="square" lIns="0" tIns="0" rIns="0" bIns="0" rtlCol="0" anchor="t"/>
+          <a:lstStyle/>
+          <a:p>
+            <a:pPr indent="0" marL="0">
+              <a:buNone/>
+            </a:pPr>
+            <a:r>
+              <a:rPr lang="en-US" sz="1050" dirty="0">
+                <a:solidFill>
+                  <a:schemeClr val="tx1"/>
+                </a:solidFill>
+              </a:rPr>
+              <a:t>Clientes que ganan puntos por compra: de 74 a 82 por semana (+11%) desde que arrancó la pauta</a:t>
+            </a:r>
+            <a:endParaRPr lang="en-US" sz="1050" dirty="0"/>
+          </a:p>
+        </p:txBody>
+      </p:sp>
+      <p:sp>
+        <p:nvSpPr>
+          <p:cNvPr id="14" name="Positive card 3"/>
+          <p:cNvSpPr/>
+          <p:nvPr/>
+        </p:nvSpPr>
+        <p:spPr>
+          <a:xfrm>
+            <a:off x="5029200" y="2697480"/>
+            <a:ext cx="1783080" cy="1554480"/>
+          </a:xfrm>
+          <a:prstGeom prst="roundRect">
+            <a:avLst>
+              <a:gd name="adj" fmla="val 4706"/>
+            </a:avLst>
+          </a:prstGeom>
+          <a:solidFill>
+            <a:schemeClr val="bg2"/>
+          </a:solidFill>
+          <a:ln/>
+        </p:spPr>
+      </p:sp>
+      <p:sp>
+        <p:nvSpPr>
+          <p:cNvPr id="15" name="Positive dot 3"/>
+          <p:cNvSpPr/>
+          <p:nvPr/>
+        </p:nvSpPr>
+        <p:spPr>
+          <a:xfrm>
+            <a:off x="5166360" y="2834640"/>
+            <a:ext cx="256032" cy="256032"/>
+          </a:xfrm>
+          <a:prstGeom prst="ellipse">
+            <a:avLst/>
+          </a:prstGeom>
+          <a:solidFill>
+            <a:schemeClr val="accent2"/>
+          </a:solidFill>
+          <a:ln/>
+        </p:spPr>
+      </p:sp>
+      <p:sp>
+        <p:nvSpPr>
+          <p:cNvPr id="16" name="Text 13"/>
+          <p:cNvSpPr txBox="1"/>
+          <p:nvPr/>
+        </p:nvSpPr>
+        <p:spPr>
+          <a:xfrm>
+            <a:off x="5486400" y="2788920"/>
+            <a:ext cx="1261872" cy="365760"/>
+          </a:xfrm>
+          <a:prstGeom prst="rect">
+            <a:avLst/>
+          </a:prstGeom>
+          <a:noFill/>
+          <a:ln/>
+        </p:spPr>
+        <p:txBody>
+          <a:bodyPr wrap="square" lIns="0" tIns="0" rIns="0" bIns="0" rtlCol="0" anchor="ctr">
+            <a:normAutofit/>
+          </a:bodyPr>
+          <a:lstStyle/>
+          <a:p>
+            <a:pPr indent="0" marL="0">
+              <a:buNone/>
+            </a:pPr>
+            <a:r>
+              <a:rPr lang="en-US" sz="1200" b="1" dirty="0">
+                <a:solidFill>
+                  <a:schemeClr val="tx1"/>
+                </a:solidFill>
+                <a:latin typeface="Cambria" pitchFamily="34" charset="0"/>
+                <a:ea typeface="Cambria" pitchFamily="34" charset="-122"/>
+                <a:cs typeface="Cambria" pitchFamily="34" charset="-120"/>
+              </a:rPr>
+              <a:t>Suscripciones al alza</a:t>
+            </a:r>
+            <a:endParaRPr lang="en-US" sz="1200" dirty="0"/>
+          </a:p>
+        </p:txBody>
+      </p:sp>
+      <p:sp>
+        <p:nvSpPr>
+          <p:cNvPr id="17" name="Text 14"/>
+          <p:cNvSpPr txBox="1"/>
+          <p:nvPr/>
+        </p:nvSpPr>
+        <p:spPr>
+          <a:xfrm>
+            <a:off x="5166360" y="3200400"/>
+            <a:ext cx="1536192" cy="987552"/>
+          </a:xfrm>
+          <a:prstGeom prst="rect">
+            <a:avLst/>
+          </a:prstGeom>
+          <a:noFill/>
+          <a:ln/>
+        </p:spPr>
+        <p:txBody>
+          <a:bodyPr wrap="square" lIns="0" tIns="0" rIns="0" bIns="0" rtlCol="0" anchor="t"/>
+          <a:lstStyle/>
+          <a:p>
+            <a:pPr indent="0" marL="0">
+              <a:buNone/>
+            </a:pPr>
+            <a:r>
+              <a:rPr lang="en-US" sz="1050" dirty="0">
+                <a:solidFill>
+                  <a:schemeClr val="tx1"/>
+                </a:solidFill>
+              </a:rPr>
+              <a:t>Más ventas por suscripción, con el flujo Subscribe &amp; Save activo desde el 7 oct</a:t>
+            </a:r>
+            <a:endParaRPr lang="en-US" sz="1050" dirty="0"/>
+          </a:p>
+        </p:txBody>
+      </p:sp>
+      <p:sp>
+        <p:nvSpPr>
+          <p:cNvPr id="18" name="Positive card 4"/>
+          <p:cNvSpPr/>
+          <p:nvPr/>
+        </p:nvSpPr>
+        <p:spPr>
+          <a:xfrm>
+            <a:off x="6903720" y="2697480"/>
+            <a:ext cx="1783080" cy="1554480"/>
+          </a:xfrm>
+          <a:prstGeom prst="roundRect">
+            <a:avLst>
+              <a:gd name="adj" fmla="val 4706"/>
+            </a:avLst>
+          </a:prstGeom>
+          <a:solidFill>
+            <a:schemeClr val="bg2"/>
+          </a:solidFill>
+          <a:ln/>
+        </p:spPr>
+      </p:sp>
+      <p:sp>
+        <p:nvSpPr>
+          <p:cNvPr id="19" name="Positive dot 4"/>
+          <p:cNvSpPr/>
+          <p:nvPr/>
+        </p:nvSpPr>
+        <p:spPr>
+          <a:xfrm>
+            <a:off x="7040880" y="2834640"/>
+            <a:ext cx="256032" cy="256032"/>
+          </a:xfrm>
+          <a:prstGeom prst="ellipse">
+            <a:avLst/>
+          </a:prstGeom>
+          <a:solidFill>
+            <a:schemeClr val="accent2"/>
+          </a:solidFill>
+          <a:ln/>
+        </p:spPr>
+      </p:sp>
+      <p:sp>
+        <p:nvSpPr>
+          <p:cNvPr id="20" name="Text 17"/>
+          <p:cNvSpPr txBox="1"/>
+          <p:nvPr/>
+        </p:nvSpPr>
+        <p:spPr>
+          <a:xfrm>
+            <a:off x="7360920" y="2788920"/>
+            <a:ext cx="1261872" cy="365760"/>
+          </a:xfrm>
+          <a:prstGeom prst="rect">
+            <a:avLst/>
+          </a:prstGeom>
+          <a:noFill/>
+          <a:ln/>
+        </p:spPr>
+        <p:txBody>
+          <a:bodyPr wrap="square" lIns="0" tIns="0" rIns="0" bIns="0" rtlCol="0" anchor="ctr">
+            <a:normAutofit/>
+          </a:bodyPr>
+          <a:lstStyle/>
+          <a:p>
+            <a:pPr indent="0" marL="0">
+              <a:buNone/>
+            </a:pPr>
+            <a:r>
+              <a:rPr lang="en-US" sz="1200" b="1" dirty="0">
+                <a:solidFill>
+                  <a:schemeClr val="tx1"/>
+                </a:solidFill>
+                <a:latin typeface="Cambria" pitchFamily="34" charset="0"/>
+                <a:ea typeface="Cambria" pitchFamily="34" charset="-122"/>
+                <a:cs typeface="Cambria" pitchFamily="34" charset="-120"/>
+              </a:rPr>
+              <a:t>Google: Marca y PMax</a:t>
+            </a:r>
+            <a:endParaRPr lang="en-US" sz="1200" dirty="0"/>
+          </a:p>
+        </p:txBody>
+      </p:sp>
+      <p:sp>
+        <p:nvSpPr>
+          <p:cNvPr id="21" name="Text 18"/>
+          <p:cNvSpPr txBox="1"/>
+          <p:nvPr/>
+        </p:nvSpPr>
+        <p:spPr>
+          <a:xfrm>
+            <a:off x="7040880" y="3200400"/>
+            <a:ext cx="1536192" cy="987552"/>
+          </a:xfrm>
+          <a:prstGeom prst="rect">
+            <a:avLst/>
+          </a:prstGeom>
+          <a:noFill/>
+          <a:ln/>
+        </p:spPr>
+        <p:txBody>
+          <a:bodyPr wrap="square" lIns="0" tIns="0" rIns="0" bIns="0" rtlCol="0" anchor="t"/>
+          <a:lstStyle/>
+          <a:p>
+            <a:pPr indent="0" marL="0">
+              <a:buNone/>
+            </a:pPr>
+            <a:r>
+              <a:rPr lang="en-US" sz="1050" dirty="0">
+                <a:solidFill>
+                  <a:schemeClr val="tx1"/>
+                </a:solidFill>
+              </a:rPr>
+              <a:t>ROAS muy sólido la última semana, en paralelo con el encendido de Meta</a:t>
+            </a:r>
+            <a:endParaRPr lang="en-US" sz="1050" dirty="0"/>
+          </a:p>
+        </p:txBody>
+      </p:sp>
+      <p:sp>
+        <p:nvSpPr>
+          <p:cNvPr id="22" name="Text 19"/>
+          <p:cNvSpPr txBox="1"/>
+          <p:nvPr/>
+        </p:nvSpPr>
+        <p:spPr>
+          <a:xfrm>
+            <a:off x="457200" y="4434840"/>
+            <a:ext cx="8229600" cy="274320"/>
+          </a:xfrm>
+          <a:prstGeom prst="rect">
+            <a:avLst/>
+          </a:prstGeom>
+          <a:noFill/>
+          <a:ln/>
+        </p:spPr>
+        <p:txBody>
+          <a:bodyPr wrap="square" lIns="0" tIns="0" rIns="0" bIns="0" rtlCol="0" anchor="ctr"/>
+          <a:lstStyle/>
+          <a:p>
+            <a:pPr indent="0" marL="0">
+              <a:buNone/>
+            </a:pPr>
+            <a:r>
+              <a:rPr lang="en-US" sz="900" i="1" dirty="0">
+                <a:solidFill>
+                  <a:schemeClr val="accent4"/>
+                </a:solidFill>
+              </a:rPr>
+              <a:t>Fuente: Klaviyo (Brooklyn Biltong) para ventas de la tienda, flujos y Smile. Suscripciones y Google: reportes de plataforma del equipo.</a:t>
+            </a:r>
+            <a:endParaRPr lang="en-US" sz="900" dirty="0"/>
+          </a:p>
+        </p:txBody>
+      </p:sp>
+      <p:sp>
+        <p:nvSpPr>
+          <p:cNvPr id="25" name="Slide Number Placeholder 0"/>
+          <p:cNvSpPr>
+            <a:spLocks noGrp="1"/>
+          </p:cNvSpPr>
+          <p:nvPr>
+            <p:ph type="sldNum" sz="quarter" idx="4294967295"/>
+          </p:nvPr>
+        </p:nvSpPr>
+        <p:spPr>
+          <a:xfrm>
+            <a:off x="8321040" y="4800600"/>
+            <a:ext cx="365760" cy="228600"/>
+          </a:xfrm>
+          <a:prstGeom prst="rect">
+            <a:avLst/>
+          </a:prstGeom>
+          <a:extLst>
+            <a:ext uri="{C572A759-6A51-4108-AA02-DFA0A04FC94B}">
+              <ma14:wrappingTextBoxFlag xmlns:ma14="http://schemas.microsoft.com/office/mac/drawingml/2011/main" val="0"/>
+            </a:ext>
+          </a:extLst>
+        </p:spPr>
+        <p:txBody>
+          <a:bodyPr/>
+          <a:lstStyle>
+            <a:lvl1pPr>
+              <a:defRPr sz="900">
+                <a:solidFill>
+                  <a:schemeClr val="accent4"/>
+                </a:solidFill>
+              </a:defRPr>
+            </a:lvl1pPr>
+          </a:lstStyle>
+          <a:p>
+            <a:pPr algn="r"/>
+            <a:fld id="{F7021451-1387-4CA6-816F-3879F97B5CBC}" type="slidenum">
+              <a:rPr b="0" lang="en-US"/>
+              <a:t>3</a:t>
+            </a:fld>
+            <a:endParaRPr lang="en-US"/>
+          </a:p>
+        </p:txBody>
+      </p:sp>
+    </p:spTree>
+  </p:cSld>
+  <p:clrMapOvr>
+    <a:masterClrMapping/>
+  </p:clrMapOvr>
+</p:sld>
+</file>
+
+<file path=ppt/slides/slide4.xml><?xml version="1.0" encoding="utf-8"?>
+<p:sld xmlns:a="http://schemas.openxmlformats.org/drawingml/2006/main" xmlns:r="http://schemas.openxmlformats.org/officeDocument/2006/relationships" xmlns:p="http://schemas.openxmlformats.org/presentationml/2006/main">
+  <p:cSld name="Slide 4">
+    <p:spTree>
+      <p:nvGrpSpPr>
+        <p:cNvPr id="1" name=""/>
+        <p:cNvGrpSpPr/>
+        <p:nvPr/>
+      </p:nvGrpSpPr>
+      <p:grpSpPr>
+        <a:xfrm>
+          <a:off x="0" y="0"/>
+          <a:ext cx="0" cy="0"/>
+          <a:chOff x="0" y="0"/>
+          <a:chExt cx="0" cy="0"/>
+        </a:xfrm>
+      </p:grpSpPr>
+      <p:sp>
+        <p:nvSpPr>
+          <p:cNvPr id="2" name="Text 0"/>
+          <p:cNvSpPr/>
+          <p:nvPr>
+            <p:ph idx="100" type="title" hasCustomPrompt="1"/>
+          </p:nvPr>
+        </p:nvSpPr>
+        <p:spPr>
+          <a:xfrm>
+            <a:off x="457200" y="274320"/>
+            <a:ext cx="8229600" cy="594360"/>
+          </a:xfrm>
+          <a:prstGeom prst="rect">
+            <a:avLst/>
+          </a:prstGeom>
+          <a:noFill/>
+          <a:ln/>
+        </p:spPr>
+        <p:txBody>
+          <a:bodyPr wrap="square" lIns="0" tIns="0" rIns="0" bIns="0" rtlCol="0" anchor="ctr"/>
+          <a:lstStyle/>
+          <a:p>
+            <a:pPr algn="l" indent="0" marL="0">
+              <a:buNone/>
+            </a:pPr>
+            <a:r>
+              <a:rPr lang="en-US" sz="2600" b="1" dirty="0">
+                <a:solidFill>
+                  <a:schemeClr val="tx1"/>
+                </a:solidFill>
+                <a:latin typeface="Cambria" pitchFamily="34" charset="0"/>
+                <a:ea typeface="Cambria" pitchFamily="34" charset="-122"/>
+                <a:cs typeface="Cambria" pitchFamily="34" charset="-120"/>
+              </a:rPr>
               <a:t>Lo comprometido el 9 de octubre: estado por marca</a:t>
             </a:r>
             <a:endParaRPr lang="en-US" sz="2600" dirty="0"/>
@@ -3245,7 +4552,7 @@
       </p:sp>
       <p:graphicFrame>
         <p:nvGraphicFramePr>
-          <p:cNvPr id="4" name="Commitment tracker"/>
+          <p:cNvPr id="5" name="Commitment tracker"/>
           <p:cNvGraphicFramePr>
             <a:graphicFrameLocks noGrp="1"/>
           </p:cNvGraphicFramePr>
@@ -6054,381 +7361,6 @@
             <a:pPr algn="r"/>
             <a:fld id="{F7021451-1387-4CA6-816F-3879F97B5CBC}" type="slidenum">
               <a:rPr b="0" lang="en-US"/>
-              <a:t>3</a:t>
-            </a:fld>
-            <a:endParaRPr lang="en-US"/>
-          </a:p>
-        </p:txBody>
-      </p:sp>
-    </p:spTree>
-  </p:cSld>
-  <p:clrMapOvr>
-    <a:masterClrMapping/>
-  </p:clrMapOvr>
-</p:sld>
-</file>
-
-<file path=ppt/slides/slide4.xml><?xml version="1.0" encoding="utf-8"?>
-<p:sld xmlns:a="http://schemas.openxmlformats.org/drawingml/2006/main" xmlns:r="http://schemas.openxmlformats.org/officeDocument/2006/relationships" xmlns:p="http://schemas.openxmlformats.org/presentationml/2006/main">
-  <p:cSld name="Slide 4">
-    <p:spTree>
-      <p:nvGrpSpPr>
-        <p:cNvPr id="1" name=""/>
-        <p:cNvGrpSpPr/>
-        <p:nvPr/>
-      </p:nvGrpSpPr>
-      <p:grpSpPr>
-        <a:xfrm>
-          <a:off x="0" y="0"/>
-          <a:ext cx="0" cy="0"/>
-          <a:chOff x="0" y="0"/>
-          <a:chExt cx="0" cy="0"/>
-        </a:xfrm>
-      </p:grpSpPr>
-      <p:sp>
-        <p:nvSpPr>
-          <p:cNvPr id="2" name="Text 0"/>
-          <p:cNvSpPr/>
-          <p:nvPr>
-            <p:ph idx="100" type="title" hasCustomPrompt="1"/>
-          </p:nvPr>
-        </p:nvSpPr>
-        <p:spPr>
-          <a:xfrm>
-            <a:off x="457200" y="274320"/>
-            <a:ext cx="8229600" cy="594360"/>
-          </a:xfrm>
-          <a:prstGeom prst="rect">
-            <a:avLst/>
-          </a:prstGeom>
-          <a:noFill/>
-          <a:ln/>
-        </p:spPr>
-        <p:txBody>
-          <a:bodyPr wrap="square" lIns="0" tIns="0" rIns="0" bIns="0" rtlCol="0" anchor="ctr"/>
-          <a:lstStyle/>
-          <a:p>
-            <a:pPr algn="l" indent="0" marL="0">
-              <a:buNone/>
-            </a:pPr>
-            <a:r>
-              <a:rPr lang="en-US" sz="2600" b="1" dirty="0">
-                <a:solidFill>
-                  <a:schemeClr val="tx1"/>
-                </a:solidFill>
-                <a:latin typeface="Cambria" pitchFamily="34" charset="0"/>
-                <a:ea typeface="Cambria" pitchFamily="34" charset="-122"/>
-                <a:cs typeface="Cambria" pitchFamily="34" charset="-120"/>
-              </a:rPr>
-              <a:t>Meta: más volumen, eficiencia todavía en construcción</a:t>
-            </a:r>
-            <a:endParaRPr lang="en-US" sz="2600" dirty="0"/>
-          </a:p>
-        </p:txBody>
-      </p:sp>
-      <p:graphicFrame>
-        <p:nvGraphicFramePr>
-          <p:cNvPr id="3" name="Purchases chart" descr=""/>
-          <p:cNvGraphicFramePr/>
-          <p:nvPr/>
-        </p:nvGraphicFramePr>
-        <p:xfrm>
-          <a:off x="457200" y="960120"/>
-          <a:ext cx="4206240" cy="3429000"/>
-        </p:xfrm>
-        <a:graphic xmlns:a="http://schemas.openxmlformats.org/drawingml/2006/main">
-          <a:graphicData uri="http://schemas.openxmlformats.org/drawingml/2006/chart">
-            <c:chart xmlns:c="http://schemas.openxmlformats.org/drawingml/2006/chart" r:id="rId1"/>
-          </a:graphicData>
-        </a:graphic>
-      </p:graphicFrame>
-      <p:sp>
-        <p:nvSpPr>
-          <p:cNvPr id="4" name="Text 1"/>
-          <p:cNvSpPr txBox="1"/>
-          <p:nvPr/>
-        </p:nvSpPr>
-        <p:spPr>
-          <a:xfrm>
-            <a:off x="4937760" y="1005840"/>
-            <a:ext cx="3749040" cy="320040"/>
-          </a:xfrm>
-          <a:prstGeom prst="rect">
-            <a:avLst/>
-          </a:prstGeom>
-          <a:noFill/>
-          <a:ln/>
-        </p:spPr>
-        <p:txBody>
-          <a:bodyPr wrap="square" lIns="0" tIns="0" rIns="0" bIns="0" rtlCol="0" anchor="ctr"/>
-          <a:lstStyle/>
-          <a:p>
-            <a:pPr indent="0" marL="0">
-              <a:buNone/>
-            </a:pPr>
-            <a:r>
-              <a:rPr lang="en-US" sz="1500" b="1" dirty="0">
-                <a:solidFill>
-                  <a:schemeClr val="accent2"/>
-                </a:solidFill>
-                <a:latin typeface="Cambria" pitchFamily="34" charset="0"/>
-                <a:ea typeface="Cambria" pitchFamily="34" charset="-122"/>
-                <a:cs typeface="Cambria" pitchFamily="34" charset="-120"/>
-              </a:rPr>
-              <a:t>Lo que funciona</a:t>
-            </a:r>
-            <a:endParaRPr lang="en-US" sz="1500" dirty="0"/>
-          </a:p>
-        </p:txBody>
-      </p:sp>
-      <p:sp>
-        <p:nvSpPr>
-          <p:cNvPr id="5" name="Text 2"/>
-          <p:cNvSpPr txBox="1"/>
-          <p:nvPr/>
-        </p:nvSpPr>
-        <p:spPr>
-          <a:xfrm>
-            <a:off x="4937760" y="1371600"/>
-            <a:ext cx="3749040" cy="1152144"/>
-          </a:xfrm>
-          <a:prstGeom prst="rect">
-            <a:avLst/>
-          </a:prstGeom>
-          <a:noFill/>
-          <a:ln/>
-        </p:spPr>
-        <p:txBody>
-          <a:bodyPr wrap="square" lIns="0" tIns="0" rIns="0" bIns="0" rtlCol="0" anchor="t"/>
-          <a:lstStyle/>
-          <a:p>
-            <a:pPr marL="342900" indent="-342900">
-              <a:spcAft>
-                <a:spcPts val="400"/>
-              </a:spcAft>
-              <a:buSzPct val="100000"/>
-              <a:buChar char="•"/>
-            </a:pPr>
-            <a:r>
-              <a:rPr lang="en-US" sz="1200" dirty="0">
-                <a:solidFill>
-                  <a:schemeClr val="tx1"/>
-                </a:solidFill>
-              </a:rPr>
-              <a:t>Ayoba, clientes nuevos: $26 por compra, retorno 1,6x</a:t>
-            </a:r>
-            <a:endParaRPr lang="en-US" sz="1200" dirty="0"/>
-          </a:p>
-          <a:p>
-            <a:pPr marL="342900" indent="-342900">
-              <a:spcAft>
-                <a:spcPts val="400"/>
-              </a:spcAft>
-              <a:buSzPct val="100000"/>
-              <a:buChar char="•"/>
-            </a:pPr>
-            <a:r>
-              <a:rPr lang="en-US" sz="1200" dirty="0">
-                <a:solidFill>
-                  <a:schemeClr val="tx1"/>
-                </a:solidFill>
-              </a:rPr>
-              <a:t>Brooklyn, retargeting dinámico: $26 por compra, retorno 2,9x</a:t>
-            </a:r>
-            <a:endParaRPr lang="en-US" sz="1200" dirty="0"/>
-          </a:p>
-          <a:p>
-            <a:pPr marL="342900" indent="-342900">
-              <a:spcAft>
-                <a:spcPts val="400"/>
-              </a:spcAft>
-              <a:buSzPct val="100000"/>
-              <a:buChar char="•"/>
-            </a:pPr>
-            <a:r>
-              <a:rPr lang="en-US" sz="1200" dirty="0">
-                <a:solidFill>
-                  <a:schemeClr val="tx1"/>
-                </a:solidFill>
-              </a:rPr>
-              <a:t>Beg &amp; Barker, retargeting dinámico: retorno 3,1x</a:t>
-            </a:r>
-            <a:endParaRPr lang="en-US" sz="1200" dirty="0"/>
-          </a:p>
-        </p:txBody>
-      </p:sp>
-      <p:sp>
-        <p:nvSpPr>
-          <p:cNvPr id="6" name="Text 3"/>
-          <p:cNvSpPr txBox="1"/>
-          <p:nvPr/>
-        </p:nvSpPr>
-        <p:spPr>
-          <a:xfrm>
-            <a:off x="4937760" y="2697480"/>
-            <a:ext cx="3749040" cy="320040"/>
-          </a:xfrm>
-          <a:prstGeom prst="rect">
-            <a:avLst/>
-          </a:prstGeom>
-          <a:noFill/>
-          <a:ln/>
-        </p:spPr>
-        <p:txBody>
-          <a:bodyPr wrap="square" lIns="0" tIns="0" rIns="0" bIns="0" rtlCol="0" anchor="ctr"/>
-          <a:lstStyle/>
-          <a:p>
-            <a:pPr indent="0" marL="0">
-              <a:buNone/>
-            </a:pPr>
-            <a:r>
-              <a:rPr lang="en-US" sz="1500" b="1" dirty="0">
-                <a:solidFill>
-                  <a:schemeClr val="accent1"/>
-                </a:solidFill>
-                <a:latin typeface="Cambria" pitchFamily="34" charset="0"/>
-                <a:ea typeface="Cambria" pitchFamily="34" charset="-122"/>
-                <a:cs typeface="Cambria" pitchFamily="34" charset="-120"/>
-              </a:rPr>
-              <a:t>Lo que estamos corrigiendo</a:t>
-            </a:r>
-            <a:endParaRPr lang="en-US" sz="1500" dirty="0"/>
-          </a:p>
-        </p:txBody>
-      </p:sp>
-      <p:sp>
-        <p:nvSpPr>
-          <p:cNvPr id="7" name="Text 4"/>
-          <p:cNvSpPr txBox="1"/>
-          <p:nvPr/>
-        </p:nvSpPr>
-        <p:spPr>
-          <a:xfrm>
-            <a:off x="4937760" y="3063240"/>
-            <a:ext cx="3749040" cy="768096"/>
-          </a:xfrm>
-          <a:prstGeom prst="rect">
-            <a:avLst/>
-          </a:prstGeom>
-          <a:noFill/>
-          <a:ln/>
-        </p:spPr>
-        <p:txBody>
-          <a:bodyPr wrap="square" lIns="0" tIns="0" rIns="0" bIns="0" rtlCol="0" anchor="t"/>
-          <a:lstStyle/>
-          <a:p>
-            <a:pPr marL="342900" indent="-342900">
-              <a:spcAft>
-                <a:spcPts val="400"/>
-              </a:spcAft>
-              <a:buSzPct val="100000"/>
-              <a:buChar char="•"/>
-            </a:pPr>
-            <a:r>
-              <a:rPr lang="en-US" sz="1200" dirty="0">
-                <a:solidFill>
-                  <a:schemeClr val="tx1"/>
-                </a:solidFill>
-              </a:rPr>
-              <a:t>Brooklyn, clientes nuevos: $170 por compra → presupuesto recortado el 13 oct</a:t>
-            </a:r>
-            <a:endParaRPr lang="en-US" sz="1200" dirty="0"/>
-          </a:p>
-          <a:p>
-            <a:pPr marL="342900" indent="-342900">
-              <a:spcAft>
-                <a:spcPts val="400"/>
-              </a:spcAft>
-              <a:buSzPct val="100000"/>
-              <a:buChar char="•"/>
-            </a:pPr>
-            <a:r>
-              <a:rPr lang="en-US" sz="1200" dirty="0">
-                <a:solidFill>
-                  <a:schemeClr val="tx1"/>
-                </a:solidFill>
-              </a:rPr>
-              <a:t>Retargeting nuevo (desde el 10 oct) aún en aprendizaje; le subimos presupuesto en Ayoba y Beg &amp; Barker</a:t>
-            </a:r>
-            <a:endParaRPr lang="en-US" sz="1200" dirty="0"/>
-          </a:p>
-        </p:txBody>
-      </p:sp>
-      <p:sp>
-        <p:nvSpPr>
-          <p:cNvPr id="8" name="Text 5"/>
-          <p:cNvSpPr txBox="1"/>
-          <p:nvPr/>
-        </p:nvSpPr>
-        <p:spPr>
-          <a:xfrm>
-            <a:off x="457200" y="4434840"/>
-            <a:ext cx="8229600" cy="274320"/>
-          </a:xfrm>
-          <a:prstGeom prst="rect">
-            <a:avLst/>
-          </a:prstGeom>
-          <a:noFill/>
-          <a:ln/>
-        </p:spPr>
-        <p:txBody>
-          <a:bodyPr wrap="square" lIns="0" tIns="0" rIns="0" bIns="0" rtlCol="0" anchor="ctr"/>
-          <a:lstStyle/>
-          <a:p>
-            <a:pPr indent="0" marL="0">
-              <a:buNone/>
-            </a:pPr>
-            <a:r>
-              <a:rPr lang="en-US" sz="900" i="1" dirty="0">
-                <a:solidFill>
-                  <a:schemeClr val="accent4"/>
-                </a:solidFill>
-              </a:rPr>
-              <a:t>Fuente: Meta Ads Manager, compras y retorno atribuidos por la plataforma. No incluye Google Ads ni el total de ventas de la tienda (ver dashboards).</a:t>
-            </a:r>
-            <a:endParaRPr lang="en-US" sz="900" dirty="0"/>
-          </a:p>
-        </p:txBody>
-      </p:sp>
-      <p:sp>
-        <p:nvSpPr>
-          <p:cNvPr id="25" name="Slide Number Placeholder 0"/>
-          <p:cNvSpPr>
-            <a:spLocks noGrp="1"/>
-          </p:cNvSpPr>
-          <p:nvPr>
-            <p:ph type="sldNum" sz="quarter" idx="4294967295"/>
-          </p:nvPr>
-        </p:nvSpPr>
-        <p:spPr>
-          <a:xfrm>
-            <a:off x="8321040" y="4800600"/>
-            <a:ext cx="365760" cy="228600"/>
-          </a:xfrm>
-          <a:prstGeom prst="rect">
-            <a:avLst/>
-          </a:prstGeom>
-          <a:extLst>
-            <a:ext uri="{C572A759-6A51-4108-AA02-DFA0A04FC94B}">
-              <ma14:wrappingTextBoxFlag xmlns:ma14="http://schemas.microsoft.com/office/mac/drawingml/2011/main" val="0"/>
-            </a:ext>
-          </a:extLst>
-        </p:spPr>
-        <p:txBody>
-          <a:bodyPr/>
-          <a:lstStyle>
-            <a:lvl1pPr>
-              <a:defRPr sz="900">
-                <a:solidFill>
-                  <a:schemeClr val="accent4"/>
-                </a:solidFill>
-              </a:defRPr>
-            </a:lvl1pPr>
-          </a:lstStyle>
-          <a:p>
-            <a:pPr algn="r"/>
-            <a:fld id="{F7021451-1387-4CA6-816F-3879F97B5CBC}" type="slidenum">
-              <a:rPr b="0" lang="en-US"/>
               <a:t>4</a:t>
             </a:fld>
             <a:endParaRPr lang="en-US"/>
@@ -6495,207 +7427,21 @@
                 <a:ea typeface="Cambria" pitchFamily="34" charset="-122"/>
                 <a:cs typeface="Cambria" pitchFamily="34" charset="-120"/>
               </a:rPr>
-              <a:t>Brooklyn: email y SMS ya generan ventas recurrentes</a:t>
+              <a:t>Meta: más volumen, eficiencia todavía en construcción</a:t>
             </a:r>
             <a:endParaRPr lang="en-US" sz="2600" dirty="0"/>
           </a:p>
         </p:txBody>
       </p:sp>
-      <p:sp>
-        <p:nvSpPr>
-          <p:cNvPr id="3" name="Retention stat panel"/>
-          <p:cNvSpPr/>
-          <p:nvPr/>
-        </p:nvSpPr>
-        <p:spPr>
-          <a:xfrm>
-            <a:off x="457200" y="1005840"/>
-            <a:ext cx="3108960" cy="3291840"/>
-          </a:xfrm>
-          <a:prstGeom prst="roundRect">
-            <a:avLst>
-              <a:gd name="adj" fmla="val 2353"/>
-            </a:avLst>
-          </a:prstGeom>
-          <a:solidFill>
-            <a:schemeClr val="tx1"/>
-          </a:solidFill>
-          <a:ln/>
-        </p:spPr>
-      </p:sp>
-      <p:sp>
-        <p:nvSpPr>
-          <p:cNvPr id="4" name="Text 2"/>
-          <p:cNvSpPr txBox="1"/>
-          <p:nvPr/>
-        </p:nvSpPr>
-        <p:spPr>
-          <a:xfrm>
-            <a:off x="685800" y="1188720"/>
-            <a:ext cx="2651760" cy="685800"/>
-          </a:xfrm>
-          <a:prstGeom prst="rect">
-            <a:avLst/>
-          </a:prstGeom>
-          <a:noFill/>
-          <a:ln/>
-        </p:spPr>
-        <p:txBody>
-          <a:bodyPr wrap="square" lIns="0" tIns="0" rIns="0" bIns="0" rtlCol="0" anchor="ctr"/>
-          <a:lstStyle/>
-          <a:p>
-            <a:pPr indent="0" marL="0">
-              <a:buNone/>
-            </a:pPr>
-            <a:r>
-              <a:rPr lang="en-US" sz="4000" b="1" dirty="0">
-                <a:solidFill>
-                  <a:schemeClr val="bg1"/>
-                </a:solidFill>
-                <a:latin typeface="Cambria" pitchFamily="34" charset="0"/>
-                <a:ea typeface="Cambria" pitchFamily="34" charset="-122"/>
-                <a:cs typeface="Cambria" pitchFamily="34" charset="-120"/>
-              </a:rPr>
-              <a:t>$2.074</a:t>
-            </a:r>
-            <a:endParaRPr lang="en-US" sz="4000" dirty="0"/>
-          </a:p>
-        </p:txBody>
-      </p:sp>
-      <p:sp>
-        <p:nvSpPr>
-          <p:cNvPr id="5" name="Text 3"/>
-          <p:cNvSpPr txBox="1"/>
-          <p:nvPr/>
-        </p:nvSpPr>
-        <p:spPr>
-          <a:xfrm>
-            <a:off x="685800" y="1874520"/>
-            <a:ext cx="2651760" cy="457200"/>
-          </a:xfrm>
-          <a:prstGeom prst="rect">
-            <a:avLst/>
-          </a:prstGeom>
-          <a:noFill/>
-          <a:ln/>
-        </p:spPr>
-        <p:txBody>
-          <a:bodyPr wrap="square" lIns="0" tIns="0" rIns="0" bIns="0" rtlCol="0" anchor="ctr"/>
-          <a:lstStyle/>
-          <a:p>
-            <a:pPr indent="0" marL="0">
-              <a:buNone/>
-            </a:pPr>
-            <a:r>
-              <a:rPr lang="en-US" sz="1200" dirty="0">
-                <a:solidFill>
-                  <a:schemeClr val="accent6"/>
-                </a:solidFill>
-              </a:rPr>
-              <a:t>en ventas atribuidas a email y SMS,</a:t>
-            </a:r>
-            <a:endParaRPr lang="en-US" sz="1200" dirty="0"/>
-          </a:p>
-          <a:p>
-            <a:pPr indent="0" marL="0">
-              <a:buNone/>
-            </a:pPr>
-            <a:r>
-              <a:rPr lang="en-US" sz="1200" dirty="0">
-                <a:solidFill>
-                  <a:schemeClr val="accent6"/>
-                </a:solidFill>
-              </a:rPr>
-              <a:t>1–14 oct</a:t>
-            </a:r>
-            <a:endParaRPr lang="en-US" sz="1200" dirty="0"/>
-          </a:p>
-        </p:txBody>
-      </p:sp>
-      <p:sp>
-        <p:nvSpPr>
-          <p:cNvPr id="6" name="Text 4"/>
-          <p:cNvSpPr txBox="1"/>
-          <p:nvPr/>
-        </p:nvSpPr>
-        <p:spPr>
-          <a:xfrm>
-            <a:off x="685800" y="2468880"/>
-            <a:ext cx="2651760" cy="685800"/>
-          </a:xfrm>
-          <a:prstGeom prst="rect">
-            <a:avLst/>
-          </a:prstGeom>
-          <a:noFill/>
-          <a:ln/>
-        </p:spPr>
-        <p:txBody>
-          <a:bodyPr wrap="square" lIns="0" tIns="0" rIns="0" bIns="0" rtlCol="0" anchor="ctr"/>
-          <a:lstStyle/>
-          <a:p>
-            <a:pPr indent="0" marL="0">
-              <a:buNone/>
-            </a:pPr>
-            <a:r>
-              <a:rPr lang="en-US" sz="4000" b="1" dirty="0">
-                <a:solidFill>
-                  <a:schemeClr val="bg1"/>
-                </a:solidFill>
-                <a:latin typeface="Cambria" pitchFamily="34" charset="0"/>
-                <a:ea typeface="Cambria" pitchFamily="34" charset="-122"/>
-                <a:cs typeface="Cambria" pitchFamily="34" charset="-120"/>
-              </a:rPr>
-              <a:t>31</a:t>
-            </a:r>
-            <a:endParaRPr lang="en-US" sz="4000" dirty="0"/>
-          </a:p>
-        </p:txBody>
-      </p:sp>
-      <p:sp>
-        <p:nvSpPr>
-          <p:cNvPr id="7" name="Text 5"/>
-          <p:cNvSpPr txBox="1"/>
-          <p:nvPr/>
-        </p:nvSpPr>
-        <p:spPr>
-          <a:xfrm>
-            <a:off x="685800" y="3154680"/>
-            <a:ext cx="2651760" cy="457200"/>
-          </a:xfrm>
-          <a:prstGeom prst="rect">
-            <a:avLst/>
-          </a:prstGeom>
-          <a:noFill/>
-          <a:ln/>
-        </p:spPr>
-        <p:txBody>
-          <a:bodyPr wrap="square" lIns="0" tIns="0" rIns="0" bIns="0" rtlCol="0" anchor="ctr"/>
-          <a:lstStyle/>
-          <a:p>
-            <a:pPr indent="0" marL="0">
-              <a:buNone/>
-            </a:pPr>
-            <a:r>
-              <a:rPr lang="en-US" sz="1200" dirty="0">
-                <a:solidFill>
-                  <a:schemeClr val="accent6"/>
-                </a:solidFill>
-              </a:rPr>
-              <a:t>órdenes; 17 llegan solas por flujos automáticos</a:t>
-            </a:r>
-            <a:endParaRPr lang="en-US" sz="1200" dirty="0"/>
-          </a:p>
-        </p:txBody>
-      </p:sp>
       <p:graphicFrame>
         <p:nvGraphicFramePr>
-          <p:cNvPr id="8" name="Sales by program chart" descr=""/>
+          <p:cNvPr id="3" name="Purchases chart" descr=""/>
           <p:cNvGraphicFramePr/>
           <p:nvPr/>
         </p:nvGraphicFramePr>
         <p:xfrm>
-          <a:off x="3840480" y="960120"/>
-          <a:ext cx="4846320" cy="2743200"/>
+          <a:off x="457200" y="960120"/>
+          <a:ext cx="4206240" cy="3429000"/>
         </p:xfrm>
         <a:graphic xmlns:a="http://schemas.openxmlformats.org/drawingml/2006/main">
           <a:graphicData uri="http://schemas.openxmlformats.org/drawingml/2006/chart">
@@ -6705,14 +7451,14 @@
       </p:graphicFrame>
       <p:sp>
         <p:nvSpPr>
-          <p:cNvPr id="9" name="Text 6"/>
+          <p:cNvPr id="4" name="Text 1"/>
           <p:cNvSpPr txBox="1"/>
           <p:nvPr/>
         </p:nvSpPr>
         <p:spPr>
           <a:xfrm>
-            <a:off x="3931920" y="3749040"/>
-            <a:ext cx="4754880" cy="548640"/>
+            <a:off x="4937760" y="1005840"/>
+            <a:ext cx="3749040" cy="320040"/>
           </a:xfrm>
           <a:prstGeom prst="rect">
             <a:avLst/>
@@ -6721,27 +7467,203 @@
           <a:ln/>
         </p:spPr>
         <p:txBody>
-          <a:bodyPr wrap="square" lIns="0" tIns="0" rIns="0" bIns="0" rtlCol="0" anchor="t"/>
+          <a:bodyPr wrap="square" lIns="0" tIns="0" rIns="0" bIns="0" rtlCol="0" anchor="ctr"/>
           <a:lstStyle/>
           <a:p>
             <a:pPr indent="0" marL="0">
               <a:buNone/>
             </a:pPr>
             <a:r>
+              <a:rPr lang="en-US" sz="1500" b="1" dirty="0">
+                <a:solidFill>
+                  <a:schemeClr val="accent2"/>
+                </a:solidFill>
+                <a:latin typeface="Cambria" pitchFamily="34" charset="0"/>
+                <a:ea typeface="Cambria" pitchFamily="34" charset="-122"/>
+                <a:cs typeface="Cambria" pitchFamily="34" charset="-120"/>
+              </a:rPr>
+              <a:t>Lo que funciona</a:t>
+            </a:r>
+            <a:endParaRPr lang="en-US" sz="1500" dirty="0"/>
+          </a:p>
+        </p:txBody>
+      </p:sp>
+      <p:sp>
+        <p:nvSpPr>
+          <p:cNvPr id="5" name="Text 2"/>
+          <p:cNvSpPr txBox="1"/>
+          <p:nvPr/>
+        </p:nvSpPr>
+        <p:spPr>
+          <a:xfrm>
+            <a:off x="4937760" y="1371600"/>
+            <a:ext cx="3749040" cy="1152144"/>
+          </a:xfrm>
+          <a:prstGeom prst="rect">
+            <a:avLst/>
+          </a:prstGeom>
+          <a:noFill/>
+          <a:ln/>
+        </p:spPr>
+        <p:txBody>
+          <a:bodyPr wrap="square" lIns="0" tIns="0" rIns="0" bIns="0" rtlCol="0" anchor="t"/>
+          <a:lstStyle/>
+          <a:p>
+            <a:pPr marL="342900" indent="-342900">
+              <a:spcAft>
+                <a:spcPts val="400"/>
+              </a:spcAft>
+              <a:buSzPct val="100000"/>
+              <a:buChar char="•"/>
+            </a:pPr>
+            <a:r>
               <a:rPr lang="en-US" sz="1200" dirty="0">
                 <a:solidFill>
                   <a:schemeClr val="tx1"/>
                 </a:solidFill>
               </a:rPr>
-              <a:t>El Game Day tuvo 60% de apertura. Los flujos de Subscribe &amp; Save y Segunda Orden están activos desde el 7 oct.</a:t>
+              <a:t>Ayoba, clientes nuevos: $26 por compra, retorno 1,6x</a:t>
             </a:r>
             <a:endParaRPr lang="en-US" sz="1200" dirty="0"/>
           </a:p>
+          <a:p>
+            <a:pPr marL="342900" indent="-342900">
+              <a:spcAft>
+                <a:spcPts val="400"/>
+              </a:spcAft>
+              <a:buSzPct val="100000"/>
+              <a:buChar char="•"/>
+            </a:pPr>
+            <a:r>
+              <a:rPr lang="en-US" sz="1200" dirty="0">
+                <a:solidFill>
+                  <a:schemeClr val="tx1"/>
+                </a:solidFill>
+              </a:rPr>
+              <a:t>Brooklyn, retargeting dinámico: $26 por compra, retorno 2,9x</a:t>
+            </a:r>
+            <a:endParaRPr lang="en-US" sz="1200" dirty="0"/>
+          </a:p>
+          <a:p>
+            <a:pPr marL="342900" indent="-342900">
+              <a:spcAft>
+                <a:spcPts val="400"/>
+              </a:spcAft>
+              <a:buSzPct val="100000"/>
+              <a:buChar char="•"/>
+            </a:pPr>
+            <a:r>
+              <a:rPr lang="en-US" sz="1200" dirty="0">
+                <a:solidFill>
+                  <a:schemeClr val="tx1"/>
+                </a:solidFill>
+              </a:rPr>
+              <a:t>Beg &amp; Barker, retargeting dinámico: retorno 3,1x</a:t>
+            </a:r>
+            <a:endParaRPr lang="en-US" sz="1200" dirty="0"/>
+          </a:p>
         </p:txBody>
       </p:sp>
       <p:sp>
         <p:nvSpPr>
-          <p:cNvPr id="10" name="Text 7"/>
+          <p:cNvPr id="6" name="Text 3"/>
+          <p:cNvSpPr txBox="1"/>
+          <p:nvPr/>
+        </p:nvSpPr>
+        <p:spPr>
+          <a:xfrm>
+            <a:off x="4937760" y="2697480"/>
+            <a:ext cx="3749040" cy="320040"/>
+          </a:xfrm>
+          <a:prstGeom prst="rect">
+            <a:avLst/>
+          </a:prstGeom>
+          <a:noFill/>
+          <a:ln/>
+        </p:spPr>
+        <p:txBody>
+          <a:bodyPr wrap="square" lIns="0" tIns="0" rIns="0" bIns="0" rtlCol="0" anchor="ctr"/>
+          <a:lstStyle/>
+          <a:p>
+            <a:pPr indent="0" marL="0">
+              <a:buNone/>
+            </a:pPr>
+            <a:r>
+              <a:rPr lang="en-US" sz="1500" b="1" dirty="0">
+                <a:solidFill>
+                  <a:schemeClr val="accent1"/>
+                </a:solidFill>
+                <a:latin typeface="Cambria" pitchFamily="34" charset="0"/>
+                <a:ea typeface="Cambria" pitchFamily="34" charset="-122"/>
+                <a:cs typeface="Cambria" pitchFamily="34" charset="-120"/>
+              </a:rPr>
+              <a:t>Lo que estamos corrigiendo</a:t>
+            </a:r>
+            <a:endParaRPr lang="en-US" sz="1500" dirty="0"/>
+          </a:p>
+        </p:txBody>
+      </p:sp>
+      <p:sp>
+        <p:nvSpPr>
+          <p:cNvPr id="7" name="Text 4"/>
+          <p:cNvSpPr txBox="1"/>
+          <p:nvPr/>
+        </p:nvSpPr>
+        <p:spPr>
+          <a:xfrm>
+            <a:off x="4937760" y="3063240"/>
+            <a:ext cx="3749040" cy="768096"/>
+          </a:xfrm>
+          <a:prstGeom prst="rect">
+            <a:avLst/>
+          </a:prstGeom>
+          <a:noFill/>
+          <a:ln/>
+        </p:spPr>
+        <p:txBody>
+          <a:bodyPr wrap="square" lIns="0" tIns="0" rIns="0" bIns="0" rtlCol="0" anchor="t"/>
+          <a:lstStyle/>
+          <a:p>
+            <a:pPr marL="342900" indent="-342900">
+              <a:spcAft>
+                <a:spcPts val="400"/>
+              </a:spcAft>
+              <a:buSzPct val="100000"/>
+              <a:buChar char="•"/>
+            </a:pPr>
+            <a:r>
+              <a:rPr lang="en-US" sz="1200" dirty="0">
+                <a:solidFill>
+                  <a:schemeClr val="tx1"/>
+                </a:solidFill>
+              </a:rPr>
+              <a:t>Brooklyn, clientes nuevos: $170 por compra → presupuesto recortado el 13 oct</a:t>
+            </a:r>
+            <a:endParaRPr lang="en-US" sz="1200" dirty="0"/>
+          </a:p>
+          <a:p>
+            <a:pPr marL="342900" indent="-342900">
+              <a:spcAft>
+                <a:spcPts val="400"/>
+              </a:spcAft>
+              <a:buSzPct val="100000"/>
+              <a:buChar char="•"/>
+            </a:pPr>
+            <a:r>
+              <a:rPr lang="en-US" sz="1200" dirty="0">
+                <a:solidFill>
+                  <a:schemeClr val="tx1"/>
+                </a:solidFill>
+              </a:rPr>
+              <a:t>Retargeting nuevo (desde el 10 oct) aún en aprendizaje; le subimos presupuesto en Ayoba y Beg &amp; Barker</a:t>
+            </a:r>
+            <a:endParaRPr lang="en-US" sz="1200" dirty="0"/>
+          </a:p>
+        </p:txBody>
+      </p:sp>
+      <p:sp>
+        <p:nvSpPr>
+          <p:cNvPr id="8" name="Text 5"/>
           <p:cNvSpPr txBox="1"/>
           <p:nvPr/>
         </p:nvSpPr>
@@ -6769,7 +7691,7 @@
                   <a:schemeClr val="accent4"/>
                 </a:solidFill>
               </a:rPr>
-              <a:t>Fuente: Klaviyo (Brooklyn Biltong), órdenes atribuidas por la plataforma.</a:t>
+              <a:t>Fuente: Meta Ads Manager, compras y retorno atribuidos por la plataforma. No incluye Google Ads ni el total de ventas de la tienda (ver dashboards).</a:t>
             </a:r>
             <a:endParaRPr lang="en-US" sz="900" dirty="0"/>
           </a:p>
@@ -6880,6 +7802,391 @@
                 <a:ea typeface="Cambria" pitchFamily="34" charset="-122"/>
                 <a:cs typeface="Cambria" pitchFamily="34" charset="-120"/>
               </a:rPr>
+              <a:t>Brooklyn: email y SMS ya generan ventas recurrentes</a:t>
+            </a:r>
+            <a:endParaRPr lang="en-US" sz="2600" dirty="0"/>
+          </a:p>
+        </p:txBody>
+      </p:sp>
+      <p:sp>
+        <p:nvSpPr>
+          <p:cNvPr id="3" name="Retention stat panel"/>
+          <p:cNvSpPr/>
+          <p:nvPr/>
+        </p:nvSpPr>
+        <p:spPr>
+          <a:xfrm>
+            <a:off x="457200" y="1005840"/>
+            <a:ext cx="3108960" cy="3291840"/>
+          </a:xfrm>
+          <a:prstGeom prst="roundRect">
+            <a:avLst>
+              <a:gd name="adj" fmla="val 2353"/>
+            </a:avLst>
+          </a:prstGeom>
+          <a:solidFill>
+            <a:schemeClr val="tx1"/>
+          </a:solidFill>
+          <a:ln/>
+        </p:spPr>
+      </p:sp>
+      <p:sp>
+        <p:nvSpPr>
+          <p:cNvPr id="4" name="Text 2"/>
+          <p:cNvSpPr txBox="1"/>
+          <p:nvPr/>
+        </p:nvSpPr>
+        <p:spPr>
+          <a:xfrm>
+            <a:off x="685800" y="1188720"/>
+            <a:ext cx="2651760" cy="685800"/>
+          </a:xfrm>
+          <a:prstGeom prst="rect">
+            <a:avLst/>
+          </a:prstGeom>
+          <a:noFill/>
+          <a:ln/>
+        </p:spPr>
+        <p:txBody>
+          <a:bodyPr wrap="square" lIns="0" tIns="0" rIns="0" bIns="0" rtlCol="0" anchor="ctr"/>
+          <a:lstStyle/>
+          <a:p>
+            <a:pPr indent="0" marL="0">
+              <a:buNone/>
+            </a:pPr>
+            <a:r>
+              <a:rPr lang="en-US" sz="4000" b="1" dirty="0">
+                <a:solidFill>
+                  <a:schemeClr val="bg1"/>
+                </a:solidFill>
+                <a:latin typeface="Cambria" pitchFamily="34" charset="0"/>
+                <a:ea typeface="Cambria" pitchFamily="34" charset="-122"/>
+                <a:cs typeface="Cambria" pitchFamily="34" charset="-120"/>
+              </a:rPr>
+              <a:t>$2.074</a:t>
+            </a:r>
+            <a:endParaRPr lang="en-US" sz="4000" dirty="0"/>
+          </a:p>
+        </p:txBody>
+      </p:sp>
+      <p:sp>
+        <p:nvSpPr>
+          <p:cNvPr id="5" name="Text 3"/>
+          <p:cNvSpPr txBox="1"/>
+          <p:nvPr/>
+        </p:nvSpPr>
+        <p:spPr>
+          <a:xfrm>
+            <a:off x="685800" y="1874520"/>
+            <a:ext cx="2651760" cy="457200"/>
+          </a:xfrm>
+          <a:prstGeom prst="rect">
+            <a:avLst/>
+          </a:prstGeom>
+          <a:noFill/>
+          <a:ln/>
+        </p:spPr>
+        <p:txBody>
+          <a:bodyPr wrap="square" lIns="0" tIns="0" rIns="0" bIns="0" rtlCol="0" anchor="ctr"/>
+          <a:lstStyle/>
+          <a:p>
+            <a:pPr indent="0" marL="0">
+              <a:buNone/>
+            </a:pPr>
+            <a:r>
+              <a:rPr lang="en-US" sz="1200" dirty="0">
+                <a:solidFill>
+                  <a:schemeClr val="accent6"/>
+                </a:solidFill>
+              </a:rPr>
+              <a:t>en ventas atribuidas a email y SMS,</a:t>
+            </a:r>
+            <a:endParaRPr lang="en-US" sz="1200" dirty="0"/>
+          </a:p>
+          <a:p>
+            <a:pPr indent="0" marL="0">
+              <a:buNone/>
+            </a:pPr>
+            <a:r>
+              <a:rPr lang="en-US" sz="1200" dirty="0">
+                <a:solidFill>
+                  <a:schemeClr val="accent6"/>
+                </a:solidFill>
+              </a:rPr>
+              <a:t>1–14 oct</a:t>
+            </a:r>
+            <a:endParaRPr lang="en-US" sz="1200" dirty="0"/>
+          </a:p>
+        </p:txBody>
+      </p:sp>
+      <p:sp>
+        <p:nvSpPr>
+          <p:cNvPr id="6" name="Text 4"/>
+          <p:cNvSpPr txBox="1"/>
+          <p:nvPr/>
+        </p:nvSpPr>
+        <p:spPr>
+          <a:xfrm>
+            <a:off x="685800" y="2468880"/>
+            <a:ext cx="2651760" cy="685800"/>
+          </a:xfrm>
+          <a:prstGeom prst="rect">
+            <a:avLst/>
+          </a:prstGeom>
+          <a:noFill/>
+          <a:ln/>
+        </p:spPr>
+        <p:txBody>
+          <a:bodyPr wrap="square" lIns="0" tIns="0" rIns="0" bIns="0" rtlCol="0" anchor="ctr"/>
+          <a:lstStyle/>
+          <a:p>
+            <a:pPr indent="0" marL="0">
+              <a:buNone/>
+            </a:pPr>
+            <a:r>
+              <a:rPr lang="en-US" sz="4000" b="1" dirty="0">
+                <a:solidFill>
+                  <a:schemeClr val="bg1"/>
+                </a:solidFill>
+                <a:latin typeface="Cambria" pitchFamily="34" charset="0"/>
+                <a:ea typeface="Cambria" pitchFamily="34" charset="-122"/>
+                <a:cs typeface="Cambria" pitchFamily="34" charset="-120"/>
+              </a:rPr>
+              <a:t>31</a:t>
+            </a:r>
+            <a:endParaRPr lang="en-US" sz="4000" dirty="0"/>
+          </a:p>
+        </p:txBody>
+      </p:sp>
+      <p:sp>
+        <p:nvSpPr>
+          <p:cNvPr id="7" name="Text 5"/>
+          <p:cNvSpPr txBox="1"/>
+          <p:nvPr/>
+        </p:nvSpPr>
+        <p:spPr>
+          <a:xfrm>
+            <a:off x="685800" y="3154680"/>
+            <a:ext cx="2651760" cy="457200"/>
+          </a:xfrm>
+          <a:prstGeom prst="rect">
+            <a:avLst/>
+          </a:prstGeom>
+          <a:noFill/>
+          <a:ln/>
+        </p:spPr>
+        <p:txBody>
+          <a:bodyPr wrap="square" lIns="0" tIns="0" rIns="0" bIns="0" rtlCol="0" anchor="ctr"/>
+          <a:lstStyle/>
+          <a:p>
+            <a:pPr indent="0" marL="0">
+              <a:buNone/>
+            </a:pPr>
+            <a:r>
+              <a:rPr lang="en-US" sz="1200" dirty="0">
+                <a:solidFill>
+                  <a:schemeClr val="accent6"/>
+                </a:solidFill>
+              </a:rPr>
+              <a:t>órdenes; 17 llegan solas por flujos automáticos</a:t>
+            </a:r>
+            <a:endParaRPr lang="en-US" sz="1200" dirty="0"/>
+          </a:p>
+        </p:txBody>
+      </p:sp>
+      <p:graphicFrame>
+        <p:nvGraphicFramePr>
+          <p:cNvPr id="8" name="Sales by program chart" descr=""/>
+          <p:cNvGraphicFramePr/>
+          <p:nvPr/>
+        </p:nvGraphicFramePr>
+        <p:xfrm>
+          <a:off x="3840480" y="960120"/>
+          <a:ext cx="4846320" cy="2743200"/>
+        </p:xfrm>
+        <a:graphic xmlns:a="http://schemas.openxmlformats.org/drawingml/2006/main">
+          <a:graphicData uri="http://schemas.openxmlformats.org/drawingml/2006/chart">
+            <c:chart xmlns:c="http://schemas.openxmlformats.org/drawingml/2006/chart" r:id="rId1"/>
+          </a:graphicData>
+        </a:graphic>
+      </p:graphicFrame>
+      <p:sp>
+        <p:nvSpPr>
+          <p:cNvPr id="9" name="Text 6"/>
+          <p:cNvSpPr txBox="1"/>
+          <p:nvPr/>
+        </p:nvSpPr>
+        <p:spPr>
+          <a:xfrm>
+            <a:off x="3931920" y="3749040"/>
+            <a:ext cx="4754880" cy="548640"/>
+          </a:xfrm>
+          <a:prstGeom prst="rect">
+            <a:avLst/>
+          </a:prstGeom>
+          <a:noFill/>
+          <a:ln/>
+        </p:spPr>
+        <p:txBody>
+          <a:bodyPr wrap="square" lIns="0" tIns="0" rIns="0" bIns="0" rtlCol="0" anchor="t"/>
+          <a:lstStyle/>
+          <a:p>
+            <a:pPr indent="0" marL="0">
+              <a:buNone/>
+            </a:pPr>
+            <a:r>
+              <a:rPr lang="en-US" sz="1200" dirty="0">
+                <a:solidFill>
+                  <a:schemeClr val="tx1"/>
+                </a:solidFill>
+              </a:rPr>
+              <a:t>El Game Day tuvo 60% de apertura. Los flujos de Subscribe &amp; Save y Segunda Orden están activos desde el 7 oct.</a:t>
+            </a:r>
+            <a:endParaRPr lang="en-US" sz="1200" dirty="0"/>
+          </a:p>
+        </p:txBody>
+      </p:sp>
+      <p:sp>
+        <p:nvSpPr>
+          <p:cNvPr id="10" name="Text 7"/>
+          <p:cNvSpPr txBox="1"/>
+          <p:nvPr/>
+        </p:nvSpPr>
+        <p:spPr>
+          <a:xfrm>
+            <a:off x="457200" y="4434840"/>
+            <a:ext cx="8229600" cy="274320"/>
+          </a:xfrm>
+          <a:prstGeom prst="rect">
+            <a:avLst/>
+          </a:prstGeom>
+          <a:noFill/>
+          <a:ln/>
+        </p:spPr>
+        <p:txBody>
+          <a:bodyPr wrap="square" lIns="0" tIns="0" rIns="0" bIns="0" rtlCol="0" anchor="ctr"/>
+          <a:lstStyle/>
+          <a:p>
+            <a:pPr indent="0" marL="0">
+              <a:buNone/>
+            </a:pPr>
+            <a:r>
+              <a:rPr lang="en-US" sz="900" i="1" dirty="0">
+                <a:solidFill>
+                  <a:schemeClr val="accent4"/>
+                </a:solidFill>
+              </a:rPr>
+              <a:t>Fuente: Klaviyo (Brooklyn Biltong), órdenes atribuidas por la plataforma.</a:t>
+            </a:r>
+            <a:endParaRPr lang="en-US" sz="900" dirty="0"/>
+          </a:p>
+        </p:txBody>
+      </p:sp>
+      <p:sp>
+        <p:nvSpPr>
+          <p:cNvPr id="25" name="Slide Number Placeholder 0"/>
+          <p:cNvSpPr>
+            <a:spLocks noGrp="1"/>
+          </p:cNvSpPr>
+          <p:nvPr>
+            <p:ph type="sldNum" sz="quarter" idx="4294967295"/>
+          </p:nvPr>
+        </p:nvSpPr>
+        <p:spPr>
+          <a:xfrm>
+            <a:off x="8321040" y="4800600"/>
+            <a:ext cx="365760" cy="228600"/>
+          </a:xfrm>
+          <a:prstGeom prst="rect">
+            <a:avLst/>
+          </a:prstGeom>
+          <a:extLst>
+            <a:ext uri="{C572A759-6A51-4108-AA02-DFA0A04FC94B}">
+              <ma14:wrappingTextBoxFlag xmlns:ma14="http://schemas.microsoft.com/office/mac/drawingml/2011/main" val="0"/>
+            </a:ext>
+          </a:extLst>
+        </p:spPr>
+        <p:txBody>
+          <a:bodyPr/>
+          <a:lstStyle>
+            <a:lvl1pPr>
+              <a:defRPr sz="900">
+                <a:solidFill>
+                  <a:schemeClr val="accent4"/>
+                </a:solidFill>
+              </a:defRPr>
+            </a:lvl1pPr>
+          </a:lstStyle>
+          <a:p>
+            <a:pPr algn="r"/>
+            <a:fld id="{F7021451-1387-4CA6-816F-3879F97B5CBC}" type="slidenum">
+              <a:rPr b="0" lang="en-US"/>
+              <a:t>6</a:t>
+            </a:fld>
+            <a:endParaRPr lang="en-US"/>
+          </a:p>
+        </p:txBody>
+      </p:sp>
+    </p:spTree>
+  </p:cSld>
+  <p:clrMapOvr>
+    <a:masterClrMapping/>
+  </p:clrMapOvr>
+</p:sld>
+</file>
+
+<file path=ppt/slides/slide7.xml><?xml version="1.0" encoding="utf-8"?>
+<p:sld xmlns:a="http://schemas.openxmlformats.org/drawingml/2006/main" xmlns:r="http://schemas.openxmlformats.org/officeDocument/2006/relationships" xmlns:p="http://schemas.openxmlformats.org/presentationml/2006/main">
+  <p:cSld name="Slide 7">
+    <p:spTree>
+      <p:nvGrpSpPr>
+        <p:cNvPr id="1" name=""/>
+        <p:cNvGrpSpPr/>
+        <p:nvPr/>
+      </p:nvGrpSpPr>
+      <p:grpSpPr>
+        <a:xfrm>
+          <a:off x="0" y="0"/>
+          <a:ext cx="0" cy="0"/>
+          <a:chOff x="0" y="0"/>
+          <a:chExt cx="0" cy="0"/>
+        </a:xfrm>
+      </p:grpSpPr>
+      <p:sp>
+        <p:nvSpPr>
+          <p:cNvPr id="2" name="Text 0"/>
+          <p:cNvSpPr/>
+          <p:nvPr>
+            <p:ph idx="100" type="title" hasCustomPrompt="1"/>
+          </p:nvPr>
+        </p:nvSpPr>
+        <p:spPr>
+          <a:xfrm>
+            <a:off x="457200" y="274320"/>
+            <a:ext cx="8229600" cy="594360"/>
+          </a:xfrm>
+          <a:prstGeom prst="rect">
+            <a:avLst/>
+          </a:prstGeom>
+          <a:noFill/>
+          <a:ln/>
+        </p:spPr>
+        <p:txBody>
+          <a:bodyPr wrap="square" lIns="0" tIns="0" rIns="0" bIns="0" rtlCol="0" anchor="ctr"/>
+          <a:lstStyle/>
+          <a:p>
+            <a:pPr algn="l" indent="0" marL="0">
+              <a:buNone/>
+            </a:pPr>
+            <a:r>
+              <a:rPr lang="en-US" sz="2600" b="1" dirty="0">
+                <a:solidFill>
+                  <a:schemeClr val="tx1"/>
+                </a:solidFill>
+                <a:latin typeface="Cambria" pitchFamily="34" charset="0"/>
+                <a:ea typeface="Cambria" pitchFamily="34" charset="-122"/>
+                <a:cs typeface="Cambria" pitchFamily="34" charset="-120"/>
+              </a:rPr>
               <a:t>Próximas dos semanas</a:t>
             </a:r>
             <a:endParaRPr lang="en-US" sz="2600" dirty="0"/>
@@ -7560,6 +8867,21 @@
                   <a:schemeClr val="tx1"/>
                 </a:solidFill>
               </a:rPr>
+              <a:t>Plan para recuperar el volumen de email: ~14 mil envíos por semana hoy vs. ~23 mil en agosto–septiembre</a:t>
+            </a:r>
+            <a:endParaRPr lang="en-US" sz="1200" dirty="0"/>
+          </a:p>
+          <a:p>
+            <a:pPr marL="342900" indent="-342900">
+              <a:buSzPct val="100000"/>
+              <a:buChar char="•"/>
+            </a:pPr>
+            <a:r>
+              <a:rPr lang="en-US" sz="1200" dirty="0">
+                <a:solidFill>
+                  <a:schemeClr val="tx1"/>
+                </a:solidFill>
+              </a:rPr>
               <a:t>Resultados del Fast Sale frente a la semana promocional de septiembre</a:t>
             </a:r>
             <a:endParaRPr lang="en-US" sz="1200" dirty="0"/>
@@ -7605,7 +8927,7 @@
             <a:pPr algn="r"/>
             <a:fld id="{F7021451-1387-4CA6-816F-3879F97B5CBC}" type="slidenum">
               <a:rPr b="0" lang="en-US"/>
-              <a:t>6</a:t>
+              <a:t>7</a:t>
             </a:fld>
             <a:endParaRPr lang="en-US"/>
           </a:p>

--- a/status_ceo/Stormberg_Status_CEO_Oct2026_ES.pptx
+++ b/status_ceo/Stormberg_Status_CEO_Oct2026_ES.pptx
@@ -113,21 +113,21 @@
   <p:extLst>
     <p:ext uri="{521415D9-36F7-43E2-AB2F-B90AF26B5E84}">
       <p14:sectionLst xmlns:p14="http://schemas.microsoft.com/office/powerpoint/2010/main">
-        <p14:section name="Resumen" id="{d0653caf-6330-0383-0609-7ad77b5b1810}">
+        <p14:section name="Resumen" id="{1a590ad6-ecd0-d4ef-bce8-1632711cf837}">
           <p14:sldIdLst>
             <p14:sldId id="256"/>
             <p14:sldId id="257"/>
             <p14:sldId id="258"/>
           </p14:sldIdLst>
         </p14:section>
-        <p14:section name="Avances" id="{e4ca8ef7-515d-e99b-9f36-3175c2df1973}">
+        <p14:section name="Avances" id="{1dcb5d36-b8d8-cc93-1cd3-f5295a21862e}">
           <p14:sldIdLst>
             <p14:sldId id="259"/>
             <p14:sldId id="260"/>
             <p14:sldId id="261"/>
           </p14:sldIdLst>
         </p14:section>
-        <p14:section name="Próximos pasos" id="{956ceead-70c4-aa53-7e9b-a491e4a594e6}">
+        <p14:section name="Próximos pasos" id="{dd99baca-5415-568a-5d27-584e997c4e7b}">
           <p14:sldIdLst>
             <p14:sldId id="262"/>
           </p14:sldIdLst>
@@ -8187,7 +8187,7 @@
                 <a:ea typeface="Cambria" pitchFamily="34" charset="-122"/>
                 <a:cs typeface="Cambria" pitchFamily="34" charset="-120"/>
               </a:rPr>
-              <a:t>Próximas dos semanas</a:t>
+              <a:t>Lo que haremos esta semana</a:t>
             </a:r>
             <a:endParaRPr lang="en-US" sz="2600" dirty="0"/>
           </a:p>
@@ -8195,37 +8195,36 @@
       </p:sp>
       <p:sp>
         <p:nvSpPr>
-          <p:cNvPr id="3" name="Timeline line"/>
+          <p:cNvPr id="3" name="Plan card 1"/>
           <p:cNvSpPr/>
           <p:nvPr/>
         </p:nvSpPr>
         <p:spPr>
           <a:xfrm>
-            <a:off x="777240" y="1463040"/>
-            <a:ext cx="7589520" cy="0"/>
+            <a:off x="457200" y="1005840"/>
+            <a:ext cx="2651760" cy="2377440"/>
           </a:xfrm>
-          <a:prstGeom prst="line">
-            <a:avLst/>
+          <a:prstGeom prst="roundRect">
+            <a:avLst>
+              <a:gd name="adj" fmla="val 3077"/>
+            </a:avLst>
           </a:prstGeom>
-          <a:noFill/>
-          <a:ln w="25400">
-            <a:solidFill>
-              <a:schemeClr val="accent6"/>
-            </a:solidFill>
-            <a:prstDash val="solid"/>
-          </a:ln>
+          <a:solidFill>
+            <a:schemeClr val="bg2"/>
+          </a:solidFill>
+          <a:ln/>
         </p:spPr>
       </p:sp>
       <p:sp>
         <p:nvSpPr>
-          <p:cNvPr id="4" name="Timeline dot 1"/>
+          <p:cNvPr id="4" name="Plan dot 1"/>
           <p:cNvSpPr/>
           <p:nvPr/>
         </p:nvSpPr>
         <p:spPr>
           <a:xfrm>
-            <a:off x="594360" y="1280160"/>
-            <a:ext cx="365760" cy="365760"/>
+            <a:off x="640080" y="1188720"/>
+            <a:ext cx="274320" cy="274320"/>
           </a:xfrm>
           <a:prstGeom prst="ellipse">
             <a:avLst/>
@@ -8233,12 +8232,7 @@
           <a:solidFill>
             <a:schemeClr val="accent1"/>
           </a:solidFill>
-          <a:ln w="25400">
-            <a:solidFill>
-              <a:schemeClr val="bg1"/>
-            </a:solidFill>
-            <a:prstDash val="solid"/>
-          </a:ln>
+          <a:ln/>
         </p:spPr>
       </p:sp>
       <p:sp>
@@ -8249,8 +8243,8 @@
         </p:nvSpPr>
         <p:spPr>
           <a:xfrm>
-            <a:off x="457200" y="1783080"/>
-            <a:ext cx="2011680" cy="274320"/>
+            <a:off x="1005840" y="1143000"/>
+            <a:ext cx="1965960" cy="365760"/>
           </a:xfrm>
           <a:prstGeom prst="rect">
             <a:avLst/>
@@ -8266,14 +8260,17 @@
               <a:buNone/>
             </a:pPr>
             <a:r>
-              <a:rPr lang="en-US" sz="1200" b="1" dirty="0">
-                <a:solidFill>
-                  <a:schemeClr val="accent1"/>
-                </a:solidFill>
+              <a:rPr lang="en-US" sz="1500" b="1" dirty="0">
+                <a:solidFill>
+                  <a:schemeClr val="tx1"/>
+                </a:solidFill>
+                <a:latin typeface="Cambria" pitchFamily="34" charset="0"/>
+                <a:ea typeface="Cambria" pitchFamily="34" charset="-122"/>
+                <a:cs typeface="Cambria" pitchFamily="34" charset="-120"/>
               </a:rPr>
-              <a:t>15 oct</a:t>
+              <a:t>Brooklyn Biltong</a:t>
             </a:r>
-            <a:endParaRPr lang="en-US" sz="1200" dirty="0"/>
+            <a:endParaRPr lang="en-US" sz="1500" dirty="0"/>
           </a:p>
         </p:txBody>
       </p:sp>
@@ -8285,8 +8282,126 @@
         </p:nvSpPr>
         <p:spPr>
           <a:xfrm>
-            <a:off x="457200" y="2057400"/>
-            <a:ext cx="1920240" cy="320040"/>
+            <a:off x="640080" y="1600200"/>
+            <a:ext cx="2331720" cy="1691640"/>
+          </a:xfrm>
+          <a:prstGeom prst="rect">
+            <a:avLst/>
+          </a:prstGeom>
+          <a:noFill/>
+          <a:ln/>
+        </p:spPr>
+        <p:txBody>
+          <a:bodyPr wrap="square" lIns="0" tIns="0" rIns="0" bIns="0" rtlCol="0" anchor="t"/>
+          <a:lstStyle/>
+          <a:p>
+            <a:pPr marL="342900" indent="-342900">
+              <a:spcAft>
+                <a:spcPts val="500"/>
+              </a:spcAft>
+              <a:buSzPct val="100000"/>
+              <a:buChar char="•"/>
+            </a:pPr>
+            <a:r>
+              <a:rPr lang="en-US" sz="1100" dirty="0">
+                <a:solidFill>
+                  <a:schemeClr val="tx1"/>
+                </a:solidFill>
+              </a:rPr>
+              <a:t>Fast Sale: VIP 20% y lista 15% (15 oct), recordatorio el 16 y cierre el 18</a:t>
+            </a:r>
+            <a:endParaRPr lang="en-US" sz="1100" dirty="0"/>
+          </a:p>
+          <a:p>
+            <a:pPr marL="342900" indent="-342900">
+              <a:spcAft>
+                <a:spcPts val="500"/>
+              </a:spcAft>
+              <a:buSzPct val="100000"/>
+              <a:buChar char="•"/>
+            </a:pPr>
+            <a:r>
+              <a:rPr lang="en-US" sz="1100" dirty="0">
+                <a:solidFill>
+                  <a:schemeClr val="tx1"/>
+                </a:solidFill>
+              </a:rPr>
+              <a:t>Escalar el retargeting dinámico y Smile; ajustar clientes nuevos según su costo por compra</a:t>
+            </a:r>
+            <a:endParaRPr lang="en-US" sz="1100" dirty="0"/>
+          </a:p>
+          <a:p>
+            <a:pPr marL="342900" indent="-342900">
+              <a:spcAft>
+                <a:spcPts val="500"/>
+              </a:spcAft>
+              <a:buSzPct val="100000"/>
+              <a:buChar char="•"/>
+            </a:pPr>
+            <a:r>
+              <a:rPr lang="en-US" sz="1100" dirty="0">
+                <a:solidFill>
+                  <a:schemeClr val="tx1"/>
+                </a:solidFill>
+              </a:rPr>
+              <a:t>Recuperar la frecuencia de email y activar el flujo Recurrente → Suscripción</a:t>
+            </a:r>
+            <a:endParaRPr lang="en-US" sz="1100" dirty="0"/>
+          </a:p>
+        </p:txBody>
+      </p:sp>
+      <p:sp>
+        <p:nvSpPr>
+          <p:cNvPr id="7" name="Plan card 2"/>
+          <p:cNvSpPr/>
+          <p:nvPr/>
+        </p:nvSpPr>
+        <p:spPr>
+          <a:xfrm>
+            <a:off x="3246120" y="1005840"/>
+            <a:ext cx="2651760" cy="2377440"/>
+          </a:xfrm>
+          <a:prstGeom prst="roundRect">
+            <a:avLst>
+              <a:gd name="adj" fmla="val 3077"/>
+            </a:avLst>
+          </a:prstGeom>
+          <a:solidFill>
+            <a:schemeClr val="bg2"/>
+          </a:solidFill>
+          <a:ln/>
+        </p:spPr>
+      </p:sp>
+      <p:sp>
+        <p:nvSpPr>
+          <p:cNvPr id="8" name="Plan dot 2"/>
+          <p:cNvSpPr/>
+          <p:nvPr/>
+        </p:nvSpPr>
+        <p:spPr>
+          <a:xfrm>
+            <a:off x="3429000" y="1188720"/>
+            <a:ext cx="274320" cy="274320"/>
+          </a:xfrm>
+          <a:prstGeom prst="ellipse">
+            <a:avLst/>
+          </a:prstGeom>
+          <a:solidFill>
+            <a:schemeClr val="tx2"/>
+          </a:solidFill>
+          <a:ln/>
+        </p:spPr>
+      </p:sp>
+      <p:sp>
+        <p:nvSpPr>
+          <p:cNvPr id="9" name="Text 7"/>
+          <p:cNvSpPr txBox="1"/>
+          <p:nvPr/>
+        </p:nvSpPr>
+        <p:spPr>
+          <a:xfrm>
+            <a:off x="3794760" y="1143000"/>
+            <a:ext cx="1965960" cy="365760"/>
           </a:xfrm>
           <a:prstGeom prst="rect">
             <a:avLst/>
@@ -8302,7 +8417,7 @@
               <a:buNone/>
             </a:pPr>
             <a:r>
-              <a:rPr lang="en-US" sz="1400" b="1" dirty="0">
+              <a:rPr lang="en-US" sz="1500" b="1" dirty="0">
                 <a:solidFill>
                   <a:schemeClr val="tx1"/>
                 </a:solidFill>
@@ -8310,22 +8425,22 @@
                 <a:ea typeface="Cambria" pitchFamily="34" charset="-122"/>
                 <a:cs typeface="Cambria" pitchFamily="34" charset="-120"/>
               </a:rPr>
-              <a:t>Fast Sale Brooklyn</a:t>
+              <a:t>Ayoba Foods</a:t>
             </a:r>
-            <a:endParaRPr lang="en-US" sz="1400" dirty="0"/>
+            <a:endParaRPr lang="en-US" sz="1500" dirty="0"/>
           </a:p>
         </p:txBody>
       </p:sp>
       <p:sp>
         <p:nvSpPr>
-          <p:cNvPr id="7" name="Text 5"/>
+          <p:cNvPr id="10" name="Text 8"/>
           <p:cNvSpPr txBox="1"/>
           <p:nvPr/>
         </p:nvSpPr>
         <p:spPr>
           <a:xfrm>
-            <a:off x="457200" y="2395728"/>
-            <a:ext cx="1874520" cy="822960"/>
+            <a:off x="3429000" y="1600200"/>
+            <a:ext cx="2331720" cy="1691640"/>
           </a:xfrm>
           <a:prstGeom prst="rect">
             <a:avLst/>
@@ -8337,8 +8452,12 @@
           <a:bodyPr wrap="square" lIns="0" tIns="0" rIns="0" bIns="0" rtlCol="0" anchor="t"/>
           <a:lstStyle/>
           <a:p>
-            <a:pPr indent="0" marL="0">
-              <a:buNone/>
+            <a:pPr marL="342900" indent="-342900">
+              <a:spcAft>
+                <a:spcPts val="500"/>
+              </a:spcAft>
+              <a:buSzPct val="100000"/>
+              <a:buChar char="•"/>
             </a:pPr>
             <a:r>
               <a:rPr lang="en-US" sz="1100" dirty="0">
@@ -8346,47 +8465,100 @@
                   <a:schemeClr val="tx1"/>
                 </a:solidFill>
               </a:rPr>
-              <a:t>VIP (2+ órdenes) 20%, resto de la lista 15%</a:t>
+              <a:t>Escalar la campaña de clientes nuevos, la de menor costo por compra del portafolio</a:t>
             </a:r>
             <a:endParaRPr lang="en-US" sz="1100" dirty="0"/>
           </a:p>
+          <a:p>
+            <a:pPr marL="342900" indent="-342900">
+              <a:spcAft>
+                <a:spcPts val="500"/>
+              </a:spcAft>
+              <a:buSzPct val="100000"/>
+              <a:buChar char="•"/>
+            </a:pPr>
+            <a:r>
+              <a:rPr lang="en-US" sz="1100" dirty="0">
+                <a:solidFill>
+                  <a:schemeClr val="tx1"/>
+                </a:solidFill>
+              </a:rPr>
+              <a:t>Activar los flujos de retención para que corran solos</a:t>
+            </a:r>
+            <a:endParaRPr lang="en-US" sz="1100" dirty="0"/>
+          </a:p>
+          <a:p>
+            <a:pPr marL="342900" indent="-342900">
+              <a:spcAft>
+                <a:spcPts val="500"/>
+              </a:spcAft>
+              <a:buSzPct val="100000"/>
+              <a:buChar char="•"/>
+            </a:pPr>
+            <a:r>
+              <a:rPr lang="en-US" sz="1100" dirty="0">
+                <a:solidFill>
+                  <a:schemeClr val="tx1"/>
+                </a:solidFill>
+              </a:rPr>
+              <a:t>Campañas: Spicy Taco Night, Droëwors Oktoberfest y Cabin Weekend</a:t>
+            </a:r>
+            <a:endParaRPr lang="en-US" sz="1100" dirty="0"/>
+          </a:p>
         </p:txBody>
       </p:sp>
       <p:sp>
         <p:nvSpPr>
-          <p:cNvPr id="8" name="Timeline dot 2"/>
+          <p:cNvPr id="11" name="Plan card 3"/>
           <p:cNvSpPr/>
           <p:nvPr/>
         </p:nvSpPr>
         <p:spPr>
           <a:xfrm>
-            <a:off x="2667305" y="1280160"/>
-            <a:ext cx="365760" cy="365760"/>
+            <a:off x="6035040" y="1005840"/>
+            <a:ext cx="2651760" cy="2377440"/>
+          </a:xfrm>
+          <a:prstGeom prst="roundRect">
+            <a:avLst>
+              <a:gd name="adj" fmla="val 3077"/>
+            </a:avLst>
+          </a:prstGeom>
+          <a:solidFill>
+            <a:schemeClr val="bg2"/>
+          </a:solidFill>
+          <a:ln/>
+        </p:spPr>
+      </p:sp>
+      <p:sp>
+        <p:nvSpPr>
+          <p:cNvPr id="12" name="Plan dot 3"/>
+          <p:cNvSpPr/>
+          <p:nvPr/>
+        </p:nvSpPr>
+        <p:spPr>
+          <a:xfrm>
+            <a:off x="6217920" y="1188720"/>
+            <a:ext cx="274320" cy="274320"/>
           </a:xfrm>
           <a:prstGeom prst="ellipse">
             <a:avLst/>
           </a:prstGeom>
           <a:solidFill>
-            <a:schemeClr val="accent1"/>
+            <a:schemeClr val="tx2"/>
           </a:solidFill>
-          <a:ln w="25400">
-            <a:solidFill>
-              <a:schemeClr val="bg1"/>
-            </a:solidFill>
-            <a:prstDash val="solid"/>
-          </a:ln>
+          <a:ln/>
         </p:spPr>
       </p:sp>
       <p:sp>
         <p:nvSpPr>
-          <p:cNvPr id="9" name="Text 7"/>
+          <p:cNvPr id="13" name="Text 11"/>
           <p:cNvSpPr txBox="1"/>
           <p:nvPr/>
         </p:nvSpPr>
         <p:spPr>
           <a:xfrm>
-            <a:off x="2530145" y="1783080"/>
-            <a:ext cx="2011680" cy="274320"/>
+            <a:off x="6583680" y="1143000"/>
+            <a:ext cx="1965960" cy="365760"/>
           </a:xfrm>
           <a:prstGeom prst="rect">
             <a:avLst/>
@@ -8402,43 +8574,7 @@
               <a:buNone/>
             </a:pPr>
             <a:r>
-              <a:rPr lang="en-US" sz="1200" b="1" dirty="0">
-                <a:solidFill>
-                  <a:schemeClr val="accent1"/>
-                </a:solidFill>
-              </a:rPr>
-              <a:t>16–18 oct</a:t>
-            </a:r>
-            <a:endParaRPr lang="en-US" sz="1200" dirty="0"/>
-          </a:p>
-        </p:txBody>
-      </p:sp>
-      <p:sp>
-        <p:nvSpPr>
-          <p:cNvPr id="10" name="Text 8"/>
-          <p:cNvSpPr txBox="1"/>
-          <p:nvPr/>
-        </p:nvSpPr>
-        <p:spPr>
-          <a:xfrm>
-            <a:off x="2530145" y="2057400"/>
-            <a:ext cx="1920240" cy="320040"/>
-          </a:xfrm>
-          <a:prstGeom prst="rect">
-            <a:avLst/>
-          </a:prstGeom>
-          <a:noFill/>
-          <a:ln/>
-        </p:spPr>
-        <p:txBody>
-          <a:bodyPr wrap="square" lIns="0" tIns="0" rIns="0" bIns="0" rtlCol="0" anchor="ctr"/>
-          <a:lstStyle/>
-          <a:p>
-            <a:pPr indent="0" marL="0">
-              <a:buNone/>
-            </a:pPr>
-            <a:r>
-              <a:rPr lang="en-US" sz="1400" b="1" dirty="0">
+              <a:rPr lang="en-US" sz="1500" b="1" dirty="0">
                 <a:solidFill>
                   <a:schemeClr val="tx1"/>
                 </a:solidFill>
@@ -8446,22 +8582,22 @@
                 <a:ea typeface="Cambria" pitchFamily="34" charset="-122"/>
                 <a:cs typeface="Cambria" pitchFamily="34" charset="-120"/>
               </a:rPr>
-              <a:t>Recordatorio y cierre</a:t>
+              <a:t>Beg &amp; Barker</a:t>
             </a:r>
-            <a:endParaRPr lang="en-US" sz="1400" dirty="0"/>
+            <a:endParaRPr lang="en-US" sz="1500" dirty="0"/>
           </a:p>
         </p:txBody>
       </p:sp>
       <p:sp>
         <p:nvSpPr>
-          <p:cNvPr id="11" name="Text 9"/>
+          <p:cNvPr id="14" name="Text 12"/>
           <p:cNvSpPr txBox="1"/>
           <p:nvPr/>
         </p:nvSpPr>
         <p:spPr>
           <a:xfrm>
-            <a:off x="2530145" y="2395728"/>
-            <a:ext cx="1874520" cy="822960"/>
+            <a:off x="6217920" y="1600200"/>
+            <a:ext cx="2331720" cy="1691640"/>
           </a:xfrm>
           <a:prstGeom prst="rect">
             <a:avLst/>
@@ -8473,8 +8609,12 @@
           <a:bodyPr wrap="square" lIns="0" tIns="0" rIns="0" bIns="0" rtlCol="0" anchor="t"/>
           <a:lstStyle/>
           <a:p>
-            <a:pPr indent="0" marL="0">
-              <a:buNone/>
+            <a:pPr marL="342900" indent="-342900">
+              <a:spcAft>
+                <a:spcPts val="500"/>
+              </a:spcAft>
+              <a:buSzPct val="100000"/>
+              <a:buChar char="•"/>
             </a:pPr>
             <a:r>
               <a:rPr lang="en-US" sz="1100" dirty="0">
@@ -8482,135 +8622,17 @@
                   <a:schemeClr val="tx1"/>
                 </a:solidFill>
               </a:rPr>
-              <a:t>Por email a VIP y lista general</a:t>
+              <a:t>Escalar la campaña de clientes nuevos a medida que gana datos</a:t>
             </a:r>
             <a:endParaRPr lang="en-US" sz="1100" dirty="0"/>
           </a:p>
-        </p:txBody>
-      </p:sp>
-      <p:sp>
-        <p:nvSpPr>
-          <p:cNvPr id="12" name="Timeline dot 3"/>
-          <p:cNvSpPr/>
-          <p:nvPr/>
-        </p:nvSpPr>
-        <p:spPr>
-          <a:xfrm>
-            <a:off x="4740250" y="1280160"/>
-            <a:ext cx="365760" cy="365760"/>
-          </a:xfrm>
-          <a:prstGeom prst="ellipse">
-            <a:avLst/>
-          </a:prstGeom>
-          <a:solidFill>
-            <a:schemeClr val="tx2"/>
-          </a:solidFill>
-          <a:ln w="25400">
-            <a:solidFill>
-              <a:schemeClr val="bg1"/>
-            </a:solidFill>
-            <a:prstDash val="solid"/>
-          </a:ln>
-        </p:spPr>
-      </p:sp>
-      <p:sp>
-        <p:nvSpPr>
-          <p:cNvPr id="13" name="Text 11"/>
-          <p:cNvSpPr txBox="1"/>
-          <p:nvPr/>
-        </p:nvSpPr>
-        <p:spPr>
-          <a:xfrm>
-            <a:off x="4603090" y="1783080"/>
-            <a:ext cx="2011680" cy="274320"/>
-          </a:xfrm>
-          <a:prstGeom prst="rect">
-            <a:avLst/>
-          </a:prstGeom>
-          <a:noFill/>
-          <a:ln/>
-        </p:spPr>
-        <p:txBody>
-          <a:bodyPr wrap="square" lIns="0" tIns="0" rIns="0" bIns="0" rtlCol="0" anchor="ctr"/>
-          <a:lstStyle/>
-          <a:p>
-            <a:pPr indent="0" marL="0">
-              <a:buNone/>
-            </a:pPr>
-            <a:r>
-              <a:rPr lang="en-US" sz="1200" b="1" dirty="0">
-                <a:solidFill>
-                  <a:schemeClr val="tx2"/>
-                </a:solidFill>
-              </a:rPr>
-              <a:t>Semana del 20</a:t>
-            </a:r>
-            <a:endParaRPr lang="en-US" sz="1200" dirty="0"/>
-          </a:p>
-        </p:txBody>
-      </p:sp>
-      <p:sp>
-        <p:nvSpPr>
-          <p:cNvPr id="14" name="Text 12"/>
-          <p:cNvSpPr txBox="1"/>
-          <p:nvPr/>
-        </p:nvSpPr>
-        <p:spPr>
-          <a:xfrm>
-            <a:off x="4603090" y="2057400"/>
-            <a:ext cx="1920240" cy="320040"/>
-          </a:xfrm>
-          <a:prstGeom prst="rect">
-            <a:avLst/>
-          </a:prstGeom>
-          <a:noFill/>
-          <a:ln/>
-        </p:spPr>
-        <p:txBody>
-          <a:bodyPr wrap="square" lIns="0" tIns="0" rIns="0" bIns="0" rtlCol="0" anchor="ctr"/>
-          <a:lstStyle/>
-          <a:p>
-            <a:pPr indent="0" marL="0">
-              <a:buNone/>
-            </a:pPr>
-            <a:r>
-              <a:rPr lang="en-US" sz="1400" b="1" dirty="0">
-                <a:solidFill>
-                  <a:schemeClr val="tx1"/>
-                </a:solidFill>
-                <a:latin typeface="Cambria" pitchFamily="34" charset="0"/>
-                <a:ea typeface="Cambria" pitchFamily="34" charset="-122"/>
-                <a:cs typeface="Cambria" pitchFamily="34" charset="-120"/>
-              </a:rPr>
-              <a:t>Escalar lo que gana</a:t>
-            </a:r>
-            <a:endParaRPr lang="en-US" sz="1400" dirty="0"/>
-          </a:p>
-        </p:txBody>
-      </p:sp>
-      <p:sp>
-        <p:nvSpPr>
-          <p:cNvPr id="15" name="Text 13"/>
-          <p:cNvSpPr txBox="1"/>
-          <p:nvPr/>
-        </p:nvSpPr>
-        <p:spPr>
-          <a:xfrm>
-            <a:off x="4603090" y="2395728"/>
-            <a:ext cx="1874520" cy="822960"/>
-          </a:xfrm>
-          <a:prstGeom prst="rect">
-            <a:avLst/>
-          </a:prstGeom>
-          <a:noFill/>
-          <a:ln/>
-        </p:spPr>
-        <p:txBody>
-          <a:bodyPr wrap="square" lIns="0" tIns="0" rIns="0" bIns="0" rtlCol="0" anchor="t"/>
-          <a:lstStyle/>
-          <a:p>
-            <a:pPr indent="0" marL="0">
-              <a:buNone/>
+          <a:p>
+            <a:pPr marL="342900" indent="-342900">
+              <a:spcAft>
+                <a:spcPts val="500"/>
+              </a:spcAft>
+              <a:buSzPct val="100000"/>
+              <a:buChar char="•"/>
             </a:pPr>
             <a:r>
               <a:rPr lang="en-US" sz="1100" dirty="0">
@@ -8618,135 +8640,17 @@
                   <a:schemeClr val="tx1"/>
                 </a:solidFill>
               </a:rPr>
-              <a:t>Más presupuesto a retargeting y a Ayoba clientes nuevos; menos a lo caro</a:t>
+              <a:t>Lanzar la SMS Welcome Series y medir la nueva Welcome BARK15</a:t>
             </a:r>
             <a:endParaRPr lang="en-US" sz="1100" dirty="0"/>
           </a:p>
-        </p:txBody>
-      </p:sp>
-      <p:sp>
-        <p:nvSpPr>
-          <p:cNvPr id="16" name="Timeline dot 4"/>
-          <p:cNvSpPr/>
-          <p:nvPr/>
-        </p:nvSpPr>
-        <p:spPr>
-          <a:xfrm>
-            <a:off x="6813194" y="1280160"/>
-            <a:ext cx="365760" cy="365760"/>
-          </a:xfrm>
-          <a:prstGeom prst="ellipse">
-            <a:avLst/>
-          </a:prstGeom>
-          <a:solidFill>
-            <a:schemeClr val="tx2"/>
-          </a:solidFill>
-          <a:ln w="25400">
-            <a:solidFill>
-              <a:schemeClr val="bg1"/>
-            </a:solidFill>
-            <a:prstDash val="solid"/>
-          </a:ln>
-        </p:spPr>
-      </p:sp>
-      <p:sp>
-        <p:nvSpPr>
-          <p:cNvPr id="17" name="Text 15"/>
-          <p:cNvSpPr txBox="1"/>
-          <p:nvPr/>
-        </p:nvSpPr>
-        <p:spPr>
-          <a:xfrm>
-            <a:off x="6676034" y="1783080"/>
-            <a:ext cx="2011680" cy="274320"/>
-          </a:xfrm>
-          <a:prstGeom prst="rect">
-            <a:avLst/>
-          </a:prstGeom>
-          <a:noFill/>
-          <a:ln/>
-        </p:spPr>
-        <p:txBody>
-          <a:bodyPr wrap="square" lIns="0" tIns="0" rIns="0" bIns="0" rtlCol="0" anchor="ctr"/>
-          <a:lstStyle/>
-          <a:p>
-            <a:pPr indent="0" marL="0">
-              <a:buNone/>
-            </a:pPr>
-            <a:r>
-              <a:rPr lang="en-US" sz="1200" b="1" dirty="0">
-                <a:solidFill>
-                  <a:schemeClr val="tx2"/>
-                </a:solidFill>
-              </a:rPr>
-              <a:t>Octubre</a:t>
-            </a:r>
-            <a:endParaRPr lang="en-US" sz="1200" dirty="0"/>
-          </a:p>
-        </p:txBody>
-      </p:sp>
-      <p:sp>
-        <p:nvSpPr>
-          <p:cNvPr id="18" name="Text 16"/>
-          <p:cNvSpPr txBox="1"/>
-          <p:nvPr/>
-        </p:nvSpPr>
-        <p:spPr>
-          <a:xfrm>
-            <a:off x="6676034" y="2057400"/>
-            <a:ext cx="1920240" cy="320040"/>
-          </a:xfrm>
-          <a:prstGeom prst="rect">
-            <a:avLst/>
-          </a:prstGeom>
-          <a:noFill/>
-          <a:ln/>
-        </p:spPr>
-        <p:txBody>
-          <a:bodyPr wrap="square" lIns="0" tIns="0" rIns="0" bIns="0" rtlCol="0" anchor="ctr"/>
-          <a:lstStyle/>
-          <a:p>
-            <a:pPr indent="0" marL="0">
-              <a:buNone/>
-            </a:pPr>
-            <a:r>
-              <a:rPr lang="en-US" sz="1400" b="1" dirty="0">
-                <a:solidFill>
-                  <a:schemeClr val="tx1"/>
-                </a:solidFill>
-                <a:latin typeface="Cambria" pitchFamily="34" charset="0"/>
-                <a:ea typeface="Cambria" pitchFamily="34" charset="-122"/>
-                <a:cs typeface="Cambria" pitchFamily="34" charset="-120"/>
-              </a:rPr>
-              <a:t>Retención</a:t>
-            </a:r>
-            <a:endParaRPr lang="en-US" sz="1400" dirty="0"/>
-          </a:p>
-        </p:txBody>
-      </p:sp>
-      <p:sp>
-        <p:nvSpPr>
-          <p:cNvPr id="19" name="Text 17"/>
-          <p:cNvSpPr txBox="1"/>
-          <p:nvPr/>
-        </p:nvSpPr>
-        <p:spPr>
-          <a:xfrm>
-            <a:off x="6676034" y="2395728"/>
-            <a:ext cx="1874520" cy="822960"/>
-          </a:xfrm>
-          <a:prstGeom prst="rect">
-            <a:avLst/>
-          </a:prstGeom>
-          <a:noFill/>
-          <a:ln/>
-        </p:spPr>
-        <p:txBody>
-          <a:bodyPr wrap="square" lIns="0" tIns="0" rIns="0" bIns="0" rtlCol="0" anchor="t"/>
-          <a:lstStyle/>
-          <a:p>
-            <a:pPr indent="0" marL="0">
-              <a:buNone/>
+          <a:p>
+            <a:pPr marL="342900" indent="-342900">
+              <a:spcAft>
+                <a:spcPts val="500"/>
+              </a:spcAft>
+              <a:buSzPct val="100000"/>
+              <a:buChar char="•"/>
             </a:pPr>
             <a:r>
               <a:rPr lang="en-US" sz="1100" dirty="0">
@@ -8754,7 +8658,7 @@
                   <a:schemeClr val="tx1"/>
                 </a:solidFill>
               </a:rPr>
-              <a:t>Recurrente → Suscripción (Brooklyn), SMS Welcome (Beg &amp; Barker), flujos de Ayoba</a:t>
+              <a:t>Sostener el retargeting dinámico con su nuevo presupuesto</a:t>
             </a:r>
             <a:endParaRPr lang="en-US" sz="1100" dirty="0"/>
           </a:p>
@@ -8762,35 +8666,35 @@
       </p:sp>
       <p:sp>
         <p:nvSpPr>
-          <p:cNvPr id="20" name="Meeting asks panel"/>
+          <p:cNvPr id="15" name="Follow-up panel"/>
           <p:cNvSpPr/>
           <p:nvPr/>
         </p:nvSpPr>
         <p:spPr>
           <a:xfrm>
-            <a:off x="457200" y="3429000"/>
-            <a:ext cx="8229600" cy="1051560"/>
+            <a:off x="457200" y="3566160"/>
+            <a:ext cx="8229600" cy="960120"/>
           </a:xfrm>
           <a:prstGeom prst="roundRect">
             <a:avLst>
-              <a:gd name="adj" fmla="val 6957"/>
+              <a:gd name="adj" fmla="val 7619"/>
             </a:avLst>
           </a:prstGeom>
           <a:solidFill>
-            <a:schemeClr val="bg2"/>
+            <a:schemeClr val="tx1"/>
           </a:solidFill>
           <a:ln/>
         </p:spPr>
       </p:sp>
       <p:sp>
         <p:nvSpPr>
-          <p:cNvPr id="21" name="Text 19"/>
+          <p:cNvPr id="16" name="Text 14"/>
           <p:cNvSpPr txBox="1"/>
           <p:nvPr/>
         </p:nvSpPr>
         <p:spPr>
           <a:xfrm>
-            <a:off x="685800" y="3520440"/>
+            <a:off x="685800" y="3657600"/>
             <a:ext cx="7772400" cy="320040"/>
           </a:xfrm>
           <a:prstGeom prst="rect">
@@ -8807,30 +8711,30 @@
               <a:buNone/>
             </a:pPr>
             <a:r>
-              <a:rPr lang="en-US" sz="1400" b="1" dirty="0">
-                <a:solidFill>
-                  <a:schemeClr val="accent1"/>
+              <a:rPr lang="en-US" sz="1500" b="1" dirty="0">
+                <a:solidFill>
+                  <a:schemeClr val="bg1"/>
                 </a:solidFill>
                 <a:latin typeface="Cambria" pitchFamily="34" charset="0"/>
                 <a:ea typeface="Cambria" pitchFamily="34" charset="-122"/>
                 <a:cs typeface="Cambria" pitchFamily="34" charset="-120"/>
               </a:rPr>
-              <a:t>Lo que proponemos revisar en la reunión del miércoles</a:t>
+              <a:t>Próximo seguimiento: 21 de octubre</a:t>
             </a:r>
-            <a:endParaRPr lang="en-US" sz="1400" dirty="0"/>
+            <a:endParaRPr lang="en-US" sz="1500" dirty="0"/>
           </a:p>
         </p:txBody>
       </p:sp>
       <p:sp>
         <p:nvSpPr>
-          <p:cNvPr id="22" name="Text 20"/>
+          <p:cNvPr id="17" name="Text 15"/>
           <p:cNvSpPr txBox="1"/>
           <p:nvPr/>
         </p:nvSpPr>
         <p:spPr>
           <a:xfrm>
-            <a:off x="685800" y="3840480"/>
-            <a:ext cx="7772400" cy="548640"/>
+            <a:off x="685800" y="3995928"/>
+            <a:ext cx="7772400" cy="457200"/>
           </a:xfrm>
           <a:prstGeom prst="rect">
             <a:avLst/>
@@ -8842,47 +8746,16 @@
           <a:bodyPr wrap="square" lIns="0" tIns="0" rIns="0" bIns="0" rtlCol="0" anchor="t"/>
           <a:lstStyle/>
           <a:p>
-            <a:pPr marL="342900" indent="-342900">
-              <a:buSzPct val="100000"/>
-              <a:buChar char="•"/>
+            <a:pPr indent="0" marL="0">
+              <a:buNone/>
             </a:pPr>
             <a:r>
               <a:rPr lang="en-US" sz="1200" dirty="0">
                 <a:solidFill>
-                  <a:schemeClr val="tx1"/>
+                  <a:schemeClr val="accent6"/>
                 </a:solidFill>
               </a:rPr>
-              <a:t>Meta de costo por compra de clientes nuevos por marca</a:t>
-            </a:r>
-            <a:endParaRPr lang="en-US" sz="1200" dirty="0"/>
-          </a:p>
-          <a:p>
-            <a:pPr marL="342900" indent="-342900">
-              <a:buSzPct val="100000"/>
-              <a:buChar char="•"/>
-            </a:pPr>
-            <a:r>
-              <a:rPr lang="en-US" sz="1200" dirty="0">
-                <a:solidFill>
-                  <a:schemeClr val="tx1"/>
-                </a:solidFill>
-              </a:rPr>
-              <a:t>Plan para recuperar el volumen de email: ~14 mil envíos por semana hoy vs. ~23 mil en agosto–septiembre</a:t>
-            </a:r>
-            <a:endParaRPr lang="en-US" sz="1200" dirty="0"/>
-          </a:p>
-          <a:p>
-            <a:pPr marL="342900" indent="-342900">
-              <a:buSzPct val="100000"/>
-              <a:buChar char="•"/>
-            </a:pPr>
-            <a:r>
-              <a:rPr lang="en-US" sz="1200" dirty="0">
-                <a:solidFill>
-                  <a:schemeClr val="tx1"/>
-                </a:solidFill>
-              </a:rPr>
-              <a:t>Resultados del Fast Sale frente a la semana promocional de septiembre</a:t>
+              <a:t>Le compartiremos los resultados del Fast Sale de Brooklyn (ventas, órdenes y respuesta de VIP vs. lista) y cómo evolucionan las campañas de clientes nuevos en las 3 marcas.</a:t>
             </a:r>
             <a:endParaRPr lang="en-US" sz="1200" dirty="0"/>
           </a:p>

--- a/status_ceo/Stormberg_Status_CEO_Oct2026_ES.pptx
+++ b/status_ceo/Stormberg_Status_CEO_Oct2026_ES.pptx
@@ -113,21 +113,21 @@
   <p:extLst>
     <p:ext uri="{521415D9-36F7-43E2-AB2F-B90AF26B5E84}">
       <p14:sectionLst xmlns:p14="http://schemas.microsoft.com/office/powerpoint/2010/main">
-        <p14:section name="Resumen" id="{1a590ad6-ecd0-d4ef-bce8-1632711cf837}">
+        <p14:section name="Resumen" id="{942286a6-1709-ca31-d2e2-d9025e495ceb}">
           <p14:sldIdLst>
             <p14:sldId id="256"/>
             <p14:sldId id="257"/>
             <p14:sldId id="258"/>
           </p14:sldIdLst>
         </p14:section>
-        <p14:section name="Avances" id="{1dcb5d36-b8d8-cc93-1cd3-f5295a21862e}">
+        <p14:section name="Avances" id="{5522b7fe-d0dd-1b6c-a411-d29463125f8c}">
           <p14:sldIdLst>
             <p14:sldId id="259"/>
             <p14:sldId id="260"/>
             <p14:sldId id="261"/>
           </p14:sldIdLst>
         </p14:section>
-        <p14:section name="Próximos pasos" id="{dd99baca-5415-568a-5d27-584e997c4e7b}">
+        <p14:section name="Próximos pasos" id="{6aa2f217-acdd-3f72-7879-2a5d2a5abe7a}">
           <p14:sldIdLst>
             <p14:sldId id="262"/>
           </p14:sldIdLst>
@@ -3632,7 +3632,7 @@
                   <a:schemeClr val="tx1"/>
                 </a:solidFill>
               </a:rPr>
-              <a:t>Brooklyn vendió $1.745 diarios del 10 al 12 de octubre, casi el doble que en los primeros nueve días del mes, justo cuando se encendió Meta.</a:t>
+              <a:t>Brooklyn vendió $1.745 diarios del 10 al 12 de octubre, casi el doble que en los primeros nueve días del mes, justo cuando se encendió Meta. Y la utilidad se mantiene en $4,5–5K al mes con casi la mitad de la inversión en medios.</a:t>
             </a:r>
             <a:endParaRPr lang="en-US" sz="1400" dirty="0"/>
           </a:p>
@@ -3861,7 +3861,48 @@
         <p:spPr>
           <a:xfrm>
             <a:off x="457200" y="3611880"/>
-            <a:ext cx="1737360" cy="685800"/>
+            <a:ext cx="1828800" cy="685800"/>
+          </a:xfrm>
+          <a:prstGeom prst="rect">
+            <a:avLst/>
+          </a:prstGeom>
+          <a:noFill/>
+          <a:ln/>
+        </p:spPr>
+        <p:txBody>
+          <a:bodyPr wrap="square" lIns="0" tIns="0" rIns="0" bIns="0" rtlCol="0" anchor="ctr">
+            <a:normAutofit/>
+          </a:bodyPr>
+          <a:lstStyle/>
+          <a:p>
+            <a:pPr indent="0" marL="0">
+              <a:buNone/>
+            </a:pPr>
+            <a:r>
+              <a:rPr lang="en-US" sz="2800" b="1" dirty="0">
+                <a:solidFill>
+                  <a:schemeClr val="accent2"/>
+                </a:solidFill>
+                <a:latin typeface="Cambria" pitchFamily="34" charset="0"/>
+                <a:ea typeface="Cambria" pitchFamily="34" charset="-122"/>
+                <a:cs typeface="Cambria" pitchFamily="34" charset="-120"/>
+              </a:rPr>
+              <a:t>$4,5–5K</a:t>
+            </a:r>
+            <a:endParaRPr lang="en-US" sz="2800" dirty="0"/>
+          </a:p>
+        </p:txBody>
+      </p:sp>
+      <p:sp>
+        <p:nvSpPr>
+          <p:cNvPr id="5" name="Text 2"/>
+          <p:cNvSpPr txBox="1"/>
+          <p:nvPr/>
+        </p:nvSpPr>
+        <p:spPr>
+          <a:xfrm>
+            <a:off x="2377440" y="3611880"/>
+            <a:ext cx="2377440" cy="685800"/>
           </a:xfrm>
           <a:prstGeom prst="rect">
             <a:avLst/>
@@ -3877,51 +3918,12 @@
               <a:buNone/>
             </a:pPr>
             <a:r>
-              <a:rPr lang="en-US" sz="3200" b="1" dirty="0">
-                <a:solidFill>
-                  <a:schemeClr val="accent2"/>
-                </a:solidFill>
-                <a:latin typeface="Cambria" pitchFamily="34" charset="0"/>
-                <a:ea typeface="Cambria" pitchFamily="34" charset="-122"/>
-                <a:cs typeface="Cambria" pitchFamily="34" charset="-120"/>
+              <a:rPr lang="en-US" sz="1200" dirty="0">
+                <a:solidFill>
+                  <a:schemeClr val="tx1"/>
+                </a:solidFill>
               </a:rPr>
-              <a:t>$1.745</a:t>
-            </a:r>
-            <a:endParaRPr lang="en-US" sz="3200" dirty="0"/>
-          </a:p>
-        </p:txBody>
-      </p:sp>
-      <p:sp>
-        <p:nvSpPr>
-          <p:cNvPr id="5" name="Text 2"/>
-          <p:cNvSpPr txBox="1"/>
-          <p:nvPr/>
-        </p:nvSpPr>
-        <p:spPr>
-          <a:xfrm>
-            <a:off x="2240280" y="3611880"/>
-            <a:ext cx="2514600" cy="685800"/>
-          </a:xfrm>
-          <a:prstGeom prst="rect">
-            <a:avLst/>
-          </a:prstGeom>
-          <a:noFill/>
-          <a:ln/>
-        </p:spPr>
-        <p:txBody>
-          <a:bodyPr wrap="square" lIns="0" tIns="0" rIns="0" bIns="0" rtlCol="0" anchor="ctr"/>
-          <a:lstStyle/>
-          <a:p>
-            <a:pPr indent="0" marL="0">
-              <a:buNone/>
-            </a:pPr>
-            <a:r>
-              <a:rPr lang="en-US" sz="1200" dirty="0">
-                <a:solidFill>
-                  <a:schemeClr val="tx1"/>
-                </a:solidFill>
-              </a:rPr>
-              <a:t>venta diaria promedio del 10 al 12 de octubre, vs. $919 del 1 al 9</a:t>
+              <a:t>de utilidad mensual estable desde mayo, con casi la mitad de la inversión en medios</a:t>
             </a:r>
             <a:endParaRPr lang="en-US" sz="1200" dirty="0"/>
           </a:p>
@@ -4433,7 +4435,7 @@
                   <a:schemeClr val="accent4"/>
                 </a:solidFill>
               </a:rPr>
-              <a:t>Fuente: Klaviyo (Brooklyn Biltong) para ventas de la tienda, flujos y Smile. Suscripciones y Google: reportes de plataforma del equipo.</a:t>
+              <a:t>Fuente: Klaviyo (Brooklyn Biltong) para ventas de la tienda, flujos y Smile. Utilidad: análisis financiero de Brooklyn. Suscripciones y Google: reportes de plataforma del equipo.</a:t>
             </a:r>
             <a:endParaRPr lang="en-US" sz="900" dirty="0"/>
           </a:p>

--- a/status_ceo/Stormberg_Status_CEO_Oct2026_ES.pptx
+++ b/status_ceo/Stormberg_Status_CEO_Oct2026_ES.pptx
@@ -12,9 +12,10 @@
     <p:sldId id="260" r:id="rId6"/>
     <p:sldId id="261" r:id="rId7"/>
     <p:sldId id="262" r:id="rId8"/>
+    <p:sldId id="263" r:id="rId9"/>
   </p:sldIdLst>
   <p:notesMasterIdLst>
-    <p:notesMasterId r:id="rId9"/>
+    <p:notesMasterId r:id="rId10"/>
   </p:notesMasterIdLst>
   <p:sldSz cx="9144000" cy="5143500"/>
   <p:notesSz cx="5143500" cy="9144000"/>
@@ -113,23 +114,24 @@
   <p:extLst>
     <p:ext uri="{521415D9-36F7-43E2-AB2F-B90AF26B5E84}">
       <p14:sectionLst xmlns:p14="http://schemas.microsoft.com/office/powerpoint/2010/main">
-        <p14:section name="Resumen" id="{942286a6-1709-ca31-d2e2-d9025e495ceb}">
+        <p14:section name="Resumen" id="{5845631f-987d-e56f-a059-3aab15afdd7c}">
           <p14:sldIdLst>
             <p14:sldId id="256"/>
             <p14:sldId id="257"/>
             <p14:sldId id="258"/>
+            <p14:sldId id="259"/>
           </p14:sldIdLst>
         </p14:section>
-        <p14:section name="Avances" id="{5522b7fe-d0dd-1b6c-a411-d29463125f8c}">
+        <p14:section name="Avances" id="{c3cf5e8c-1df6-098c-63e2-34052b8ba268}">
           <p14:sldIdLst>
-            <p14:sldId id="259"/>
             <p14:sldId id="260"/>
             <p14:sldId id="261"/>
+            <p14:sldId id="262"/>
           </p14:sldIdLst>
         </p14:section>
-        <p14:section name="Próximos pasos" id="{6aa2f217-acdd-3f72-7879-2a5d2a5abe7a}">
+        <p14:section name="Próximos pasos" id="{8b22bd57-aa73-725b-ac94-8194006c4366}">
           <p14:sldIdLst>
-            <p14:sldId id="262"/>
+            <p14:sldId id="263"/>
           </p14:sldIdLst>
         </p14:section>
       </p14:sectionLst>
@@ -2217,6 +2219,94 @@
 </p:notes>
 </file>
 
+<file path=ppt/notesSlides/notesSlide8.xml><?xml version="1.0" encoding="utf-8"?>
+<p:notes xmlns:a="http://schemas.openxmlformats.org/drawingml/2006/main" xmlns:r="http://schemas.openxmlformats.org/officeDocument/2006/relationships" xmlns:p="http://schemas.openxmlformats.org/presentationml/2006/main">
+  <p:cSld>
+    <p:spTree>
+      <p:nvGrpSpPr>
+        <p:cNvPr id="1" name=""/>
+        <p:cNvGrpSpPr/>
+        <p:nvPr/>
+      </p:nvGrpSpPr>
+      <p:grpSpPr>
+        <a:xfrm>
+          <a:off x="0" y="0"/>
+          <a:ext cx="0" cy="0"/>
+          <a:chOff x="0" y="0"/>
+          <a:chExt cx="0" cy="0"/>
+        </a:xfrm>
+      </p:grpSpPr>
+      <p:sp>
+        <p:nvSpPr>
+          <p:cNvPr id="2" name="Slide Image Placeholder 1"/>
+          <p:cNvSpPr>
+            <a:spLocks noGrp="1" noRot="1" noChangeAspect="1"/>
+          </p:cNvSpPr>
+          <p:nvPr>
+            <p:ph type="sldImg"/>
+          </p:nvPr>
+        </p:nvSpPr>
+        <p:spPr/>
+      </p:sp>
+      <p:sp>
+        <p:nvSpPr>
+          <p:cNvPr id="3" name="Notes Placeholder 2"/>
+          <p:cNvSpPr>
+            <a:spLocks noGrp="1"/>
+          </p:cNvSpPr>
+          <p:nvPr>
+            <p:ph type="body" idx="1"/>
+          </p:nvPr>
+        </p:nvSpPr>
+        <p:spPr/>
+        <p:txBody>
+          <a:bodyPr/>
+          <a:lstStyle/>
+          <a:p>
+            <a:r>
+              <a:rPr lang="en-US" dirty="0"/>
+              <a:t/>
+            </a:r>
+            <a:endParaRPr lang="en-US" dirty="0"/>
+          </a:p>
+        </p:txBody>
+      </p:sp>
+      <p:sp>
+        <p:nvSpPr>
+          <p:cNvPr id="4" name="Slide Number Placeholder 3"/>
+          <p:cNvSpPr>
+            <a:spLocks noGrp="1"/>
+          </p:cNvSpPr>
+          <p:nvPr>
+            <p:ph type="sldNum" sz="quarter" idx="10"/>
+          </p:nvPr>
+        </p:nvSpPr>
+        <p:spPr/>
+        <p:txBody>
+          <a:bodyPr/>
+          <a:lstStyle/>
+          <a:p>
+            <a:fld id="{F7021451-1387-4CA6-816F-3879F97B5CBC}" type="slidenum">
+              <a:rPr lang="en-US"/>
+              <a:t>8</a:t>
+            </a:fld>
+            <a:endParaRPr lang="en-US"/>
+          </a:p>
+        </p:txBody>
+      </p:sp>
+    </p:spTree>
+    <p:extLst>
+      <p:ext uri="{BB962C8B-B14F-4D97-AF65-F5344CB8AC3E}">
+        <p14:creationId xmlns:p14="http://schemas.microsoft.com/office/powerpoint/2010/main" val="1024086991"/>
+      </p:ext>
+    </p:extLst>
+  </p:cSld>
+  <p:clrMapOvr>
+    <a:masterClrMapping/>
+  </p:clrMapOvr>
+</p:notes>
+</file>
+
 <file path=ppt/slideLayouts/slideLayout1.xml><?xml version="1.0" encoding="utf-8"?>
 <p:sldLayout xmlns:a="http://schemas.openxmlformats.org/drawingml/2006/main" xmlns:r="http://schemas.openxmlformats.org/officeDocument/2006/relationships" xmlns:p="http://schemas.openxmlformats.org/presentationml/2006/main" preserve="1">
   <p:cSld name="DEFAULT">
@@ -3830,7 +3920,7 @@
                 <a:ea typeface="Cambria" pitchFamily="34" charset="-122"/>
                 <a:cs typeface="Cambria" pitchFamily="34" charset="-120"/>
               </a:rPr>
-              <a:t>Señales positivas de la última semana</a:t>
+              <a:t>Brooklyn: señales positivas de la última semana</a:t>
             </a:r>
             <a:endParaRPr lang="en-US" sz="2600" dirty="0"/>
           </a:p>
@@ -4546,6 +4636,926 @@
                 <a:ea typeface="Cambria" pitchFamily="34" charset="-122"/>
                 <a:cs typeface="Cambria" pitchFamily="34" charset="-120"/>
               </a:rPr>
+              <a:t>Beg &amp; Barker: una base sólida y recurrente</a:t>
+            </a:r>
+            <a:endParaRPr lang="en-US" sz="2600" dirty="0"/>
+          </a:p>
+        </p:txBody>
+      </p:sp>
+      <p:sp>
+        <p:nvSpPr>
+          <p:cNvPr id="3" name="BB stat 1"/>
+          <p:cNvSpPr/>
+          <p:nvPr/>
+        </p:nvSpPr>
+        <p:spPr>
+          <a:xfrm>
+            <a:off x="457200" y="1005840"/>
+            <a:ext cx="4206240" cy="1005840"/>
+          </a:xfrm>
+          <a:prstGeom prst="roundRect">
+            <a:avLst>
+              <a:gd name="adj" fmla="val 7273"/>
+            </a:avLst>
+          </a:prstGeom>
+          <a:solidFill>
+            <a:schemeClr val="bg2"/>
+          </a:solidFill>
+          <a:ln/>
+        </p:spPr>
+      </p:sp>
+      <p:sp>
+        <p:nvSpPr>
+          <p:cNvPr id="4" name="Text 2"/>
+          <p:cNvSpPr txBox="1"/>
+          <p:nvPr/>
+        </p:nvSpPr>
+        <p:spPr>
+          <a:xfrm>
+            <a:off x="640080" y="1097280"/>
+            <a:ext cx="1463040" cy="822960"/>
+          </a:xfrm>
+          <a:prstGeom prst="rect">
+            <a:avLst/>
+          </a:prstGeom>
+          <a:noFill/>
+          <a:ln/>
+        </p:spPr>
+        <p:txBody>
+          <a:bodyPr wrap="square" lIns="0" tIns="0" rIns="0" bIns="0" rtlCol="0" anchor="ctr">
+            <a:normAutofit/>
+          </a:bodyPr>
+          <a:lstStyle/>
+          <a:p>
+            <a:pPr indent="0" marL="0">
+              <a:buNone/>
+            </a:pPr>
+            <a:r>
+              <a:rPr lang="en-US" sz="3000" b="1" dirty="0">
+                <a:solidFill>
+                  <a:schemeClr val="tx2"/>
+                </a:solidFill>
+                <a:latin typeface="Cambria" pitchFamily="34" charset="0"/>
+                <a:ea typeface="Cambria" pitchFamily="34" charset="-122"/>
+                <a:cs typeface="Cambria" pitchFamily="34" charset="-120"/>
+              </a:rPr>
+              <a:t>$89,9K</a:t>
+            </a:r>
+            <a:endParaRPr lang="en-US" sz="3000" dirty="0"/>
+          </a:p>
+        </p:txBody>
+      </p:sp>
+      <p:sp>
+        <p:nvSpPr>
+          <p:cNvPr id="5" name="Text 3"/>
+          <p:cNvSpPr txBox="1"/>
+          <p:nvPr/>
+        </p:nvSpPr>
+        <p:spPr>
+          <a:xfrm>
+            <a:off x="2194560" y="1097280"/>
+            <a:ext cx="2331720" cy="822960"/>
+          </a:xfrm>
+          <a:prstGeom prst="rect">
+            <a:avLst/>
+          </a:prstGeom>
+          <a:noFill/>
+          <a:ln/>
+        </p:spPr>
+        <p:txBody>
+          <a:bodyPr wrap="square" lIns="0" tIns="0" rIns="0" bIns="0" rtlCol="0" anchor="ctr"/>
+          <a:lstStyle/>
+          <a:p>
+            <a:pPr indent="0" marL="0">
+              <a:buNone/>
+            </a:pPr>
+            <a:r>
+              <a:rPr lang="en-US" sz="1200" dirty="0">
+                <a:solidFill>
+                  <a:schemeClr val="tx1"/>
+                </a:solidFill>
+              </a:rPr>
+              <a:t>en ventas en lo que va del año, con 1.181 órdenes y ticket promedio de $76</a:t>
+            </a:r>
+            <a:endParaRPr lang="en-US" sz="1200" dirty="0"/>
+          </a:p>
+        </p:txBody>
+      </p:sp>
+      <p:sp>
+        <p:nvSpPr>
+          <p:cNvPr id="6" name="BB stat 2"/>
+          <p:cNvSpPr/>
+          <p:nvPr/>
+        </p:nvSpPr>
+        <p:spPr>
+          <a:xfrm>
+            <a:off x="457200" y="2148840"/>
+            <a:ext cx="4206240" cy="1005840"/>
+          </a:xfrm>
+          <a:prstGeom prst="roundRect">
+            <a:avLst>
+              <a:gd name="adj" fmla="val 7273"/>
+            </a:avLst>
+          </a:prstGeom>
+          <a:solidFill>
+            <a:schemeClr val="bg2"/>
+          </a:solidFill>
+          <a:ln/>
+        </p:spPr>
+      </p:sp>
+      <p:sp>
+        <p:nvSpPr>
+          <p:cNvPr id="7" name="Text 5"/>
+          <p:cNvSpPr txBox="1"/>
+          <p:nvPr/>
+        </p:nvSpPr>
+        <p:spPr>
+          <a:xfrm>
+            <a:off x="640080" y="2240280"/>
+            <a:ext cx="1463040" cy="822960"/>
+          </a:xfrm>
+          <a:prstGeom prst="rect">
+            <a:avLst/>
+          </a:prstGeom>
+          <a:noFill/>
+          <a:ln/>
+        </p:spPr>
+        <p:txBody>
+          <a:bodyPr wrap="square" lIns="0" tIns="0" rIns="0" bIns="0" rtlCol="0" anchor="ctr">
+            <a:normAutofit/>
+          </a:bodyPr>
+          <a:lstStyle/>
+          <a:p>
+            <a:pPr indent="0" marL="0">
+              <a:buNone/>
+            </a:pPr>
+            <a:r>
+              <a:rPr lang="en-US" sz="3000" b="1" dirty="0">
+                <a:solidFill>
+                  <a:schemeClr val="accent2"/>
+                </a:solidFill>
+                <a:latin typeface="Cambria" pitchFamily="34" charset="0"/>
+                <a:ea typeface="Cambria" pitchFamily="34" charset="-122"/>
+                <a:cs typeface="Cambria" pitchFamily="34" charset="-120"/>
+              </a:rPr>
+              <a:t>44%</a:t>
+            </a:r>
+            <a:endParaRPr lang="en-US" sz="3000" dirty="0"/>
+          </a:p>
+        </p:txBody>
+      </p:sp>
+      <p:sp>
+        <p:nvSpPr>
+          <p:cNvPr id="8" name="Text 6"/>
+          <p:cNvSpPr txBox="1"/>
+          <p:nvPr/>
+        </p:nvSpPr>
+        <p:spPr>
+          <a:xfrm>
+            <a:off x="2194560" y="2240280"/>
+            <a:ext cx="2331720" cy="822960"/>
+          </a:xfrm>
+          <a:prstGeom prst="rect">
+            <a:avLst/>
+          </a:prstGeom>
+          <a:noFill/>
+          <a:ln/>
+        </p:spPr>
+        <p:txBody>
+          <a:bodyPr wrap="square" lIns="0" tIns="0" rIns="0" bIns="0" rtlCol="0" anchor="ctr"/>
+          <a:lstStyle/>
+          <a:p>
+            <a:pPr indent="0" marL="0">
+              <a:buNone/>
+            </a:pPr>
+            <a:r>
+              <a:rPr lang="en-US" sz="1200" dirty="0">
+                <a:solidFill>
+                  <a:schemeClr val="tx1"/>
+                </a:solidFill>
+              </a:rPr>
+              <a:t>de las ventas son renovaciones de suscripción: $40K de ingreso recurrente en el año</a:t>
+            </a:r>
+            <a:endParaRPr lang="en-US" sz="1200" dirty="0"/>
+          </a:p>
+        </p:txBody>
+      </p:sp>
+      <p:sp>
+        <p:nvSpPr>
+          <p:cNvPr id="9" name="BB stat 3"/>
+          <p:cNvSpPr/>
+          <p:nvPr/>
+        </p:nvSpPr>
+        <p:spPr>
+          <a:xfrm>
+            <a:off x="457200" y="3291840"/>
+            <a:ext cx="4206240" cy="1005840"/>
+          </a:xfrm>
+          <a:prstGeom prst="roundRect">
+            <a:avLst>
+              <a:gd name="adj" fmla="val 7273"/>
+            </a:avLst>
+          </a:prstGeom>
+          <a:solidFill>
+            <a:schemeClr val="bg2"/>
+          </a:solidFill>
+          <a:ln/>
+        </p:spPr>
+      </p:sp>
+      <p:sp>
+        <p:nvSpPr>
+          <p:cNvPr id="10" name="Text 8"/>
+          <p:cNvSpPr txBox="1"/>
+          <p:nvPr/>
+        </p:nvSpPr>
+        <p:spPr>
+          <a:xfrm>
+            <a:off x="640080" y="3383280"/>
+            <a:ext cx="1463040" cy="822960"/>
+          </a:xfrm>
+          <a:prstGeom prst="rect">
+            <a:avLst/>
+          </a:prstGeom>
+          <a:noFill/>
+          <a:ln/>
+        </p:spPr>
+        <p:txBody>
+          <a:bodyPr wrap="square" lIns="0" tIns="0" rIns="0" bIns="0" rtlCol="0" anchor="ctr">
+            <a:normAutofit/>
+          </a:bodyPr>
+          <a:lstStyle/>
+          <a:p>
+            <a:pPr indent="0" marL="0">
+              <a:buNone/>
+            </a:pPr>
+            <a:r>
+              <a:rPr lang="en-US" sz="3000" b="1" dirty="0">
+                <a:solidFill>
+                  <a:schemeClr val="accent1"/>
+                </a:solidFill>
+                <a:latin typeface="Cambria" pitchFamily="34" charset="0"/>
+                <a:ea typeface="Cambria" pitchFamily="34" charset="-122"/>
+                <a:cs typeface="Cambria" pitchFamily="34" charset="-120"/>
+              </a:rPr>
+              <a:t>$2,21</a:t>
+            </a:r>
+            <a:endParaRPr lang="en-US" sz="3000" dirty="0"/>
+          </a:p>
+        </p:txBody>
+      </p:sp>
+      <p:sp>
+        <p:nvSpPr>
+          <p:cNvPr id="11" name="Text 9"/>
+          <p:cNvSpPr txBox="1"/>
+          <p:nvPr/>
+        </p:nvSpPr>
+        <p:spPr>
+          <a:xfrm>
+            <a:off x="2194560" y="3383280"/>
+            <a:ext cx="2331720" cy="822960"/>
+          </a:xfrm>
+          <a:prstGeom prst="rect">
+            <a:avLst/>
+          </a:prstGeom>
+          <a:noFill/>
+          <a:ln/>
+        </p:spPr>
+        <p:txBody>
+          <a:bodyPr wrap="square" lIns="0" tIns="0" rIns="0" bIns="0" rtlCol="0" anchor="ctr"/>
+          <a:lstStyle/>
+          <a:p>
+            <a:pPr indent="0" marL="0">
+              <a:buNone/>
+            </a:pPr>
+            <a:r>
+              <a:rPr lang="en-US" sz="1200" dirty="0">
+                <a:solidFill>
+                  <a:schemeClr val="tx1"/>
+                </a:solidFill>
+              </a:rPr>
+              <a:t>por destinatario en los flujos automáticos, 13 veces más que las campañas</a:t>
+            </a:r>
+            <a:endParaRPr lang="en-US" sz="1200" dirty="0"/>
+          </a:p>
+        </p:txBody>
+      </p:sp>
+      <p:sp>
+        <p:nvSpPr>
+          <p:cNvPr id="12" name="BB card 1"/>
+          <p:cNvSpPr/>
+          <p:nvPr/>
+        </p:nvSpPr>
+        <p:spPr>
+          <a:xfrm>
+            <a:off x="5029200" y="1005840"/>
+            <a:ext cx="1783080" cy="1554480"/>
+          </a:xfrm>
+          <a:prstGeom prst="roundRect">
+            <a:avLst>
+              <a:gd name="adj" fmla="val 4706"/>
+            </a:avLst>
+          </a:prstGeom>
+          <a:solidFill>
+            <a:schemeClr val="bg2"/>
+          </a:solidFill>
+          <a:ln/>
+        </p:spPr>
+      </p:sp>
+      <p:sp>
+        <p:nvSpPr>
+          <p:cNvPr id="13" name="BB dot 1"/>
+          <p:cNvSpPr/>
+          <p:nvPr/>
+        </p:nvSpPr>
+        <p:spPr>
+          <a:xfrm>
+            <a:off x="5166360" y="1143000"/>
+            <a:ext cx="256032" cy="256032"/>
+          </a:xfrm>
+          <a:prstGeom prst="ellipse">
+            <a:avLst/>
+          </a:prstGeom>
+          <a:solidFill>
+            <a:schemeClr val="accent2"/>
+          </a:solidFill>
+          <a:ln/>
+        </p:spPr>
+      </p:sp>
+      <p:sp>
+        <p:nvSpPr>
+          <p:cNvPr id="14" name="Text 12"/>
+          <p:cNvSpPr txBox="1"/>
+          <p:nvPr/>
+        </p:nvSpPr>
+        <p:spPr>
+          <a:xfrm>
+            <a:off x="5486400" y="1097280"/>
+            <a:ext cx="1261872" cy="365760"/>
+          </a:xfrm>
+          <a:prstGeom prst="rect">
+            <a:avLst/>
+          </a:prstGeom>
+          <a:noFill/>
+          <a:ln/>
+        </p:spPr>
+        <p:txBody>
+          <a:bodyPr wrap="square" lIns="0" tIns="0" rIns="0" bIns="0" rtlCol="0" anchor="ctr">
+            <a:normAutofit/>
+          </a:bodyPr>
+          <a:lstStyle/>
+          <a:p>
+            <a:pPr indent="0" marL="0">
+              <a:buNone/>
+            </a:pPr>
+            <a:r>
+              <a:rPr lang="en-US" sz="1200" b="1" dirty="0">
+                <a:solidFill>
+                  <a:schemeClr val="tx1"/>
+                </a:solidFill>
+                <a:latin typeface="Cambria" pitchFamily="34" charset="0"/>
+                <a:ea typeface="Cambria" pitchFamily="34" charset="-122"/>
+                <a:cs typeface="Cambria" pitchFamily="34" charset="-120"/>
+              </a:rPr>
+              <a:t>Ventas estables</a:t>
+            </a:r>
+            <a:endParaRPr lang="en-US" sz="1200" dirty="0"/>
+          </a:p>
+        </p:txBody>
+      </p:sp>
+      <p:sp>
+        <p:nvSpPr>
+          <p:cNvPr id="15" name="Text 13"/>
+          <p:cNvSpPr txBox="1"/>
+          <p:nvPr/>
+        </p:nvSpPr>
+        <p:spPr>
+          <a:xfrm>
+            <a:off x="5166360" y="1508760"/>
+            <a:ext cx="1536192" cy="987552"/>
+          </a:xfrm>
+          <a:prstGeom prst="rect">
+            <a:avLst/>
+          </a:prstGeom>
+          <a:noFill/>
+          <a:ln/>
+        </p:spPr>
+        <p:txBody>
+          <a:bodyPr wrap="square" lIns="0" tIns="0" rIns="0" bIns="0" rtlCol="0" anchor="t"/>
+          <a:lstStyle/>
+          <a:p>
+            <a:pPr indent="0" marL="0">
+              <a:buNone/>
+            </a:pPr>
+            <a:r>
+              <a:rPr lang="en-US" sz="1100" dirty="0">
+                <a:solidFill>
+                  <a:schemeClr val="tx1"/>
+                </a:solidFill>
+              </a:rPr>
+              <a:t>~$9,3K al mes en el primer trimestre y ~$9,7K de abril a septiembre</a:t>
+            </a:r>
+            <a:endParaRPr lang="en-US" sz="1100" dirty="0"/>
+          </a:p>
+        </p:txBody>
+      </p:sp>
+      <p:sp>
+        <p:nvSpPr>
+          <p:cNvPr id="16" name="BB card 2"/>
+          <p:cNvSpPr/>
+          <p:nvPr/>
+        </p:nvSpPr>
+        <p:spPr>
+          <a:xfrm>
+            <a:off x="6903720" y="1005840"/>
+            <a:ext cx="1783080" cy="1554480"/>
+          </a:xfrm>
+          <a:prstGeom prst="roundRect">
+            <a:avLst>
+              <a:gd name="adj" fmla="val 4706"/>
+            </a:avLst>
+          </a:prstGeom>
+          <a:solidFill>
+            <a:schemeClr val="bg2"/>
+          </a:solidFill>
+          <a:ln/>
+        </p:spPr>
+      </p:sp>
+      <p:sp>
+        <p:nvSpPr>
+          <p:cNvPr id="17" name="BB dot 2"/>
+          <p:cNvSpPr/>
+          <p:nvPr/>
+        </p:nvSpPr>
+        <p:spPr>
+          <a:xfrm>
+            <a:off x="7040880" y="1143000"/>
+            <a:ext cx="256032" cy="256032"/>
+          </a:xfrm>
+          <a:prstGeom prst="ellipse">
+            <a:avLst/>
+          </a:prstGeom>
+          <a:solidFill>
+            <a:schemeClr val="accent2"/>
+          </a:solidFill>
+          <a:ln/>
+        </p:spPr>
+      </p:sp>
+      <p:sp>
+        <p:nvSpPr>
+          <p:cNvPr id="18" name="Text 16"/>
+          <p:cNvSpPr txBox="1"/>
+          <p:nvPr/>
+        </p:nvSpPr>
+        <p:spPr>
+          <a:xfrm>
+            <a:off x="7360920" y="1097280"/>
+            <a:ext cx="1261872" cy="365760"/>
+          </a:xfrm>
+          <a:prstGeom prst="rect">
+            <a:avLst/>
+          </a:prstGeom>
+          <a:noFill/>
+          <a:ln/>
+        </p:spPr>
+        <p:txBody>
+          <a:bodyPr wrap="square" lIns="0" tIns="0" rIns="0" bIns="0" rtlCol="0" anchor="ctr">
+            <a:normAutofit/>
+          </a:bodyPr>
+          <a:lstStyle/>
+          <a:p>
+            <a:pPr indent="0" marL="0">
+              <a:buNone/>
+            </a:pPr>
+            <a:r>
+              <a:rPr lang="en-US" sz="1200" b="1" dirty="0">
+                <a:solidFill>
+                  <a:schemeClr val="tx1"/>
+                </a:solidFill>
+                <a:latin typeface="Cambria" pitchFamily="34" charset="0"/>
+                <a:ea typeface="Cambria" pitchFamily="34" charset="-122"/>
+                <a:cs typeface="Cambria" pitchFamily="34" charset="-120"/>
+              </a:rPr>
+              <a:t>Búsqueda de marca</a:t>
+            </a:r>
+            <a:endParaRPr lang="en-US" sz="1200" dirty="0"/>
+          </a:p>
+        </p:txBody>
+      </p:sp>
+      <p:sp>
+        <p:nvSpPr>
+          <p:cNvPr id="19" name="Text 17"/>
+          <p:cNvSpPr txBox="1"/>
+          <p:nvPr/>
+        </p:nvSpPr>
+        <p:spPr>
+          <a:xfrm>
+            <a:off x="7040880" y="1508760"/>
+            <a:ext cx="1536192" cy="987552"/>
+          </a:xfrm>
+          <a:prstGeom prst="rect">
+            <a:avLst/>
+          </a:prstGeom>
+          <a:noFill/>
+          <a:ln/>
+        </p:spPr>
+        <p:txBody>
+          <a:bodyPr wrap="square" lIns="0" tIns="0" rIns="0" bIns="0" rtlCol="0" anchor="t"/>
+          <a:lstStyle/>
+          <a:p>
+            <a:pPr indent="0" marL="0">
+              <a:buNone/>
+            </a:pPr>
+            <a:r>
+              <a:rPr lang="en-US" sz="1100" dirty="0">
+                <a:solidFill>
+                  <a:schemeClr val="tx1"/>
+                </a:solidFill>
+              </a:rPr>
+              <a:t>La línea más rentable de Google, con un retorno cercano a 3x</a:t>
+            </a:r>
+            <a:endParaRPr lang="en-US" sz="1100" dirty="0"/>
+          </a:p>
+        </p:txBody>
+      </p:sp>
+      <p:sp>
+        <p:nvSpPr>
+          <p:cNvPr id="20" name="BB card 3"/>
+          <p:cNvSpPr/>
+          <p:nvPr/>
+        </p:nvSpPr>
+        <p:spPr>
+          <a:xfrm>
+            <a:off x="5029200" y="2697480"/>
+            <a:ext cx="1783080" cy="1554480"/>
+          </a:xfrm>
+          <a:prstGeom prst="roundRect">
+            <a:avLst>
+              <a:gd name="adj" fmla="val 4706"/>
+            </a:avLst>
+          </a:prstGeom>
+          <a:solidFill>
+            <a:schemeClr val="bg2"/>
+          </a:solidFill>
+          <a:ln/>
+        </p:spPr>
+      </p:sp>
+      <p:sp>
+        <p:nvSpPr>
+          <p:cNvPr id="21" name="BB dot 3"/>
+          <p:cNvSpPr/>
+          <p:nvPr/>
+        </p:nvSpPr>
+        <p:spPr>
+          <a:xfrm>
+            <a:off x="5166360" y="2834640"/>
+            <a:ext cx="256032" cy="256032"/>
+          </a:xfrm>
+          <a:prstGeom prst="ellipse">
+            <a:avLst/>
+          </a:prstGeom>
+          <a:solidFill>
+            <a:schemeClr val="accent2"/>
+          </a:solidFill>
+          <a:ln/>
+        </p:spPr>
+      </p:sp>
+      <p:sp>
+        <p:nvSpPr>
+          <p:cNvPr id="22" name="Text 20"/>
+          <p:cNvSpPr txBox="1"/>
+          <p:nvPr/>
+        </p:nvSpPr>
+        <p:spPr>
+          <a:xfrm>
+            <a:off x="5486400" y="2788920"/>
+            <a:ext cx="1261872" cy="365760"/>
+          </a:xfrm>
+          <a:prstGeom prst="rect">
+            <a:avLst/>
+          </a:prstGeom>
+          <a:noFill/>
+          <a:ln/>
+        </p:spPr>
+        <p:txBody>
+          <a:bodyPr wrap="square" lIns="0" tIns="0" rIns="0" bIns="0" rtlCol="0" anchor="ctr">
+            <a:normAutofit/>
+          </a:bodyPr>
+          <a:lstStyle/>
+          <a:p>
+            <a:pPr indent="0" marL="0">
+              <a:buNone/>
+            </a:pPr>
+            <a:r>
+              <a:rPr lang="en-US" sz="1200" b="1" dirty="0">
+                <a:solidFill>
+                  <a:schemeClr val="tx1"/>
+                </a:solidFill>
+                <a:latin typeface="Cambria" pitchFamily="34" charset="0"/>
+                <a:ea typeface="Cambria" pitchFamily="34" charset="-122"/>
+                <a:cs typeface="Cambria" pitchFamily="34" charset="-120"/>
+              </a:rPr>
+              <a:t>Retargeting dinámico</a:t>
+            </a:r>
+            <a:endParaRPr lang="en-US" sz="1200" dirty="0"/>
+          </a:p>
+        </p:txBody>
+      </p:sp>
+      <p:sp>
+        <p:nvSpPr>
+          <p:cNvPr id="23" name="Text 21"/>
+          <p:cNvSpPr txBox="1"/>
+          <p:nvPr/>
+        </p:nvSpPr>
+        <p:spPr>
+          <a:xfrm>
+            <a:off x="5166360" y="3200400"/>
+            <a:ext cx="1536192" cy="987552"/>
+          </a:xfrm>
+          <a:prstGeom prst="rect">
+            <a:avLst/>
+          </a:prstGeom>
+          <a:noFill/>
+          <a:ln/>
+        </p:spPr>
+        <p:txBody>
+          <a:bodyPr wrap="square" lIns="0" tIns="0" rIns="0" bIns="0" rtlCol="0" anchor="t"/>
+          <a:lstStyle/>
+          <a:p>
+            <a:pPr indent="0" marL="0">
+              <a:buNone/>
+            </a:pPr>
+            <a:r>
+              <a:rPr lang="en-US" sz="1100" dirty="0">
+                <a:solidFill>
+                  <a:schemeClr val="tx1"/>
+                </a:solidFill>
+              </a:rPr>
+              <a:t>Retorno de 3,1x en Meta antes de la reestructura del 10 oct</a:t>
+            </a:r>
+            <a:endParaRPr lang="en-US" sz="1100" dirty="0"/>
+          </a:p>
+        </p:txBody>
+      </p:sp>
+      <p:sp>
+        <p:nvSpPr>
+          <p:cNvPr id="24" name="BB card 4"/>
+          <p:cNvSpPr/>
+          <p:nvPr/>
+        </p:nvSpPr>
+        <p:spPr>
+          <a:xfrm>
+            <a:off x="6903720" y="2697480"/>
+            <a:ext cx="1783080" cy="1554480"/>
+          </a:xfrm>
+          <a:prstGeom prst="roundRect">
+            <a:avLst>
+              <a:gd name="adj" fmla="val 4706"/>
+            </a:avLst>
+          </a:prstGeom>
+          <a:solidFill>
+            <a:schemeClr val="bg2"/>
+          </a:solidFill>
+          <a:ln/>
+        </p:spPr>
+      </p:sp>
+      <p:sp>
+        <p:nvSpPr>
+          <p:cNvPr id="25" name="BB dot 4"/>
+          <p:cNvSpPr/>
+          <p:nvPr/>
+        </p:nvSpPr>
+        <p:spPr>
+          <a:xfrm>
+            <a:off x="7040880" y="2834640"/>
+            <a:ext cx="256032" cy="256032"/>
+          </a:xfrm>
+          <a:prstGeom prst="ellipse">
+            <a:avLst/>
+          </a:prstGeom>
+          <a:solidFill>
+            <a:schemeClr val="accent2"/>
+          </a:solidFill>
+          <a:ln/>
+        </p:spPr>
+      </p:sp>
+      <p:sp>
+        <p:nvSpPr>
+          <p:cNvPr id="26" name="Text 24"/>
+          <p:cNvSpPr txBox="1"/>
+          <p:nvPr/>
+        </p:nvSpPr>
+        <p:spPr>
+          <a:xfrm>
+            <a:off x="7360920" y="2788920"/>
+            <a:ext cx="1261872" cy="365760"/>
+          </a:xfrm>
+          <a:prstGeom prst="rect">
+            <a:avLst/>
+          </a:prstGeom>
+          <a:noFill/>
+          <a:ln/>
+        </p:spPr>
+        <p:txBody>
+          <a:bodyPr wrap="square" lIns="0" tIns="0" rIns="0" bIns="0" rtlCol="0" anchor="ctr">
+            <a:normAutofit/>
+          </a:bodyPr>
+          <a:lstStyle/>
+          <a:p>
+            <a:pPr indent="0" marL="0">
+              <a:buNone/>
+            </a:pPr>
+            <a:r>
+              <a:rPr lang="en-US" sz="1200" b="1" dirty="0">
+                <a:solidFill>
+                  <a:schemeClr val="tx1"/>
+                </a:solidFill>
+                <a:latin typeface="Cambria" pitchFamily="34" charset="0"/>
+                <a:ea typeface="Cambria" pitchFamily="34" charset="-122"/>
+                <a:cs typeface="Cambria" pitchFamily="34" charset="-120"/>
+              </a:rPr>
+              <a:t>Bienvenida renovada</a:t>
+            </a:r>
+            <a:endParaRPr lang="en-US" sz="1200" dirty="0"/>
+          </a:p>
+        </p:txBody>
+      </p:sp>
+      <p:sp>
+        <p:nvSpPr>
+          <p:cNvPr id="27" name="Text 25"/>
+          <p:cNvSpPr txBox="1"/>
+          <p:nvPr/>
+        </p:nvSpPr>
+        <p:spPr>
+          <a:xfrm>
+            <a:off x="7040880" y="3200400"/>
+            <a:ext cx="1536192" cy="987552"/>
+          </a:xfrm>
+          <a:prstGeom prst="rect">
+            <a:avLst/>
+          </a:prstGeom>
+          <a:noFill/>
+          <a:ln/>
+        </p:spPr>
+        <p:txBody>
+          <a:bodyPr wrap="square" lIns="0" tIns="0" rIns="0" bIns="0" rtlCol="0" anchor="t"/>
+          <a:lstStyle/>
+          <a:p>
+            <a:pPr indent="0" marL="0">
+              <a:buNone/>
+            </a:pPr>
+            <a:r>
+              <a:rPr lang="en-US" sz="1100" dirty="0">
+                <a:solidFill>
+                  <a:schemeClr val="tx1"/>
+                </a:solidFill>
+              </a:rPr>
+              <a:t>Welcome BARK15 activa desde el 6 oct; SMS Welcome en camino</a:t>
+            </a:r>
+            <a:endParaRPr lang="en-US" sz="1100" dirty="0"/>
+          </a:p>
+        </p:txBody>
+      </p:sp>
+      <p:sp>
+        <p:nvSpPr>
+          <p:cNvPr id="28" name="Text 26"/>
+          <p:cNvSpPr txBox="1"/>
+          <p:nvPr/>
+        </p:nvSpPr>
+        <p:spPr>
+          <a:xfrm>
+            <a:off x="457200" y="4434840"/>
+            <a:ext cx="8229600" cy="274320"/>
+          </a:xfrm>
+          <a:prstGeom prst="rect">
+            <a:avLst/>
+          </a:prstGeom>
+          <a:noFill/>
+          <a:ln/>
+        </p:spPr>
+        <p:txBody>
+          <a:bodyPr wrap="square" lIns="0" tIns="0" rIns="0" bIns="0" rtlCol="0" anchor="ctr"/>
+          <a:lstStyle/>
+          <a:p>
+            <a:pPr indent="0" marL="0">
+              <a:buNone/>
+            </a:pPr>
+            <a:r>
+              <a:rPr lang="en-US" sz="900" i="1" dirty="0">
+                <a:solidFill>
+                  <a:schemeClr val="accent4"/>
+                </a:solidFill>
+              </a:rPr>
+              <a:t>Fuente: dashboard de la tienda (1 ene – 13 oct 2026), Klaviyo, Google Ads (retorno de marca estimado) y Meta Ads Manager.</a:t>
+            </a:r>
+            <a:endParaRPr lang="en-US" sz="900" dirty="0"/>
+          </a:p>
+        </p:txBody>
+      </p:sp>
+      <p:sp>
+        <p:nvSpPr>
+          <p:cNvPr id="25" name="Slide Number Placeholder 0"/>
+          <p:cNvSpPr>
+            <a:spLocks noGrp="1"/>
+          </p:cNvSpPr>
+          <p:nvPr>
+            <p:ph type="sldNum" sz="quarter" idx="4294967295"/>
+          </p:nvPr>
+        </p:nvSpPr>
+        <p:spPr>
+          <a:xfrm>
+            <a:off x="8321040" y="4800600"/>
+            <a:ext cx="365760" cy="228600"/>
+          </a:xfrm>
+          <a:prstGeom prst="rect">
+            <a:avLst/>
+          </a:prstGeom>
+          <a:extLst>
+            <a:ext uri="{C572A759-6A51-4108-AA02-DFA0A04FC94B}">
+              <ma14:wrappingTextBoxFlag xmlns:ma14="http://schemas.microsoft.com/office/mac/drawingml/2011/main" val="0"/>
+            </a:ext>
+          </a:extLst>
+        </p:spPr>
+        <p:txBody>
+          <a:bodyPr/>
+          <a:lstStyle>
+            <a:lvl1pPr>
+              <a:defRPr sz="900">
+                <a:solidFill>
+                  <a:schemeClr val="accent4"/>
+                </a:solidFill>
+              </a:defRPr>
+            </a:lvl1pPr>
+          </a:lstStyle>
+          <a:p>
+            <a:pPr algn="r"/>
+            <a:fld id="{F7021451-1387-4CA6-816F-3879F97B5CBC}" type="slidenum">
+              <a:rPr b="0" lang="en-US"/>
+              <a:t>4</a:t>
+            </a:fld>
+            <a:endParaRPr lang="en-US"/>
+          </a:p>
+        </p:txBody>
+      </p:sp>
+    </p:spTree>
+  </p:cSld>
+  <p:clrMapOvr>
+    <a:masterClrMapping/>
+  </p:clrMapOvr>
+</p:sld>
+</file>
+
+<file path=ppt/slides/slide5.xml><?xml version="1.0" encoding="utf-8"?>
+<p:sld xmlns:a="http://schemas.openxmlformats.org/drawingml/2006/main" xmlns:r="http://schemas.openxmlformats.org/officeDocument/2006/relationships" xmlns:p="http://schemas.openxmlformats.org/presentationml/2006/main">
+  <p:cSld name="Slide 5">
+    <p:spTree>
+      <p:nvGrpSpPr>
+        <p:cNvPr id="1" name=""/>
+        <p:cNvGrpSpPr/>
+        <p:nvPr/>
+      </p:nvGrpSpPr>
+      <p:grpSpPr>
+        <a:xfrm>
+          <a:off x="0" y="0"/>
+          <a:ext cx="0" cy="0"/>
+          <a:chOff x="0" y="0"/>
+          <a:chExt cx="0" cy="0"/>
+        </a:xfrm>
+      </p:grpSpPr>
+      <p:sp>
+        <p:nvSpPr>
+          <p:cNvPr id="2" name="Text 0"/>
+          <p:cNvSpPr/>
+          <p:nvPr>
+            <p:ph idx="100" type="title" hasCustomPrompt="1"/>
+          </p:nvPr>
+        </p:nvSpPr>
+        <p:spPr>
+          <a:xfrm>
+            <a:off x="457200" y="274320"/>
+            <a:ext cx="8229600" cy="594360"/>
+          </a:xfrm>
+          <a:prstGeom prst="rect">
+            <a:avLst/>
+          </a:prstGeom>
+          <a:noFill/>
+          <a:ln/>
+        </p:spPr>
+        <p:txBody>
+          <a:bodyPr wrap="square" lIns="0" tIns="0" rIns="0" bIns="0" rtlCol="0" anchor="ctr"/>
+          <a:lstStyle/>
+          <a:p>
+            <a:pPr algn="l" indent="0" marL="0">
+              <a:buNone/>
+            </a:pPr>
+            <a:r>
+              <a:rPr lang="en-US" sz="2600" b="1" dirty="0">
+                <a:solidFill>
+                  <a:schemeClr val="tx1"/>
+                </a:solidFill>
+                <a:latin typeface="Cambria" pitchFamily="34" charset="0"/>
+                <a:ea typeface="Cambria" pitchFamily="34" charset="-122"/>
+                <a:cs typeface="Cambria" pitchFamily="34" charset="-120"/>
+              </a:rPr>
               <a:t>Lo comprometido el 9 de octubre: estado por marca</a:t>
             </a:r>
             <a:endParaRPr lang="en-US" sz="2600" dirty="0"/>
@@ -4554,7 +5564,7 @@
       </p:sp>
       <p:graphicFrame>
         <p:nvGraphicFramePr>
-          <p:cNvPr id="5" name="Commitment tracker"/>
+          <p:cNvPr id="6" name="Commitment tracker"/>
           <p:cNvGraphicFramePr>
             <a:graphicFrameLocks noGrp="1"/>
           </p:cNvGraphicFramePr>
@@ -7363,381 +8373,6 @@
             <a:pPr algn="r"/>
             <a:fld id="{F7021451-1387-4CA6-816F-3879F97B5CBC}" type="slidenum">
               <a:rPr b="0" lang="en-US"/>
-              <a:t>4</a:t>
-            </a:fld>
-            <a:endParaRPr lang="en-US"/>
-          </a:p>
-        </p:txBody>
-      </p:sp>
-    </p:spTree>
-  </p:cSld>
-  <p:clrMapOvr>
-    <a:masterClrMapping/>
-  </p:clrMapOvr>
-</p:sld>
-</file>
-
-<file path=ppt/slides/slide5.xml><?xml version="1.0" encoding="utf-8"?>
-<p:sld xmlns:a="http://schemas.openxmlformats.org/drawingml/2006/main" xmlns:r="http://schemas.openxmlformats.org/officeDocument/2006/relationships" xmlns:p="http://schemas.openxmlformats.org/presentationml/2006/main">
-  <p:cSld name="Slide 5">
-    <p:spTree>
-      <p:nvGrpSpPr>
-        <p:cNvPr id="1" name=""/>
-        <p:cNvGrpSpPr/>
-        <p:nvPr/>
-      </p:nvGrpSpPr>
-      <p:grpSpPr>
-        <a:xfrm>
-          <a:off x="0" y="0"/>
-          <a:ext cx="0" cy="0"/>
-          <a:chOff x="0" y="0"/>
-          <a:chExt cx="0" cy="0"/>
-        </a:xfrm>
-      </p:grpSpPr>
-      <p:sp>
-        <p:nvSpPr>
-          <p:cNvPr id="2" name="Text 0"/>
-          <p:cNvSpPr/>
-          <p:nvPr>
-            <p:ph idx="100" type="title" hasCustomPrompt="1"/>
-          </p:nvPr>
-        </p:nvSpPr>
-        <p:spPr>
-          <a:xfrm>
-            <a:off x="457200" y="274320"/>
-            <a:ext cx="8229600" cy="594360"/>
-          </a:xfrm>
-          <a:prstGeom prst="rect">
-            <a:avLst/>
-          </a:prstGeom>
-          <a:noFill/>
-          <a:ln/>
-        </p:spPr>
-        <p:txBody>
-          <a:bodyPr wrap="square" lIns="0" tIns="0" rIns="0" bIns="0" rtlCol="0" anchor="ctr"/>
-          <a:lstStyle/>
-          <a:p>
-            <a:pPr algn="l" indent="0" marL="0">
-              <a:buNone/>
-            </a:pPr>
-            <a:r>
-              <a:rPr lang="en-US" sz="2600" b="1" dirty="0">
-                <a:solidFill>
-                  <a:schemeClr val="tx1"/>
-                </a:solidFill>
-                <a:latin typeface="Cambria" pitchFamily="34" charset="0"/>
-                <a:ea typeface="Cambria" pitchFamily="34" charset="-122"/>
-                <a:cs typeface="Cambria" pitchFamily="34" charset="-120"/>
-              </a:rPr>
-              <a:t>Meta: más volumen, eficiencia todavía en construcción</a:t>
-            </a:r>
-            <a:endParaRPr lang="en-US" sz="2600" dirty="0"/>
-          </a:p>
-        </p:txBody>
-      </p:sp>
-      <p:graphicFrame>
-        <p:nvGraphicFramePr>
-          <p:cNvPr id="3" name="Purchases chart" descr=""/>
-          <p:cNvGraphicFramePr/>
-          <p:nvPr/>
-        </p:nvGraphicFramePr>
-        <p:xfrm>
-          <a:off x="457200" y="960120"/>
-          <a:ext cx="4206240" cy="3429000"/>
-        </p:xfrm>
-        <a:graphic xmlns:a="http://schemas.openxmlformats.org/drawingml/2006/main">
-          <a:graphicData uri="http://schemas.openxmlformats.org/drawingml/2006/chart">
-            <c:chart xmlns:c="http://schemas.openxmlformats.org/drawingml/2006/chart" r:id="rId1"/>
-          </a:graphicData>
-        </a:graphic>
-      </p:graphicFrame>
-      <p:sp>
-        <p:nvSpPr>
-          <p:cNvPr id="4" name="Text 1"/>
-          <p:cNvSpPr txBox="1"/>
-          <p:nvPr/>
-        </p:nvSpPr>
-        <p:spPr>
-          <a:xfrm>
-            <a:off x="4937760" y="1005840"/>
-            <a:ext cx="3749040" cy="320040"/>
-          </a:xfrm>
-          <a:prstGeom prst="rect">
-            <a:avLst/>
-          </a:prstGeom>
-          <a:noFill/>
-          <a:ln/>
-        </p:spPr>
-        <p:txBody>
-          <a:bodyPr wrap="square" lIns="0" tIns="0" rIns="0" bIns="0" rtlCol="0" anchor="ctr"/>
-          <a:lstStyle/>
-          <a:p>
-            <a:pPr indent="0" marL="0">
-              <a:buNone/>
-            </a:pPr>
-            <a:r>
-              <a:rPr lang="en-US" sz="1500" b="1" dirty="0">
-                <a:solidFill>
-                  <a:schemeClr val="accent2"/>
-                </a:solidFill>
-                <a:latin typeface="Cambria" pitchFamily="34" charset="0"/>
-                <a:ea typeface="Cambria" pitchFamily="34" charset="-122"/>
-                <a:cs typeface="Cambria" pitchFamily="34" charset="-120"/>
-              </a:rPr>
-              <a:t>Lo que funciona</a:t>
-            </a:r>
-            <a:endParaRPr lang="en-US" sz="1500" dirty="0"/>
-          </a:p>
-        </p:txBody>
-      </p:sp>
-      <p:sp>
-        <p:nvSpPr>
-          <p:cNvPr id="5" name="Text 2"/>
-          <p:cNvSpPr txBox="1"/>
-          <p:nvPr/>
-        </p:nvSpPr>
-        <p:spPr>
-          <a:xfrm>
-            <a:off x="4937760" y="1371600"/>
-            <a:ext cx="3749040" cy="1152144"/>
-          </a:xfrm>
-          <a:prstGeom prst="rect">
-            <a:avLst/>
-          </a:prstGeom>
-          <a:noFill/>
-          <a:ln/>
-        </p:spPr>
-        <p:txBody>
-          <a:bodyPr wrap="square" lIns="0" tIns="0" rIns="0" bIns="0" rtlCol="0" anchor="t"/>
-          <a:lstStyle/>
-          <a:p>
-            <a:pPr marL="342900" indent="-342900">
-              <a:spcAft>
-                <a:spcPts val="400"/>
-              </a:spcAft>
-              <a:buSzPct val="100000"/>
-              <a:buChar char="•"/>
-            </a:pPr>
-            <a:r>
-              <a:rPr lang="en-US" sz="1200" dirty="0">
-                <a:solidFill>
-                  <a:schemeClr val="tx1"/>
-                </a:solidFill>
-              </a:rPr>
-              <a:t>Ayoba, clientes nuevos: $26 por compra, retorno 1,6x</a:t>
-            </a:r>
-            <a:endParaRPr lang="en-US" sz="1200" dirty="0"/>
-          </a:p>
-          <a:p>
-            <a:pPr marL="342900" indent="-342900">
-              <a:spcAft>
-                <a:spcPts val="400"/>
-              </a:spcAft>
-              <a:buSzPct val="100000"/>
-              <a:buChar char="•"/>
-            </a:pPr>
-            <a:r>
-              <a:rPr lang="en-US" sz="1200" dirty="0">
-                <a:solidFill>
-                  <a:schemeClr val="tx1"/>
-                </a:solidFill>
-              </a:rPr>
-              <a:t>Brooklyn, retargeting dinámico: $26 por compra, retorno 2,9x</a:t>
-            </a:r>
-            <a:endParaRPr lang="en-US" sz="1200" dirty="0"/>
-          </a:p>
-          <a:p>
-            <a:pPr marL="342900" indent="-342900">
-              <a:spcAft>
-                <a:spcPts val="400"/>
-              </a:spcAft>
-              <a:buSzPct val="100000"/>
-              <a:buChar char="•"/>
-            </a:pPr>
-            <a:r>
-              <a:rPr lang="en-US" sz="1200" dirty="0">
-                <a:solidFill>
-                  <a:schemeClr val="tx1"/>
-                </a:solidFill>
-              </a:rPr>
-              <a:t>Beg &amp; Barker, retargeting dinámico: retorno 3,1x</a:t>
-            </a:r>
-            <a:endParaRPr lang="en-US" sz="1200" dirty="0"/>
-          </a:p>
-        </p:txBody>
-      </p:sp>
-      <p:sp>
-        <p:nvSpPr>
-          <p:cNvPr id="6" name="Text 3"/>
-          <p:cNvSpPr txBox="1"/>
-          <p:nvPr/>
-        </p:nvSpPr>
-        <p:spPr>
-          <a:xfrm>
-            <a:off x="4937760" y="2697480"/>
-            <a:ext cx="3749040" cy="320040"/>
-          </a:xfrm>
-          <a:prstGeom prst="rect">
-            <a:avLst/>
-          </a:prstGeom>
-          <a:noFill/>
-          <a:ln/>
-        </p:spPr>
-        <p:txBody>
-          <a:bodyPr wrap="square" lIns="0" tIns="0" rIns="0" bIns="0" rtlCol="0" anchor="ctr"/>
-          <a:lstStyle/>
-          <a:p>
-            <a:pPr indent="0" marL="0">
-              <a:buNone/>
-            </a:pPr>
-            <a:r>
-              <a:rPr lang="en-US" sz="1500" b="1" dirty="0">
-                <a:solidFill>
-                  <a:schemeClr val="accent1"/>
-                </a:solidFill>
-                <a:latin typeface="Cambria" pitchFamily="34" charset="0"/>
-                <a:ea typeface="Cambria" pitchFamily="34" charset="-122"/>
-                <a:cs typeface="Cambria" pitchFamily="34" charset="-120"/>
-              </a:rPr>
-              <a:t>Lo que estamos corrigiendo</a:t>
-            </a:r>
-            <a:endParaRPr lang="en-US" sz="1500" dirty="0"/>
-          </a:p>
-        </p:txBody>
-      </p:sp>
-      <p:sp>
-        <p:nvSpPr>
-          <p:cNvPr id="7" name="Text 4"/>
-          <p:cNvSpPr txBox="1"/>
-          <p:nvPr/>
-        </p:nvSpPr>
-        <p:spPr>
-          <a:xfrm>
-            <a:off x="4937760" y="3063240"/>
-            <a:ext cx="3749040" cy="768096"/>
-          </a:xfrm>
-          <a:prstGeom prst="rect">
-            <a:avLst/>
-          </a:prstGeom>
-          <a:noFill/>
-          <a:ln/>
-        </p:spPr>
-        <p:txBody>
-          <a:bodyPr wrap="square" lIns="0" tIns="0" rIns="0" bIns="0" rtlCol="0" anchor="t"/>
-          <a:lstStyle/>
-          <a:p>
-            <a:pPr marL="342900" indent="-342900">
-              <a:spcAft>
-                <a:spcPts val="400"/>
-              </a:spcAft>
-              <a:buSzPct val="100000"/>
-              <a:buChar char="•"/>
-            </a:pPr>
-            <a:r>
-              <a:rPr lang="en-US" sz="1200" dirty="0">
-                <a:solidFill>
-                  <a:schemeClr val="tx1"/>
-                </a:solidFill>
-              </a:rPr>
-              <a:t>Brooklyn, clientes nuevos: $170 por compra → presupuesto recortado el 13 oct</a:t>
-            </a:r>
-            <a:endParaRPr lang="en-US" sz="1200" dirty="0"/>
-          </a:p>
-          <a:p>
-            <a:pPr marL="342900" indent="-342900">
-              <a:spcAft>
-                <a:spcPts val="400"/>
-              </a:spcAft>
-              <a:buSzPct val="100000"/>
-              <a:buChar char="•"/>
-            </a:pPr>
-            <a:r>
-              <a:rPr lang="en-US" sz="1200" dirty="0">
-                <a:solidFill>
-                  <a:schemeClr val="tx1"/>
-                </a:solidFill>
-              </a:rPr>
-              <a:t>Retargeting nuevo (desde el 10 oct) aún en aprendizaje; le subimos presupuesto en Ayoba y Beg &amp; Barker</a:t>
-            </a:r>
-            <a:endParaRPr lang="en-US" sz="1200" dirty="0"/>
-          </a:p>
-        </p:txBody>
-      </p:sp>
-      <p:sp>
-        <p:nvSpPr>
-          <p:cNvPr id="8" name="Text 5"/>
-          <p:cNvSpPr txBox="1"/>
-          <p:nvPr/>
-        </p:nvSpPr>
-        <p:spPr>
-          <a:xfrm>
-            <a:off x="457200" y="4434840"/>
-            <a:ext cx="8229600" cy="274320"/>
-          </a:xfrm>
-          <a:prstGeom prst="rect">
-            <a:avLst/>
-          </a:prstGeom>
-          <a:noFill/>
-          <a:ln/>
-        </p:spPr>
-        <p:txBody>
-          <a:bodyPr wrap="square" lIns="0" tIns="0" rIns="0" bIns="0" rtlCol="0" anchor="ctr"/>
-          <a:lstStyle/>
-          <a:p>
-            <a:pPr indent="0" marL="0">
-              <a:buNone/>
-            </a:pPr>
-            <a:r>
-              <a:rPr lang="en-US" sz="900" i="1" dirty="0">
-                <a:solidFill>
-                  <a:schemeClr val="accent4"/>
-                </a:solidFill>
-              </a:rPr>
-              <a:t>Fuente: Meta Ads Manager, compras y retorno atribuidos por la plataforma. No incluye Google Ads ni el total de ventas de la tienda (ver dashboards).</a:t>
-            </a:r>
-            <a:endParaRPr lang="en-US" sz="900" dirty="0"/>
-          </a:p>
-        </p:txBody>
-      </p:sp>
-      <p:sp>
-        <p:nvSpPr>
-          <p:cNvPr id="25" name="Slide Number Placeholder 0"/>
-          <p:cNvSpPr>
-            <a:spLocks noGrp="1"/>
-          </p:cNvSpPr>
-          <p:nvPr>
-            <p:ph type="sldNum" sz="quarter" idx="4294967295"/>
-          </p:nvPr>
-        </p:nvSpPr>
-        <p:spPr>
-          <a:xfrm>
-            <a:off x="8321040" y="4800600"/>
-            <a:ext cx="365760" cy="228600"/>
-          </a:xfrm>
-          <a:prstGeom prst="rect">
-            <a:avLst/>
-          </a:prstGeom>
-          <a:extLst>
-            <a:ext uri="{C572A759-6A51-4108-AA02-DFA0A04FC94B}">
-              <ma14:wrappingTextBoxFlag xmlns:ma14="http://schemas.microsoft.com/office/mac/drawingml/2011/main" val="0"/>
-            </a:ext>
-          </a:extLst>
-        </p:spPr>
-        <p:txBody>
-          <a:bodyPr/>
-          <a:lstStyle>
-            <a:lvl1pPr>
-              <a:defRPr sz="900">
-                <a:solidFill>
-                  <a:schemeClr val="accent4"/>
-                </a:solidFill>
-              </a:defRPr>
-            </a:lvl1pPr>
-          </a:lstStyle>
-          <a:p>
-            <a:pPr algn="r"/>
-            <a:fld id="{F7021451-1387-4CA6-816F-3879F97B5CBC}" type="slidenum">
-              <a:rPr b="0" lang="en-US"/>
               <a:t>5</a:t>
             </a:fld>
             <a:endParaRPr lang="en-US"/>
@@ -7804,207 +8439,21 @@
                 <a:ea typeface="Cambria" pitchFamily="34" charset="-122"/>
                 <a:cs typeface="Cambria" pitchFamily="34" charset="-120"/>
               </a:rPr>
-              <a:t>Brooklyn: email y SMS ya generan ventas recurrentes</a:t>
+              <a:t>Meta: más volumen, eficiencia todavía en construcción</a:t>
             </a:r>
             <a:endParaRPr lang="en-US" sz="2600" dirty="0"/>
           </a:p>
         </p:txBody>
       </p:sp>
-      <p:sp>
-        <p:nvSpPr>
-          <p:cNvPr id="3" name="Retention stat panel"/>
-          <p:cNvSpPr/>
-          <p:nvPr/>
-        </p:nvSpPr>
-        <p:spPr>
-          <a:xfrm>
-            <a:off x="457200" y="1005840"/>
-            <a:ext cx="3108960" cy="3291840"/>
-          </a:xfrm>
-          <a:prstGeom prst="roundRect">
-            <a:avLst>
-              <a:gd name="adj" fmla="val 2353"/>
-            </a:avLst>
-          </a:prstGeom>
-          <a:solidFill>
-            <a:schemeClr val="tx1"/>
-          </a:solidFill>
-          <a:ln/>
-        </p:spPr>
-      </p:sp>
-      <p:sp>
-        <p:nvSpPr>
-          <p:cNvPr id="4" name="Text 2"/>
-          <p:cNvSpPr txBox="1"/>
-          <p:nvPr/>
-        </p:nvSpPr>
-        <p:spPr>
-          <a:xfrm>
-            <a:off x="685800" y="1188720"/>
-            <a:ext cx="2651760" cy="685800"/>
-          </a:xfrm>
-          <a:prstGeom prst="rect">
-            <a:avLst/>
-          </a:prstGeom>
-          <a:noFill/>
-          <a:ln/>
-        </p:spPr>
-        <p:txBody>
-          <a:bodyPr wrap="square" lIns="0" tIns="0" rIns="0" bIns="0" rtlCol="0" anchor="ctr"/>
-          <a:lstStyle/>
-          <a:p>
-            <a:pPr indent="0" marL="0">
-              <a:buNone/>
-            </a:pPr>
-            <a:r>
-              <a:rPr lang="en-US" sz="4000" b="1" dirty="0">
-                <a:solidFill>
-                  <a:schemeClr val="bg1"/>
-                </a:solidFill>
-                <a:latin typeface="Cambria" pitchFamily="34" charset="0"/>
-                <a:ea typeface="Cambria" pitchFamily="34" charset="-122"/>
-                <a:cs typeface="Cambria" pitchFamily="34" charset="-120"/>
-              </a:rPr>
-              <a:t>$2.074</a:t>
-            </a:r>
-            <a:endParaRPr lang="en-US" sz="4000" dirty="0"/>
-          </a:p>
-        </p:txBody>
-      </p:sp>
-      <p:sp>
-        <p:nvSpPr>
-          <p:cNvPr id="5" name="Text 3"/>
-          <p:cNvSpPr txBox="1"/>
-          <p:nvPr/>
-        </p:nvSpPr>
-        <p:spPr>
-          <a:xfrm>
-            <a:off x="685800" y="1874520"/>
-            <a:ext cx="2651760" cy="457200"/>
-          </a:xfrm>
-          <a:prstGeom prst="rect">
-            <a:avLst/>
-          </a:prstGeom>
-          <a:noFill/>
-          <a:ln/>
-        </p:spPr>
-        <p:txBody>
-          <a:bodyPr wrap="square" lIns="0" tIns="0" rIns="0" bIns="0" rtlCol="0" anchor="ctr"/>
-          <a:lstStyle/>
-          <a:p>
-            <a:pPr indent="0" marL="0">
-              <a:buNone/>
-            </a:pPr>
-            <a:r>
-              <a:rPr lang="en-US" sz="1200" dirty="0">
-                <a:solidFill>
-                  <a:schemeClr val="accent6"/>
-                </a:solidFill>
-              </a:rPr>
-              <a:t>en ventas atribuidas a email y SMS,</a:t>
-            </a:r>
-            <a:endParaRPr lang="en-US" sz="1200" dirty="0"/>
-          </a:p>
-          <a:p>
-            <a:pPr indent="0" marL="0">
-              <a:buNone/>
-            </a:pPr>
-            <a:r>
-              <a:rPr lang="en-US" sz="1200" dirty="0">
-                <a:solidFill>
-                  <a:schemeClr val="accent6"/>
-                </a:solidFill>
-              </a:rPr>
-              <a:t>1–14 oct</a:t>
-            </a:r>
-            <a:endParaRPr lang="en-US" sz="1200" dirty="0"/>
-          </a:p>
-        </p:txBody>
-      </p:sp>
-      <p:sp>
-        <p:nvSpPr>
-          <p:cNvPr id="6" name="Text 4"/>
-          <p:cNvSpPr txBox="1"/>
-          <p:nvPr/>
-        </p:nvSpPr>
-        <p:spPr>
-          <a:xfrm>
-            <a:off x="685800" y="2468880"/>
-            <a:ext cx="2651760" cy="685800"/>
-          </a:xfrm>
-          <a:prstGeom prst="rect">
-            <a:avLst/>
-          </a:prstGeom>
-          <a:noFill/>
-          <a:ln/>
-        </p:spPr>
-        <p:txBody>
-          <a:bodyPr wrap="square" lIns="0" tIns="0" rIns="0" bIns="0" rtlCol="0" anchor="ctr"/>
-          <a:lstStyle/>
-          <a:p>
-            <a:pPr indent="0" marL="0">
-              <a:buNone/>
-            </a:pPr>
-            <a:r>
-              <a:rPr lang="en-US" sz="4000" b="1" dirty="0">
-                <a:solidFill>
-                  <a:schemeClr val="bg1"/>
-                </a:solidFill>
-                <a:latin typeface="Cambria" pitchFamily="34" charset="0"/>
-                <a:ea typeface="Cambria" pitchFamily="34" charset="-122"/>
-                <a:cs typeface="Cambria" pitchFamily="34" charset="-120"/>
-              </a:rPr>
-              <a:t>31</a:t>
-            </a:r>
-            <a:endParaRPr lang="en-US" sz="4000" dirty="0"/>
-          </a:p>
-        </p:txBody>
-      </p:sp>
-      <p:sp>
-        <p:nvSpPr>
-          <p:cNvPr id="7" name="Text 5"/>
-          <p:cNvSpPr txBox="1"/>
-          <p:nvPr/>
-        </p:nvSpPr>
-        <p:spPr>
-          <a:xfrm>
-            <a:off x="685800" y="3154680"/>
-            <a:ext cx="2651760" cy="457200"/>
-          </a:xfrm>
-          <a:prstGeom prst="rect">
-            <a:avLst/>
-          </a:prstGeom>
-          <a:noFill/>
-          <a:ln/>
-        </p:spPr>
-        <p:txBody>
-          <a:bodyPr wrap="square" lIns="0" tIns="0" rIns="0" bIns="0" rtlCol="0" anchor="ctr"/>
-          <a:lstStyle/>
-          <a:p>
-            <a:pPr indent="0" marL="0">
-              <a:buNone/>
-            </a:pPr>
-            <a:r>
-              <a:rPr lang="en-US" sz="1200" dirty="0">
-                <a:solidFill>
-                  <a:schemeClr val="accent6"/>
-                </a:solidFill>
-              </a:rPr>
-              <a:t>órdenes; 17 llegan solas por flujos automáticos</a:t>
-            </a:r>
-            <a:endParaRPr lang="en-US" sz="1200" dirty="0"/>
-          </a:p>
-        </p:txBody>
-      </p:sp>
       <p:graphicFrame>
         <p:nvGraphicFramePr>
-          <p:cNvPr id="8" name="Sales by program chart" descr=""/>
+          <p:cNvPr id="3" name="Purchases chart" descr=""/>
           <p:cNvGraphicFramePr/>
           <p:nvPr/>
         </p:nvGraphicFramePr>
         <p:xfrm>
-          <a:off x="3840480" y="960120"/>
-          <a:ext cx="4846320" cy="2743200"/>
+          <a:off x="457200" y="960120"/>
+          <a:ext cx="4206240" cy="3429000"/>
         </p:xfrm>
         <a:graphic xmlns:a="http://schemas.openxmlformats.org/drawingml/2006/main">
           <a:graphicData uri="http://schemas.openxmlformats.org/drawingml/2006/chart">
@@ -8014,14 +8463,14 @@
       </p:graphicFrame>
       <p:sp>
         <p:nvSpPr>
-          <p:cNvPr id="9" name="Text 6"/>
+          <p:cNvPr id="4" name="Text 1"/>
           <p:cNvSpPr txBox="1"/>
           <p:nvPr/>
         </p:nvSpPr>
         <p:spPr>
           <a:xfrm>
-            <a:off x="3931920" y="3749040"/>
-            <a:ext cx="4754880" cy="548640"/>
+            <a:off x="4937760" y="1005840"/>
+            <a:ext cx="3749040" cy="320040"/>
           </a:xfrm>
           <a:prstGeom prst="rect">
             <a:avLst/>
@@ -8030,27 +8479,203 @@
           <a:ln/>
         </p:spPr>
         <p:txBody>
-          <a:bodyPr wrap="square" lIns="0" tIns="0" rIns="0" bIns="0" rtlCol="0" anchor="t"/>
+          <a:bodyPr wrap="square" lIns="0" tIns="0" rIns="0" bIns="0" rtlCol="0" anchor="ctr"/>
           <a:lstStyle/>
           <a:p>
             <a:pPr indent="0" marL="0">
               <a:buNone/>
             </a:pPr>
             <a:r>
+              <a:rPr lang="en-US" sz="1500" b="1" dirty="0">
+                <a:solidFill>
+                  <a:schemeClr val="accent2"/>
+                </a:solidFill>
+                <a:latin typeface="Cambria" pitchFamily="34" charset="0"/>
+                <a:ea typeface="Cambria" pitchFamily="34" charset="-122"/>
+                <a:cs typeface="Cambria" pitchFamily="34" charset="-120"/>
+              </a:rPr>
+              <a:t>Lo que funciona</a:t>
+            </a:r>
+            <a:endParaRPr lang="en-US" sz="1500" dirty="0"/>
+          </a:p>
+        </p:txBody>
+      </p:sp>
+      <p:sp>
+        <p:nvSpPr>
+          <p:cNvPr id="5" name="Text 2"/>
+          <p:cNvSpPr txBox="1"/>
+          <p:nvPr/>
+        </p:nvSpPr>
+        <p:spPr>
+          <a:xfrm>
+            <a:off x="4937760" y="1371600"/>
+            <a:ext cx="3749040" cy="1152144"/>
+          </a:xfrm>
+          <a:prstGeom prst="rect">
+            <a:avLst/>
+          </a:prstGeom>
+          <a:noFill/>
+          <a:ln/>
+        </p:spPr>
+        <p:txBody>
+          <a:bodyPr wrap="square" lIns="0" tIns="0" rIns="0" bIns="0" rtlCol="0" anchor="t"/>
+          <a:lstStyle/>
+          <a:p>
+            <a:pPr marL="342900" indent="-342900">
+              <a:spcAft>
+                <a:spcPts val="400"/>
+              </a:spcAft>
+              <a:buSzPct val="100000"/>
+              <a:buChar char="•"/>
+            </a:pPr>
+            <a:r>
               <a:rPr lang="en-US" sz="1200" dirty="0">
                 <a:solidFill>
                   <a:schemeClr val="tx1"/>
                 </a:solidFill>
               </a:rPr>
-              <a:t>El Game Day tuvo 60% de apertura. Los flujos de Subscribe &amp; Save y Segunda Orden están activos desde el 7 oct.</a:t>
+              <a:t>Ayoba, clientes nuevos: $26 por compra, retorno 1,6x</a:t>
             </a:r>
             <a:endParaRPr lang="en-US" sz="1200" dirty="0"/>
           </a:p>
+          <a:p>
+            <a:pPr marL="342900" indent="-342900">
+              <a:spcAft>
+                <a:spcPts val="400"/>
+              </a:spcAft>
+              <a:buSzPct val="100000"/>
+              <a:buChar char="•"/>
+            </a:pPr>
+            <a:r>
+              <a:rPr lang="en-US" sz="1200" dirty="0">
+                <a:solidFill>
+                  <a:schemeClr val="tx1"/>
+                </a:solidFill>
+              </a:rPr>
+              <a:t>Brooklyn, retargeting dinámico: $26 por compra, retorno 2,9x</a:t>
+            </a:r>
+            <a:endParaRPr lang="en-US" sz="1200" dirty="0"/>
+          </a:p>
+          <a:p>
+            <a:pPr marL="342900" indent="-342900">
+              <a:spcAft>
+                <a:spcPts val="400"/>
+              </a:spcAft>
+              <a:buSzPct val="100000"/>
+              <a:buChar char="•"/>
+            </a:pPr>
+            <a:r>
+              <a:rPr lang="en-US" sz="1200" dirty="0">
+                <a:solidFill>
+                  <a:schemeClr val="tx1"/>
+                </a:solidFill>
+              </a:rPr>
+              <a:t>Beg &amp; Barker, retargeting dinámico: retorno 3,1x</a:t>
+            </a:r>
+            <a:endParaRPr lang="en-US" sz="1200" dirty="0"/>
+          </a:p>
         </p:txBody>
       </p:sp>
       <p:sp>
         <p:nvSpPr>
-          <p:cNvPr id="10" name="Text 7"/>
+          <p:cNvPr id="6" name="Text 3"/>
+          <p:cNvSpPr txBox="1"/>
+          <p:nvPr/>
+        </p:nvSpPr>
+        <p:spPr>
+          <a:xfrm>
+            <a:off x="4937760" y="2697480"/>
+            <a:ext cx="3749040" cy="320040"/>
+          </a:xfrm>
+          <a:prstGeom prst="rect">
+            <a:avLst/>
+          </a:prstGeom>
+          <a:noFill/>
+          <a:ln/>
+        </p:spPr>
+        <p:txBody>
+          <a:bodyPr wrap="square" lIns="0" tIns="0" rIns="0" bIns="0" rtlCol="0" anchor="ctr"/>
+          <a:lstStyle/>
+          <a:p>
+            <a:pPr indent="0" marL="0">
+              <a:buNone/>
+            </a:pPr>
+            <a:r>
+              <a:rPr lang="en-US" sz="1500" b="1" dirty="0">
+                <a:solidFill>
+                  <a:schemeClr val="accent1"/>
+                </a:solidFill>
+                <a:latin typeface="Cambria" pitchFamily="34" charset="0"/>
+                <a:ea typeface="Cambria" pitchFamily="34" charset="-122"/>
+                <a:cs typeface="Cambria" pitchFamily="34" charset="-120"/>
+              </a:rPr>
+              <a:t>Lo que estamos corrigiendo</a:t>
+            </a:r>
+            <a:endParaRPr lang="en-US" sz="1500" dirty="0"/>
+          </a:p>
+        </p:txBody>
+      </p:sp>
+      <p:sp>
+        <p:nvSpPr>
+          <p:cNvPr id="7" name="Text 4"/>
+          <p:cNvSpPr txBox="1"/>
+          <p:nvPr/>
+        </p:nvSpPr>
+        <p:spPr>
+          <a:xfrm>
+            <a:off x="4937760" y="3063240"/>
+            <a:ext cx="3749040" cy="768096"/>
+          </a:xfrm>
+          <a:prstGeom prst="rect">
+            <a:avLst/>
+          </a:prstGeom>
+          <a:noFill/>
+          <a:ln/>
+        </p:spPr>
+        <p:txBody>
+          <a:bodyPr wrap="square" lIns="0" tIns="0" rIns="0" bIns="0" rtlCol="0" anchor="t"/>
+          <a:lstStyle/>
+          <a:p>
+            <a:pPr marL="342900" indent="-342900">
+              <a:spcAft>
+                <a:spcPts val="400"/>
+              </a:spcAft>
+              <a:buSzPct val="100000"/>
+              <a:buChar char="•"/>
+            </a:pPr>
+            <a:r>
+              <a:rPr lang="en-US" sz="1200" dirty="0">
+                <a:solidFill>
+                  <a:schemeClr val="tx1"/>
+                </a:solidFill>
+              </a:rPr>
+              <a:t>Brooklyn, clientes nuevos: $170 por compra → presupuesto recortado el 13 oct</a:t>
+            </a:r>
+            <a:endParaRPr lang="en-US" sz="1200" dirty="0"/>
+          </a:p>
+          <a:p>
+            <a:pPr marL="342900" indent="-342900">
+              <a:spcAft>
+                <a:spcPts val="400"/>
+              </a:spcAft>
+              <a:buSzPct val="100000"/>
+              <a:buChar char="•"/>
+            </a:pPr>
+            <a:r>
+              <a:rPr lang="en-US" sz="1200" dirty="0">
+                <a:solidFill>
+                  <a:schemeClr val="tx1"/>
+                </a:solidFill>
+              </a:rPr>
+              <a:t>Retargeting nuevo (desde el 10 oct) aún en aprendizaje; le subimos presupuesto en Ayoba y Beg &amp; Barker</a:t>
+            </a:r>
+            <a:endParaRPr lang="en-US" sz="1200" dirty="0"/>
+          </a:p>
+        </p:txBody>
+      </p:sp>
+      <p:sp>
+        <p:nvSpPr>
+          <p:cNvPr id="8" name="Text 5"/>
           <p:cNvSpPr txBox="1"/>
           <p:nvPr/>
         </p:nvSpPr>
@@ -8078,7 +8703,7 @@
                   <a:schemeClr val="accent4"/>
                 </a:solidFill>
               </a:rPr>
-              <a:t>Fuente: Klaviyo (Brooklyn Biltong), órdenes atribuidas por la plataforma.</a:t>
+              <a:t>Fuente: Meta Ads Manager, compras y retorno atribuidos por la plataforma. No incluye Google Ads ni el total de ventas de la tienda (ver dashboards).</a:t>
             </a:r>
             <a:endParaRPr lang="en-US" sz="900" dirty="0"/>
           </a:p>
@@ -8189,6 +8814,391 @@
                 <a:ea typeface="Cambria" pitchFamily="34" charset="-122"/>
                 <a:cs typeface="Cambria" pitchFamily="34" charset="-120"/>
               </a:rPr>
+              <a:t>Brooklyn: email y SMS ya generan ventas recurrentes</a:t>
+            </a:r>
+            <a:endParaRPr lang="en-US" sz="2600" dirty="0"/>
+          </a:p>
+        </p:txBody>
+      </p:sp>
+      <p:sp>
+        <p:nvSpPr>
+          <p:cNvPr id="3" name="Retention stat panel"/>
+          <p:cNvSpPr/>
+          <p:nvPr/>
+        </p:nvSpPr>
+        <p:spPr>
+          <a:xfrm>
+            <a:off x="457200" y="1005840"/>
+            <a:ext cx="3108960" cy="3291840"/>
+          </a:xfrm>
+          <a:prstGeom prst="roundRect">
+            <a:avLst>
+              <a:gd name="adj" fmla="val 2353"/>
+            </a:avLst>
+          </a:prstGeom>
+          <a:solidFill>
+            <a:schemeClr val="tx1"/>
+          </a:solidFill>
+          <a:ln/>
+        </p:spPr>
+      </p:sp>
+      <p:sp>
+        <p:nvSpPr>
+          <p:cNvPr id="4" name="Text 2"/>
+          <p:cNvSpPr txBox="1"/>
+          <p:nvPr/>
+        </p:nvSpPr>
+        <p:spPr>
+          <a:xfrm>
+            <a:off x="685800" y="1188720"/>
+            <a:ext cx="2651760" cy="685800"/>
+          </a:xfrm>
+          <a:prstGeom prst="rect">
+            <a:avLst/>
+          </a:prstGeom>
+          <a:noFill/>
+          <a:ln/>
+        </p:spPr>
+        <p:txBody>
+          <a:bodyPr wrap="square" lIns="0" tIns="0" rIns="0" bIns="0" rtlCol="0" anchor="ctr"/>
+          <a:lstStyle/>
+          <a:p>
+            <a:pPr indent="0" marL="0">
+              <a:buNone/>
+            </a:pPr>
+            <a:r>
+              <a:rPr lang="en-US" sz="4000" b="1" dirty="0">
+                <a:solidFill>
+                  <a:schemeClr val="bg1"/>
+                </a:solidFill>
+                <a:latin typeface="Cambria" pitchFamily="34" charset="0"/>
+                <a:ea typeface="Cambria" pitchFamily="34" charset="-122"/>
+                <a:cs typeface="Cambria" pitchFamily="34" charset="-120"/>
+              </a:rPr>
+              <a:t>$2.074</a:t>
+            </a:r>
+            <a:endParaRPr lang="en-US" sz="4000" dirty="0"/>
+          </a:p>
+        </p:txBody>
+      </p:sp>
+      <p:sp>
+        <p:nvSpPr>
+          <p:cNvPr id="5" name="Text 3"/>
+          <p:cNvSpPr txBox="1"/>
+          <p:nvPr/>
+        </p:nvSpPr>
+        <p:spPr>
+          <a:xfrm>
+            <a:off x="685800" y="1874520"/>
+            <a:ext cx="2651760" cy="457200"/>
+          </a:xfrm>
+          <a:prstGeom prst="rect">
+            <a:avLst/>
+          </a:prstGeom>
+          <a:noFill/>
+          <a:ln/>
+        </p:spPr>
+        <p:txBody>
+          <a:bodyPr wrap="square" lIns="0" tIns="0" rIns="0" bIns="0" rtlCol="0" anchor="ctr"/>
+          <a:lstStyle/>
+          <a:p>
+            <a:pPr indent="0" marL="0">
+              <a:buNone/>
+            </a:pPr>
+            <a:r>
+              <a:rPr lang="en-US" sz="1200" dirty="0">
+                <a:solidFill>
+                  <a:schemeClr val="accent6"/>
+                </a:solidFill>
+              </a:rPr>
+              <a:t>en ventas atribuidas a email y SMS,</a:t>
+            </a:r>
+            <a:endParaRPr lang="en-US" sz="1200" dirty="0"/>
+          </a:p>
+          <a:p>
+            <a:pPr indent="0" marL="0">
+              <a:buNone/>
+            </a:pPr>
+            <a:r>
+              <a:rPr lang="en-US" sz="1200" dirty="0">
+                <a:solidFill>
+                  <a:schemeClr val="accent6"/>
+                </a:solidFill>
+              </a:rPr>
+              <a:t>1–14 oct</a:t>
+            </a:r>
+            <a:endParaRPr lang="en-US" sz="1200" dirty="0"/>
+          </a:p>
+        </p:txBody>
+      </p:sp>
+      <p:sp>
+        <p:nvSpPr>
+          <p:cNvPr id="6" name="Text 4"/>
+          <p:cNvSpPr txBox="1"/>
+          <p:nvPr/>
+        </p:nvSpPr>
+        <p:spPr>
+          <a:xfrm>
+            <a:off x="685800" y="2468880"/>
+            <a:ext cx="2651760" cy="685800"/>
+          </a:xfrm>
+          <a:prstGeom prst="rect">
+            <a:avLst/>
+          </a:prstGeom>
+          <a:noFill/>
+          <a:ln/>
+        </p:spPr>
+        <p:txBody>
+          <a:bodyPr wrap="square" lIns="0" tIns="0" rIns="0" bIns="0" rtlCol="0" anchor="ctr"/>
+          <a:lstStyle/>
+          <a:p>
+            <a:pPr indent="0" marL="0">
+              <a:buNone/>
+            </a:pPr>
+            <a:r>
+              <a:rPr lang="en-US" sz="4000" b="1" dirty="0">
+                <a:solidFill>
+                  <a:schemeClr val="bg1"/>
+                </a:solidFill>
+                <a:latin typeface="Cambria" pitchFamily="34" charset="0"/>
+                <a:ea typeface="Cambria" pitchFamily="34" charset="-122"/>
+                <a:cs typeface="Cambria" pitchFamily="34" charset="-120"/>
+              </a:rPr>
+              <a:t>31</a:t>
+            </a:r>
+            <a:endParaRPr lang="en-US" sz="4000" dirty="0"/>
+          </a:p>
+        </p:txBody>
+      </p:sp>
+      <p:sp>
+        <p:nvSpPr>
+          <p:cNvPr id="7" name="Text 5"/>
+          <p:cNvSpPr txBox="1"/>
+          <p:nvPr/>
+        </p:nvSpPr>
+        <p:spPr>
+          <a:xfrm>
+            <a:off x="685800" y="3154680"/>
+            <a:ext cx="2651760" cy="457200"/>
+          </a:xfrm>
+          <a:prstGeom prst="rect">
+            <a:avLst/>
+          </a:prstGeom>
+          <a:noFill/>
+          <a:ln/>
+        </p:spPr>
+        <p:txBody>
+          <a:bodyPr wrap="square" lIns="0" tIns="0" rIns="0" bIns="0" rtlCol="0" anchor="ctr"/>
+          <a:lstStyle/>
+          <a:p>
+            <a:pPr indent="0" marL="0">
+              <a:buNone/>
+            </a:pPr>
+            <a:r>
+              <a:rPr lang="en-US" sz="1200" dirty="0">
+                <a:solidFill>
+                  <a:schemeClr val="accent6"/>
+                </a:solidFill>
+              </a:rPr>
+              <a:t>órdenes; 17 llegan solas por flujos automáticos</a:t>
+            </a:r>
+            <a:endParaRPr lang="en-US" sz="1200" dirty="0"/>
+          </a:p>
+        </p:txBody>
+      </p:sp>
+      <p:graphicFrame>
+        <p:nvGraphicFramePr>
+          <p:cNvPr id="8" name="Sales by program chart" descr=""/>
+          <p:cNvGraphicFramePr/>
+          <p:nvPr/>
+        </p:nvGraphicFramePr>
+        <p:xfrm>
+          <a:off x="3840480" y="960120"/>
+          <a:ext cx="4846320" cy="2743200"/>
+        </p:xfrm>
+        <a:graphic xmlns:a="http://schemas.openxmlformats.org/drawingml/2006/main">
+          <a:graphicData uri="http://schemas.openxmlformats.org/drawingml/2006/chart">
+            <c:chart xmlns:c="http://schemas.openxmlformats.org/drawingml/2006/chart" r:id="rId1"/>
+          </a:graphicData>
+        </a:graphic>
+      </p:graphicFrame>
+      <p:sp>
+        <p:nvSpPr>
+          <p:cNvPr id="9" name="Text 6"/>
+          <p:cNvSpPr txBox="1"/>
+          <p:nvPr/>
+        </p:nvSpPr>
+        <p:spPr>
+          <a:xfrm>
+            <a:off x="3931920" y="3749040"/>
+            <a:ext cx="4754880" cy="548640"/>
+          </a:xfrm>
+          <a:prstGeom prst="rect">
+            <a:avLst/>
+          </a:prstGeom>
+          <a:noFill/>
+          <a:ln/>
+        </p:spPr>
+        <p:txBody>
+          <a:bodyPr wrap="square" lIns="0" tIns="0" rIns="0" bIns="0" rtlCol="0" anchor="t"/>
+          <a:lstStyle/>
+          <a:p>
+            <a:pPr indent="0" marL="0">
+              <a:buNone/>
+            </a:pPr>
+            <a:r>
+              <a:rPr lang="en-US" sz="1200" dirty="0">
+                <a:solidFill>
+                  <a:schemeClr val="tx1"/>
+                </a:solidFill>
+              </a:rPr>
+              <a:t>El Game Day tuvo 60% de apertura. Los flujos de Subscribe &amp; Save y Segunda Orden están activos desde el 7 oct.</a:t>
+            </a:r>
+            <a:endParaRPr lang="en-US" sz="1200" dirty="0"/>
+          </a:p>
+        </p:txBody>
+      </p:sp>
+      <p:sp>
+        <p:nvSpPr>
+          <p:cNvPr id="10" name="Text 7"/>
+          <p:cNvSpPr txBox="1"/>
+          <p:nvPr/>
+        </p:nvSpPr>
+        <p:spPr>
+          <a:xfrm>
+            <a:off x="457200" y="4434840"/>
+            <a:ext cx="8229600" cy="274320"/>
+          </a:xfrm>
+          <a:prstGeom prst="rect">
+            <a:avLst/>
+          </a:prstGeom>
+          <a:noFill/>
+          <a:ln/>
+        </p:spPr>
+        <p:txBody>
+          <a:bodyPr wrap="square" lIns="0" tIns="0" rIns="0" bIns="0" rtlCol="0" anchor="ctr"/>
+          <a:lstStyle/>
+          <a:p>
+            <a:pPr indent="0" marL="0">
+              <a:buNone/>
+            </a:pPr>
+            <a:r>
+              <a:rPr lang="en-US" sz="900" i="1" dirty="0">
+                <a:solidFill>
+                  <a:schemeClr val="accent4"/>
+                </a:solidFill>
+              </a:rPr>
+              <a:t>Fuente: Klaviyo (Brooklyn Biltong), órdenes atribuidas por la plataforma.</a:t>
+            </a:r>
+            <a:endParaRPr lang="en-US" sz="900" dirty="0"/>
+          </a:p>
+        </p:txBody>
+      </p:sp>
+      <p:sp>
+        <p:nvSpPr>
+          <p:cNvPr id="25" name="Slide Number Placeholder 0"/>
+          <p:cNvSpPr>
+            <a:spLocks noGrp="1"/>
+          </p:cNvSpPr>
+          <p:nvPr>
+            <p:ph type="sldNum" sz="quarter" idx="4294967295"/>
+          </p:nvPr>
+        </p:nvSpPr>
+        <p:spPr>
+          <a:xfrm>
+            <a:off x="8321040" y="4800600"/>
+            <a:ext cx="365760" cy="228600"/>
+          </a:xfrm>
+          <a:prstGeom prst="rect">
+            <a:avLst/>
+          </a:prstGeom>
+          <a:extLst>
+            <a:ext uri="{C572A759-6A51-4108-AA02-DFA0A04FC94B}">
+              <ma14:wrappingTextBoxFlag xmlns:ma14="http://schemas.microsoft.com/office/mac/drawingml/2011/main" val="0"/>
+            </a:ext>
+          </a:extLst>
+        </p:spPr>
+        <p:txBody>
+          <a:bodyPr/>
+          <a:lstStyle>
+            <a:lvl1pPr>
+              <a:defRPr sz="900">
+                <a:solidFill>
+                  <a:schemeClr val="accent4"/>
+                </a:solidFill>
+              </a:defRPr>
+            </a:lvl1pPr>
+          </a:lstStyle>
+          <a:p>
+            <a:pPr algn="r"/>
+            <a:fld id="{F7021451-1387-4CA6-816F-3879F97B5CBC}" type="slidenum">
+              <a:rPr b="0" lang="en-US"/>
+              <a:t>7</a:t>
+            </a:fld>
+            <a:endParaRPr lang="en-US"/>
+          </a:p>
+        </p:txBody>
+      </p:sp>
+    </p:spTree>
+  </p:cSld>
+  <p:clrMapOvr>
+    <a:masterClrMapping/>
+  </p:clrMapOvr>
+</p:sld>
+</file>
+
+<file path=ppt/slides/slide8.xml><?xml version="1.0" encoding="utf-8"?>
+<p:sld xmlns:a="http://schemas.openxmlformats.org/drawingml/2006/main" xmlns:r="http://schemas.openxmlformats.org/officeDocument/2006/relationships" xmlns:p="http://schemas.openxmlformats.org/presentationml/2006/main">
+  <p:cSld name="Slide 8">
+    <p:spTree>
+      <p:nvGrpSpPr>
+        <p:cNvPr id="1" name=""/>
+        <p:cNvGrpSpPr/>
+        <p:nvPr/>
+      </p:nvGrpSpPr>
+      <p:grpSpPr>
+        <a:xfrm>
+          <a:off x="0" y="0"/>
+          <a:ext cx="0" cy="0"/>
+          <a:chOff x="0" y="0"/>
+          <a:chExt cx="0" cy="0"/>
+        </a:xfrm>
+      </p:grpSpPr>
+      <p:sp>
+        <p:nvSpPr>
+          <p:cNvPr id="2" name="Text 0"/>
+          <p:cNvSpPr/>
+          <p:nvPr>
+            <p:ph idx="100" type="title" hasCustomPrompt="1"/>
+          </p:nvPr>
+        </p:nvSpPr>
+        <p:spPr>
+          <a:xfrm>
+            <a:off x="457200" y="274320"/>
+            <a:ext cx="8229600" cy="594360"/>
+          </a:xfrm>
+          <a:prstGeom prst="rect">
+            <a:avLst/>
+          </a:prstGeom>
+          <a:noFill/>
+          <a:ln/>
+        </p:spPr>
+        <p:txBody>
+          <a:bodyPr wrap="square" lIns="0" tIns="0" rIns="0" bIns="0" rtlCol="0" anchor="ctr"/>
+          <a:lstStyle/>
+          <a:p>
+            <a:pPr algn="l" indent="0" marL="0">
+              <a:buNone/>
+            </a:pPr>
+            <a:r>
+              <a:rPr lang="en-US" sz="2600" b="1" dirty="0">
+                <a:solidFill>
+                  <a:schemeClr val="tx1"/>
+                </a:solidFill>
+                <a:latin typeface="Cambria" pitchFamily="34" charset="0"/>
+                <a:ea typeface="Cambria" pitchFamily="34" charset="-122"/>
+                <a:cs typeface="Cambria" pitchFamily="34" charset="-120"/>
+              </a:rPr>
               <a:t>Lo que haremos esta semana</a:t>
             </a:r>
             <a:endParaRPr lang="en-US" sz="2600" dirty="0"/>
@@ -8802,7 +9812,7 @@
             <a:pPr algn="r"/>
             <a:fld id="{F7021451-1387-4CA6-816F-3879F97B5CBC}" type="slidenum">
               <a:rPr b="0" lang="en-US"/>
-              <a:t>7</a:t>
+              <a:t>8</a:t>
             </a:fld>
             <a:endParaRPr lang="en-US"/>
           </a:p>

--- a/status_ceo/Stormberg_Status_CEO_Oct2026_ES.pptx
+++ b/status_ceo/Stormberg_Status_CEO_Oct2026_ES.pptx
@@ -13,9 +13,10 @@
     <p:sldId id="261" r:id="rId7"/>
     <p:sldId id="262" r:id="rId8"/>
     <p:sldId id="263" r:id="rId9"/>
+    <p:sldId id="264" r:id="rId10"/>
   </p:sldIdLst>
   <p:notesMasterIdLst>
-    <p:notesMasterId r:id="rId10"/>
+    <p:notesMasterId r:id="rId11"/>
   </p:notesMasterIdLst>
   <p:sldSz cx="9144000" cy="5143500"/>
   <p:notesSz cx="5143500" cy="9144000"/>
@@ -114,24 +115,25 @@
   <p:extLst>
     <p:ext uri="{521415D9-36F7-43E2-AB2F-B90AF26B5E84}">
       <p14:sectionLst xmlns:p14="http://schemas.microsoft.com/office/powerpoint/2010/main">
-        <p14:section name="Resumen" id="{5845631f-987d-e56f-a059-3aab15afdd7c}">
+        <p14:section name="Resumen" id="{e37eebfa-dfed-0ebf-51f9-d0039de16467}">
           <p14:sldIdLst>
             <p14:sldId id="256"/>
             <p14:sldId id="257"/>
             <p14:sldId id="258"/>
             <p14:sldId id="259"/>
+            <p14:sldId id="260"/>
           </p14:sldIdLst>
         </p14:section>
-        <p14:section name="Avances" id="{c3cf5e8c-1df6-098c-63e2-34052b8ba268}">
+        <p14:section name="Avances" id="{104e45ce-e9e5-6855-d974-dafc2894c724}">
           <p14:sldIdLst>
-            <p14:sldId id="260"/>
             <p14:sldId id="261"/>
             <p14:sldId id="262"/>
+            <p14:sldId id="263"/>
           </p14:sldIdLst>
         </p14:section>
-        <p14:section name="Próximos pasos" id="{8b22bd57-aa73-725b-ac94-8194006c4366}">
+        <p14:section name="Próximos pasos" id="{2af1588c-5d51-2cc8-ba24-e61671ca8846}">
           <p14:sldIdLst>
-            <p14:sldId id="263"/>
+            <p14:sldId id="264"/>
           </p14:sldIdLst>
         </p14:section>
       </p14:sectionLst>
@@ -2307,6 +2309,94 @@
 </p:notes>
 </file>
 
+<file path=ppt/notesSlides/notesSlide9.xml><?xml version="1.0" encoding="utf-8"?>
+<p:notes xmlns:a="http://schemas.openxmlformats.org/drawingml/2006/main" xmlns:r="http://schemas.openxmlformats.org/officeDocument/2006/relationships" xmlns:p="http://schemas.openxmlformats.org/presentationml/2006/main">
+  <p:cSld>
+    <p:spTree>
+      <p:nvGrpSpPr>
+        <p:cNvPr id="1" name=""/>
+        <p:cNvGrpSpPr/>
+        <p:nvPr/>
+      </p:nvGrpSpPr>
+      <p:grpSpPr>
+        <a:xfrm>
+          <a:off x="0" y="0"/>
+          <a:ext cx="0" cy="0"/>
+          <a:chOff x="0" y="0"/>
+          <a:chExt cx="0" cy="0"/>
+        </a:xfrm>
+      </p:grpSpPr>
+      <p:sp>
+        <p:nvSpPr>
+          <p:cNvPr id="2" name="Slide Image Placeholder 1"/>
+          <p:cNvSpPr>
+            <a:spLocks noGrp="1" noRot="1" noChangeAspect="1"/>
+          </p:cNvSpPr>
+          <p:nvPr>
+            <p:ph type="sldImg"/>
+          </p:nvPr>
+        </p:nvSpPr>
+        <p:spPr/>
+      </p:sp>
+      <p:sp>
+        <p:nvSpPr>
+          <p:cNvPr id="3" name="Notes Placeholder 2"/>
+          <p:cNvSpPr>
+            <a:spLocks noGrp="1"/>
+          </p:cNvSpPr>
+          <p:nvPr>
+            <p:ph type="body" idx="1"/>
+          </p:nvPr>
+        </p:nvSpPr>
+        <p:spPr/>
+        <p:txBody>
+          <a:bodyPr/>
+          <a:lstStyle/>
+          <a:p>
+            <a:r>
+              <a:rPr lang="en-US" dirty="0"/>
+              <a:t/>
+            </a:r>
+            <a:endParaRPr lang="en-US" dirty="0"/>
+          </a:p>
+        </p:txBody>
+      </p:sp>
+      <p:sp>
+        <p:nvSpPr>
+          <p:cNvPr id="4" name="Slide Number Placeholder 3"/>
+          <p:cNvSpPr>
+            <a:spLocks noGrp="1"/>
+          </p:cNvSpPr>
+          <p:nvPr>
+            <p:ph type="sldNum" sz="quarter" idx="10"/>
+          </p:nvPr>
+        </p:nvSpPr>
+        <p:spPr/>
+        <p:txBody>
+          <a:bodyPr/>
+          <a:lstStyle/>
+          <a:p>
+            <a:fld id="{F7021451-1387-4CA6-816F-3879F97B5CBC}" type="slidenum">
+              <a:rPr lang="en-US"/>
+              <a:t>9</a:t>
+            </a:fld>
+            <a:endParaRPr lang="en-US"/>
+          </a:p>
+        </p:txBody>
+      </p:sp>
+    </p:spTree>
+    <p:extLst>
+      <p:ext uri="{BB962C8B-B14F-4D97-AF65-F5344CB8AC3E}">
+        <p14:creationId xmlns:p14="http://schemas.microsoft.com/office/powerpoint/2010/main" val="1024086991"/>
+      </p:ext>
+    </p:extLst>
+  </p:cSld>
+  <p:clrMapOvr>
+    <a:masterClrMapping/>
+  </p:clrMapOvr>
+</p:notes>
+</file>
+
 <file path=ppt/slideLayouts/slideLayout1.xml><?xml version="1.0" encoding="utf-8"?>
 <p:sldLayout xmlns:a="http://schemas.openxmlformats.org/drawingml/2006/main" xmlns:r="http://schemas.openxmlformats.org/officeDocument/2006/relationships" xmlns:p="http://schemas.openxmlformats.org/presentationml/2006/main" preserve="1">
   <p:cSld name="DEFAULT">
@@ -5556,6 +5646,926 @@
                 <a:ea typeface="Cambria" pitchFamily="34" charset="-122"/>
                 <a:cs typeface="Cambria" pitchFamily="34" charset="-120"/>
               </a:rPr>
+              <a:t>Ayoba: ticket alto y una operación rentable</a:t>
+            </a:r>
+            <a:endParaRPr lang="en-US" sz="2600" dirty="0"/>
+          </a:p>
+        </p:txBody>
+      </p:sp>
+      <p:sp>
+        <p:nvSpPr>
+          <p:cNvPr id="3" name="AY stat 1"/>
+          <p:cNvSpPr/>
+          <p:nvPr/>
+        </p:nvSpPr>
+        <p:spPr>
+          <a:xfrm>
+            <a:off x="457200" y="1005840"/>
+            <a:ext cx="4206240" cy="1005840"/>
+          </a:xfrm>
+          <a:prstGeom prst="roundRect">
+            <a:avLst>
+              <a:gd name="adj" fmla="val 7273"/>
+            </a:avLst>
+          </a:prstGeom>
+          <a:solidFill>
+            <a:schemeClr val="bg2"/>
+          </a:solidFill>
+          <a:ln/>
+        </p:spPr>
+      </p:sp>
+      <p:sp>
+        <p:nvSpPr>
+          <p:cNvPr id="4" name="Text 2"/>
+          <p:cNvSpPr txBox="1"/>
+          <p:nvPr/>
+        </p:nvSpPr>
+        <p:spPr>
+          <a:xfrm>
+            <a:off x="640080" y="1097280"/>
+            <a:ext cx="1463040" cy="822960"/>
+          </a:xfrm>
+          <a:prstGeom prst="rect">
+            <a:avLst/>
+          </a:prstGeom>
+          <a:noFill/>
+          <a:ln/>
+        </p:spPr>
+        <p:txBody>
+          <a:bodyPr wrap="square" lIns="0" tIns="0" rIns="0" bIns="0" rtlCol="0" anchor="ctr">
+            <a:normAutofit/>
+          </a:bodyPr>
+          <a:lstStyle/>
+          <a:p>
+            <a:pPr indent="0" marL="0">
+              <a:buNone/>
+            </a:pPr>
+            <a:r>
+              <a:rPr lang="en-US" sz="3000" b="1" dirty="0">
+                <a:solidFill>
+                  <a:schemeClr val="tx2"/>
+                </a:solidFill>
+                <a:latin typeface="Cambria" pitchFamily="34" charset="0"/>
+                <a:ea typeface="Cambria" pitchFamily="34" charset="-122"/>
+                <a:cs typeface="Cambria" pitchFamily="34" charset="-120"/>
+              </a:rPr>
+              <a:t>$107,8K</a:t>
+            </a:r>
+            <a:endParaRPr lang="en-US" sz="3000" dirty="0"/>
+          </a:p>
+        </p:txBody>
+      </p:sp>
+      <p:sp>
+        <p:nvSpPr>
+          <p:cNvPr id="5" name="Text 3"/>
+          <p:cNvSpPr txBox="1"/>
+          <p:nvPr/>
+        </p:nvSpPr>
+        <p:spPr>
+          <a:xfrm>
+            <a:off x="2194560" y="1097280"/>
+            <a:ext cx="2331720" cy="822960"/>
+          </a:xfrm>
+          <a:prstGeom prst="rect">
+            <a:avLst/>
+          </a:prstGeom>
+          <a:noFill/>
+          <a:ln/>
+        </p:spPr>
+        <p:txBody>
+          <a:bodyPr wrap="square" lIns="0" tIns="0" rIns="0" bIns="0" rtlCol="0" anchor="ctr"/>
+          <a:lstStyle/>
+          <a:p>
+            <a:pPr indent="0" marL="0">
+              <a:buNone/>
+            </a:pPr>
+            <a:r>
+              <a:rPr lang="en-US" sz="1200" dirty="0">
+                <a:solidFill>
+                  <a:schemeClr val="tx1"/>
+                </a:solidFill>
+              </a:rPr>
+              <a:t>en ventas brutas en lo que va del año, con 1.188 órdenes</a:t>
+            </a:r>
+            <a:endParaRPr lang="en-US" sz="1200" dirty="0"/>
+          </a:p>
+        </p:txBody>
+      </p:sp>
+      <p:sp>
+        <p:nvSpPr>
+          <p:cNvPr id="6" name="AY stat 2"/>
+          <p:cNvSpPr/>
+          <p:nvPr/>
+        </p:nvSpPr>
+        <p:spPr>
+          <a:xfrm>
+            <a:off x="457200" y="2148840"/>
+            <a:ext cx="4206240" cy="1005840"/>
+          </a:xfrm>
+          <a:prstGeom prst="roundRect">
+            <a:avLst>
+              <a:gd name="adj" fmla="val 7273"/>
+            </a:avLst>
+          </a:prstGeom>
+          <a:solidFill>
+            <a:schemeClr val="bg2"/>
+          </a:solidFill>
+          <a:ln/>
+        </p:spPr>
+      </p:sp>
+      <p:sp>
+        <p:nvSpPr>
+          <p:cNvPr id="7" name="Text 5"/>
+          <p:cNvSpPr txBox="1"/>
+          <p:nvPr/>
+        </p:nvSpPr>
+        <p:spPr>
+          <a:xfrm>
+            <a:off x="640080" y="2240280"/>
+            <a:ext cx="1463040" cy="822960"/>
+          </a:xfrm>
+          <a:prstGeom prst="rect">
+            <a:avLst/>
+          </a:prstGeom>
+          <a:noFill/>
+          <a:ln/>
+        </p:spPr>
+        <p:txBody>
+          <a:bodyPr wrap="square" lIns="0" tIns="0" rIns="0" bIns="0" rtlCol="0" anchor="ctr">
+            <a:normAutofit/>
+          </a:bodyPr>
+          <a:lstStyle/>
+          <a:p>
+            <a:pPr indent="0" marL="0">
+              <a:buNone/>
+            </a:pPr>
+            <a:r>
+              <a:rPr lang="en-US" sz="3000" b="1" dirty="0">
+                <a:solidFill>
+                  <a:schemeClr val="accent2"/>
+                </a:solidFill>
+                <a:latin typeface="Cambria" pitchFamily="34" charset="0"/>
+                <a:ea typeface="Cambria" pitchFamily="34" charset="-122"/>
+                <a:cs typeface="Cambria" pitchFamily="34" charset="-120"/>
+              </a:rPr>
+              <a:t>60%</a:t>
+            </a:r>
+            <a:endParaRPr lang="en-US" sz="3000" dirty="0"/>
+          </a:p>
+        </p:txBody>
+      </p:sp>
+      <p:sp>
+        <p:nvSpPr>
+          <p:cNvPr id="8" name="Text 6"/>
+          <p:cNvSpPr txBox="1"/>
+          <p:nvPr/>
+        </p:nvSpPr>
+        <p:spPr>
+          <a:xfrm>
+            <a:off x="2194560" y="2240280"/>
+            <a:ext cx="2331720" cy="822960"/>
+          </a:xfrm>
+          <a:prstGeom prst="rect">
+            <a:avLst/>
+          </a:prstGeom>
+          <a:noFill/>
+          <a:ln/>
+        </p:spPr>
+        <p:txBody>
+          <a:bodyPr wrap="square" lIns="0" tIns="0" rIns="0" bIns="0" rtlCol="0" anchor="ctr"/>
+          <a:lstStyle/>
+          <a:p>
+            <a:pPr indent="0" marL="0">
+              <a:buNone/>
+            </a:pPr>
+            <a:r>
+              <a:rPr lang="en-US" sz="1200" dirty="0">
+                <a:solidFill>
+                  <a:schemeClr val="tx1"/>
+                </a:solidFill>
+              </a:rPr>
+              <a:t>de margen bruto después del costo de producto: $64,7K de contribución</a:t>
+            </a:r>
+            <a:endParaRPr lang="en-US" sz="1200" dirty="0"/>
+          </a:p>
+        </p:txBody>
+      </p:sp>
+      <p:sp>
+        <p:nvSpPr>
+          <p:cNvPr id="9" name="AY stat 3"/>
+          <p:cNvSpPr/>
+          <p:nvPr/>
+        </p:nvSpPr>
+        <p:spPr>
+          <a:xfrm>
+            <a:off x="457200" y="3291840"/>
+            <a:ext cx="4206240" cy="1005840"/>
+          </a:xfrm>
+          <a:prstGeom prst="roundRect">
+            <a:avLst>
+              <a:gd name="adj" fmla="val 7273"/>
+            </a:avLst>
+          </a:prstGeom>
+          <a:solidFill>
+            <a:schemeClr val="bg2"/>
+          </a:solidFill>
+          <a:ln/>
+        </p:spPr>
+      </p:sp>
+      <p:sp>
+        <p:nvSpPr>
+          <p:cNvPr id="10" name="Text 8"/>
+          <p:cNvSpPr txBox="1"/>
+          <p:nvPr/>
+        </p:nvSpPr>
+        <p:spPr>
+          <a:xfrm>
+            <a:off x="640080" y="3383280"/>
+            <a:ext cx="1463040" cy="822960"/>
+          </a:xfrm>
+          <a:prstGeom prst="rect">
+            <a:avLst/>
+          </a:prstGeom>
+          <a:noFill/>
+          <a:ln/>
+        </p:spPr>
+        <p:txBody>
+          <a:bodyPr wrap="square" lIns="0" tIns="0" rIns="0" bIns="0" rtlCol="0" anchor="ctr">
+            <a:normAutofit/>
+          </a:bodyPr>
+          <a:lstStyle/>
+          <a:p>
+            <a:pPr indent="0" marL="0">
+              <a:buNone/>
+            </a:pPr>
+            <a:r>
+              <a:rPr lang="en-US" sz="3000" b="1" dirty="0">
+                <a:solidFill>
+                  <a:schemeClr val="accent1"/>
+                </a:solidFill>
+                <a:latin typeface="Cambria" pitchFamily="34" charset="0"/>
+                <a:ea typeface="Cambria" pitchFamily="34" charset="-122"/>
+                <a:cs typeface="Cambria" pitchFamily="34" charset="-120"/>
+              </a:rPr>
+              <a:t>4,2x</a:t>
+            </a:r>
+            <a:endParaRPr lang="en-US" sz="3000" dirty="0"/>
+          </a:p>
+        </p:txBody>
+      </p:sp>
+      <p:sp>
+        <p:nvSpPr>
+          <p:cNvPr id="11" name="Text 9"/>
+          <p:cNvSpPr txBox="1"/>
+          <p:nvPr/>
+        </p:nvSpPr>
+        <p:spPr>
+          <a:xfrm>
+            <a:off x="2194560" y="3383280"/>
+            <a:ext cx="2331720" cy="822960"/>
+          </a:xfrm>
+          <a:prstGeom prst="rect">
+            <a:avLst/>
+          </a:prstGeom>
+          <a:noFill/>
+          <a:ln/>
+        </p:spPr>
+        <p:txBody>
+          <a:bodyPr wrap="square" lIns="0" tIns="0" rIns="0" bIns="0" rtlCol="0" anchor="ctr"/>
+          <a:lstStyle/>
+          <a:p>
+            <a:pPr indent="0" marL="0">
+              <a:buNone/>
+            </a:pPr>
+            <a:r>
+              <a:rPr lang="en-US" sz="1200" dirty="0">
+                <a:solidFill>
+                  <a:schemeClr val="tx1"/>
+                </a:solidFill>
+              </a:rPr>
+              <a:t>en ventas por cada dólar invertido en medios pagados en el año</a:t>
+            </a:r>
+            <a:endParaRPr lang="en-US" sz="1200" dirty="0"/>
+          </a:p>
+        </p:txBody>
+      </p:sp>
+      <p:sp>
+        <p:nvSpPr>
+          <p:cNvPr id="12" name="AY card 1"/>
+          <p:cNvSpPr/>
+          <p:nvPr/>
+        </p:nvSpPr>
+        <p:spPr>
+          <a:xfrm>
+            <a:off x="5029200" y="1005840"/>
+            <a:ext cx="1783080" cy="1554480"/>
+          </a:xfrm>
+          <a:prstGeom prst="roundRect">
+            <a:avLst>
+              <a:gd name="adj" fmla="val 4706"/>
+            </a:avLst>
+          </a:prstGeom>
+          <a:solidFill>
+            <a:schemeClr val="bg2"/>
+          </a:solidFill>
+          <a:ln/>
+        </p:spPr>
+      </p:sp>
+      <p:sp>
+        <p:nvSpPr>
+          <p:cNvPr id="13" name="AY dot 1"/>
+          <p:cNvSpPr/>
+          <p:nvPr/>
+        </p:nvSpPr>
+        <p:spPr>
+          <a:xfrm>
+            <a:off x="5166360" y="1143000"/>
+            <a:ext cx="256032" cy="256032"/>
+          </a:xfrm>
+          <a:prstGeom prst="ellipse">
+            <a:avLst/>
+          </a:prstGeom>
+          <a:solidFill>
+            <a:schemeClr val="accent2"/>
+          </a:solidFill>
+          <a:ln/>
+        </p:spPr>
+      </p:sp>
+      <p:sp>
+        <p:nvSpPr>
+          <p:cNvPr id="14" name="Text 12"/>
+          <p:cNvSpPr txBox="1"/>
+          <p:nvPr/>
+        </p:nvSpPr>
+        <p:spPr>
+          <a:xfrm>
+            <a:off x="5486400" y="1097280"/>
+            <a:ext cx="1261872" cy="365760"/>
+          </a:xfrm>
+          <a:prstGeom prst="rect">
+            <a:avLst/>
+          </a:prstGeom>
+          <a:noFill/>
+          <a:ln/>
+        </p:spPr>
+        <p:txBody>
+          <a:bodyPr wrap="square" lIns="0" tIns="0" rIns="0" bIns="0" rtlCol="0" anchor="ctr">
+            <a:normAutofit/>
+          </a:bodyPr>
+          <a:lstStyle/>
+          <a:p>
+            <a:pPr indent="0" marL="0">
+              <a:buNone/>
+            </a:pPr>
+            <a:r>
+              <a:rPr lang="en-US" sz="1200" b="1" dirty="0">
+                <a:solidFill>
+                  <a:schemeClr val="tx1"/>
+                </a:solidFill>
+                <a:latin typeface="Cambria" pitchFamily="34" charset="0"/>
+                <a:ea typeface="Cambria" pitchFamily="34" charset="-122"/>
+                <a:cs typeface="Cambria" pitchFamily="34" charset="-120"/>
+              </a:rPr>
+              <a:t>Ticket más alto</a:t>
+            </a:r>
+            <a:endParaRPr lang="en-US" sz="1200" dirty="0"/>
+          </a:p>
+        </p:txBody>
+      </p:sp>
+      <p:sp>
+        <p:nvSpPr>
+          <p:cNvPr id="15" name="Text 13"/>
+          <p:cNvSpPr txBox="1"/>
+          <p:nvPr/>
+        </p:nvSpPr>
+        <p:spPr>
+          <a:xfrm>
+            <a:off x="5166360" y="1508760"/>
+            <a:ext cx="1536192" cy="987552"/>
+          </a:xfrm>
+          <a:prstGeom prst="rect">
+            <a:avLst/>
+          </a:prstGeom>
+          <a:noFill/>
+          <a:ln/>
+        </p:spPr>
+        <p:txBody>
+          <a:bodyPr wrap="square" lIns="0" tIns="0" rIns="0" bIns="0" rtlCol="0" anchor="t"/>
+          <a:lstStyle/>
+          <a:p>
+            <a:pPr indent="0" marL="0">
+              <a:buNone/>
+            </a:pPr>
+            <a:r>
+              <a:rPr lang="en-US" sz="1100" dirty="0">
+                <a:solidFill>
+                  <a:schemeClr val="tx1"/>
+                </a:solidFill>
+              </a:rPr>
+              <a:t>$91 promedio por orden, el más alto del portafolio</a:t>
+            </a:r>
+            <a:endParaRPr lang="en-US" sz="1100" dirty="0"/>
+          </a:p>
+        </p:txBody>
+      </p:sp>
+      <p:sp>
+        <p:nvSpPr>
+          <p:cNvPr id="16" name="AY card 2"/>
+          <p:cNvSpPr/>
+          <p:nvPr/>
+        </p:nvSpPr>
+        <p:spPr>
+          <a:xfrm>
+            <a:off x="6903720" y="1005840"/>
+            <a:ext cx="1783080" cy="1554480"/>
+          </a:xfrm>
+          <a:prstGeom prst="roundRect">
+            <a:avLst>
+              <a:gd name="adj" fmla="val 4706"/>
+            </a:avLst>
+          </a:prstGeom>
+          <a:solidFill>
+            <a:schemeClr val="bg2"/>
+          </a:solidFill>
+          <a:ln/>
+        </p:spPr>
+      </p:sp>
+      <p:sp>
+        <p:nvSpPr>
+          <p:cNvPr id="17" name="AY dot 2"/>
+          <p:cNvSpPr/>
+          <p:nvPr/>
+        </p:nvSpPr>
+        <p:spPr>
+          <a:xfrm>
+            <a:off x="7040880" y="1143000"/>
+            <a:ext cx="256032" cy="256032"/>
+          </a:xfrm>
+          <a:prstGeom prst="ellipse">
+            <a:avLst/>
+          </a:prstGeom>
+          <a:solidFill>
+            <a:schemeClr val="accent2"/>
+          </a:solidFill>
+          <a:ln/>
+        </p:spPr>
+      </p:sp>
+      <p:sp>
+        <p:nvSpPr>
+          <p:cNvPr id="18" name="Text 16"/>
+          <p:cNvSpPr txBox="1"/>
+          <p:nvPr/>
+        </p:nvSpPr>
+        <p:spPr>
+          <a:xfrm>
+            <a:off x="7360920" y="1097280"/>
+            <a:ext cx="1261872" cy="365760"/>
+          </a:xfrm>
+          <a:prstGeom prst="rect">
+            <a:avLst/>
+          </a:prstGeom>
+          <a:noFill/>
+          <a:ln/>
+        </p:spPr>
+        <p:txBody>
+          <a:bodyPr wrap="square" lIns="0" tIns="0" rIns="0" bIns="0" rtlCol="0" anchor="ctr">
+            <a:normAutofit/>
+          </a:bodyPr>
+          <a:lstStyle/>
+          <a:p>
+            <a:pPr indent="0" marL="0">
+              <a:buNone/>
+            </a:pPr>
+            <a:r>
+              <a:rPr lang="en-US" sz="1200" b="1" dirty="0">
+                <a:solidFill>
+                  <a:schemeClr val="tx1"/>
+                </a:solidFill>
+                <a:latin typeface="Cambria" pitchFamily="34" charset="0"/>
+                <a:ea typeface="Cambria" pitchFamily="34" charset="-122"/>
+                <a:cs typeface="Cambria" pitchFamily="34" charset="-120"/>
+              </a:rPr>
+              <a:t>Clientes nuevos</a:t>
+            </a:r>
+            <a:endParaRPr lang="en-US" sz="1200" dirty="0"/>
+          </a:p>
+        </p:txBody>
+      </p:sp>
+      <p:sp>
+        <p:nvSpPr>
+          <p:cNvPr id="19" name="Text 17"/>
+          <p:cNvSpPr txBox="1"/>
+          <p:nvPr/>
+        </p:nvSpPr>
+        <p:spPr>
+          <a:xfrm>
+            <a:off x="7040880" y="1508760"/>
+            <a:ext cx="1536192" cy="987552"/>
+          </a:xfrm>
+          <a:prstGeom prst="rect">
+            <a:avLst/>
+          </a:prstGeom>
+          <a:noFill/>
+          <a:ln/>
+        </p:spPr>
+        <p:txBody>
+          <a:bodyPr wrap="square" lIns="0" tIns="0" rIns="0" bIns="0" rtlCol="0" anchor="t"/>
+          <a:lstStyle/>
+          <a:p>
+            <a:pPr indent="0" marL="0">
+              <a:buNone/>
+            </a:pPr>
+            <a:r>
+              <a:rPr lang="en-US" sz="1100" dirty="0">
+                <a:solidFill>
+                  <a:schemeClr val="tx1"/>
+                </a:solidFill>
+              </a:rPr>
+              <a:t>523 en el año, a unos $49 cada uno</a:t>
+            </a:r>
+            <a:endParaRPr lang="en-US" sz="1100" dirty="0"/>
+          </a:p>
+        </p:txBody>
+      </p:sp>
+      <p:sp>
+        <p:nvSpPr>
+          <p:cNvPr id="20" name="AY card 3"/>
+          <p:cNvSpPr/>
+          <p:nvPr/>
+        </p:nvSpPr>
+        <p:spPr>
+          <a:xfrm>
+            <a:off x="5029200" y="2697480"/>
+            <a:ext cx="1783080" cy="1554480"/>
+          </a:xfrm>
+          <a:prstGeom prst="roundRect">
+            <a:avLst>
+              <a:gd name="adj" fmla="val 4706"/>
+            </a:avLst>
+          </a:prstGeom>
+          <a:solidFill>
+            <a:schemeClr val="bg2"/>
+          </a:solidFill>
+          <a:ln/>
+        </p:spPr>
+      </p:sp>
+      <p:sp>
+        <p:nvSpPr>
+          <p:cNvPr id="21" name="AY dot 3"/>
+          <p:cNvSpPr/>
+          <p:nvPr/>
+        </p:nvSpPr>
+        <p:spPr>
+          <a:xfrm>
+            <a:off x="5166360" y="2834640"/>
+            <a:ext cx="256032" cy="256032"/>
+          </a:xfrm>
+          <a:prstGeom prst="ellipse">
+            <a:avLst/>
+          </a:prstGeom>
+          <a:solidFill>
+            <a:schemeClr val="accent2"/>
+          </a:solidFill>
+          <a:ln/>
+        </p:spPr>
+      </p:sp>
+      <p:sp>
+        <p:nvSpPr>
+          <p:cNvPr id="22" name="Text 20"/>
+          <p:cNvSpPr txBox="1"/>
+          <p:nvPr/>
+        </p:nvSpPr>
+        <p:spPr>
+          <a:xfrm>
+            <a:off x="5486400" y="2788920"/>
+            <a:ext cx="1261872" cy="365760"/>
+          </a:xfrm>
+          <a:prstGeom prst="rect">
+            <a:avLst/>
+          </a:prstGeom>
+          <a:noFill/>
+          <a:ln/>
+        </p:spPr>
+        <p:txBody>
+          <a:bodyPr wrap="square" lIns="0" tIns="0" rIns="0" bIns="0" rtlCol="0" anchor="ctr">
+            <a:normAutofit/>
+          </a:bodyPr>
+          <a:lstStyle/>
+          <a:p>
+            <a:pPr indent="0" marL="0">
+              <a:buNone/>
+            </a:pPr>
+            <a:r>
+              <a:rPr lang="en-US" sz="1200" b="1" dirty="0">
+                <a:solidFill>
+                  <a:schemeClr val="tx1"/>
+                </a:solidFill>
+                <a:latin typeface="Cambria" pitchFamily="34" charset="0"/>
+                <a:ea typeface="Cambria" pitchFamily="34" charset="-122"/>
+                <a:cs typeface="Cambria" pitchFamily="34" charset="-120"/>
+              </a:rPr>
+              <a:t>Ventas sanas</a:t>
+            </a:r>
+            <a:endParaRPr lang="en-US" sz="1200" dirty="0"/>
+          </a:p>
+        </p:txBody>
+      </p:sp>
+      <p:sp>
+        <p:nvSpPr>
+          <p:cNvPr id="23" name="Text 21"/>
+          <p:cNvSpPr txBox="1"/>
+          <p:nvPr/>
+        </p:nvSpPr>
+        <p:spPr>
+          <a:xfrm>
+            <a:off x="5166360" y="3200400"/>
+            <a:ext cx="1536192" cy="987552"/>
+          </a:xfrm>
+          <a:prstGeom prst="rect">
+            <a:avLst/>
+          </a:prstGeom>
+          <a:noFill/>
+          <a:ln/>
+        </p:spPr>
+        <p:txBody>
+          <a:bodyPr wrap="square" lIns="0" tIns="0" rIns="0" bIns="0" rtlCol="0" anchor="t"/>
+          <a:lstStyle/>
+          <a:p>
+            <a:pPr indent="0" marL="0">
+              <a:buNone/>
+            </a:pPr>
+            <a:r>
+              <a:rPr lang="en-US" sz="1100" dirty="0">
+                <a:solidFill>
+                  <a:schemeClr val="tx1"/>
+                </a:solidFill>
+              </a:rPr>
+              <a:t>Descuentos de solo 5,7% y devoluciones de 3,5% sobre ventas</a:t>
+            </a:r>
+            <a:endParaRPr lang="en-US" sz="1100" dirty="0"/>
+          </a:p>
+        </p:txBody>
+      </p:sp>
+      <p:sp>
+        <p:nvSpPr>
+          <p:cNvPr id="24" name="AY card 4"/>
+          <p:cNvSpPr/>
+          <p:nvPr/>
+        </p:nvSpPr>
+        <p:spPr>
+          <a:xfrm>
+            <a:off x="6903720" y="2697480"/>
+            <a:ext cx="1783080" cy="1554480"/>
+          </a:xfrm>
+          <a:prstGeom prst="roundRect">
+            <a:avLst>
+              <a:gd name="adj" fmla="val 4706"/>
+            </a:avLst>
+          </a:prstGeom>
+          <a:solidFill>
+            <a:schemeClr val="bg2"/>
+          </a:solidFill>
+          <a:ln/>
+        </p:spPr>
+      </p:sp>
+      <p:sp>
+        <p:nvSpPr>
+          <p:cNvPr id="25" name="AY dot 4"/>
+          <p:cNvSpPr/>
+          <p:nvPr/>
+        </p:nvSpPr>
+        <p:spPr>
+          <a:xfrm>
+            <a:off x="7040880" y="2834640"/>
+            <a:ext cx="256032" cy="256032"/>
+          </a:xfrm>
+          <a:prstGeom prst="ellipse">
+            <a:avLst/>
+          </a:prstGeom>
+          <a:solidFill>
+            <a:schemeClr val="accent2"/>
+          </a:solidFill>
+          <a:ln/>
+        </p:spPr>
+      </p:sp>
+      <p:sp>
+        <p:nvSpPr>
+          <p:cNvPr id="26" name="Text 24"/>
+          <p:cNvSpPr txBox="1"/>
+          <p:nvPr/>
+        </p:nvSpPr>
+        <p:spPr>
+          <a:xfrm>
+            <a:off x="7360920" y="2788920"/>
+            <a:ext cx="1261872" cy="365760"/>
+          </a:xfrm>
+          <a:prstGeom prst="rect">
+            <a:avLst/>
+          </a:prstGeom>
+          <a:noFill/>
+          <a:ln/>
+        </p:spPr>
+        <p:txBody>
+          <a:bodyPr wrap="square" lIns="0" tIns="0" rIns="0" bIns="0" rtlCol="0" anchor="ctr">
+            <a:normAutofit/>
+          </a:bodyPr>
+          <a:lstStyle/>
+          <a:p>
+            <a:pPr indent="0" marL="0">
+              <a:buNone/>
+            </a:pPr>
+            <a:r>
+              <a:rPr lang="en-US" sz="1200" b="1" dirty="0">
+                <a:solidFill>
+                  <a:schemeClr val="tx1"/>
+                </a:solidFill>
+                <a:latin typeface="Cambria" pitchFamily="34" charset="0"/>
+                <a:ea typeface="Cambria" pitchFamily="34" charset="-122"/>
+                <a:cs typeface="Cambria" pitchFamily="34" charset="-120"/>
+              </a:rPr>
+              <a:t>Meta en octubre</a:t>
+            </a:r>
+            <a:endParaRPr lang="en-US" sz="1200" dirty="0"/>
+          </a:p>
+        </p:txBody>
+      </p:sp>
+      <p:sp>
+        <p:nvSpPr>
+          <p:cNvPr id="27" name="Text 25"/>
+          <p:cNvSpPr txBox="1"/>
+          <p:nvPr/>
+        </p:nvSpPr>
+        <p:spPr>
+          <a:xfrm>
+            <a:off x="7040880" y="3200400"/>
+            <a:ext cx="1536192" cy="987552"/>
+          </a:xfrm>
+          <a:prstGeom prst="rect">
+            <a:avLst/>
+          </a:prstGeom>
+          <a:noFill/>
+          <a:ln/>
+        </p:spPr>
+        <p:txBody>
+          <a:bodyPr wrap="square" lIns="0" tIns="0" rIns="0" bIns="0" rtlCol="0" anchor="t"/>
+          <a:lstStyle/>
+          <a:p>
+            <a:pPr indent="0" marL="0">
+              <a:buNone/>
+            </a:pPr>
+            <a:r>
+              <a:rPr lang="en-US" sz="1100" dirty="0">
+                <a:solidFill>
+                  <a:schemeClr val="tx1"/>
+                </a:solidFill>
+              </a:rPr>
+              <a:t>Clientes nuevos a $26 por compra, la campaña más eficiente del portafolio</a:t>
+            </a:r>
+            <a:endParaRPr lang="en-US" sz="1100" dirty="0"/>
+          </a:p>
+        </p:txBody>
+      </p:sp>
+      <p:sp>
+        <p:nvSpPr>
+          <p:cNvPr id="28" name="Text 26"/>
+          <p:cNvSpPr txBox="1"/>
+          <p:nvPr/>
+        </p:nvSpPr>
+        <p:spPr>
+          <a:xfrm>
+            <a:off x="457200" y="4434840"/>
+            <a:ext cx="8229600" cy="274320"/>
+          </a:xfrm>
+          <a:prstGeom prst="rect">
+            <a:avLst/>
+          </a:prstGeom>
+          <a:noFill/>
+          <a:ln/>
+        </p:spPr>
+        <p:txBody>
+          <a:bodyPr wrap="square" lIns="0" tIns="0" rIns="0" bIns="0" rtlCol="0" anchor="ctr"/>
+          <a:lstStyle/>
+          <a:p>
+            <a:pPr indent="0" marL="0">
+              <a:buNone/>
+            </a:pPr>
+            <a:r>
+              <a:rPr lang="en-US" sz="900" i="1" dirty="0">
+                <a:solidFill>
+                  <a:schemeClr val="accent4"/>
+                </a:solidFill>
+              </a:rPr>
+              <a:t>Fuente: dashboard Shopify DTC de Ayoba (1 ene – 13 oct 2026) y Meta Ads Manager (6–13 oct).</a:t>
+            </a:r>
+            <a:endParaRPr lang="en-US" sz="900" dirty="0"/>
+          </a:p>
+        </p:txBody>
+      </p:sp>
+      <p:sp>
+        <p:nvSpPr>
+          <p:cNvPr id="25" name="Slide Number Placeholder 0"/>
+          <p:cNvSpPr>
+            <a:spLocks noGrp="1"/>
+          </p:cNvSpPr>
+          <p:nvPr>
+            <p:ph type="sldNum" sz="quarter" idx="4294967295"/>
+          </p:nvPr>
+        </p:nvSpPr>
+        <p:spPr>
+          <a:xfrm>
+            <a:off x="8321040" y="4800600"/>
+            <a:ext cx="365760" cy="228600"/>
+          </a:xfrm>
+          <a:prstGeom prst="rect">
+            <a:avLst/>
+          </a:prstGeom>
+          <a:extLst>
+            <a:ext uri="{C572A759-6A51-4108-AA02-DFA0A04FC94B}">
+              <ma14:wrappingTextBoxFlag xmlns:ma14="http://schemas.microsoft.com/office/mac/drawingml/2011/main" val="0"/>
+            </a:ext>
+          </a:extLst>
+        </p:spPr>
+        <p:txBody>
+          <a:bodyPr/>
+          <a:lstStyle>
+            <a:lvl1pPr>
+              <a:defRPr sz="900">
+                <a:solidFill>
+                  <a:schemeClr val="accent4"/>
+                </a:solidFill>
+              </a:defRPr>
+            </a:lvl1pPr>
+          </a:lstStyle>
+          <a:p>
+            <a:pPr algn="r"/>
+            <a:fld id="{F7021451-1387-4CA6-816F-3879F97B5CBC}" type="slidenum">
+              <a:rPr b="0" lang="en-US"/>
+              <a:t>5</a:t>
+            </a:fld>
+            <a:endParaRPr lang="en-US"/>
+          </a:p>
+        </p:txBody>
+      </p:sp>
+    </p:spTree>
+  </p:cSld>
+  <p:clrMapOvr>
+    <a:masterClrMapping/>
+  </p:clrMapOvr>
+</p:sld>
+</file>
+
+<file path=ppt/slides/slide6.xml><?xml version="1.0" encoding="utf-8"?>
+<p:sld xmlns:a="http://schemas.openxmlformats.org/drawingml/2006/main" xmlns:r="http://schemas.openxmlformats.org/officeDocument/2006/relationships" xmlns:p="http://schemas.openxmlformats.org/presentationml/2006/main">
+  <p:cSld name="Slide 6">
+    <p:spTree>
+      <p:nvGrpSpPr>
+        <p:cNvPr id="1" name=""/>
+        <p:cNvGrpSpPr/>
+        <p:nvPr/>
+      </p:nvGrpSpPr>
+      <p:grpSpPr>
+        <a:xfrm>
+          <a:off x="0" y="0"/>
+          <a:ext cx="0" cy="0"/>
+          <a:chOff x="0" y="0"/>
+          <a:chExt cx="0" cy="0"/>
+        </a:xfrm>
+      </p:grpSpPr>
+      <p:sp>
+        <p:nvSpPr>
+          <p:cNvPr id="2" name="Text 0"/>
+          <p:cNvSpPr/>
+          <p:nvPr>
+            <p:ph idx="100" type="title" hasCustomPrompt="1"/>
+          </p:nvPr>
+        </p:nvSpPr>
+        <p:spPr>
+          <a:xfrm>
+            <a:off x="457200" y="274320"/>
+            <a:ext cx="8229600" cy="594360"/>
+          </a:xfrm>
+          <a:prstGeom prst="rect">
+            <a:avLst/>
+          </a:prstGeom>
+          <a:noFill/>
+          <a:ln/>
+        </p:spPr>
+        <p:txBody>
+          <a:bodyPr wrap="square" lIns="0" tIns="0" rIns="0" bIns="0" rtlCol="0" anchor="ctr"/>
+          <a:lstStyle/>
+          <a:p>
+            <a:pPr algn="l" indent="0" marL="0">
+              <a:buNone/>
+            </a:pPr>
+            <a:r>
+              <a:rPr lang="en-US" sz="2600" b="1" dirty="0">
+                <a:solidFill>
+                  <a:schemeClr val="tx1"/>
+                </a:solidFill>
+                <a:latin typeface="Cambria" pitchFamily="34" charset="0"/>
+                <a:ea typeface="Cambria" pitchFamily="34" charset="-122"/>
+                <a:cs typeface="Cambria" pitchFamily="34" charset="-120"/>
+              </a:rPr>
               <a:t>Lo comprometido el 9 de octubre: estado por marca</a:t>
             </a:r>
             <a:endParaRPr lang="en-US" sz="2600" dirty="0"/>
@@ -5564,7 +6574,7 @@
       </p:sp>
       <p:graphicFrame>
         <p:nvGraphicFramePr>
-          <p:cNvPr id="6" name="Commitment tracker"/>
+          <p:cNvPr id="7" name="Commitment tracker"/>
           <p:cNvGraphicFramePr>
             <a:graphicFrameLocks noGrp="1"/>
           </p:cNvGraphicFramePr>
@@ -8373,381 +9383,6 @@
             <a:pPr algn="r"/>
             <a:fld id="{F7021451-1387-4CA6-816F-3879F97B5CBC}" type="slidenum">
               <a:rPr b="0" lang="en-US"/>
-              <a:t>5</a:t>
-            </a:fld>
-            <a:endParaRPr lang="en-US"/>
-          </a:p>
-        </p:txBody>
-      </p:sp>
-    </p:spTree>
-  </p:cSld>
-  <p:clrMapOvr>
-    <a:masterClrMapping/>
-  </p:clrMapOvr>
-</p:sld>
-</file>
-
-<file path=ppt/slides/slide6.xml><?xml version="1.0" encoding="utf-8"?>
-<p:sld xmlns:a="http://schemas.openxmlformats.org/drawingml/2006/main" xmlns:r="http://schemas.openxmlformats.org/officeDocument/2006/relationships" xmlns:p="http://schemas.openxmlformats.org/presentationml/2006/main">
-  <p:cSld name="Slide 6">
-    <p:spTree>
-      <p:nvGrpSpPr>
-        <p:cNvPr id="1" name=""/>
-        <p:cNvGrpSpPr/>
-        <p:nvPr/>
-      </p:nvGrpSpPr>
-      <p:grpSpPr>
-        <a:xfrm>
-          <a:off x="0" y="0"/>
-          <a:ext cx="0" cy="0"/>
-          <a:chOff x="0" y="0"/>
-          <a:chExt cx="0" cy="0"/>
-        </a:xfrm>
-      </p:grpSpPr>
-      <p:sp>
-        <p:nvSpPr>
-          <p:cNvPr id="2" name="Text 0"/>
-          <p:cNvSpPr/>
-          <p:nvPr>
-            <p:ph idx="100" type="title" hasCustomPrompt="1"/>
-          </p:nvPr>
-        </p:nvSpPr>
-        <p:spPr>
-          <a:xfrm>
-            <a:off x="457200" y="274320"/>
-            <a:ext cx="8229600" cy="594360"/>
-          </a:xfrm>
-          <a:prstGeom prst="rect">
-            <a:avLst/>
-          </a:prstGeom>
-          <a:noFill/>
-          <a:ln/>
-        </p:spPr>
-        <p:txBody>
-          <a:bodyPr wrap="square" lIns="0" tIns="0" rIns="0" bIns="0" rtlCol="0" anchor="ctr"/>
-          <a:lstStyle/>
-          <a:p>
-            <a:pPr algn="l" indent="0" marL="0">
-              <a:buNone/>
-            </a:pPr>
-            <a:r>
-              <a:rPr lang="en-US" sz="2600" b="1" dirty="0">
-                <a:solidFill>
-                  <a:schemeClr val="tx1"/>
-                </a:solidFill>
-                <a:latin typeface="Cambria" pitchFamily="34" charset="0"/>
-                <a:ea typeface="Cambria" pitchFamily="34" charset="-122"/>
-                <a:cs typeface="Cambria" pitchFamily="34" charset="-120"/>
-              </a:rPr>
-              <a:t>Meta: más volumen, eficiencia todavía en construcción</a:t>
-            </a:r>
-            <a:endParaRPr lang="en-US" sz="2600" dirty="0"/>
-          </a:p>
-        </p:txBody>
-      </p:sp>
-      <p:graphicFrame>
-        <p:nvGraphicFramePr>
-          <p:cNvPr id="3" name="Purchases chart" descr=""/>
-          <p:cNvGraphicFramePr/>
-          <p:nvPr/>
-        </p:nvGraphicFramePr>
-        <p:xfrm>
-          <a:off x="457200" y="960120"/>
-          <a:ext cx="4206240" cy="3429000"/>
-        </p:xfrm>
-        <a:graphic xmlns:a="http://schemas.openxmlformats.org/drawingml/2006/main">
-          <a:graphicData uri="http://schemas.openxmlformats.org/drawingml/2006/chart">
-            <c:chart xmlns:c="http://schemas.openxmlformats.org/drawingml/2006/chart" r:id="rId1"/>
-          </a:graphicData>
-        </a:graphic>
-      </p:graphicFrame>
-      <p:sp>
-        <p:nvSpPr>
-          <p:cNvPr id="4" name="Text 1"/>
-          <p:cNvSpPr txBox="1"/>
-          <p:nvPr/>
-        </p:nvSpPr>
-        <p:spPr>
-          <a:xfrm>
-            <a:off x="4937760" y="1005840"/>
-            <a:ext cx="3749040" cy="320040"/>
-          </a:xfrm>
-          <a:prstGeom prst="rect">
-            <a:avLst/>
-          </a:prstGeom>
-          <a:noFill/>
-          <a:ln/>
-        </p:spPr>
-        <p:txBody>
-          <a:bodyPr wrap="square" lIns="0" tIns="0" rIns="0" bIns="0" rtlCol="0" anchor="ctr"/>
-          <a:lstStyle/>
-          <a:p>
-            <a:pPr indent="0" marL="0">
-              <a:buNone/>
-            </a:pPr>
-            <a:r>
-              <a:rPr lang="en-US" sz="1500" b="1" dirty="0">
-                <a:solidFill>
-                  <a:schemeClr val="accent2"/>
-                </a:solidFill>
-                <a:latin typeface="Cambria" pitchFamily="34" charset="0"/>
-                <a:ea typeface="Cambria" pitchFamily="34" charset="-122"/>
-                <a:cs typeface="Cambria" pitchFamily="34" charset="-120"/>
-              </a:rPr>
-              <a:t>Lo que funciona</a:t>
-            </a:r>
-            <a:endParaRPr lang="en-US" sz="1500" dirty="0"/>
-          </a:p>
-        </p:txBody>
-      </p:sp>
-      <p:sp>
-        <p:nvSpPr>
-          <p:cNvPr id="5" name="Text 2"/>
-          <p:cNvSpPr txBox="1"/>
-          <p:nvPr/>
-        </p:nvSpPr>
-        <p:spPr>
-          <a:xfrm>
-            <a:off x="4937760" y="1371600"/>
-            <a:ext cx="3749040" cy="1152144"/>
-          </a:xfrm>
-          <a:prstGeom prst="rect">
-            <a:avLst/>
-          </a:prstGeom>
-          <a:noFill/>
-          <a:ln/>
-        </p:spPr>
-        <p:txBody>
-          <a:bodyPr wrap="square" lIns="0" tIns="0" rIns="0" bIns="0" rtlCol="0" anchor="t"/>
-          <a:lstStyle/>
-          <a:p>
-            <a:pPr marL="342900" indent="-342900">
-              <a:spcAft>
-                <a:spcPts val="400"/>
-              </a:spcAft>
-              <a:buSzPct val="100000"/>
-              <a:buChar char="•"/>
-            </a:pPr>
-            <a:r>
-              <a:rPr lang="en-US" sz="1200" dirty="0">
-                <a:solidFill>
-                  <a:schemeClr val="tx1"/>
-                </a:solidFill>
-              </a:rPr>
-              <a:t>Ayoba, clientes nuevos: $26 por compra, retorno 1,6x</a:t>
-            </a:r>
-            <a:endParaRPr lang="en-US" sz="1200" dirty="0"/>
-          </a:p>
-          <a:p>
-            <a:pPr marL="342900" indent="-342900">
-              <a:spcAft>
-                <a:spcPts val="400"/>
-              </a:spcAft>
-              <a:buSzPct val="100000"/>
-              <a:buChar char="•"/>
-            </a:pPr>
-            <a:r>
-              <a:rPr lang="en-US" sz="1200" dirty="0">
-                <a:solidFill>
-                  <a:schemeClr val="tx1"/>
-                </a:solidFill>
-              </a:rPr>
-              <a:t>Brooklyn, retargeting dinámico: $26 por compra, retorno 2,9x</a:t>
-            </a:r>
-            <a:endParaRPr lang="en-US" sz="1200" dirty="0"/>
-          </a:p>
-          <a:p>
-            <a:pPr marL="342900" indent="-342900">
-              <a:spcAft>
-                <a:spcPts val="400"/>
-              </a:spcAft>
-              <a:buSzPct val="100000"/>
-              <a:buChar char="•"/>
-            </a:pPr>
-            <a:r>
-              <a:rPr lang="en-US" sz="1200" dirty="0">
-                <a:solidFill>
-                  <a:schemeClr val="tx1"/>
-                </a:solidFill>
-              </a:rPr>
-              <a:t>Beg &amp; Barker, retargeting dinámico: retorno 3,1x</a:t>
-            </a:r>
-            <a:endParaRPr lang="en-US" sz="1200" dirty="0"/>
-          </a:p>
-        </p:txBody>
-      </p:sp>
-      <p:sp>
-        <p:nvSpPr>
-          <p:cNvPr id="6" name="Text 3"/>
-          <p:cNvSpPr txBox="1"/>
-          <p:nvPr/>
-        </p:nvSpPr>
-        <p:spPr>
-          <a:xfrm>
-            <a:off x="4937760" y="2697480"/>
-            <a:ext cx="3749040" cy="320040"/>
-          </a:xfrm>
-          <a:prstGeom prst="rect">
-            <a:avLst/>
-          </a:prstGeom>
-          <a:noFill/>
-          <a:ln/>
-        </p:spPr>
-        <p:txBody>
-          <a:bodyPr wrap="square" lIns="0" tIns="0" rIns="0" bIns="0" rtlCol="0" anchor="ctr"/>
-          <a:lstStyle/>
-          <a:p>
-            <a:pPr indent="0" marL="0">
-              <a:buNone/>
-            </a:pPr>
-            <a:r>
-              <a:rPr lang="en-US" sz="1500" b="1" dirty="0">
-                <a:solidFill>
-                  <a:schemeClr val="accent1"/>
-                </a:solidFill>
-                <a:latin typeface="Cambria" pitchFamily="34" charset="0"/>
-                <a:ea typeface="Cambria" pitchFamily="34" charset="-122"/>
-                <a:cs typeface="Cambria" pitchFamily="34" charset="-120"/>
-              </a:rPr>
-              <a:t>Lo que estamos corrigiendo</a:t>
-            </a:r>
-            <a:endParaRPr lang="en-US" sz="1500" dirty="0"/>
-          </a:p>
-        </p:txBody>
-      </p:sp>
-      <p:sp>
-        <p:nvSpPr>
-          <p:cNvPr id="7" name="Text 4"/>
-          <p:cNvSpPr txBox="1"/>
-          <p:nvPr/>
-        </p:nvSpPr>
-        <p:spPr>
-          <a:xfrm>
-            <a:off x="4937760" y="3063240"/>
-            <a:ext cx="3749040" cy="768096"/>
-          </a:xfrm>
-          <a:prstGeom prst="rect">
-            <a:avLst/>
-          </a:prstGeom>
-          <a:noFill/>
-          <a:ln/>
-        </p:spPr>
-        <p:txBody>
-          <a:bodyPr wrap="square" lIns="0" tIns="0" rIns="0" bIns="0" rtlCol="0" anchor="t"/>
-          <a:lstStyle/>
-          <a:p>
-            <a:pPr marL="342900" indent="-342900">
-              <a:spcAft>
-                <a:spcPts val="400"/>
-              </a:spcAft>
-              <a:buSzPct val="100000"/>
-              <a:buChar char="•"/>
-            </a:pPr>
-            <a:r>
-              <a:rPr lang="en-US" sz="1200" dirty="0">
-                <a:solidFill>
-                  <a:schemeClr val="tx1"/>
-                </a:solidFill>
-              </a:rPr>
-              <a:t>Brooklyn, clientes nuevos: $170 por compra → presupuesto recortado el 13 oct</a:t>
-            </a:r>
-            <a:endParaRPr lang="en-US" sz="1200" dirty="0"/>
-          </a:p>
-          <a:p>
-            <a:pPr marL="342900" indent="-342900">
-              <a:spcAft>
-                <a:spcPts val="400"/>
-              </a:spcAft>
-              <a:buSzPct val="100000"/>
-              <a:buChar char="•"/>
-            </a:pPr>
-            <a:r>
-              <a:rPr lang="en-US" sz="1200" dirty="0">
-                <a:solidFill>
-                  <a:schemeClr val="tx1"/>
-                </a:solidFill>
-              </a:rPr>
-              <a:t>Retargeting nuevo (desde el 10 oct) aún en aprendizaje; le subimos presupuesto en Ayoba y Beg &amp; Barker</a:t>
-            </a:r>
-            <a:endParaRPr lang="en-US" sz="1200" dirty="0"/>
-          </a:p>
-        </p:txBody>
-      </p:sp>
-      <p:sp>
-        <p:nvSpPr>
-          <p:cNvPr id="8" name="Text 5"/>
-          <p:cNvSpPr txBox="1"/>
-          <p:nvPr/>
-        </p:nvSpPr>
-        <p:spPr>
-          <a:xfrm>
-            <a:off x="457200" y="4434840"/>
-            <a:ext cx="8229600" cy="274320"/>
-          </a:xfrm>
-          <a:prstGeom prst="rect">
-            <a:avLst/>
-          </a:prstGeom>
-          <a:noFill/>
-          <a:ln/>
-        </p:spPr>
-        <p:txBody>
-          <a:bodyPr wrap="square" lIns="0" tIns="0" rIns="0" bIns="0" rtlCol="0" anchor="ctr"/>
-          <a:lstStyle/>
-          <a:p>
-            <a:pPr indent="0" marL="0">
-              <a:buNone/>
-            </a:pPr>
-            <a:r>
-              <a:rPr lang="en-US" sz="900" i="1" dirty="0">
-                <a:solidFill>
-                  <a:schemeClr val="accent4"/>
-                </a:solidFill>
-              </a:rPr>
-              <a:t>Fuente: Meta Ads Manager, compras y retorno atribuidos por la plataforma. No incluye Google Ads ni el total de ventas de la tienda (ver dashboards).</a:t>
-            </a:r>
-            <a:endParaRPr lang="en-US" sz="900" dirty="0"/>
-          </a:p>
-        </p:txBody>
-      </p:sp>
-      <p:sp>
-        <p:nvSpPr>
-          <p:cNvPr id="25" name="Slide Number Placeholder 0"/>
-          <p:cNvSpPr>
-            <a:spLocks noGrp="1"/>
-          </p:cNvSpPr>
-          <p:nvPr>
-            <p:ph type="sldNum" sz="quarter" idx="4294967295"/>
-          </p:nvPr>
-        </p:nvSpPr>
-        <p:spPr>
-          <a:xfrm>
-            <a:off x="8321040" y="4800600"/>
-            <a:ext cx="365760" cy="228600"/>
-          </a:xfrm>
-          <a:prstGeom prst="rect">
-            <a:avLst/>
-          </a:prstGeom>
-          <a:extLst>
-            <a:ext uri="{C572A759-6A51-4108-AA02-DFA0A04FC94B}">
-              <ma14:wrappingTextBoxFlag xmlns:ma14="http://schemas.microsoft.com/office/mac/drawingml/2011/main" val="0"/>
-            </a:ext>
-          </a:extLst>
-        </p:spPr>
-        <p:txBody>
-          <a:bodyPr/>
-          <a:lstStyle>
-            <a:lvl1pPr>
-              <a:defRPr sz="900">
-                <a:solidFill>
-                  <a:schemeClr val="accent4"/>
-                </a:solidFill>
-              </a:defRPr>
-            </a:lvl1pPr>
-          </a:lstStyle>
-          <a:p>
-            <a:pPr algn="r"/>
-            <a:fld id="{F7021451-1387-4CA6-816F-3879F97B5CBC}" type="slidenum">
-              <a:rPr b="0" lang="en-US"/>
               <a:t>6</a:t>
             </a:fld>
             <a:endParaRPr lang="en-US"/>
@@ -8814,207 +9449,21 @@
                 <a:ea typeface="Cambria" pitchFamily="34" charset="-122"/>
                 <a:cs typeface="Cambria" pitchFamily="34" charset="-120"/>
               </a:rPr>
-              <a:t>Brooklyn: email y SMS ya generan ventas recurrentes</a:t>
+              <a:t>Meta: más volumen, eficiencia todavía en construcción</a:t>
             </a:r>
             <a:endParaRPr lang="en-US" sz="2600" dirty="0"/>
-          </a:p>
-        </p:txBody>
-      </p:sp>
-      <p:sp>
-        <p:nvSpPr>
-          <p:cNvPr id="3" name="Retention stat panel"/>
-          <p:cNvSpPr/>
-          <p:nvPr/>
-        </p:nvSpPr>
-        <p:spPr>
-          <a:xfrm>
-            <a:off x="457200" y="1005840"/>
-            <a:ext cx="3108960" cy="3291840"/>
-          </a:xfrm>
-          <a:prstGeom prst="roundRect">
-            <a:avLst>
-              <a:gd name="adj" fmla="val 2353"/>
-            </a:avLst>
-          </a:prstGeom>
-          <a:solidFill>
-            <a:schemeClr val="tx1"/>
-          </a:solidFill>
-          <a:ln/>
-        </p:spPr>
-      </p:sp>
-      <p:sp>
-        <p:nvSpPr>
-          <p:cNvPr id="4" name="Text 2"/>
-          <p:cNvSpPr txBox="1"/>
-          <p:nvPr/>
-        </p:nvSpPr>
-        <p:spPr>
-          <a:xfrm>
-            <a:off x="685800" y="1188720"/>
-            <a:ext cx="2651760" cy="685800"/>
-          </a:xfrm>
-          <a:prstGeom prst="rect">
-            <a:avLst/>
-          </a:prstGeom>
-          <a:noFill/>
-          <a:ln/>
-        </p:spPr>
-        <p:txBody>
-          <a:bodyPr wrap="square" lIns="0" tIns="0" rIns="0" bIns="0" rtlCol="0" anchor="ctr"/>
-          <a:lstStyle/>
-          <a:p>
-            <a:pPr indent="0" marL="0">
-              <a:buNone/>
-            </a:pPr>
-            <a:r>
-              <a:rPr lang="en-US" sz="4000" b="1" dirty="0">
-                <a:solidFill>
-                  <a:schemeClr val="bg1"/>
-                </a:solidFill>
-                <a:latin typeface="Cambria" pitchFamily="34" charset="0"/>
-                <a:ea typeface="Cambria" pitchFamily="34" charset="-122"/>
-                <a:cs typeface="Cambria" pitchFamily="34" charset="-120"/>
-              </a:rPr>
-              <a:t>$2.074</a:t>
-            </a:r>
-            <a:endParaRPr lang="en-US" sz="4000" dirty="0"/>
-          </a:p>
-        </p:txBody>
-      </p:sp>
-      <p:sp>
-        <p:nvSpPr>
-          <p:cNvPr id="5" name="Text 3"/>
-          <p:cNvSpPr txBox="1"/>
-          <p:nvPr/>
-        </p:nvSpPr>
-        <p:spPr>
-          <a:xfrm>
-            <a:off x="685800" y="1874520"/>
-            <a:ext cx="2651760" cy="457200"/>
-          </a:xfrm>
-          <a:prstGeom prst="rect">
-            <a:avLst/>
-          </a:prstGeom>
-          <a:noFill/>
-          <a:ln/>
-        </p:spPr>
-        <p:txBody>
-          <a:bodyPr wrap="square" lIns="0" tIns="0" rIns="0" bIns="0" rtlCol="0" anchor="ctr"/>
-          <a:lstStyle/>
-          <a:p>
-            <a:pPr indent="0" marL="0">
-              <a:buNone/>
-            </a:pPr>
-            <a:r>
-              <a:rPr lang="en-US" sz="1200" dirty="0">
-                <a:solidFill>
-                  <a:schemeClr val="accent6"/>
-                </a:solidFill>
-              </a:rPr>
-              <a:t>en ventas atribuidas a email y SMS,</a:t>
-            </a:r>
-            <a:endParaRPr lang="en-US" sz="1200" dirty="0"/>
-          </a:p>
-          <a:p>
-            <a:pPr indent="0" marL="0">
-              <a:buNone/>
-            </a:pPr>
-            <a:r>
-              <a:rPr lang="en-US" sz="1200" dirty="0">
-                <a:solidFill>
-                  <a:schemeClr val="accent6"/>
-                </a:solidFill>
-              </a:rPr>
-              <a:t>1–14 oct</a:t>
-            </a:r>
-            <a:endParaRPr lang="en-US" sz="1200" dirty="0"/>
-          </a:p>
-        </p:txBody>
-      </p:sp>
-      <p:sp>
-        <p:nvSpPr>
-          <p:cNvPr id="6" name="Text 4"/>
-          <p:cNvSpPr txBox="1"/>
-          <p:nvPr/>
-        </p:nvSpPr>
-        <p:spPr>
-          <a:xfrm>
-            <a:off x="685800" y="2468880"/>
-            <a:ext cx="2651760" cy="685800"/>
-          </a:xfrm>
-          <a:prstGeom prst="rect">
-            <a:avLst/>
-          </a:prstGeom>
-          <a:noFill/>
-          <a:ln/>
-        </p:spPr>
-        <p:txBody>
-          <a:bodyPr wrap="square" lIns="0" tIns="0" rIns="0" bIns="0" rtlCol="0" anchor="ctr"/>
-          <a:lstStyle/>
-          <a:p>
-            <a:pPr indent="0" marL="0">
-              <a:buNone/>
-            </a:pPr>
-            <a:r>
-              <a:rPr lang="en-US" sz="4000" b="1" dirty="0">
-                <a:solidFill>
-                  <a:schemeClr val="bg1"/>
-                </a:solidFill>
-                <a:latin typeface="Cambria" pitchFamily="34" charset="0"/>
-                <a:ea typeface="Cambria" pitchFamily="34" charset="-122"/>
-                <a:cs typeface="Cambria" pitchFamily="34" charset="-120"/>
-              </a:rPr>
-              <a:t>31</a:t>
-            </a:r>
-            <a:endParaRPr lang="en-US" sz="4000" dirty="0"/>
-          </a:p>
-        </p:txBody>
-      </p:sp>
-      <p:sp>
-        <p:nvSpPr>
-          <p:cNvPr id="7" name="Text 5"/>
-          <p:cNvSpPr txBox="1"/>
-          <p:nvPr/>
-        </p:nvSpPr>
-        <p:spPr>
-          <a:xfrm>
-            <a:off x="685800" y="3154680"/>
-            <a:ext cx="2651760" cy="457200"/>
-          </a:xfrm>
-          <a:prstGeom prst="rect">
-            <a:avLst/>
-          </a:prstGeom>
-          <a:noFill/>
-          <a:ln/>
-        </p:spPr>
-        <p:txBody>
-          <a:bodyPr wrap="square" lIns="0" tIns="0" rIns="0" bIns="0" rtlCol="0" anchor="ctr"/>
-          <a:lstStyle/>
-          <a:p>
-            <a:pPr indent="0" marL="0">
-              <a:buNone/>
-            </a:pPr>
-            <a:r>
-              <a:rPr lang="en-US" sz="1200" dirty="0">
-                <a:solidFill>
-                  <a:schemeClr val="accent6"/>
-                </a:solidFill>
-              </a:rPr>
-              <a:t>órdenes; 17 llegan solas por flujos automáticos</a:t>
-            </a:r>
-            <a:endParaRPr lang="en-US" sz="1200" dirty="0"/>
           </a:p>
         </p:txBody>
       </p:sp>
       <p:graphicFrame>
         <p:nvGraphicFramePr>
-          <p:cNvPr id="8" name="Sales by program chart" descr=""/>
+          <p:cNvPr id="3" name="Purchases chart" descr=""/>
           <p:cNvGraphicFramePr/>
           <p:nvPr/>
         </p:nvGraphicFramePr>
         <p:xfrm>
-          <a:off x="3840480" y="960120"/>
-          <a:ext cx="4846320" cy="2743200"/>
+          <a:off x="457200" y="960120"/>
+          <a:ext cx="4206240" cy="3429000"/>
         </p:xfrm>
         <a:graphic xmlns:a="http://schemas.openxmlformats.org/drawingml/2006/main">
           <a:graphicData uri="http://schemas.openxmlformats.org/drawingml/2006/chart">
@@ -9024,14 +9473,53 @@
       </p:graphicFrame>
       <p:sp>
         <p:nvSpPr>
-          <p:cNvPr id="9" name="Text 6"/>
+          <p:cNvPr id="4" name="Text 1"/>
           <p:cNvSpPr txBox="1"/>
           <p:nvPr/>
         </p:nvSpPr>
         <p:spPr>
           <a:xfrm>
-            <a:off x="3931920" y="3749040"/>
-            <a:ext cx="4754880" cy="548640"/>
+            <a:off x="4937760" y="1005840"/>
+            <a:ext cx="3749040" cy="320040"/>
+          </a:xfrm>
+          <a:prstGeom prst="rect">
+            <a:avLst/>
+          </a:prstGeom>
+          <a:noFill/>
+          <a:ln/>
+        </p:spPr>
+        <p:txBody>
+          <a:bodyPr wrap="square" lIns="0" tIns="0" rIns="0" bIns="0" rtlCol="0" anchor="ctr"/>
+          <a:lstStyle/>
+          <a:p>
+            <a:pPr indent="0" marL="0">
+              <a:buNone/>
+            </a:pPr>
+            <a:r>
+              <a:rPr lang="en-US" sz="1500" b="1" dirty="0">
+                <a:solidFill>
+                  <a:schemeClr val="accent2"/>
+                </a:solidFill>
+                <a:latin typeface="Cambria" pitchFamily="34" charset="0"/>
+                <a:ea typeface="Cambria" pitchFamily="34" charset="-122"/>
+                <a:cs typeface="Cambria" pitchFamily="34" charset="-120"/>
+              </a:rPr>
+              <a:t>Lo que funciona</a:t>
+            </a:r>
+            <a:endParaRPr lang="en-US" sz="1500" dirty="0"/>
+          </a:p>
+        </p:txBody>
+      </p:sp>
+      <p:sp>
+        <p:nvSpPr>
+          <p:cNvPr id="5" name="Text 2"/>
+          <p:cNvSpPr txBox="1"/>
+          <p:nvPr/>
+        </p:nvSpPr>
+        <p:spPr>
+          <a:xfrm>
+            <a:off x="4937760" y="1371600"/>
+            <a:ext cx="3749040" cy="1152144"/>
           </a:xfrm>
           <a:prstGeom prst="rect">
             <a:avLst/>
@@ -9043,24 +9531,161 @@
           <a:bodyPr wrap="square" lIns="0" tIns="0" rIns="0" bIns="0" rtlCol="0" anchor="t"/>
           <a:lstStyle/>
           <a:p>
+            <a:pPr marL="342900" indent="-342900">
+              <a:spcAft>
+                <a:spcPts val="400"/>
+              </a:spcAft>
+              <a:buSzPct val="100000"/>
+              <a:buChar char="•"/>
+            </a:pPr>
+            <a:r>
+              <a:rPr lang="en-US" sz="1200" dirty="0">
+                <a:solidFill>
+                  <a:schemeClr val="tx1"/>
+                </a:solidFill>
+              </a:rPr>
+              <a:t>Ayoba, clientes nuevos: $26 por compra, retorno 1,6x</a:t>
+            </a:r>
+            <a:endParaRPr lang="en-US" sz="1200" dirty="0"/>
+          </a:p>
+          <a:p>
+            <a:pPr marL="342900" indent="-342900">
+              <a:spcAft>
+                <a:spcPts val="400"/>
+              </a:spcAft>
+              <a:buSzPct val="100000"/>
+              <a:buChar char="•"/>
+            </a:pPr>
+            <a:r>
+              <a:rPr lang="en-US" sz="1200" dirty="0">
+                <a:solidFill>
+                  <a:schemeClr val="tx1"/>
+                </a:solidFill>
+              </a:rPr>
+              <a:t>Brooklyn, retargeting dinámico: $26 por compra, retorno 2,9x</a:t>
+            </a:r>
+            <a:endParaRPr lang="en-US" sz="1200" dirty="0"/>
+          </a:p>
+          <a:p>
+            <a:pPr marL="342900" indent="-342900">
+              <a:spcAft>
+                <a:spcPts val="400"/>
+              </a:spcAft>
+              <a:buSzPct val="100000"/>
+              <a:buChar char="•"/>
+            </a:pPr>
+            <a:r>
+              <a:rPr lang="en-US" sz="1200" dirty="0">
+                <a:solidFill>
+                  <a:schemeClr val="tx1"/>
+                </a:solidFill>
+              </a:rPr>
+              <a:t>Beg &amp; Barker, retargeting dinámico: retorno 3,1x</a:t>
+            </a:r>
+            <a:endParaRPr lang="en-US" sz="1200" dirty="0"/>
+          </a:p>
+        </p:txBody>
+      </p:sp>
+      <p:sp>
+        <p:nvSpPr>
+          <p:cNvPr id="6" name="Text 3"/>
+          <p:cNvSpPr txBox="1"/>
+          <p:nvPr/>
+        </p:nvSpPr>
+        <p:spPr>
+          <a:xfrm>
+            <a:off x="4937760" y="2697480"/>
+            <a:ext cx="3749040" cy="320040"/>
+          </a:xfrm>
+          <a:prstGeom prst="rect">
+            <a:avLst/>
+          </a:prstGeom>
+          <a:noFill/>
+          <a:ln/>
+        </p:spPr>
+        <p:txBody>
+          <a:bodyPr wrap="square" lIns="0" tIns="0" rIns="0" bIns="0" rtlCol="0" anchor="ctr"/>
+          <a:lstStyle/>
+          <a:p>
             <a:pPr indent="0" marL="0">
               <a:buNone/>
             </a:pPr>
             <a:r>
+              <a:rPr lang="en-US" sz="1500" b="1" dirty="0">
+                <a:solidFill>
+                  <a:schemeClr val="accent1"/>
+                </a:solidFill>
+                <a:latin typeface="Cambria" pitchFamily="34" charset="0"/>
+                <a:ea typeface="Cambria" pitchFamily="34" charset="-122"/>
+                <a:cs typeface="Cambria" pitchFamily="34" charset="-120"/>
+              </a:rPr>
+              <a:t>Lo que estamos corrigiendo</a:t>
+            </a:r>
+            <a:endParaRPr lang="en-US" sz="1500" dirty="0"/>
+          </a:p>
+        </p:txBody>
+      </p:sp>
+      <p:sp>
+        <p:nvSpPr>
+          <p:cNvPr id="7" name="Text 4"/>
+          <p:cNvSpPr txBox="1"/>
+          <p:nvPr/>
+        </p:nvSpPr>
+        <p:spPr>
+          <a:xfrm>
+            <a:off x="4937760" y="3063240"/>
+            <a:ext cx="3749040" cy="768096"/>
+          </a:xfrm>
+          <a:prstGeom prst="rect">
+            <a:avLst/>
+          </a:prstGeom>
+          <a:noFill/>
+          <a:ln/>
+        </p:spPr>
+        <p:txBody>
+          <a:bodyPr wrap="square" lIns="0" tIns="0" rIns="0" bIns="0" rtlCol="0" anchor="t"/>
+          <a:lstStyle/>
+          <a:p>
+            <a:pPr marL="342900" indent="-342900">
+              <a:spcAft>
+                <a:spcPts val="400"/>
+              </a:spcAft>
+              <a:buSzPct val="100000"/>
+              <a:buChar char="•"/>
+            </a:pPr>
+            <a:r>
               <a:rPr lang="en-US" sz="1200" dirty="0">
                 <a:solidFill>
                   <a:schemeClr val="tx1"/>
                 </a:solidFill>
               </a:rPr>
-              <a:t>El Game Day tuvo 60% de apertura. Los flujos de Subscribe &amp; Save y Segunda Orden están activos desde el 7 oct.</a:t>
+              <a:t>Brooklyn, clientes nuevos: $170 por compra → presupuesto recortado el 13 oct</a:t>
             </a:r>
             <a:endParaRPr lang="en-US" sz="1200" dirty="0"/>
           </a:p>
-        </p:txBody>
-      </p:sp>
-      <p:sp>
-        <p:nvSpPr>
-          <p:cNvPr id="10" name="Text 7"/>
+          <a:p>
+            <a:pPr marL="342900" indent="-342900">
+              <a:spcAft>
+                <a:spcPts val="400"/>
+              </a:spcAft>
+              <a:buSzPct val="100000"/>
+              <a:buChar char="•"/>
+            </a:pPr>
+            <a:r>
+              <a:rPr lang="en-US" sz="1200" dirty="0">
+                <a:solidFill>
+                  <a:schemeClr val="tx1"/>
+                </a:solidFill>
+              </a:rPr>
+              <a:t>Retargeting nuevo (desde el 10 oct) aún en aprendizaje; le subimos presupuesto en Ayoba y Beg &amp; Barker</a:t>
+            </a:r>
+            <a:endParaRPr lang="en-US" sz="1200" dirty="0"/>
+          </a:p>
+        </p:txBody>
+      </p:sp>
+      <p:sp>
+        <p:nvSpPr>
+          <p:cNvPr id="8" name="Text 5"/>
           <p:cNvSpPr txBox="1"/>
           <p:nvPr/>
         </p:nvSpPr>
@@ -9088,7 +9713,7 @@
                   <a:schemeClr val="accent4"/>
                 </a:solidFill>
               </a:rPr>
-              <a:t>Fuente: Klaviyo (Brooklyn Biltong), órdenes atribuidas por la plataforma.</a:t>
+              <a:t>Fuente: Meta Ads Manager, compras y retorno atribuidos por la plataforma. No incluye Google Ads ni el total de ventas de la tienda (ver dashboards).</a:t>
             </a:r>
             <a:endParaRPr lang="en-US" sz="900" dirty="0"/>
           </a:p>
@@ -9199,7 +9824,7 @@
                 <a:ea typeface="Cambria" pitchFamily="34" charset="-122"/>
                 <a:cs typeface="Cambria" pitchFamily="34" charset="-120"/>
               </a:rPr>
-              <a:t>Lo que haremos esta semana</a:t>
+              <a:t>Brooklyn: email y SMS ya generan ventas recurrentes</a:t>
             </a:r>
             <a:endParaRPr lang="en-US" sz="2600" dirty="0"/>
           </a:p>
@@ -9207,56 +9832,36 @@
       </p:sp>
       <p:sp>
         <p:nvSpPr>
-          <p:cNvPr id="3" name="Plan card 1"/>
+          <p:cNvPr id="3" name="Retention stat panel"/>
           <p:cNvSpPr/>
           <p:nvPr/>
         </p:nvSpPr>
         <p:spPr>
           <a:xfrm>
             <a:off x="457200" y="1005840"/>
-            <a:ext cx="2651760" cy="2377440"/>
+            <a:ext cx="3108960" cy="3291840"/>
           </a:xfrm>
           <a:prstGeom prst="roundRect">
             <a:avLst>
-              <a:gd name="adj" fmla="val 3077"/>
+              <a:gd name="adj" fmla="val 2353"/>
             </a:avLst>
           </a:prstGeom>
           <a:solidFill>
-            <a:schemeClr val="bg2"/>
+            <a:schemeClr val="tx1"/>
           </a:solidFill>
           <a:ln/>
         </p:spPr>
       </p:sp>
       <p:sp>
         <p:nvSpPr>
-          <p:cNvPr id="4" name="Plan dot 1"/>
-          <p:cNvSpPr/>
-          <p:nvPr/>
-        </p:nvSpPr>
-        <p:spPr>
-          <a:xfrm>
-            <a:off x="640080" y="1188720"/>
-            <a:ext cx="274320" cy="274320"/>
-          </a:xfrm>
-          <a:prstGeom prst="ellipse">
-            <a:avLst/>
-          </a:prstGeom>
-          <a:solidFill>
-            <a:schemeClr val="accent1"/>
-          </a:solidFill>
-          <a:ln/>
-        </p:spPr>
-      </p:sp>
-      <p:sp>
-        <p:nvSpPr>
-          <p:cNvPr id="5" name="Text 3"/>
+          <p:cNvPr id="4" name="Text 2"/>
           <p:cNvSpPr txBox="1"/>
           <p:nvPr/>
         </p:nvSpPr>
         <p:spPr>
           <a:xfrm>
-            <a:off x="1005840" y="1143000"/>
-            <a:ext cx="1965960" cy="365760"/>
+            <a:off x="685800" y="1188720"/>
+            <a:ext cx="2651760" cy="685800"/>
           </a:xfrm>
           <a:prstGeom prst="rect">
             <a:avLst/>
@@ -9272,17 +9877,67 @@
               <a:buNone/>
             </a:pPr>
             <a:r>
-              <a:rPr lang="en-US" sz="1500" b="1" dirty="0">
-                <a:solidFill>
-                  <a:schemeClr val="tx1"/>
+              <a:rPr lang="en-US" sz="4000" b="1" dirty="0">
+                <a:solidFill>
+                  <a:schemeClr val="bg1"/>
                 </a:solidFill>
                 <a:latin typeface="Cambria" pitchFamily="34" charset="0"/>
                 <a:ea typeface="Cambria" pitchFamily="34" charset="-122"/>
                 <a:cs typeface="Cambria" pitchFamily="34" charset="-120"/>
               </a:rPr>
-              <a:t>Brooklyn Biltong</a:t>
-            </a:r>
-            <a:endParaRPr lang="en-US" sz="1500" dirty="0"/>
+              <a:t>$2.074</a:t>
+            </a:r>
+            <a:endParaRPr lang="en-US" sz="4000" dirty="0"/>
+          </a:p>
+        </p:txBody>
+      </p:sp>
+      <p:sp>
+        <p:nvSpPr>
+          <p:cNvPr id="5" name="Text 3"/>
+          <p:cNvSpPr txBox="1"/>
+          <p:nvPr/>
+        </p:nvSpPr>
+        <p:spPr>
+          <a:xfrm>
+            <a:off x="685800" y="1874520"/>
+            <a:ext cx="2651760" cy="457200"/>
+          </a:xfrm>
+          <a:prstGeom prst="rect">
+            <a:avLst/>
+          </a:prstGeom>
+          <a:noFill/>
+          <a:ln/>
+        </p:spPr>
+        <p:txBody>
+          <a:bodyPr wrap="square" lIns="0" tIns="0" rIns="0" bIns="0" rtlCol="0" anchor="ctr"/>
+          <a:lstStyle/>
+          <a:p>
+            <a:pPr indent="0" marL="0">
+              <a:buNone/>
+            </a:pPr>
+            <a:r>
+              <a:rPr lang="en-US" sz="1200" dirty="0">
+                <a:solidFill>
+                  <a:schemeClr val="accent6"/>
+                </a:solidFill>
+              </a:rPr>
+              <a:t>en ventas atribuidas a email y SMS,</a:t>
+            </a:r>
+            <a:endParaRPr lang="en-US" sz="1200" dirty="0"/>
+          </a:p>
+          <a:p>
+            <a:pPr indent="0" marL="0">
+              <a:buNone/>
+            </a:pPr>
+            <a:r>
+              <a:rPr lang="en-US" sz="1200" dirty="0">
+                <a:solidFill>
+                  <a:schemeClr val="accent6"/>
+                </a:solidFill>
+              </a:rPr>
+              <a:t>1–14 oct</a:t>
+            </a:r>
+            <a:endParaRPr lang="en-US" sz="1200" dirty="0"/>
           </a:p>
         </p:txBody>
       </p:sp>
@@ -9294,126 +9949,8 @@
         </p:nvSpPr>
         <p:spPr>
           <a:xfrm>
-            <a:off x="640080" y="1600200"/>
-            <a:ext cx="2331720" cy="1691640"/>
-          </a:xfrm>
-          <a:prstGeom prst="rect">
-            <a:avLst/>
-          </a:prstGeom>
-          <a:noFill/>
-          <a:ln/>
-        </p:spPr>
-        <p:txBody>
-          <a:bodyPr wrap="square" lIns="0" tIns="0" rIns="0" bIns="0" rtlCol="0" anchor="t"/>
-          <a:lstStyle/>
-          <a:p>
-            <a:pPr marL="342900" indent="-342900">
-              <a:spcAft>
-                <a:spcPts val="500"/>
-              </a:spcAft>
-              <a:buSzPct val="100000"/>
-              <a:buChar char="•"/>
-            </a:pPr>
-            <a:r>
-              <a:rPr lang="en-US" sz="1100" dirty="0">
-                <a:solidFill>
-                  <a:schemeClr val="tx1"/>
-                </a:solidFill>
-              </a:rPr>
-              <a:t>Fast Sale: VIP 20% y lista 15% (15 oct), recordatorio el 16 y cierre el 18</a:t>
-            </a:r>
-            <a:endParaRPr lang="en-US" sz="1100" dirty="0"/>
-          </a:p>
-          <a:p>
-            <a:pPr marL="342900" indent="-342900">
-              <a:spcAft>
-                <a:spcPts val="500"/>
-              </a:spcAft>
-              <a:buSzPct val="100000"/>
-              <a:buChar char="•"/>
-            </a:pPr>
-            <a:r>
-              <a:rPr lang="en-US" sz="1100" dirty="0">
-                <a:solidFill>
-                  <a:schemeClr val="tx1"/>
-                </a:solidFill>
-              </a:rPr>
-              <a:t>Escalar el retargeting dinámico y Smile; ajustar clientes nuevos según su costo por compra</a:t>
-            </a:r>
-            <a:endParaRPr lang="en-US" sz="1100" dirty="0"/>
-          </a:p>
-          <a:p>
-            <a:pPr marL="342900" indent="-342900">
-              <a:spcAft>
-                <a:spcPts val="500"/>
-              </a:spcAft>
-              <a:buSzPct val="100000"/>
-              <a:buChar char="•"/>
-            </a:pPr>
-            <a:r>
-              <a:rPr lang="en-US" sz="1100" dirty="0">
-                <a:solidFill>
-                  <a:schemeClr val="tx1"/>
-                </a:solidFill>
-              </a:rPr>
-              <a:t>Recuperar la frecuencia de email y activar el flujo Recurrente → Suscripción</a:t>
-            </a:r>
-            <a:endParaRPr lang="en-US" sz="1100" dirty="0"/>
-          </a:p>
-        </p:txBody>
-      </p:sp>
-      <p:sp>
-        <p:nvSpPr>
-          <p:cNvPr id="7" name="Plan card 2"/>
-          <p:cNvSpPr/>
-          <p:nvPr/>
-        </p:nvSpPr>
-        <p:spPr>
-          <a:xfrm>
-            <a:off x="3246120" y="1005840"/>
-            <a:ext cx="2651760" cy="2377440"/>
-          </a:xfrm>
-          <a:prstGeom prst="roundRect">
-            <a:avLst>
-              <a:gd name="adj" fmla="val 3077"/>
-            </a:avLst>
-          </a:prstGeom>
-          <a:solidFill>
-            <a:schemeClr val="bg2"/>
-          </a:solidFill>
-          <a:ln/>
-        </p:spPr>
-      </p:sp>
-      <p:sp>
-        <p:nvSpPr>
-          <p:cNvPr id="8" name="Plan dot 2"/>
-          <p:cNvSpPr/>
-          <p:nvPr/>
-        </p:nvSpPr>
-        <p:spPr>
-          <a:xfrm>
-            <a:off x="3429000" y="1188720"/>
-            <a:ext cx="274320" cy="274320"/>
-          </a:xfrm>
-          <a:prstGeom prst="ellipse">
-            <a:avLst/>
-          </a:prstGeom>
-          <a:solidFill>
-            <a:schemeClr val="tx2"/>
-          </a:solidFill>
-          <a:ln/>
-        </p:spPr>
-      </p:sp>
-      <p:sp>
-        <p:nvSpPr>
-          <p:cNvPr id="9" name="Text 7"/>
-          <p:cNvSpPr txBox="1"/>
-          <p:nvPr/>
-        </p:nvSpPr>
-        <p:spPr>
-          <a:xfrm>
-            <a:off x="3794760" y="1143000"/>
-            <a:ext cx="1965960" cy="365760"/>
+            <a:off x="685800" y="2468880"/>
+            <a:ext cx="2651760" cy="685800"/>
           </a:xfrm>
           <a:prstGeom prst="rect">
             <a:avLst/>
@@ -9429,30 +9966,82 @@
               <a:buNone/>
             </a:pPr>
             <a:r>
-              <a:rPr lang="en-US" sz="1500" b="1" dirty="0">
-                <a:solidFill>
-                  <a:schemeClr val="tx1"/>
+              <a:rPr lang="en-US" sz="4000" b="1" dirty="0">
+                <a:solidFill>
+                  <a:schemeClr val="bg1"/>
                 </a:solidFill>
                 <a:latin typeface="Cambria" pitchFamily="34" charset="0"/>
                 <a:ea typeface="Cambria" pitchFamily="34" charset="-122"/>
                 <a:cs typeface="Cambria" pitchFamily="34" charset="-120"/>
               </a:rPr>
-              <a:t>Ayoba Foods</a:t>
-            </a:r>
-            <a:endParaRPr lang="en-US" sz="1500" dirty="0"/>
-          </a:p>
-        </p:txBody>
-      </p:sp>
-      <p:sp>
-        <p:nvSpPr>
-          <p:cNvPr id="10" name="Text 8"/>
+              <a:t>31</a:t>
+            </a:r>
+            <a:endParaRPr lang="en-US" sz="4000" dirty="0"/>
+          </a:p>
+        </p:txBody>
+      </p:sp>
+      <p:sp>
+        <p:nvSpPr>
+          <p:cNvPr id="7" name="Text 5"/>
           <p:cNvSpPr txBox="1"/>
           <p:nvPr/>
         </p:nvSpPr>
         <p:spPr>
           <a:xfrm>
-            <a:off x="3429000" y="1600200"/>
-            <a:ext cx="2331720" cy="1691640"/>
+            <a:off x="685800" y="3154680"/>
+            <a:ext cx="2651760" cy="457200"/>
+          </a:xfrm>
+          <a:prstGeom prst="rect">
+            <a:avLst/>
+          </a:prstGeom>
+          <a:noFill/>
+          <a:ln/>
+        </p:spPr>
+        <p:txBody>
+          <a:bodyPr wrap="square" lIns="0" tIns="0" rIns="0" bIns="0" rtlCol="0" anchor="ctr"/>
+          <a:lstStyle/>
+          <a:p>
+            <a:pPr indent="0" marL="0">
+              <a:buNone/>
+            </a:pPr>
+            <a:r>
+              <a:rPr lang="en-US" sz="1200" dirty="0">
+                <a:solidFill>
+                  <a:schemeClr val="accent6"/>
+                </a:solidFill>
+              </a:rPr>
+              <a:t>órdenes; 17 llegan solas por flujos automáticos</a:t>
+            </a:r>
+            <a:endParaRPr lang="en-US" sz="1200" dirty="0"/>
+          </a:p>
+        </p:txBody>
+      </p:sp>
+      <p:graphicFrame>
+        <p:nvGraphicFramePr>
+          <p:cNvPr id="8" name="Sales by program chart" descr=""/>
+          <p:cNvGraphicFramePr/>
+          <p:nvPr/>
+        </p:nvGraphicFramePr>
+        <p:xfrm>
+          <a:off x="3840480" y="960120"/>
+          <a:ext cx="4846320" cy="2743200"/>
+        </p:xfrm>
+        <a:graphic xmlns:a="http://schemas.openxmlformats.org/drawingml/2006/main">
+          <a:graphicData uri="http://schemas.openxmlformats.org/drawingml/2006/chart">
+            <c:chart xmlns:c="http://schemas.openxmlformats.org/drawingml/2006/chart" r:id="rId1"/>
+          </a:graphicData>
+        </a:graphic>
+      </p:graphicFrame>
+      <p:sp>
+        <p:nvSpPr>
+          <p:cNvPr id="9" name="Text 6"/>
+          <p:cNvSpPr txBox="1"/>
+          <p:nvPr/>
+        </p:nvSpPr>
+        <p:spPr>
+          <a:xfrm>
+            <a:off x="3931920" y="3749040"/>
+            <a:ext cx="4754880" cy="548640"/>
           </a:xfrm>
           <a:prstGeom prst="rect">
             <a:avLst/>
@@ -9464,113 +10053,31 @@
           <a:bodyPr wrap="square" lIns="0" tIns="0" rIns="0" bIns="0" rtlCol="0" anchor="t"/>
           <a:lstStyle/>
           <a:p>
-            <a:pPr marL="342900" indent="-342900">
-              <a:spcAft>
-                <a:spcPts val="500"/>
-              </a:spcAft>
-              <a:buSzPct val="100000"/>
-              <a:buChar char="•"/>
-            </a:pPr>
-            <a:r>
-              <a:rPr lang="en-US" sz="1100" dirty="0">
+            <a:pPr indent="0" marL="0">
+              <a:buNone/>
+            </a:pPr>
+            <a:r>
+              <a:rPr lang="en-US" sz="1200" dirty="0">
                 <a:solidFill>
                   <a:schemeClr val="tx1"/>
                 </a:solidFill>
               </a:rPr>
-              <a:t>Escalar la campaña de clientes nuevos, la de menor costo por compra del portafolio</a:t>
-            </a:r>
-            <a:endParaRPr lang="en-US" sz="1100" dirty="0"/>
-          </a:p>
-          <a:p>
-            <a:pPr marL="342900" indent="-342900">
-              <a:spcAft>
-                <a:spcPts val="500"/>
-              </a:spcAft>
-              <a:buSzPct val="100000"/>
-              <a:buChar char="•"/>
-            </a:pPr>
-            <a:r>
-              <a:rPr lang="en-US" sz="1100" dirty="0">
-                <a:solidFill>
-                  <a:schemeClr val="tx1"/>
-                </a:solidFill>
-              </a:rPr>
-              <a:t>Activar los flujos de retención para que corran solos</a:t>
-            </a:r>
-            <a:endParaRPr lang="en-US" sz="1100" dirty="0"/>
-          </a:p>
-          <a:p>
-            <a:pPr marL="342900" indent="-342900">
-              <a:spcAft>
-                <a:spcPts val="500"/>
-              </a:spcAft>
-              <a:buSzPct val="100000"/>
-              <a:buChar char="•"/>
-            </a:pPr>
-            <a:r>
-              <a:rPr lang="en-US" sz="1100" dirty="0">
-                <a:solidFill>
-                  <a:schemeClr val="tx1"/>
-                </a:solidFill>
-              </a:rPr>
-              <a:t>Campañas: Spicy Taco Night, Droëwors Oktoberfest y Cabin Weekend</a:t>
-            </a:r>
-            <a:endParaRPr lang="en-US" sz="1100" dirty="0"/>
-          </a:p>
-        </p:txBody>
-      </p:sp>
-      <p:sp>
-        <p:nvSpPr>
-          <p:cNvPr id="11" name="Plan card 3"/>
-          <p:cNvSpPr/>
-          <p:nvPr/>
-        </p:nvSpPr>
-        <p:spPr>
-          <a:xfrm>
-            <a:off x="6035040" y="1005840"/>
-            <a:ext cx="2651760" cy="2377440"/>
-          </a:xfrm>
-          <a:prstGeom prst="roundRect">
-            <a:avLst>
-              <a:gd name="adj" fmla="val 3077"/>
-            </a:avLst>
-          </a:prstGeom>
-          <a:solidFill>
-            <a:schemeClr val="bg2"/>
-          </a:solidFill>
-          <a:ln/>
-        </p:spPr>
-      </p:sp>
-      <p:sp>
-        <p:nvSpPr>
-          <p:cNvPr id="12" name="Plan dot 3"/>
-          <p:cNvSpPr/>
-          <p:nvPr/>
-        </p:nvSpPr>
-        <p:spPr>
-          <a:xfrm>
-            <a:off x="6217920" y="1188720"/>
-            <a:ext cx="274320" cy="274320"/>
-          </a:xfrm>
-          <a:prstGeom prst="ellipse">
-            <a:avLst/>
-          </a:prstGeom>
-          <a:solidFill>
-            <a:schemeClr val="tx2"/>
-          </a:solidFill>
-          <a:ln/>
-        </p:spPr>
-      </p:sp>
-      <p:sp>
-        <p:nvSpPr>
-          <p:cNvPr id="13" name="Text 11"/>
+              <a:t>El Game Day tuvo 60% de apertura. Los flujos de Subscribe &amp; Save y Segunda Orden están activos desde el 7 oct.</a:t>
+            </a:r>
+            <a:endParaRPr lang="en-US" sz="1200" dirty="0"/>
+          </a:p>
+        </p:txBody>
+      </p:sp>
+      <p:sp>
+        <p:nvSpPr>
+          <p:cNvPr id="10" name="Text 7"/>
           <p:cNvSpPr txBox="1"/>
           <p:nvPr/>
         </p:nvSpPr>
         <p:spPr>
           <a:xfrm>
-            <a:off x="6583680" y="1143000"/>
-            <a:ext cx="1965960" cy="365760"/>
+            <a:off x="457200" y="4434840"/>
+            <a:ext cx="8229600" cy="274320"/>
           </a:xfrm>
           <a:prstGeom prst="rect">
             <a:avLst/>
@@ -9586,190 +10093,14 @@
               <a:buNone/>
             </a:pPr>
             <a:r>
-              <a:rPr lang="en-US" sz="1500" b="1" dirty="0">
-                <a:solidFill>
-                  <a:schemeClr val="tx1"/>
-                </a:solidFill>
-                <a:latin typeface="Cambria" pitchFamily="34" charset="0"/>
-                <a:ea typeface="Cambria" pitchFamily="34" charset="-122"/>
-                <a:cs typeface="Cambria" pitchFamily="34" charset="-120"/>
+              <a:rPr lang="en-US" sz="900" i="1" dirty="0">
+                <a:solidFill>
+                  <a:schemeClr val="accent4"/>
+                </a:solidFill>
               </a:rPr>
-              <a:t>Beg &amp; Barker</a:t>
-            </a:r>
-            <a:endParaRPr lang="en-US" sz="1500" dirty="0"/>
-          </a:p>
-        </p:txBody>
-      </p:sp>
-      <p:sp>
-        <p:nvSpPr>
-          <p:cNvPr id="14" name="Text 12"/>
-          <p:cNvSpPr txBox="1"/>
-          <p:nvPr/>
-        </p:nvSpPr>
-        <p:spPr>
-          <a:xfrm>
-            <a:off x="6217920" y="1600200"/>
-            <a:ext cx="2331720" cy="1691640"/>
-          </a:xfrm>
-          <a:prstGeom prst="rect">
-            <a:avLst/>
-          </a:prstGeom>
-          <a:noFill/>
-          <a:ln/>
-        </p:spPr>
-        <p:txBody>
-          <a:bodyPr wrap="square" lIns="0" tIns="0" rIns="0" bIns="0" rtlCol="0" anchor="t"/>
-          <a:lstStyle/>
-          <a:p>
-            <a:pPr marL="342900" indent="-342900">
-              <a:spcAft>
-                <a:spcPts val="500"/>
-              </a:spcAft>
-              <a:buSzPct val="100000"/>
-              <a:buChar char="•"/>
-            </a:pPr>
-            <a:r>
-              <a:rPr lang="en-US" sz="1100" dirty="0">
-                <a:solidFill>
-                  <a:schemeClr val="tx1"/>
-                </a:solidFill>
-              </a:rPr>
-              <a:t>Escalar la campaña de clientes nuevos a medida que gana datos</a:t>
-            </a:r>
-            <a:endParaRPr lang="en-US" sz="1100" dirty="0"/>
-          </a:p>
-          <a:p>
-            <a:pPr marL="342900" indent="-342900">
-              <a:spcAft>
-                <a:spcPts val="500"/>
-              </a:spcAft>
-              <a:buSzPct val="100000"/>
-              <a:buChar char="•"/>
-            </a:pPr>
-            <a:r>
-              <a:rPr lang="en-US" sz="1100" dirty="0">
-                <a:solidFill>
-                  <a:schemeClr val="tx1"/>
-                </a:solidFill>
-              </a:rPr>
-              <a:t>Lanzar la SMS Welcome Series y medir la nueva Welcome BARK15</a:t>
-            </a:r>
-            <a:endParaRPr lang="en-US" sz="1100" dirty="0"/>
-          </a:p>
-          <a:p>
-            <a:pPr marL="342900" indent="-342900">
-              <a:spcAft>
-                <a:spcPts val="500"/>
-              </a:spcAft>
-              <a:buSzPct val="100000"/>
-              <a:buChar char="•"/>
-            </a:pPr>
-            <a:r>
-              <a:rPr lang="en-US" sz="1100" dirty="0">
-                <a:solidFill>
-                  <a:schemeClr val="tx1"/>
-                </a:solidFill>
-              </a:rPr>
-              <a:t>Sostener el retargeting dinámico con su nuevo presupuesto</a:t>
-            </a:r>
-            <a:endParaRPr lang="en-US" sz="1100" dirty="0"/>
-          </a:p>
-        </p:txBody>
-      </p:sp>
-      <p:sp>
-        <p:nvSpPr>
-          <p:cNvPr id="15" name="Follow-up panel"/>
-          <p:cNvSpPr/>
-          <p:nvPr/>
-        </p:nvSpPr>
-        <p:spPr>
-          <a:xfrm>
-            <a:off x="457200" y="3566160"/>
-            <a:ext cx="8229600" cy="960120"/>
-          </a:xfrm>
-          <a:prstGeom prst="roundRect">
-            <a:avLst>
-              <a:gd name="adj" fmla="val 7619"/>
-            </a:avLst>
-          </a:prstGeom>
-          <a:solidFill>
-            <a:schemeClr val="tx1"/>
-          </a:solidFill>
-          <a:ln/>
-        </p:spPr>
-      </p:sp>
-      <p:sp>
-        <p:nvSpPr>
-          <p:cNvPr id="16" name="Text 14"/>
-          <p:cNvSpPr txBox="1"/>
-          <p:nvPr/>
-        </p:nvSpPr>
-        <p:spPr>
-          <a:xfrm>
-            <a:off x="685800" y="3657600"/>
-            <a:ext cx="7772400" cy="320040"/>
-          </a:xfrm>
-          <a:prstGeom prst="rect">
-            <a:avLst/>
-          </a:prstGeom>
-          <a:noFill/>
-          <a:ln/>
-        </p:spPr>
-        <p:txBody>
-          <a:bodyPr wrap="square" lIns="0" tIns="0" rIns="0" bIns="0" rtlCol="0" anchor="ctr"/>
-          <a:lstStyle/>
-          <a:p>
-            <a:pPr indent="0" marL="0">
-              <a:buNone/>
-            </a:pPr>
-            <a:r>
-              <a:rPr lang="en-US" sz="1500" b="1" dirty="0">
-                <a:solidFill>
-                  <a:schemeClr val="bg1"/>
-                </a:solidFill>
-                <a:latin typeface="Cambria" pitchFamily="34" charset="0"/>
-                <a:ea typeface="Cambria" pitchFamily="34" charset="-122"/>
-                <a:cs typeface="Cambria" pitchFamily="34" charset="-120"/>
-              </a:rPr>
-              <a:t>Próximo seguimiento: 21 de octubre</a:t>
-            </a:r>
-            <a:endParaRPr lang="en-US" sz="1500" dirty="0"/>
-          </a:p>
-        </p:txBody>
-      </p:sp>
-      <p:sp>
-        <p:nvSpPr>
-          <p:cNvPr id="17" name="Text 15"/>
-          <p:cNvSpPr txBox="1"/>
-          <p:nvPr/>
-        </p:nvSpPr>
-        <p:spPr>
-          <a:xfrm>
-            <a:off x="685800" y="3995928"/>
-            <a:ext cx="7772400" cy="457200"/>
-          </a:xfrm>
-          <a:prstGeom prst="rect">
-            <a:avLst/>
-          </a:prstGeom>
-          <a:noFill/>
-          <a:ln/>
-        </p:spPr>
-        <p:txBody>
-          <a:bodyPr wrap="square" lIns="0" tIns="0" rIns="0" bIns="0" rtlCol="0" anchor="t"/>
-          <a:lstStyle/>
-          <a:p>
-            <a:pPr indent="0" marL="0">
-              <a:buNone/>
-            </a:pPr>
-            <a:r>
-              <a:rPr lang="en-US" sz="1200" dirty="0">
-                <a:solidFill>
-                  <a:schemeClr val="accent6"/>
-                </a:solidFill>
-              </a:rPr>
-              <a:t>Le compartiremos los resultados del Fast Sale de Brooklyn (ventas, órdenes y respuesta de VIP vs. lista) y cómo evolucionan las campañas de clientes nuevos en las 3 marcas.</a:t>
-            </a:r>
-            <a:endParaRPr lang="en-US" sz="1200" dirty="0"/>
+              <a:t>Fuente: Klaviyo (Brooklyn Biltong), órdenes atribuidas por la plataforma.</a:t>
+            </a:r>
+            <a:endParaRPr lang="en-US" sz="900" dirty="0"/>
           </a:p>
         </p:txBody>
       </p:sp>
@@ -9813,6 +10144,685 @@
             <a:fld id="{F7021451-1387-4CA6-816F-3879F97B5CBC}" type="slidenum">
               <a:rPr b="0" lang="en-US"/>
               <a:t>8</a:t>
+            </a:fld>
+            <a:endParaRPr lang="en-US"/>
+          </a:p>
+        </p:txBody>
+      </p:sp>
+    </p:spTree>
+  </p:cSld>
+  <p:clrMapOvr>
+    <a:masterClrMapping/>
+  </p:clrMapOvr>
+</p:sld>
+</file>
+
+<file path=ppt/slides/slide9.xml><?xml version="1.0" encoding="utf-8"?>
+<p:sld xmlns:a="http://schemas.openxmlformats.org/drawingml/2006/main" xmlns:r="http://schemas.openxmlformats.org/officeDocument/2006/relationships" xmlns:p="http://schemas.openxmlformats.org/presentationml/2006/main">
+  <p:cSld name="Slide 9">
+    <p:spTree>
+      <p:nvGrpSpPr>
+        <p:cNvPr id="1" name=""/>
+        <p:cNvGrpSpPr/>
+        <p:nvPr/>
+      </p:nvGrpSpPr>
+      <p:grpSpPr>
+        <a:xfrm>
+          <a:off x="0" y="0"/>
+          <a:ext cx="0" cy="0"/>
+          <a:chOff x="0" y="0"/>
+          <a:chExt cx="0" cy="0"/>
+        </a:xfrm>
+      </p:grpSpPr>
+      <p:sp>
+        <p:nvSpPr>
+          <p:cNvPr id="2" name="Text 0"/>
+          <p:cNvSpPr/>
+          <p:nvPr>
+            <p:ph idx="100" type="title" hasCustomPrompt="1"/>
+          </p:nvPr>
+        </p:nvSpPr>
+        <p:spPr>
+          <a:xfrm>
+            <a:off x="457200" y="274320"/>
+            <a:ext cx="8229600" cy="594360"/>
+          </a:xfrm>
+          <a:prstGeom prst="rect">
+            <a:avLst/>
+          </a:prstGeom>
+          <a:noFill/>
+          <a:ln/>
+        </p:spPr>
+        <p:txBody>
+          <a:bodyPr wrap="square" lIns="0" tIns="0" rIns="0" bIns="0" rtlCol="0" anchor="ctr"/>
+          <a:lstStyle/>
+          <a:p>
+            <a:pPr algn="l" indent="0" marL="0">
+              <a:buNone/>
+            </a:pPr>
+            <a:r>
+              <a:rPr lang="en-US" sz="2600" b="1" dirty="0">
+                <a:solidFill>
+                  <a:schemeClr val="tx1"/>
+                </a:solidFill>
+                <a:latin typeface="Cambria" pitchFamily="34" charset="0"/>
+                <a:ea typeface="Cambria" pitchFamily="34" charset="-122"/>
+                <a:cs typeface="Cambria" pitchFamily="34" charset="-120"/>
+              </a:rPr>
+              <a:t>Lo que haremos esta semana</a:t>
+            </a:r>
+            <a:endParaRPr lang="en-US" sz="2600" dirty="0"/>
+          </a:p>
+        </p:txBody>
+      </p:sp>
+      <p:sp>
+        <p:nvSpPr>
+          <p:cNvPr id="3" name="Plan card 1"/>
+          <p:cNvSpPr/>
+          <p:nvPr/>
+        </p:nvSpPr>
+        <p:spPr>
+          <a:xfrm>
+            <a:off x="457200" y="1005840"/>
+            <a:ext cx="2651760" cy="2377440"/>
+          </a:xfrm>
+          <a:prstGeom prst="roundRect">
+            <a:avLst>
+              <a:gd name="adj" fmla="val 3077"/>
+            </a:avLst>
+          </a:prstGeom>
+          <a:solidFill>
+            <a:schemeClr val="bg2"/>
+          </a:solidFill>
+          <a:ln/>
+        </p:spPr>
+      </p:sp>
+      <p:sp>
+        <p:nvSpPr>
+          <p:cNvPr id="4" name="Plan dot 1"/>
+          <p:cNvSpPr/>
+          <p:nvPr/>
+        </p:nvSpPr>
+        <p:spPr>
+          <a:xfrm>
+            <a:off x="640080" y="1188720"/>
+            <a:ext cx="274320" cy="274320"/>
+          </a:xfrm>
+          <a:prstGeom prst="ellipse">
+            <a:avLst/>
+          </a:prstGeom>
+          <a:solidFill>
+            <a:schemeClr val="accent1"/>
+          </a:solidFill>
+          <a:ln/>
+        </p:spPr>
+      </p:sp>
+      <p:sp>
+        <p:nvSpPr>
+          <p:cNvPr id="5" name="Text 3"/>
+          <p:cNvSpPr txBox="1"/>
+          <p:nvPr/>
+        </p:nvSpPr>
+        <p:spPr>
+          <a:xfrm>
+            <a:off x="1005840" y="1143000"/>
+            <a:ext cx="1965960" cy="365760"/>
+          </a:xfrm>
+          <a:prstGeom prst="rect">
+            <a:avLst/>
+          </a:prstGeom>
+          <a:noFill/>
+          <a:ln/>
+        </p:spPr>
+        <p:txBody>
+          <a:bodyPr wrap="square" lIns="0" tIns="0" rIns="0" bIns="0" rtlCol="0" anchor="ctr"/>
+          <a:lstStyle/>
+          <a:p>
+            <a:pPr indent="0" marL="0">
+              <a:buNone/>
+            </a:pPr>
+            <a:r>
+              <a:rPr lang="en-US" sz="1500" b="1" dirty="0">
+                <a:solidFill>
+                  <a:schemeClr val="tx1"/>
+                </a:solidFill>
+                <a:latin typeface="Cambria" pitchFamily="34" charset="0"/>
+                <a:ea typeface="Cambria" pitchFamily="34" charset="-122"/>
+                <a:cs typeface="Cambria" pitchFamily="34" charset="-120"/>
+              </a:rPr>
+              <a:t>Brooklyn Biltong</a:t>
+            </a:r>
+            <a:endParaRPr lang="en-US" sz="1500" dirty="0"/>
+          </a:p>
+        </p:txBody>
+      </p:sp>
+      <p:sp>
+        <p:nvSpPr>
+          <p:cNvPr id="6" name="Text 4"/>
+          <p:cNvSpPr txBox="1"/>
+          <p:nvPr/>
+        </p:nvSpPr>
+        <p:spPr>
+          <a:xfrm>
+            <a:off x="640080" y="1600200"/>
+            <a:ext cx="2331720" cy="1691640"/>
+          </a:xfrm>
+          <a:prstGeom prst="rect">
+            <a:avLst/>
+          </a:prstGeom>
+          <a:noFill/>
+          <a:ln/>
+        </p:spPr>
+        <p:txBody>
+          <a:bodyPr wrap="square" lIns="0" tIns="0" rIns="0" bIns="0" rtlCol="0" anchor="t"/>
+          <a:lstStyle/>
+          <a:p>
+            <a:pPr marL="342900" indent="-342900">
+              <a:spcAft>
+                <a:spcPts val="500"/>
+              </a:spcAft>
+              <a:buSzPct val="100000"/>
+              <a:buChar char="•"/>
+            </a:pPr>
+            <a:r>
+              <a:rPr lang="en-US" sz="1100" dirty="0">
+                <a:solidFill>
+                  <a:schemeClr val="tx1"/>
+                </a:solidFill>
+              </a:rPr>
+              <a:t>Fast Sale: VIP 20% y lista 15% (15 oct), recordatorio el 16 y cierre el 18</a:t>
+            </a:r>
+            <a:endParaRPr lang="en-US" sz="1100" dirty="0"/>
+          </a:p>
+          <a:p>
+            <a:pPr marL="342900" indent="-342900">
+              <a:spcAft>
+                <a:spcPts val="500"/>
+              </a:spcAft>
+              <a:buSzPct val="100000"/>
+              <a:buChar char="•"/>
+            </a:pPr>
+            <a:r>
+              <a:rPr lang="en-US" sz="1100" dirty="0">
+                <a:solidFill>
+                  <a:schemeClr val="tx1"/>
+                </a:solidFill>
+              </a:rPr>
+              <a:t>Escalar el retargeting dinámico y Smile; ajustar clientes nuevos según su costo por compra</a:t>
+            </a:r>
+            <a:endParaRPr lang="en-US" sz="1100" dirty="0"/>
+          </a:p>
+          <a:p>
+            <a:pPr marL="342900" indent="-342900">
+              <a:spcAft>
+                <a:spcPts val="500"/>
+              </a:spcAft>
+              <a:buSzPct val="100000"/>
+              <a:buChar char="•"/>
+            </a:pPr>
+            <a:r>
+              <a:rPr lang="en-US" sz="1100" dirty="0">
+                <a:solidFill>
+                  <a:schemeClr val="tx1"/>
+                </a:solidFill>
+              </a:rPr>
+              <a:t>Recuperar la frecuencia de email y activar el flujo Recurrente → Suscripción</a:t>
+            </a:r>
+            <a:endParaRPr lang="en-US" sz="1100" dirty="0"/>
+          </a:p>
+        </p:txBody>
+      </p:sp>
+      <p:sp>
+        <p:nvSpPr>
+          <p:cNvPr id="7" name="Plan card 2"/>
+          <p:cNvSpPr/>
+          <p:nvPr/>
+        </p:nvSpPr>
+        <p:spPr>
+          <a:xfrm>
+            <a:off x="3246120" y="1005840"/>
+            <a:ext cx="2651760" cy="2377440"/>
+          </a:xfrm>
+          <a:prstGeom prst="roundRect">
+            <a:avLst>
+              <a:gd name="adj" fmla="val 3077"/>
+            </a:avLst>
+          </a:prstGeom>
+          <a:solidFill>
+            <a:schemeClr val="bg2"/>
+          </a:solidFill>
+          <a:ln/>
+        </p:spPr>
+      </p:sp>
+      <p:sp>
+        <p:nvSpPr>
+          <p:cNvPr id="8" name="Plan dot 2"/>
+          <p:cNvSpPr/>
+          <p:nvPr/>
+        </p:nvSpPr>
+        <p:spPr>
+          <a:xfrm>
+            <a:off x="3429000" y="1188720"/>
+            <a:ext cx="274320" cy="274320"/>
+          </a:xfrm>
+          <a:prstGeom prst="ellipse">
+            <a:avLst/>
+          </a:prstGeom>
+          <a:solidFill>
+            <a:schemeClr val="tx2"/>
+          </a:solidFill>
+          <a:ln/>
+        </p:spPr>
+      </p:sp>
+      <p:sp>
+        <p:nvSpPr>
+          <p:cNvPr id="9" name="Text 7"/>
+          <p:cNvSpPr txBox="1"/>
+          <p:nvPr/>
+        </p:nvSpPr>
+        <p:spPr>
+          <a:xfrm>
+            <a:off x="3794760" y="1143000"/>
+            <a:ext cx="1965960" cy="365760"/>
+          </a:xfrm>
+          <a:prstGeom prst="rect">
+            <a:avLst/>
+          </a:prstGeom>
+          <a:noFill/>
+          <a:ln/>
+        </p:spPr>
+        <p:txBody>
+          <a:bodyPr wrap="square" lIns="0" tIns="0" rIns="0" bIns="0" rtlCol="0" anchor="ctr"/>
+          <a:lstStyle/>
+          <a:p>
+            <a:pPr indent="0" marL="0">
+              <a:buNone/>
+            </a:pPr>
+            <a:r>
+              <a:rPr lang="en-US" sz="1500" b="1" dirty="0">
+                <a:solidFill>
+                  <a:schemeClr val="tx1"/>
+                </a:solidFill>
+                <a:latin typeface="Cambria" pitchFamily="34" charset="0"/>
+                <a:ea typeface="Cambria" pitchFamily="34" charset="-122"/>
+                <a:cs typeface="Cambria" pitchFamily="34" charset="-120"/>
+              </a:rPr>
+              <a:t>Ayoba Foods</a:t>
+            </a:r>
+            <a:endParaRPr lang="en-US" sz="1500" dirty="0"/>
+          </a:p>
+        </p:txBody>
+      </p:sp>
+      <p:sp>
+        <p:nvSpPr>
+          <p:cNvPr id="10" name="Text 8"/>
+          <p:cNvSpPr txBox="1"/>
+          <p:nvPr/>
+        </p:nvSpPr>
+        <p:spPr>
+          <a:xfrm>
+            <a:off x="3429000" y="1600200"/>
+            <a:ext cx="2331720" cy="1691640"/>
+          </a:xfrm>
+          <a:prstGeom prst="rect">
+            <a:avLst/>
+          </a:prstGeom>
+          <a:noFill/>
+          <a:ln/>
+        </p:spPr>
+        <p:txBody>
+          <a:bodyPr wrap="square" lIns="0" tIns="0" rIns="0" bIns="0" rtlCol="0" anchor="t"/>
+          <a:lstStyle/>
+          <a:p>
+            <a:pPr marL="342900" indent="-342900">
+              <a:spcAft>
+                <a:spcPts val="500"/>
+              </a:spcAft>
+              <a:buSzPct val="100000"/>
+              <a:buChar char="•"/>
+            </a:pPr>
+            <a:r>
+              <a:rPr lang="en-US" sz="1100" dirty="0">
+                <a:solidFill>
+                  <a:schemeClr val="tx1"/>
+                </a:solidFill>
+              </a:rPr>
+              <a:t>Escalar la campaña de clientes nuevos, la de menor costo por compra del portafolio</a:t>
+            </a:r>
+            <a:endParaRPr lang="en-US" sz="1100" dirty="0"/>
+          </a:p>
+          <a:p>
+            <a:pPr marL="342900" indent="-342900">
+              <a:spcAft>
+                <a:spcPts val="500"/>
+              </a:spcAft>
+              <a:buSzPct val="100000"/>
+              <a:buChar char="•"/>
+            </a:pPr>
+            <a:r>
+              <a:rPr lang="en-US" sz="1100" dirty="0">
+                <a:solidFill>
+                  <a:schemeClr val="tx1"/>
+                </a:solidFill>
+              </a:rPr>
+              <a:t>Activar los flujos de retención para que corran solos</a:t>
+            </a:r>
+            <a:endParaRPr lang="en-US" sz="1100" dirty="0"/>
+          </a:p>
+          <a:p>
+            <a:pPr marL="342900" indent="-342900">
+              <a:spcAft>
+                <a:spcPts val="500"/>
+              </a:spcAft>
+              <a:buSzPct val="100000"/>
+              <a:buChar char="•"/>
+            </a:pPr>
+            <a:r>
+              <a:rPr lang="en-US" sz="1100" dirty="0">
+                <a:solidFill>
+                  <a:schemeClr val="tx1"/>
+                </a:solidFill>
+              </a:rPr>
+              <a:t>Campañas: Spicy Taco Night, Droëwors Oktoberfest y Cabin Weekend</a:t>
+            </a:r>
+            <a:endParaRPr lang="en-US" sz="1100" dirty="0"/>
+          </a:p>
+        </p:txBody>
+      </p:sp>
+      <p:sp>
+        <p:nvSpPr>
+          <p:cNvPr id="11" name="Plan card 3"/>
+          <p:cNvSpPr/>
+          <p:nvPr/>
+        </p:nvSpPr>
+        <p:spPr>
+          <a:xfrm>
+            <a:off x="6035040" y="1005840"/>
+            <a:ext cx="2651760" cy="2377440"/>
+          </a:xfrm>
+          <a:prstGeom prst="roundRect">
+            <a:avLst>
+              <a:gd name="adj" fmla="val 3077"/>
+            </a:avLst>
+          </a:prstGeom>
+          <a:solidFill>
+            <a:schemeClr val="bg2"/>
+          </a:solidFill>
+          <a:ln/>
+        </p:spPr>
+      </p:sp>
+      <p:sp>
+        <p:nvSpPr>
+          <p:cNvPr id="12" name="Plan dot 3"/>
+          <p:cNvSpPr/>
+          <p:nvPr/>
+        </p:nvSpPr>
+        <p:spPr>
+          <a:xfrm>
+            <a:off x="6217920" y="1188720"/>
+            <a:ext cx="274320" cy="274320"/>
+          </a:xfrm>
+          <a:prstGeom prst="ellipse">
+            <a:avLst/>
+          </a:prstGeom>
+          <a:solidFill>
+            <a:schemeClr val="tx2"/>
+          </a:solidFill>
+          <a:ln/>
+        </p:spPr>
+      </p:sp>
+      <p:sp>
+        <p:nvSpPr>
+          <p:cNvPr id="13" name="Text 11"/>
+          <p:cNvSpPr txBox="1"/>
+          <p:nvPr/>
+        </p:nvSpPr>
+        <p:spPr>
+          <a:xfrm>
+            <a:off x="6583680" y="1143000"/>
+            <a:ext cx="1965960" cy="365760"/>
+          </a:xfrm>
+          <a:prstGeom prst="rect">
+            <a:avLst/>
+          </a:prstGeom>
+          <a:noFill/>
+          <a:ln/>
+        </p:spPr>
+        <p:txBody>
+          <a:bodyPr wrap="square" lIns="0" tIns="0" rIns="0" bIns="0" rtlCol="0" anchor="ctr"/>
+          <a:lstStyle/>
+          <a:p>
+            <a:pPr indent="0" marL="0">
+              <a:buNone/>
+            </a:pPr>
+            <a:r>
+              <a:rPr lang="en-US" sz="1500" b="1" dirty="0">
+                <a:solidFill>
+                  <a:schemeClr val="tx1"/>
+                </a:solidFill>
+                <a:latin typeface="Cambria" pitchFamily="34" charset="0"/>
+                <a:ea typeface="Cambria" pitchFamily="34" charset="-122"/>
+                <a:cs typeface="Cambria" pitchFamily="34" charset="-120"/>
+              </a:rPr>
+              <a:t>Beg &amp; Barker</a:t>
+            </a:r>
+            <a:endParaRPr lang="en-US" sz="1500" dirty="0"/>
+          </a:p>
+        </p:txBody>
+      </p:sp>
+      <p:sp>
+        <p:nvSpPr>
+          <p:cNvPr id="14" name="Text 12"/>
+          <p:cNvSpPr txBox="1"/>
+          <p:nvPr/>
+        </p:nvSpPr>
+        <p:spPr>
+          <a:xfrm>
+            <a:off x="6217920" y="1600200"/>
+            <a:ext cx="2331720" cy="1691640"/>
+          </a:xfrm>
+          <a:prstGeom prst="rect">
+            <a:avLst/>
+          </a:prstGeom>
+          <a:noFill/>
+          <a:ln/>
+        </p:spPr>
+        <p:txBody>
+          <a:bodyPr wrap="square" lIns="0" tIns="0" rIns="0" bIns="0" rtlCol="0" anchor="t"/>
+          <a:lstStyle/>
+          <a:p>
+            <a:pPr marL="342900" indent="-342900">
+              <a:spcAft>
+                <a:spcPts val="500"/>
+              </a:spcAft>
+              <a:buSzPct val="100000"/>
+              <a:buChar char="•"/>
+            </a:pPr>
+            <a:r>
+              <a:rPr lang="en-US" sz="1100" dirty="0">
+                <a:solidFill>
+                  <a:schemeClr val="tx1"/>
+                </a:solidFill>
+              </a:rPr>
+              <a:t>Escalar la campaña de clientes nuevos a medida que gana datos</a:t>
+            </a:r>
+            <a:endParaRPr lang="en-US" sz="1100" dirty="0"/>
+          </a:p>
+          <a:p>
+            <a:pPr marL="342900" indent="-342900">
+              <a:spcAft>
+                <a:spcPts val="500"/>
+              </a:spcAft>
+              <a:buSzPct val="100000"/>
+              <a:buChar char="•"/>
+            </a:pPr>
+            <a:r>
+              <a:rPr lang="en-US" sz="1100" dirty="0">
+                <a:solidFill>
+                  <a:schemeClr val="tx1"/>
+                </a:solidFill>
+              </a:rPr>
+              <a:t>Lanzar la SMS Welcome Series y medir la nueva Welcome BARK15</a:t>
+            </a:r>
+            <a:endParaRPr lang="en-US" sz="1100" dirty="0"/>
+          </a:p>
+          <a:p>
+            <a:pPr marL="342900" indent="-342900">
+              <a:spcAft>
+                <a:spcPts val="500"/>
+              </a:spcAft>
+              <a:buSzPct val="100000"/>
+              <a:buChar char="•"/>
+            </a:pPr>
+            <a:r>
+              <a:rPr lang="en-US" sz="1100" dirty="0">
+                <a:solidFill>
+                  <a:schemeClr val="tx1"/>
+                </a:solidFill>
+              </a:rPr>
+              <a:t>Sostener el retargeting dinámico con su nuevo presupuesto</a:t>
+            </a:r>
+            <a:endParaRPr lang="en-US" sz="1100" dirty="0"/>
+          </a:p>
+        </p:txBody>
+      </p:sp>
+      <p:sp>
+        <p:nvSpPr>
+          <p:cNvPr id="15" name="Follow-up panel"/>
+          <p:cNvSpPr/>
+          <p:nvPr/>
+        </p:nvSpPr>
+        <p:spPr>
+          <a:xfrm>
+            <a:off x="457200" y="3566160"/>
+            <a:ext cx="8229600" cy="960120"/>
+          </a:xfrm>
+          <a:prstGeom prst="roundRect">
+            <a:avLst>
+              <a:gd name="adj" fmla="val 7619"/>
+            </a:avLst>
+          </a:prstGeom>
+          <a:solidFill>
+            <a:schemeClr val="tx1"/>
+          </a:solidFill>
+          <a:ln/>
+        </p:spPr>
+      </p:sp>
+      <p:sp>
+        <p:nvSpPr>
+          <p:cNvPr id="16" name="Text 14"/>
+          <p:cNvSpPr txBox="1"/>
+          <p:nvPr/>
+        </p:nvSpPr>
+        <p:spPr>
+          <a:xfrm>
+            <a:off x="685800" y="3657600"/>
+            <a:ext cx="7772400" cy="320040"/>
+          </a:xfrm>
+          <a:prstGeom prst="rect">
+            <a:avLst/>
+          </a:prstGeom>
+          <a:noFill/>
+          <a:ln/>
+        </p:spPr>
+        <p:txBody>
+          <a:bodyPr wrap="square" lIns="0" tIns="0" rIns="0" bIns="0" rtlCol="0" anchor="ctr"/>
+          <a:lstStyle/>
+          <a:p>
+            <a:pPr indent="0" marL="0">
+              <a:buNone/>
+            </a:pPr>
+            <a:r>
+              <a:rPr lang="en-US" sz="1500" b="1" dirty="0">
+                <a:solidFill>
+                  <a:schemeClr val="bg1"/>
+                </a:solidFill>
+                <a:latin typeface="Cambria" pitchFamily="34" charset="0"/>
+                <a:ea typeface="Cambria" pitchFamily="34" charset="-122"/>
+                <a:cs typeface="Cambria" pitchFamily="34" charset="-120"/>
+              </a:rPr>
+              <a:t>Próximo seguimiento: 21 de octubre</a:t>
+            </a:r>
+            <a:endParaRPr lang="en-US" sz="1500" dirty="0"/>
+          </a:p>
+        </p:txBody>
+      </p:sp>
+      <p:sp>
+        <p:nvSpPr>
+          <p:cNvPr id="17" name="Text 15"/>
+          <p:cNvSpPr txBox="1"/>
+          <p:nvPr/>
+        </p:nvSpPr>
+        <p:spPr>
+          <a:xfrm>
+            <a:off x="685800" y="3995928"/>
+            <a:ext cx="7772400" cy="457200"/>
+          </a:xfrm>
+          <a:prstGeom prst="rect">
+            <a:avLst/>
+          </a:prstGeom>
+          <a:noFill/>
+          <a:ln/>
+        </p:spPr>
+        <p:txBody>
+          <a:bodyPr wrap="square" lIns="0" tIns="0" rIns="0" bIns="0" rtlCol="0" anchor="t"/>
+          <a:lstStyle/>
+          <a:p>
+            <a:pPr indent="0" marL="0">
+              <a:buNone/>
+            </a:pPr>
+            <a:r>
+              <a:rPr lang="en-US" sz="1200" dirty="0">
+                <a:solidFill>
+                  <a:schemeClr val="accent6"/>
+                </a:solidFill>
+              </a:rPr>
+              <a:t>Le compartiremos los resultados del Fast Sale de Brooklyn (ventas, órdenes y respuesta de VIP vs. lista) y cómo evolucionan las campañas de clientes nuevos en las 3 marcas.</a:t>
+            </a:r>
+            <a:endParaRPr lang="en-US" sz="1200" dirty="0"/>
+          </a:p>
+        </p:txBody>
+      </p:sp>
+      <p:sp>
+        <p:nvSpPr>
+          <p:cNvPr id="25" name="Slide Number Placeholder 0"/>
+          <p:cNvSpPr>
+            <a:spLocks noGrp="1"/>
+          </p:cNvSpPr>
+          <p:nvPr>
+            <p:ph type="sldNum" sz="quarter" idx="4294967295"/>
+          </p:nvPr>
+        </p:nvSpPr>
+        <p:spPr>
+          <a:xfrm>
+            <a:off x="8321040" y="4800600"/>
+            <a:ext cx="365760" cy="228600"/>
+          </a:xfrm>
+          <a:prstGeom prst="rect">
+            <a:avLst/>
+          </a:prstGeom>
+          <a:extLst>
+            <a:ext uri="{C572A759-6A51-4108-AA02-DFA0A04FC94B}">
+              <ma14:wrappingTextBoxFlag xmlns:ma14="http://schemas.microsoft.com/office/mac/drawingml/2011/main" val="0"/>
+            </a:ext>
+          </a:extLst>
+        </p:spPr>
+        <p:txBody>
+          <a:bodyPr/>
+          <a:lstStyle>
+            <a:lvl1pPr>
+              <a:defRPr sz="900">
+                <a:solidFill>
+                  <a:schemeClr val="accent4"/>
+                </a:solidFill>
+              </a:defRPr>
+            </a:lvl1pPr>
+          </a:lstStyle>
+          <a:p>
+            <a:pPr algn="r"/>
+            <a:fld id="{F7021451-1387-4CA6-816F-3879F97B5CBC}" type="slidenum">
+              <a:rPr b="0" lang="en-US"/>
+              <a:t>9</a:t>
             </a:fld>
             <a:endParaRPr lang="en-US"/>
           </a:p>

--- a/status_ceo/Stormberg_Status_CEO_Oct2026_ES.pptx
+++ b/status_ceo/Stormberg_Status_CEO_Oct2026_ES.pptx
@@ -17,9 +17,10 @@
     <p:sldId id="265" r:id="rId11"/>
     <p:sldId id="266" r:id="rId12"/>
     <p:sldId id="267" r:id="rId13"/>
+    <p:sldId id="268" r:id="rId14"/>
   </p:sldIdLst>
   <p:notesMasterIdLst>
-    <p:notesMasterId r:id="rId14"/>
+    <p:notesMasterId r:id="rId15"/>
   </p:notesMasterIdLst>
   <p:sldSz cx="9144000" cy="5143500"/>
   <p:notesSz cx="5143500" cy="9144000"/>
@@ -118,40 +119,41 @@
   <p:extLst>
     <p:ext uri="{521415D9-36F7-43E2-AB2F-B90AF26B5E84}">
       <p14:sectionLst xmlns:p14="http://schemas.microsoft.com/office/powerpoint/2010/main">
-        <p14:section name="Resumen" id="{4d4d32d6-b45b-73a6-3bf5-6ed96c5de201}">
+        <p14:section name="Resumen" id="{6a855431-6e3a-05b1-8ea6-7829ddc7bee5}">
           <p14:sldIdLst>
             <p14:sldId id="256"/>
             <p14:sldId id="257"/>
           </p14:sldIdLst>
         </p14:section>
-        <p14:section name="Brooklyn Biltong" id="{7d80656e-0970-e7d6-2079-448ac5def46d}">
+        <p14:section name="Brooklyn Biltong" id="{0079fb7e-f3d3-f438-b387-d8062ca1eab5}">
           <p14:sldIdLst>
             <p14:sldId id="258"/>
             <p14:sldId id="259"/>
             <p14:sldId id="260"/>
+            <p14:sldId id="261"/>
           </p14:sldIdLst>
         </p14:section>
-        <p14:section name="Beg &amp; Barker" id="{21524586-00b6-7ee2-cc4f-055b6acea517}">
+        <p14:section name="Beg &amp; Barker" id="{330161c6-c482-8e73-b538-063dbb834779}">
           <p14:sldIdLst>
-            <p14:sldId id="261"/>
             <p14:sldId id="262"/>
+            <p14:sldId id="263"/>
           </p14:sldIdLst>
         </p14:section>
-        <p14:section name="Ayoba Foods" id="{b2412946-632b-6ee3-5d51-543b37b9dc0a}">
+        <p14:section name="Ayoba Foods" id="{67be9982-31c2-3f6b-f03a-619a6ea08f78}">
           <p14:sldIdLst>
-            <p14:sldId id="263"/>
             <p14:sldId id="264"/>
-          </p14:sldIdLst>
-        </p14:section>
-        <p14:section name="Próximos pasos" id="{178c47e2-463c-a6c7-3bea-47bcb86086cf}">
-          <p14:sldIdLst>
             <p14:sldId id="265"/>
           </p14:sldIdLst>
         </p14:section>
-        <p14:section name="Anexo" id="{3bccb80d-3777-9b30-4d41-589ef7a0b7af}">
+        <p14:section name="Próximos pasos" id="{00ba5860-1492-5eed-03e7-81cd258aae0f}">
           <p14:sldIdLst>
             <p14:sldId id="266"/>
+          </p14:sldIdLst>
+        </p14:section>
+        <p14:section name="Anexo" id="{4c709f5c-7b2a-53b4-bfb0-955ed30587be}">
+          <p14:sldIdLst>
             <p14:sldId id="267"/>
+            <p14:sldId id="268"/>
           </p14:sldIdLst>
         </p14:section>
       </p14:sectionLst>
@@ -2016,7 +2018,7 @@
           <a:p>
             <a:r>
               <a:rPr lang="en-US" dirty="0"/>
-              <a:t>Cerrar con el plan de la semana por marca y el compromiso de seguimiento: el 21 de octubre le compartimos los resultados del Fast Sale de Brooklyn y la primera lectura de los tests hacia Amazon. No pedimos decisiones hoy.</a:t>
+              <a:t>Con Ayoba pasa algo parecido: vende muy poco en la web. El tráfico que llega es bueno, pero la experiencia de compra frena la conversión. Octubre va en $3,1 mil con un retorno blended de 3,6x. 58% de los clientes son recurrentes; el reto es el volumen de clientes nuevos. La propuesta es un test A/B: una campaña de marca hacia Amazon para medir el resultado, con la meta de sumar 10% a las ventas de Amazon. Mantenemos la pauta web baja y optimizada, y replicamos la estrategia de Brooklyn.</a:t>
             </a:r>
             <a:endParaRPr lang="en-US" dirty="0"/>
           </a:p>
@@ -2104,7 +2106,7 @@
           <a:p>
             <a:r>
               <a:rPr lang="en-US" dirty="0"/>
-              <a:t>Anexo de respaldo: estado de cada compromiso del mail del 9 de octubre. Usar solo si pregunta.</a:t>
+              <a:t>Cerrar con el plan de la semana por marca y el compromiso de seguimiento: el 21 de octubre le compartimos los resultados del Fast Sale de Brooklyn y la primera lectura de los tests hacia Amazon. No pedimos decisiones hoy.</a:t>
             </a:r>
             <a:endParaRPr lang="en-US" dirty="0"/>
           </a:p>
@@ -2192,7 +2194,7 @@
           <a:p>
             <a:r>
               <a:rPr lang="en-US" dirty="0"/>
-              <a:t>Anexo de respaldo: detalle de Meta por marca. Usar solo si pregunta.</a:t>
+              <a:t>Anexo de respaldo: estado de cada compromiso del mail del 9 de octubre. Usar solo si pregunta.</a:t>
             </a:r>
             <a:endParaRPr lang="en-US" dirty="0"/>
           </a:p>
@@ -2216,6 +2218,94 @@
             <a:fld id="{F7021451-1387-4CA6-816F-3879F97B5CBC}" type="slidenum">
               <a:rPr lang="en-US"/>
               <a:t>12</a:t>
+            </a:fld>
+            <a:endParaRPr lang="en-US"/>
+          </a:p>
+        </p:txBody>
+      </p:sp>
+    </p:spTree>
+    <p:extLst>
+      <p:ext uri="{BB962C8B-B14F-4D97-AF65-F5344CB8AC3E}">
+        <p14:creationId xmlns:p14="http://schemas.microsoft.com/office/powerpoint/2010/main" val="1024086991"/>
+      </p:ext>
+    </p:extLst>
+  </p:cSld>
+  <p:clrMapOvr>
+    <a:masterClrMapping/>
+  </p:clrMapOvr>
+</p:notes>
+</file>
+
+<file path=ppt/notesSlides/notesSlide13.xml><?xml version="1.0" encoding="utf-8"?>
+<p:notes xmlns:a="http://schemas.openxmlformats.org/drawingml/2006/main" xmlns:r="http://schemas.openxmlformats.org/officeDocument/2006/relationships" xmlns:p="http://schemas.openxmlformats.org/presentationml/2006/main">
+  <p:cSld>
+    <p:spTree>
+      <p:nvGrpSpPr>
+        <p:cNvPr id="1" name=""/>
+        <p:cNvGrpSpPr/>
+        <p:nvPr/>
+      </p:nvGrpSpPr>
+      <p:grpSpPr>
+        <a:xfrm>
+          <a:off x="0" y="0"/>
+          <a:ext cx="0" cy="0"/>
+          <a:chOff x="0" y="0"/>
+          <a:chExt cx="0" cy="0"/>
+        </a:xfrm>
+      </p:grpSpPr>
+      <p:sp>
+        <p:nvSpPr>
+          <p:cNvPr id="2" name="Slide Image Placeholder 1"/>
+          <p:cNvSpPr>
+            <a:spLocks noGrp="1" noRot="1" noChangeAspect="1"/>
+          </p:cNvSpPr>
+          <p:nvPr>
+            <p:ph type="sldImg"/>
+          </p:nvPr>
+        </p:nvSpPr>
+        <p:spPr/>
+      </p:sp>
+      <p:sp>
+        <p:nvSpPr>
+          <p:cNvPr id="3" name="Notes Placeholder 2"/>
+          <p:cNvSpPr>
+            <a:spLocks noGrp="1"/>
+          </p:cNvSpPr>
+          <p:nvPr>
+            <p:ph type="body" idx="1"/>
+          </p:nvPr>
+        </p:nvSpPr>
+        <p:spPr/>
+        <p:txBody>
+          <a:bodyPr/>
+          <a:lstStyle/>
+          <a:p>
+            <a:r>
+              <a:rPr lang="en-US" dirty="0"/>
+              <a:t>Anexo de respaldo: detalle de Meta por marca. Usar solo si pregunta.</a:t>
+            </a:r>
+            <a:endParaRPr lang="en-US" dirty="0"/>
+          </a:p>
+        </p:txBody>
+      </p:sp>
+      <p:sp>
+        <p:nvSpPr>
+          <p:cNvPr id="4" name="Slide Number Placeholder 3"/>
+          <p:cNvSpPr>
+            <a:spLocks noGrp="1"/>
+          </p:cNvSpPr>
+          <p:nvPr>
+            <p:ph type="sldNum" sz="quarter" idx="10"/>
+          </p:nvPr>
+        </p:nvSpPr>
+        <p:spPr/>
+        <p:txBody>
+          <a:bodyPr/>
+          <a:lstStyle/>
+          <a:p>
+            <a:fld id="{F7021451-1387-4CA6-816F-3879F97B5CBC}" type="slidenum">
+              <a:rPr lang="en-US"/>
+              <a:t>13</a:t>
             </a:fld>
             <a:endParaRPr lang="en-US"/>
           </a:p>
@@ -2632,7 +2722,7 @@
           <a:p>
             <a:r>
               <a:rPr lang="en-US" dirty="0"/>
-              <a:t>Beg &amp; Barker tiene una base sólida: $89,9 mil en ventas en el año, 44% en renovaciones de suscripción, ventas estables mes a mes y flujos que rinden 13 veces más que las campañas. La búsqueda de marca es la línea más rentable de Google.</a:t>
+              <a:t>Aquí le contamos lo que viene en email para Brooklyn. Primero, el recorrido del cliente: cada compra lo lleva al siguiente flujo, desde la primera compra hasta la Bienvenida VIP y el aniversario, y si deja de comprar entra al Win-Back que le corresponde. Sumamos cinco flujos nuevos: Browse Abandonment, que es el que más rápido genera ventas; Reposición según el pack que compró; Bienvenida VIP en la tercera compra, sin descuento; Aniversario; y Win-Back B para 2.493 compradores repetidos inactivos. Además, pasamos a campañas simultáneas hipersegmentadas: varias campañas el mismo día, cada una a su grupo, sin que nadie reciba dos. Arrancamos esta semana después del Fast Sale.</a:t>
             </a:r>
             <a:endParaRPr lang="en-US" dirty="0"/>
           </a:p>
@@ -2720,7 +2810,7 @@
           <a:p>
             <a:r>
               <a:rPr lang="en-US" dirty="0"/>
-              <a:t>Siendo transparentes: las ventas van 35% por debajo del mes pasado. La eficiencia es buena, pero la inversión es baja, y en búsqueda es muy difícil competir. Por eso el enfoque es eficiencia con crecimiento de clientes nuevos a través de promo, no de marca, y llevar la pauta hacia Amazon midiendo cuánto contribuye: branding con una página completa que lleva directo a Amazon, más catálogo y retargeting. En Facebook no recomendamos seguir con el nivel actual: Meta pesa el doble que Google con bajo retorno, así que bajamos su presupuesto y monitoreamos su retorno indirecto.</a:t>
+              <a:t>Beg &amp; Barker tiene una base sólida: $89,9 mil en ventas en el año, 44% en renovaciones de suscripción, ventas estables mes a mes y flujos que rinden 13 veces más que las campañas. La búsqueda de marca es la línea más rentable de Google.</a:t>
             </a:r>
             <a:endParaRPr lang="en-US" dirty="0"/>
           </a:p>
@@ -2808,7 +2898,7 @@
           <a:p>
             <a:r>
               <a:rPr lang="en-US" dirty="0"/>
-              <a:t>Ayoba tiene el ticket más alto del portafolio, $91 por orden, un margen bruto de 60% y 4,2 dólares en ventas por cada dólar invertido en el año.</a:t>
+              <a:t>Siendo transparentes: las ventas van 35% por debajo del mes pasado. La eficiencia es buena, pero la inversión es baja, y en búsqueda es muy difícil competir. Por eso el enfoque es eficiencia con crecimiento de clientes nuevos a través de promo, no de marca, y llevar la pauta hacia Amazon midiendo cuánto contribuye: branding con una página completa que lleva directo a Amazon, más catálogo y retargeting. En Facebook no recomendamos seguir con el nivel actual: Meta pesa el doble que Google con bajo retorno, así que bajamos su presupuesto y monitoreamos su retorno indirecto.</a:t>
             </a:r>
             <a:endParaRPr lang="en-US" dirty="0"/>
           </a:p>
@@ -2896,7 +2986,7 @@
           <a:p>
             <a:r>
               <a:rPr lang="en-US" dirty="0"/>
-              <a:t>Con Ayoba pasa algo parecido: vende muy poco en la web. El tráfico que llega es bueno, pero la experiencia de compra frena la conversión. Octubre va en $3,1 mil con un retorno blended de 3,6x. 58% de los clientes son recurrentes; el reto es el volumen de clientes nuevos. La propuesta es un test A/B: una campaña de marca hacia Amazon para medir el resultado, con la meta de sumar 10% a las ventas de Amazon. Mantenemos la pauta web baja y optimizada, y replicamos la estrategia de Brooklyn.</a:t>
+              <a:t>Ayoba tiene el ticket más alto del portafolio, $91 por orden, un margen bruto de 60% y 4,2 dólares en ventas por cada dólar invertido en el año.</a:t>
             </a:r>
             <a:endParaRPr lang="en-US" dirty="0"/>
           </a:p>
@@ -3924,7 +4014,7 @@
                 <a:ea typeface="Cambria" pitchFamily="34" charset="-122"/>
                 <a:cs typeface="Cambria" pitchFamily="34" charset="-120"/>
               </a:rPr>
-              <a:t>Lo que haremos esta semana</a:t>
+              <a:t>Ayoba: buen tráfico, el foco es Amazon</a:t>
             </a:r>
             <a:endParaRPr lang="en-US" sz="2600" dirty="0"/>
           </a:p>
@@ -3932,18 +4022,18 @@
       </p:sp>
       <p:sp>
         <p:nvSpPr>
-          <p:cNvPr id="3" name="Plan card 1"/>
+          <p:cNvPr id="3" name="AY now panel"/>
           <p:cNvSpPr/>
           <p:nvPr/>
         </p:nvSpPr>
         <p:spPr>
           <a:xfrm>
             <a:off x="457200" y="1005840"/>
-            <a:ext cx="2651760" cy="2377440"/>
+            <a:ext cx="4023360" cy="3383280"/>
           </a:xfrm>
           <a:prstGeom prst="roundRect">
             <a:avLst>
-              <a:gd name="adj" fmla="val 3077"/>
+              <a:gd name="adj" fmla="val 2162"/>
             </a:avLst>
           </a:prstGeom>
           <a:solidFill>
@@ -3954,20 +4044,22 @@
       </p:sp>
       <p:sp>
         <p:nvSpPr>
-          <p:cNvPr id="4" name="Plan dot 1"/>
+          <p:cNvPr id="4" name="AY next panel"/>
           <p:cNvSpPr/>
           <p:nvPr/>
         </p:nvSpPr>
         <p:spPr>
           <a:xfrm>
-            <a:off x="640080" y="1188720"/>
-            <a:ext cx="274320" cy="274320"/>
-          </a:xfrm>
-          <a:prstGeom prst="ellipse">
-            <a:avLst/>
+            <a:off x="4663440" y="1005840"/>
+            <a:ext cx="4023360" cy="3383280"/>
+          </a:xfrm>
+          <a:prstGeom prst="roundRect">
+            <a:avLst>
+              <a:gd name="adj" fmla="val 2162"/>
+            </a:avLst>
           </a:prstGeom>
           <a:solidFill>
-            <a:schemeClr val="accent1"/>
+            <a:schemeClr val="tx1"/>
           </a:solidFill>
           <a:ln/>
         </p:spPr>
@@ -3980,8 +4072,8 @@
         </p:nvSpPr>
         <p:spPr>
           <a:xfrm>
-            <a:off x="1005840" y="1143000"/>
-            <a:ext cx="1965960" cy="365760"/>
+            <a:off x="685800" y="1188720"/>
+            <a:ext cx="3566160" cy="365760"/>
           </a:xfrm>
           <a:prstGeom prst="rect">
             <a:avLst/>
@@ -3997,17 +4089,17 @@
               <a:buNone/>
             </a:pPr>
             <a:r>
-              <a:rPr lang="en-US" sz="1500" b="1" dirty="0">
-                <a:solidFill>
-                  <a:schemeClr val="tx1"/>
+              <a:rPr lang="en-US" sz="1700" b="1" dirty="0">
+                <a:solidFill>
+                  <a:schemeClr val="accent1"/>
                 </a:solidFill>
                 <a:latin typeface="Cambria" pitchFamily="34" charset="0"/>
                 <a:ea typeface="Cambria" pitchFamily="34" charset="-122"/>
                 <a:cs typeface="Cambria" pitchFamily="34" charset="-120"/>
               </a:rPr>
-              <a:t>Brooklyn Biltong</a:t>
-            </a:r>
-            <a:endParaRPr lang="en-US" sz="1500" dirty="0"/>
+              <a:t>Dónde estamos</a:t>
+            </a:r>
+            <a:endParaRPr lang="en-US" sz="1700" dirty="0"/>
           </a:p>
         </p:txBody>
       </p:sp>
@@ -4019,8 +4111,47 @@
         </p:nvSpPr>
         <p:spPr>
           <a:xfrm>
-            <a:off x="640080" y="1600200"/>
-            <a:ext cx="2331720" cy="1691640"/>
+            <a:off x="4892040" y="1188720"/>
+            <a:ext cx="3566160" cy="365760"/>
+          </a:xfrm>
+          <a:prstGeom prst="rect">
+            <a:avLst/>
+          </a:prstGeom>
+          <a:noFill/>
+          <a:ln/>
+        </p:spPr>
+        <p:txBody>
+          <a:bodyPr wrap="square" lIns="0" tIns="0" rIns="0" bIns="0" rtlCol="0" anchor="ctr"/>
+          <a:lstStyle/>
+          <a:p>
+            <a:pPr indent="0" marL="0">
+              <a:buNone/>
+            </a:pPr>
+            <a:r>
+              <a:rPr lang="en-US" sz="1700" b="1" dirty="0">
+                <a:solidFill>
+                  <a:schemeClr val="accent6"/>
+                </a:solidFill>
+                <a:latin typeface="Cambria" pitchFamily="34" charset="0"/>
+                <a:ea typeface="Cambria" pitchFamily="34" charset="-122"/>
+                <a:cs typeface="Cambria" pitchFamily="34" charset="-120"/>
+              </a:rPr>
+              <a:t>Hacia dónde vamos</a:t>
+            </a:r>
+            <a:endParaRPr lang="en-US" sz="1700" dirty="0"/>
+          </a:p>
+        </p:txBody>
+      </p:sp>
+      <p:sp>
+        <p:nvSpPr>
+          <p:cNvPr id="7" name="Text 5"/>
+          <p:cNvSpPr txBox="1"/>
+          <p:nvPr/>
+        </p:nvSpPr>
+        <p:spPr>
+          <a:xfrm>
+            <a:off x="685800" y="1691640"/>
+            <a:ext cx="3611880" cy="2560320"/>
           </a:xfrm>
           <a:prstGeom prst="rect">
             <a:avLst/>
@@ -4034,467 +4165,168 @@
           <a:p>
             <a:pPr marL="342900" indent="-342900">
               <a:spcAft>
-                <a:spcPts val="500"/>
+                <a:spcPts val="800"/>
               </a:spcAft>
               <a:buSzPct val="100000"/>
               <a:buChar char="•"/>
             </a:pPr>
             <a:r>
-              <a:rPr lang="en-US" sz="1100" dirty="0">
+              <a:rPr lang="en-US" sz="1300" dirty="0">
                 <a:solidFill>
                   <a:schemeClr val="tx1"/>
                 </a:solidFill>
               </a:rPr>
-              <a:t>Fast Sale: VIP 20% y lista 15% (15 oct), recordatorio el 16 y cierre el 18</a:t>
-            </a:r>
-            <a:endParaRPr lang="en-US" sz="1100" dirty="0"/>
+              <a:t>Vende muy poco en la web</a:t>
+            </a:r>
+            <a:endParaRPr lang="en-US" sz="1300" dirty="0"/>
           </a:p>
           <a:p>
             <a:pPr marL="342900" indent="-342900">
               <a:spcAft>
-                <a:spcPts val="500"/>
+                <a:spcPts val="800"/>
               </a:spcAft>
               <a:buSzPct val="100000"/>
               <a:buChar char="•"/>
             </a:pPr>
             <a:r>
-              <a:rPr lang="en-US" sz="1100" dirty="0">
+              <a:rPr lang="en-US" sz="1300" dirty="0">
                 <a:solidFill>
                   <a:schemeClr val="tx1"/>
                 </a:solidFill>
               </a:rPr>
-              <a:t>Más correos y más enfocados, con flujos por tema</a:t>
-            </a:r>
-            <a:endParaRPr lang="en-US" sz="1100" dirty="0"/>
+              <a:t>El tráfico que llega es bueno, pero la experiencia de compra frena la conversión</a:t>
+            </a:r>
+            <a:endParaRPr lang="en-US" sz="1300" dirty="0"/>
           </a:p>
           <a:p>
             <a:pPr marL="342900" indent="-342900">
               <a:spcAft>
-                <a:spcPts val="500"/>
+                <a:spcPts val="800"/>
               </a:spcAft>
               <a:buSzPct val="100000"/>
               <a:buChar char="•"/>
             </a:pPr>
             <a:r>
-              <a:rPr lang="en-US" sz="1100" dirty="0">
+              <a:rPr lang="en-US" sz="1300" dirty="0">
                 <a:solidFill>
                   <a:schemeClr val="tx1"/>
                 </a:solidFill>
               </a:rPr>
-              <a:t>Crecer en ventas escalando retargeting y Smile</a:t>
-            </a:r>
-            <a:endParaRPr lang="en-US" sz="1100" dirty="0"/>
-          </a:p>
-        </p:txBody>
-      </p:sp>
-      <p:sp>
-        <p:nvSpPr>
-          <p:cNvPr id="7" name="Plan card 2"/>
-          <p:cNvSpPr/>
-          <p:nvPr/>
-        </p:nvSpPr>
-        <p:spPr>
-          <a:xfrm>
-            <a:off x="3246120" y="1005840"/>
-            <a:ext cx="2651760" cy="2377440"/>
-          </a:xfrm>
-          <a:prstGeom prst="roundRect">
-            <a:avLst>
-              <a:gd name="adj" fmla="val 3077"/>
-            </a:avLst>
-          </a:prstGeom>
-          <a:solidFill>
-            <a:schemeClr val="bg2"/>
-          </a:solidFill>
-          <a:ln/>
-        </p:spPr>
-      </p:sp>
-      <p:sp>
-        <p:nvSpPr>
-          <p:cNvPr id="8" name="Plan dot 2"/>
-          <p:cNvSpPr/>
-          <p:nvPr/>
-        </p:nvSpPr>
-        <p:spPr>
-          <a:xfrm>
-            <a:off x="3429000" y="1188720"/>
-            <a:ext cx="274320" cy="274320"/>
-          </a:xfrm>
-          <a:prstGeom prst="ellipse">
-            <a:avLst/>
-          </a:prstGeom>
-          <a:solidFill>
-            <a:schemeClr val="tx2"/>
-          </a:solidFill>
-          <a:ln/>
-        </p:spPr>
-      </p:sp>
-      <p:sp>
-        <p:nvSpPr>
-          <p:cNvPr id="9" name="Text 7"/>
-          <p:cNvSpPr txBox="1"/>
-          <p:nvPr/>
-        </p:nvSpPr>
-        <p:spPr>
-          <a:xfrm>
-            <a:off x="3794760" y="1143000"/>
-            <a:ext cx="1965960" cy="365760"/>
-          </a:xfrm>
-          <a:prstGeom prst="rect">
-            <a:avLst/>
-          </a:prstGeom>
-          <a:noFill/>
-          <a:ln/>
-        </p:spPr>
-        <p:txBody>
-          <a:bodyPr wrap="square" lIns="0" tIns="0" rIns="0" bIns="0" rtlCol="0" anchor="ctr"/>
-          <a:lstStyle/>
-          <a:p>
-            <a:pPr indent="0" marL="0">
-              <a:buNone/>
-            </a:pPr>
-            <a:r>
-              <a:rPr lang="en-US" sz="1500" b="1" dirty="0">
-                <a:solidFill>
-                  <a:schemeClr val="tx1"/>
-                </a:solidFill>
-                <a:latin typeface="Cambria" pitchFamily="34" charset="0"/>
-                <a:ea typeface="Cambria" pitchFamily="34" charset="-122"/>
-                <a:cs typeface="Cambria" pitchFamily="34" charset="-120"/>
-              </a:rPr>
-              <a:t>Beg &amp; Barker</a:t>
-            </a:r>
-            <a:endParaRPr lang="en-US" sz="1500" dirty="0"/>
-          </a:p>
-        </p:txBody>
-      </p:sp>
-      <p:sp>
-        <p:nvSpPr>
-          <p:cNvPr id="10" name="Text 8"/>
-          <p:cNvSpPr txBox="1"/>
-          <p:nvPr/>
-        </p:nvSpPr>
-        <p:spPr>
-          <a:xfrm>
-            <a:off x="3429000" y="1600200"/>
-            <a:ext cx="2331720" cy="1691640"/>
-          </a:xfrm>
-          <a:prstGeom prst="rect">
-            <a:avLst/>
-          </a:prstGeom>
-          <a:noFill/>
-          <a:ln/>
-        </p:spPr>
-        <p:txBody>
-          <a:bodyPr wrap="square" lIns="0" tIns="0" rIns="0" bIns="0" rtlCol="0" anchor="t"/>
-          <a:lstStyle/>
+              <a:t>Octubre: $3,1K en ventas con un retorno blended de 3,6x</a:t>
+            </a:r>
+            <a:endParaRPr lang="en-US" sz="1300" dirty="0"/>
+          </a:p>
           <a:p>
             <a:pPr marL="342900" indent="-342900">
               <a:spcAft>
-                <a:spcPts val="500"/>
+                <a:spcPts val="800"/>
               </a:spcAft>
               <a:buSzPct val="100000"/>
               <a:buChar char="•"/>
             </a:pPr>
             <a:r>
-              <a:rPr lang="en-US" sz="1100" dirty="0">
+              <a:rPr lang="en-US" sz="1300" dirty="0">
                 <a:solidFill>
                   <a:schemeClr val="tx1"/>
                 </a:solidFill>
               </a:rPr>
-              <a:t>Campañas de clientes nuevos con promo</a:t>
-            </a:r>
-            <a:endParaRPr lang="en-US" sz="1100" dirty="0"/>
-          </a:p>
+              <a:t>58% de los clientes son recurrentes: el reto es el volumen de nuevos</a:t>
+            </a:r>
+            <a:endParaRPr lang="en-US" sz="1300" dirty="0"/>
+          </a:p>
+        </p:txBody>
+      </p:sp>
+      <p:sp>
+        <p:nvSpPr>
+          <p:cNvPr id="8" name="Text 6"/>
+          <p:cNvSpPr txBox="1"/>
+          <p:nvPr/>
+        </p:nvSpPr>
+        <p:spPr>
+          <a:xfrm>
+            <a:off x="4892040" y="1691640"/>
+            <a:ext cx="3611880" cy="2560320"/>
+          </a:xfrm>
+          <a:prstGeom prst="rect">
+            <a:avLst/>
+          </a:prstGeom>
+          <a:noFill/>
+          <a:ln/>
+        </p:spPr>
+        <p:txBody>
+          <a:bodyPr wrap="square" lIns="0" tIns="0" rIns="0" bIns="0" rtlCol="0" anchor="t"/>
+          <a:lstStyle/>
           <a:p>
             <a:pPr marL="342900" indent="-342900">
               <a:spcAft>
-                <a:spcPts val="500"/>
+                <a:spcPts val="800"/>
               </a:spcAft>
               <a:buSzPct val="100000"/>
               <a:buChar char="•"/>
             </a:pPr>
             <a:r>
-              <a:rPr lang="en-US" sz="1100" dirty="0">
-                <a:solidFill>
-                  <a:schemeClr val="tx1"/>
-                </a:solidFill>
-              </a:rPr>
-              <a:t>Pauta hacia Amazon: página completa, catálogo y retargeting</a:t>
-            </a:r>
-            <a:endParaRPr lang="en-US" sz="1100" dirty="0"/>
+              <a:rPr lang="en-US" sz="1300" dirty="0">
+                <a:solidFill>
+                  <a:schemeClr val="bg1"/>
+                </a:solidFill>
+              </a:rPr>
+              <a:t>Test A/B: campaña de marca hacia Amazon para medir el resultado</a:t>
+            </a:r>
+            <a:endParaRPr lang="en-US" sz="1300" dirty="0"/>
           </a:p>
           <a:p>
             <a:pPr marL="342900" indent="-342900">
               <a:spcAft>
-                <a:spcPts val="500"/>
+                <a:spcPts val="800"/>
               </a:spcAft>
               <a:buSzPct val="100000"/>
               <a:buChar char="•"/>
             </a:pPr>
             <a:r>
-              <a:rPr lang="en-US" sz="1100" dirty="0">
-                <a:solidFill>
-                  <a:schemeClr val="tx1"/>
-                </a:solidFill>
-              </a:rPr>
-              <a:t>Bajar Meta y monitorear su retorno indirecto</a:t>
-            </a:r>
-            <a:endParaRPr lang="en-US" sz="1100" dirty="0"/>
-          </a:p>
-        </p:txBody>
-      </p:sp>
-      <p:sp>
-        <p:nvSpPr>
-          <p:cNvPr id="11" name="Plan card 3"/>
-          <p:cNvSpPr/>
-          <p:nvPr/>
-        </p:nvSpPr>
-        <p:spPr>
-          <a:xfrm>
-            <a:off x="6035040" y="1005840"/>
-            <a:ext cx="2651760" cy="2377440"/>
-          </a:xfrm>
-          <a:prstGeom prst="roundRect">
-            <a:avLst>
-              <a:gd name="adj" fmla="val 3077"/>
-            </a:avLst>
-          </a:prstGeom>
-          <a:solidFill>
-            <a:schemeClr val="bg2"/>
-          </a:solidFill>
-          <a:ln/>
-        </p:spPr>
-      </p:sp>
-      <p:sp>
-        <p:nvSpPr>
-          <p:cNvPr id="12" name="Plan dot 3"/>
-          <p:cNvSpPr/>
-          <p:nvPr/>
-        </p:nvSpPr>
-        <p:spPr>
-          <a:xfrm>
-            <a:off x="6217920" y="1188720"/>
-            <a:ext cx="274320" cy="274320"/>
-          </a:xfrm>
-          <a:prstGeom prst="ellipse">
-            <a:avLst/>
-          </a:prstGeom>
-          <a:solidFill>
-            <a:schemeClr val="tx2"/>
-          </a:solidFill>
-          <a:ln/>
-        </p:spPr>
-      </p:sp>
-      <p:sp>
-        <p:nvSpPr>
-          <p:cNvPr id="13" name="Text 11"/>
-          <p:cNvSpPr txBox="1"/>
-          <p:nvPr/>
-        </p:nvSpPr>
-        <p:spPr>
-          <a:xfrm>
-            <a:off x="6583680" y="1143000"/>
-            <a:ext cx="1965960" cy="365760"/>
-          </a:xfrm>
-          <a:prstGeom prst="rect">
-            <a:avLst/>
-          </a:prstGeom>
-          <a:noFill/>
-          <a:ln/>
-        </p:spPr>
-        <p:txBody>
-          <a:bodyPr wrap="square" lIns="0" tIns="0" rIns="0" bIns="0" rtlCol="0" anchor="ctr"/>
-          <a:lstStyle/>
-          <a:p>
-            <a:pPr indent="0" marL="0">
-              <a:buNone/>
-            </a:pPr>
-            <a:r>
-              <a:rPr lang="en-US" sz="1500" b="1" dirty="0">
-                <a:solidFill>
-                  <a:schemeClr val="tx1"/>
-                </a:solidFill>
-                <a:latin typeface="Cambria" pitchFamily="34" charset="0"/>
-                <a:ea typeface="Cambria" pitchFamily="34" charset="-122"/>
-                <a:cs typeface="Cambria" pitchFamily="34" charset="-120"/>
-              </a:rPr>
-              <a:t>Ayoba Foods</a:t>
-            </a:r>
-            <a:endParaRPr lang="en-US" sz="1500" dirty="0"/>
-          </a:p>
-        </p:txBody>
-      </p:sp>
-      <p:sp>
-        <p:nvSpPr>
-          <p:cNvPr id="14" name="Text 12"/>
-          <p:cNvSpPr txBox="1"/>
-          <p:nvPr/>
-        </p:nvSpPr>
-        <p:spPr>
-          <a:xfrm>
-            <a:off x="6217920" y="1600200"/>
-            <a:ext cx="2331720" cy="1691640"/>
-          </a:xfrm>
-          <a:prstGeom prst="rect">
-            <a:avLst/>
-          </a:prstGeom>
-          <a:noFill/>
-          <a:ln/>
-        </p:spPr>
-        <p:txBody>
-          <a:bodyPr wrap="square" lIns="0" tIns="0" rIns="0" bIns="0" rtlCol="0" anchor="t"/>
-          <a:lstStyle/>
+              <a:rPr lang="en-US" sz="1300" dirty="0">
+                <a:solidFill>
+                  <a:schemeClr val="bg1"/>
+                </a:solidFill>
+              </a:rPr>
+              <a:t>Objetivo: sumar 10% a las ventas de Amazon (si vende $10K, +$1K)</a:t>
+            </a:r>
+            <a:endParaRPr lang="en-US" sz="1300" dirty="0"/>
+          </a:p>
           <a:p>
             <a:pPr marL="342900" indent="-342900">
               <a:spcAft>
-                <a:spcPts val="500"/>
+                <a:spcPts val="800"/>
               </a:spcAft>
               <a:buSzPct val="100000"/>
               <a:buChar char="•"/>
             </a:pPr>
             <a:r>
-              <a:rPr lang="en-US" sz="1100" dirty="0">
-                <a:solidFill>
-                  <a:schemeClr val="tx1"/>
-                </a:solidFill>
-              </a:rPr>
-              <a:t>Test A/B de campaña de marca hacia Amazon (+10%)</a:t>
-            </a:r>
-            <a:endParaRPr lang="en-US" sz="1100" dirty="0"/>
+              <a:rPr lang="en-US" sz="1300" dirty="0">
+                <a:solidFill>
+                  <a:schemeClr val="bg1"/>
+                </a:solidFill>
+              </a:rPr>
+              <a:t>Pauta web baja y optimizada por performance</a:t>
+            </a:r>
+            <a:endParaRPr lang="en-US" sz="1300" dirty="0"/>
           </a:p>
           <a:p>
             <a:pPr marL="342900" indent="-342900">
               <a:spcAft>
-                <a:spcPts val="500"/>
+                <a:spcPts val="800"/>
               </a:spcAft>
               <a:buSzPct val="100000"/>
               <a:buChar char="•"/>
             </a:pPr>
             <a:r>
-              <a:rPr lang="en-US" sz="1100" dirty="0">
-                <a:solidFill>
-                  <a:schemeClr val="tx1"/>
-                </a:solidFill>
-              </a:rPr>
-              <a:t>Replicar la estrategia de suscripción de Brooklyn</a:t>
-            </a:r>
-            <a:endParaRPr lang="en-US" sz="1100" dirty="0"/>
-          </a:p>
-          <a:p>
-            <a:pPr marL="342900" indent="-342900">
-              <a:spcAft>
-                <a:spcPts val="500"/>
-              </a:spcAft>
-              <a:buSzPct val="100000"/>
-              <a:buChar char="•"/>
-            </a:pPr>
-            <a:r>
-              <a:rPr lang="en-US" sz="1100" dirty="0">
-                <a:solidFill>
-                  <a:schemeClr val="tx1"/>
-                </a:solidFill>
-              </a:rPr>
-              <a:t>Campañas: Taco Night, Oktoberfest y Cabin Weekend</a:t>
-            </a:r>
-            <a:endParaRPr lang="en-US" sz="1100" dirty="0"/>
-          </a:p>
-        </p:txBody>
-      </p:sp>
-      <p:sp>
-        <p:nvSpPr>
-          <p:cNvPr id="15" name="Follow-up panel"/>
-          <p:cNvSpPr/>
-          <p:nvPr/>
-        </p:nvSpPr>
-        <p:spPr>
-          <a:xfrm>
-            <a:off x="457200" y="3566160"/>
-            <a:ext cx="8229600" cy="960120"/>
-          </a:xfrm>
-          <a:prstGeom prst="roundRect">
-            <a:avLst>
-              <a:gd name="adj" fmla="val 7619"/>
-            </a:avLst>
-          </a:prstGeom>
-          <a:solidFill>
-            <a:schemeClr val="tx1"/>
-          </a:solidFill>
-          <a:ln/>
-        </p:spPr>
-      </p:sp>
-      <p:sp>
-        <p:nvSpPr>
-          <p:cNvPr id="16" name="Text 14"/>
-          <p:cNvSpPr txBox="1"/>
-          <p:nvPr/>
-        </p:nvSpPr>
-        <p:spPr>
-          <a:xfrm>
-            <a:off x="685800" y="3657600"/>
-            <a:ext cx="7772400" cy="320040"/>
-          </a:xfrm>
-          <a:prstGeom prst="rect">
-            <a:avLst/>
-          </a:prstGeom>
-          <a:noFill/>
-          <a:ln/>
-        </p:spPr>
-        <p:txBody>
-          <a:bodyPr wrap="square" lIns="0" tIns="0" rIns="0" bIns="0" rtlCol="0" anchor="ctr"/>
-          <a:lstStyle/>
-          <a:p>
-            <a:pPr indent="0" marL="0">
-              <a:buNone/>
-            </a:pPr>
-            <a:r>
-              <a:rPr lang="en-US" sz="1500" b="1" dirty="0">
+              <a:rPr lang="en-US" sz="1300" dirty="0">
                 <a:solidFill>
                   <a:schemeClr val="bg1"/>
                 </a:solidFill>
-                <a:latin typeface="Cambria" pitchFamily="34" charset="0"/>
-                <a:ea typeface="Cambria" pitchFamily="34" charset="-122"/>
-                <a:cs typeface="Cambria" pitchFamily="34" charset="-120"/>
-              </a:rPr>
-              <a:t>Próximo seguimiento: 21 de octubre</a:t>
-            </a:r>
-            <a:endParaRPr lang="en-US" sz="1500" dirty="0"/>
-          </a:p>
-        </p:txBody>
-      </p:sp>
-      <p:sp>
-        <p:nvSpPr>
-          <p:cNvPr id="17" name="Text 15"/>
-          <p:cNvSpPr txBox="1"/>
-          <p:nvPr/>
-        </p:nvSpPr>
-        <p:spPr>
-          <a:xfrm>
-            <a:off x="685800" y="3995928"/>
-            <a:ext cx="7772400" cy="457200"/>
-          </a:xfrm>
-          <a:prstGeom prst="rect">
-            <a:avLst/>
-          </a:prstGeom>
-          <a:noFill/>
-          <a:ln/>
-        </p:spPr>
-        <p:txBody>
-          <a:bodyPr wrap="square" lIns="0" tIns="0" rIns="0" bIns="0" rtlCol="0" anchor="t"/>
-          <a:lstStyle/>
-          <a:p>
-            <a:pPr indent="0" marL="0">
-              <a:buNone/>
-            </a:pPr>
-            <a:r>
-              <a:rPr lang="en-US" sz="1200" dirty="0">
-                <a:solidFill>
-                  <a:schemeClr val="accent6"/>
-                </a:solidFill>
-              </a:rPr>
-              <a:t>Le compartiremos los resultados del Fast Sale de Brooklyn y la primera lectura de los tests hacia Amazon en Beg &amp; Barker y Ayoba.</a:t>
-            </a:r>
-            <a:endParaRPr lang="en-US" sz="1200" dirty="0"/>
+              </a:rPr>
+              <a:t>Replicar la estrategia de Brooklyn: suscripción y recurrencia</a:t>
+            </a:r>
+            <a:endParaRPr lang="en-US" sz="1300" dirty="0"/>
           </a:p>
         </p:txBody>
       </p:sp>
@@ -4603,6 +4435,685 @@
                 <a:ea typeface="Cambria" pitchFamily="34" charset="-122"/>
                 <a:cs typeface="Cambria" pitchFamily="34" charset="-120"/>
               </a:rPr>
+              <a:t>Lo que haremos esta semana</a:t>
+            </a:r>
+            <a:endParaRPr lang="en-US" sz="2600" dirty="0"/>
+          </a:p>
+        </p:txBody>
+      </p:sp>
+      <p:sp>
+        <p:nvSpPr>
+          <p:cNvPr id="3" name="Plan card 1"/>
+          <p:cNvSpPr/>
+          <p:nvPr/>
+        </p:nvSpPr>
+        <p:spPr>
+          <a:xfrm>
+            <a:off x="457200" y="1005840"/>
+            <a:ext cx="2651760" cy="2377440"/>
+          </a:xfrm>
+          <a:prstGeom prst="roundRect">
+            <a:avLst>
+              <a:gd name="adj" fmla="val 3077"/>
+            </a:avLst>
+          </a:prstGeom>
+          <a:solidFill>
+            <a:schemeClr val="bg2"/>
+          </a:solidFill>
+          <a:ln/>
+        </p:spPr>
+      </p:sp>
+      <p:sp>
+        <p:nvSpPr>
+          <p:cNvPr id="4" name="Plan dot 1"/>
+          <p:cNvSpPr/>
+          <p:nvPr/>
+        </p:nvSpPr>
+        <p:spPr>
+          <a:xfrm>
+            <a:off x="640080" y="1188720"/>
+            <a:ext cx="274320" cy="274320"/>
+          </a:xfrm>
+          <a:prstGeom prst="ellipse">
+            <a:avLst/>
+          </a:prstGeom>
+          <a:solidFill>
+            <a:schemeClr val="accent1"/>
+          </a:solidFill>
+          <a:ln/>
+        </p:spPr>
+      </p:sp>
+      <p:sp>
+        <p:nvSpPr>
+          <p:cNvPr id="5" name="Text 3"/>
+          <p:cNvSpPr txBox="1"/>
+          <p:nvPr/>
+        </p:nvSpPr>
+        <p:spPr>
+          <a:xfrm>
+            <a:off x="1005840" y="1143000"/>
+            <a:ext cx="1965960" cy="365760"/>
+          </a:xfrm>
+          <a:prstGeom prst="rect">
+            <a:avLst/>
+          </a:prstGeom>
+          <a:noFill/>
+          <a:ln/>
+        </p:spPr>
+        <p:txBody>
+          <a:bodyPr wrap="square" lIns="0" tIns="0" rIns="0" bIns="0" rtlCol="0" anchor="ctr"/>
+          <a:lstStyle/>
+          <a:p>
+            <a:pPr indent="0" marL="0">
+              <a:buNone/>
+            </a:pPr>
+            <a:r>
+              <a:rPr lang="en-US" sz="1500" b="1" dirty="0">
+                <a:solidFill>
+                  <a:schemeClr val="tx1"/>
+                </a:solidFill>
+                <a:latin typeface="Cambria" pitchFamily="34" charset="0"/>
+                <a:ea typeface="Cambria" pitchFamily="34" charset="-122"/>
+                <a:cs typeface="Cambria" pitchFamily="34" charset="-120"/>
+              </a:rPr>
+              <a:t>Brooklyn Biltong</a:t>
+            </a:r>
+            <a:endParaRPr lang="en-US" sz="1500" dirty="0"/>
+          </a:p>
+        </p:txBody>
+      </p:sp>
+      <p:sp>
+        <p:nvSpPr>
+          <p:cNvPr id="6" name="Text 4"/>
+          <p:cNvSpPr txBox="1"/>
+          <p:nvPr/>
+        </p:nvSpPr>
+        <p:spPr>
+          <a:xfrm>
+            <a:off x="640080" y="1600200"/>
+            <a:ext cx="2331720" cy="1691640"/>
+          </a:xfrm>
+          <a:prstGeom prst="rect">
+            <a:avLst/>
+          </a:prstGeom>
+          <a:noFill/>
+          <a:ln/>
+        </p:spPr>
+        <p:txBody>
+          <a:bodyPr wrap="square" lIns="0" tIns="0" rIns="0" bIns="0" rtlCol="0" anchor="t"/>
+          <a:lstStyle/>
+          <a:p>
+            <a:pPr marL="342900" indent="-342900">
+              <a:spcAft>
+                <a:spcPts val="500"/>
+              </a:spcAft>
+              <a:buSzPct val="100000"/>
+              <a:buChar char="•"/>
+            </a:pPr>
+            <a:r>
+              <a:rPr lang="en-US" sz="1100" dirty="0">
+                <a:solidFill>
+                  <a:schemeClr val="tx1"/>
+                </a:solidFill>
+              </a:rPr>
+              <a:t>Fast Sale: VIP 20% y lista 15% (15 oct), recordatorio el 16 y cierre el 18</a:t>
+            </a:r>
+            <a:endParaRPr lang="en-US" sz="1100" dirty="0"/>
+          </a:p>
+          <a:p>
+            <a:pPr marL="342900" indent="-342900">
+              <a:spcAft>
+                <a:spcPts val="500"/>
+              </a:spcAft>
+              <a:buSzPct val="100000"/>
+              <a:buChar char="•"/>
+            </a:pPr>
+            <a:r>
+              <a:rPr lang="en-US" sz="1100" dirty="0">
+                <a:solidFill>
+                  <a:schemeClr val="tx1"/>
+                </a:solidFill>
+              </a:rPr>
+              <a:t>Nuevos flujos y campañas hipersegmentadas desde esta semana</a:t>
+            </a:r>
+            <a:endParaRPr lang="en-US" sz="1100" dirty="0"/>
+          </a:p>
+          <a:p>
+            <a:pPr marL="342900" indent="-342900">
+              <a:spcAft>
+                <a:spcPts val="500"/>
+              </a:spcAft>
+              <a:buSzPct val="100000"/>
+              <a:buChar char="•"/>
+            </a:pPr>
+            <a:r>
+              <a:rPr lang="en-US" sz="1100" dirty="0">
+                <a:solidFill>
+                  <a:schemeClr val="tx1"/>
+                </a:solidFill>
+              </a:rPr>
+              <a:t>Crecer en ventas escalando retargeting y Smile</a:t>
+            </a:r>
+            <a:endParaRPr lang="en-US" sz="1100" dirty="0"/>
+          </a:p>
+        </p:txBody>
+      </p:sp>
+      <p:sp>
+        <p:nvSpPr>
+          <p:cNvPr id="7" name="Plan card 2"/>
+          <p:cNvSpPr/>
+          <p:nvPr/>
+        </p:nvSpPr>
+        <p:spPr>
+          <a:xfrm>
+            <a:off x="3246120" y="1005840"/>
+            <a:ext cx="2651760" cy="2377440"/>
+          </a:xfrm>
+          <a:prstGeom prst="roundRect">
+            <a:avLst>
+              <a:gd name="adj" fmla="val 3077"/>
+            </a:avLst>
+          </a:prstGeom>
+          <a:solidFill>
+            <a:schemeClr val="bg2"/>
+          </a:solidFill>
+          <a:ln/>
+        </p:spPr>
+      </p:sp>
+      <p:sp>
+        <p:nvSpPr>
+          <p:cNvPr id="8" name="Plan dot 2"/>
+          <p:cNvSpPr/>
+          <p:nvPr/>
+        </p:nvSpPr>
+        <p:spPr>
+          <a:xfrm>
+            <a:off x="3429000" y="1188720"/>
+            <a:ext cx="274320" cy="274320"/>
+          </a:xfrm>
+          <a:prstGeom prst="ellipse">
+            <a:avLst/>
+          </a:prstGeom>
+          <a:solidFill>
+            <a:schemeClr val="tx2"/>
+          </a:solidFill>
+          <a:ln/>
+        </p:spPr>
+      </p:sp>
+      <p:sp>
+        <p:nvSpPr>
+          <p:cNvPr id="9" name="Text 7"/>
+          <p:cNvSpPr txBox="1"/>
+          <p:nvPr/>
+        </p:nvSpPr>
+        <p:spPr>
+          <a:xfrm>
+            <a:off x="3794760" y="1143000"/>
+            <a:ext cx="1965960" cy="365760"/>
+          </a:xfrm>
+          <a:prstGeom prst="rect">
+            <a:avLst/>
+          </a:prstGeom>
+          <a:noFill/>
+          <a:ln/>
+        </p:spPr>
+        <p:txBody>
+          <a:bodyPr wrap="square" lIns="0" tIns="0" rIns="0" bIns="0" rtlCol="0" anchor="ctr"/>
+          <a:lstStyle/>
+          <a:p>
+            <a:pPr indent="0" marL="0">
+              <a:buNone/>
+            </a:pPr>
+            <a:r>
+              <a:rPr lang="en-US" sz="1500" b="1" dirty="0">
+                <a:solidFill>
+                  <a:schemeClr val="tx1"/>
+                </a:solidFill>
+                <a:latin typeface="Cambria" pitchFamily="34" charset="0"/>
+                <a:ea typeface="Cambria" pitchFamily="34" charset="-122"/>
+                <a:cs typeface="Cambria" pitchFamily="34" charset="-120"/>
+              </a:rPr>
+              <a:t>Beg &amp; Barker</a:t>
+            </a:r>
+            <a:endParaRPr lang="en-US" sz="1500" dirty="0"/>
+          </a:p>
+        </p:txBody>
+      </p:sp>
+      <p:sp>
+        <p:nvSpPr>
+          <p:cNvPr id="10" name="Text 8"/>
+          <p:cNvSpPr txBox="1"/>
+          <p:nvPr/>
+        </p:nvSpPr>
+        <p:spPr>
+          <a:xfrm>
+            <a:off x="3429000" y="1600200"/>
+            <a:ext cx="2331720" cy="1691640"/>
+          </a:xfrm>
+          <a:prstGeom prst="rect">
+            <a:avLst/>
+          </a:prstGeom>
+          <a:noFill/>
+          <a:ln/>
+        </p:spPr>
+        <p:txBody>
+          <a:bodyPr wrap="square" lIns="0" tIns="0" rIns="0" bIns="0" rtlCol="0" anchor="t"/>
+          <a:lstStyle/>
+          <a:p>
+            <a:pPr marL="342900" indent="-342900">
+              <a:spcAft>
+                <a:spcPts val="500"/>
+              </a:spcAft>
+              <a:buSzPct val="100000"/>
+              <a:buChar char="•"/>
+            </a:pPr>
+            <a:r>
+              <a:rPr lang="en-US" sz="1100" dirty="0">
+                <a:solidFill>
+                  <a:schemeClr val="tx1"/>
+                </a:solidFill>
+              </a:rPr>
+              <a:t>Campañas de clientes nuevos con promo</a:t>
+            </a:r>
+            <a:endParaRPr lang="en-US" sz="1100" dirty="0"/>
+          </a:p>
+          <a:p>
+            <a:pPr marL="342900" indent="-342900">
+              <a:spcAft>
+                <a:spcPts val="500"/>
+              </a:spcAft>
+              <a:buSzPct val="100000"/>
+              <a:buChar char="•"/>
+            </a:pPr>
+            <a:r>
+              <a:rPr lang="en-US" sz="1100" dirty="0">
+                <a:solidFill>
+                  <a:schemeClr val="tx1"/>
+                </a:solidFill>
+              </a:rPr>
+              <a:t>Pauta hacia Amazon: página completa, catálogo y retargeting</a:t>
+            </a:r>
+            <a:endParaRPr lang="en-US" sz="1100" dirty="0"/>
+          </a:p>
+          <a:p>
+            <a:pPr marL="342900" indent="-342900">
+              <a:spcAft>
+                <a:spcPts val="500"/>
+              </a:spcAft>
+              <a:buSzPct val="100000"/>
+              <a:buChar char="•"/>
+            </a:pPr>
+            <a:r>
+              <a:rPr lang="en-US" sz="1100" dirty="0">
+                <a:solidFill>
+                  <a:schemeClr val="tx1"/>
+                </a:solidFill>
+              </a:rPr>
+              <a:t>Bajar Meta y monitorear su retorno indirecto</a:t>
+            </a:r>
+            <a:endParaRPr lang="en-US" sz="1100" dirty="0"/>
+          </a:p>
+        </p:txBody>
+      </p:sp>
+      <p:sp>
+        <p:nvSpPr>
+          <p:cNvPr id="11" name="Plan card 3"/>
+          <p:cNvSpPr/>
+          <p:nvPr/>
+        </p:nvSpPr>
+        <p:spPr>
+          <a:xfrm>
+            <a:off x="6035040" y="1005840"/>
+            <a:ext cx="2651760" cy="2377440"/>
+          </a:xfrm>
+          <a:prstGeom prst="roundRect">
+            <a:avLst>
+              <a:gd name="adj" fmla="val 3077"/>
+            </a:avLst>
+          </a:prstGeom>
+          <a:solidFill>
+            <a:schemeClr val="bg2"/>
+          </a:solidFill>
+          <a:ln/>
+        </p:spPr>
+      </p:sp>
+      <p:sp>
+        <p:nvSpPr>
+          <p:cNvPr id="12" name="Plan dot 3"/>
+          <p:cNvSpPr/>
+          <p:nvPr/>
+        </p:nvSpPr>
+        <p:spPr>
+          <a:xfrm>
+            <a:off x="6217920" y="1188720"/>
+            <a:ext cx="274320" cy="274320"/>
+          </a:xfrm>
+          <a:prstGeom prst="ellipse">
+            <a:avLst/>
+          </a:prstGeom>
+          <a:solidFill>
+            <a:schemeClr val="tx2"/>
+          </a:solidFill>
+          <a:ln/>
+        </p:spPr>
+      </p:sp>
+      <p:sp>
+        <p:nvSpPr>
+          <p:cNvPr id="13" name="Text 11"/>
+          <p:cNvSpPr txBox="1"/>
+          <p:nvPr/>
+        </p:nvSpPr>
+        <p:spPr>
+          <a:xfrm>
+            <a:off x="6583680" y="1143000"/>
+            <a:ext cx="1965960" cy="365760"/>
+          </a:xfrm>
+          <a:prstGeom prst="rect">
+            <a:avLst/>
+          </a:prstGeom>
+          <a:noFill/>
+          <a:ln/>
+        </p:spPr>
+        <p:txBody>
+          <a:bodyPr wrap="square" lIns="0" tIns="0" rIns="0" bIns="0" rtlCol="0" anchor="ctr"/>
+          <a:lstStyle/>
+          <a:p>
+            <a:pPr indent="0" marL="0">
+              <a:buNone/>
+            </a:pPr>
+            <a:r>
+              <a:rPr lang="en-US" sz="1500" b="1" dirty="0">
+                <a:solidFill>
+                  <a:schemeClr val="tx1"/>
+                </a:solidFill>
+                <a:latin typeface="Cambria" pitchFamily="34" charset="0"/>
+                <a:ea typeface="Cambria" pitchFamily="34" charset="-122"/>
+                <a:cs typeface="Cambria" pitchFamily="34" charset="-120"/>
+              </a:rPr>
+              <a:t>Ayoba Foods</a:t>
+            </a:r>
+            <a:endParaRPr lang="en-US" sz="1500" dirty="0"/>
+          </a:p>
+        </p:txBody>
+      </p:sp>
+      <p:sp>
+        <p:nvSpPr>
+          <p:cNvPr id="14" name="Text 12"/>
+          <p:cNvSpPr txBox="1"/>
+          <p:nvPr/>
+        </p:nvSpPr>
+        <p:spPr>
+          <a:xfrm>
+            <a:off x="6217920" y="1600200"/>
+            <a:ext cx="2331720" cy="1691640"/>
+          </a:xfrm>
+          <a:prstGeom prst="rect">
+            <a:avLst/>
+          </a:prstGeom>
+          <a:noFill/>
+          <a:ln/>
+        </p:spPr>
+        <p:txBody>
+          <a:bodyPr wrap="square" lIns="0" tIns="0" rIns="0" bIns="0" rtlCol="0" anchor="t"/>
+          <a:lstStyle/>
+          <a:p>
+            <a:pPr marL="342900" indent="-342900">
+              <a:spcAft>
+                <a:spcPts val="500"/>
+              </a:spcAft>
+              <a:buSzPct val="100000"/>
+              <a:buChar char="•"/>
+            </a:pPr>
+            <a:r>
+              <a:rPr lang="en-US" sz="1100" dirty="0">
+                <a:solidFill>
+                  <a:schemeClr val="tx1"/>
+                </a:solidFill>
+              </a:rPr>
+              <a:t>Test A/B de campaña de marca hacia Amazon (+10%)</a:t>
+            </a:r>
+            <a:endParaRPr lang="en-US" sz="1100" dirty="0"/>
+          </a:p>
+          <a:p>
+            <a:pPr marL="342900" indent="-342900">
+              <a:spcAft>
+                <a:spcPts val="500"/>
+              </a:spcAft>
+              <a:buSzPct val="100000"/>
+              <a:buChar char="•"/>
+            </a:pPr>
+            <a:r>
+              <a:rPr lang="en-US" sz="1100" dirty="0">
+                <a:solidFill>
+                  <a:schemeClr val="tx1"/>
+                </a:solidFill>
+              </a:rPr>
+              <a:t>Replicar la estrategia de suscripción de Brooklyn</a:t>
+            </a:r>
+            <a:endParaRPr lang="en-US" sz="1100" dirty="0"/>
+          </a:p>
+          <a:p>
+            <a:pPr marL="342900" indent="-342900">
+              <a:spcAft>
+                <a:spcPts val="500"/>
+              </a:spcAft>
+              <a:buSzPct val="100000"/>
+              <a:buChar char="•"/>
+            </a:pPr>
+            <a:r>
+              <a:rPr lang="en-US" sz="1100" dirty="0">
+                <a:solidFill>
+                  <a:schemeClr val="tx1"/>
+                </a:solidFill>
+              </a:rPr>
+              <a:t>Campañas: Taco Night, Oktoberfest y Cabin Weekend</a:t>
+            </a:r>
+            <a:endParaRPr lang="en-US" sz="1100" dirty="0"/>
+          </a:p>
+        </p:txBody>
+      </p:sp>
+      <p:sp>
+        <p:nvSpPr>
+          <p:cNvPr id="15" name="Follow-up panel"/>
+          <p:cNvSpPr/>
+          <p:nvPr/>
+        </p:nvSpPr>
+        <p:spPr>
+          <a:xfrm>
+            <a:off x="457200" y="3566160"/>
+            <a:ext cx="8229600" cy="960120"/>
+          </a:xfrm>
+          <a:prstGeom prst="roundRect">
+            <a:avLst>
+              <a:gd name="adj" fmla="val 7619"/>
+            </a:avLst>
+          </a:prstGeom>
+          <a:solidFill>
+            <a:schemeClr val="tx1"/>
+          </a:solidFill>
+          <a:ln/>
+        </p:spPr>
+      </p:sp>
+      <p:sp>
+        <p:nvSpPr>
+          <p:cNvPr id="16" name="Text 14"/>
+          <p:cNvSpPr txBox="1"/>
+          <p:nvPr/>
+        </p:nvSpPr>
+        <p:spPr>
+          <a:xfrm>
+            <a:off x="685800" y="3657600"/>
+            <a:ext cx="7772400" cy="320040"/>
+          </a:xfrm>
+          <a:prstGeom prst="rect">
+            <a:avLst/>
+          </a:prstGeom>
+          <a:noFill/>
+          <a:ln/>
+        </p:spPr>
+        <p:txBody>
+          <a:bodyPr wrap="square" lIns="0" tIns="0" rIns="0" bIns="0" rtlCol="0" anchor="ctr"/>
+          <a:lstStyle/>
+          <a:p>
+            <a:pPr indent="0" marL="0">
+              <a:buNone/>
+            </a:pPr>
+            <a:r>
+              <a:rPr lang="en-US" sz="1500" b="1" dirty="0">
+                <a:solidFill>
+                  <a:schemeClr val="bg1"/>
+                </a:solidFill>
+                <a:latin typeface="Cambria" pitchFamily="34" charset="0"/>
+                <a:ea typeface="Cambria" pitchFamily="34" charset="-122"/>
+                <a:cs typeface="Cambria" pitchFamily="34" charset="-120"/>
+              </a:rPr>
+              <a:t>Próximo seguimiento: 21 de octubre</a:t>
+            </a:r>
+            <a:endParaRPr lang="en-US" sz="1500" dirty="0"/>
+          </a:p>
+        </p:txBody>
+      </p:sp>
+      <p:sp>
+        <p:nvSpPr>
+          <p:cNvPr id="17" name="Text 15"/>
+          <p:cNvSpPr txBox="1"/>
+          <p:nvPr/>
+        </p:nvSpPr>
+        <p:spPr>
+          <a:xfrm>
+            <a:off x="685800" y="3995928"/>
+            <a:ext cx="7772400" cy="457200"/>
+          </a:xfrm>
+          <a:prstGeom prst="rect">
+            <a:avLst/>
+          </a:prstGeom>
+          <a:noFill/>
+          <a:ln/>
+        </p:spPr>
+        <p:txBody>
+          <a:bodyPr wrap="square" lIns="0" tIns="0" rIns="0" bIns="0" rtlCol="0" anchor="t"/>
+          <a:lstStyle/>
+          <a:p>
+            <a:pPr indent="0" marL="0">
+              <a:buNone/>
+            </a:pPr>
+            <a:r>
+              <a:rPr lang="en-US" sz="1200" dirty="0">
+                <a:solidFill>
+                  <a:schemeClr val="accent6"/>
+                </a:solidFill>
+              </a:rPr>
+              <a:t>Le compartiremos los resultados del Fast Sale de Brooklyn y la primera lectura de los tests hacia Amazon en Beg &amp; Barker y Ayoba.</a:t>
+            </a:r>
+            <a:endParaRPr lang="en-US" sz="1200" dirty="0"/>
+          </a:p>
+        </p:txBody>
+      </p:sp>
+      <p:sp>
+        <p:nvSpPr>
+          <p:cNvPr id="25" name="Slide Number Placeholder 0"/>
+          <p:cNvSpPr>
+            <a:spLocks noGrp="1"/>
+          </p:cNvSpPr>
+          <p:nvPr>
+            <p:ph type="sldNum" sz="quarter" idx="4294967295"/>
+          </p:nvPr>
+        </p:nvSpPr>
+        <p:spPr>
+          <a:xfrm>
+            <a:off x="8321040" y="4800600"/>
+            <a:ext cx="365760" cy="228600"/>
+          </a:xfrm>
+          <a:prstGeom prst="rect">
+            <a:avLst/>
+          </a:prstGeom>
+          <a:extLst>
+            <a:ext uri="{C572A759-6A51-4108-AA02-DFA0A04FC94B}">
+              <ma14:wrappingTextBoxFlag xmlns:ma14="http://schemas.microsoft.com/office/mac/drawingml/2011/main" val="0"/>
+            </a:ext>
+          </a:extLst>
+        </p:spPr>
+        <p:txBody>
+          <a:bodyPr/>
+          <a:lstStyle>
+            <a:lvl1pPr>
+              <a:defRPr sz="900">
+                <a:solidFill>
+                  <a:schemeClr val="accent4"/>
+                </a:solidFill>
+              </a:defRPr>
+            </a:lvl1pPr>
+          </a:lstStyle>
+          <a:p>
+            <a:pPr algn="r"/>
+            <a:fld id="{F7021451-1387-4CA6-816F-3879F97B5CBC}" type="slidenum">
+              <a:rPr b="0" lang="en-US"/>
+              <a:t>11</a:t>
+            </a:fld>
+            <a:endParaRPr lang="en-US"/>
+          </a:p>
+        </p:txBody>
+      </p:sp>
+    </p:spTree>
+  </p:cSld>
+  <p:clrMapOvr>
+    <a:masterClrMapping/>
+  </p:clrMapOvr>
+</p:sld>
+</file>
+
+<file path=ppt/slides/slide12.xml><?xml version="1.0" encoding="utf-8"?>
+<p:sld xmlns:a="http://schemas.openxmlformats.org/drawingml/2006/main" xmlns:r="http://schemas.openxmlformats.org/officeDocument/2006/relationships" xmlns:p="http://schemas.openxmlformats.org/presentationml/2006/main">
+  <p:cSld name="Slide 12">
+    <p:spTree>
+      <p:nvGrpSpPr>
+        <p:cNvPr id="1" name=""/>
+        <p:cNvGrpSpPr/>
+        <p:nvPr/>
+      </p:nvGrpSpPr>
+      <p:grpSpPr>
+        <a:xfrm>
+          <a:off x="0" y="0"/>
+          <a:ext cx="0" cy="0"/>
+          <a:chOff x="0" y="0"/>
+          <a:chExt cx="0" cy="0"/>
+        </a:xfrm>
+      </p:grpSpPr>
+      <p:sp>
+        <p:nvSpPr>
+          <p:cNvPr id="2" name="Text 0"/>
+          <p:cNvSpPr/>
+          <p:nvPr>
+            <p:ph idx="100" type="title" hasCustomPrompt="1"/>
+          </p:nvPr>
+        </p:nvSpPr>
+        <p:spPr>
+          <a:xfrm>
+            <a:off x="457200" y="274320"/>
+            <a:ext cx="8229600" cy="594360"/>
+          </a:xfrm>
+          <a:prstGeom prst="rect">
+            <a:avLst/>
+          </a:prstGeom>
+          <a:noFill/>
+          <a:ln/>
+        </p:spPr>
+        <p:txBody>
+          <a:bodyPr wrap="square" lIns="0" tIns="0" rIns="0" bIns="0" rtlCol="0" anchor="ctr"/>
+          <a:lstStyle/>
+          <a:p>
+            <a:pPr algn="l" indent="0" marL="0">
+              <a:buNone/>
+            </a:pPr>
+            <a:r>
+              <a:rPr lang="en-US" sz="2600" b="1" dirty="0">
+                <a:solidFill>
+                  <a:schemeClr val="tx1"/>
+                </a:solidFill>
+                <a:latin typeface="Cambria" pitchFamily="34" charset="0"/>
+                <a:ea typeface="Cambria" pitchFamily="34" charset="-122"/>
+                <a:cs typeface="Cambria" pitchFamily="34" charset="-120"/>
+              </a:rPr>
               <a:t>Lo comprometido el 9 de octubre: estado por marca</a:t>
             </a:r>
             <a:endParaRPr lang="en-US" sz="2600" dirty="0"/>
@@ -4611,7 +5122,7 @@
       </p:sp>
       <p:graphicFrame>
         <p:nvGraphicFramePr>
-          <p:cNvPr id="12" name="Commitment tracker"/>
+          <p:cNvPr id="13" name="Commitment tracker"/>
           <p:cNvGraphicFramePr>
             <a:graphicFrameLocks noGrp="1"/>
           </p:cNvGraphicFramePr>
@@ -7420,7 +7931,7 @@
             <a:pPr algn="r"/>
             <a:fld id="{F7021451-1387-4CA6-816F-3879F97B5CBC}" type="slidenum">
               <a:rPr b="0" lang="en-US"/>
-              <a:t>11</a:t>
+              <a:t>12</a:t>
             </a:fld>
             <a:endParaRPr lang="en-US"/>
           </a:p>
@@ -7434,9 +7945,9 @@
 </p:sld>
 </file>
 
-<file path=ppt/slides/slide12.xml><?xml version="1.0" encoding="utf-8"?>
+<file path=ppt/slides/slide13.xml><?xml version="1.0" encoding="utf-8"?>
 <p:sld xmlns:a="http://schemas.openxmlformats.org/drawingml/2006/main" xmlns:r="http://schemas.openxmlformats.org/officeDocument/2006/relationships" xmlns:p="http://schemas.openxmlformats.org/presentationml/2006/main">
-  <p:cSld name="Slide 12">
+  <p:cSld name="Slide 13">
     <p:spTree>
       <p:nvGrpSpPr>
         <p:cNvPr id="1" name=""/>
@@ -7795,7 +8306,7 @@
             <a:pPr algn="r"/>
             <a:fld id="{F7021451-1387-4CA6-816F-3879F97B5CBC}" type="slidenum">
               <a:rPr b="0" lang="en-US"/>
-              <a:t>12</a:t>
+              <a:t>13</a:t>
             </a:fld>
             <a:endParaRPr lang="en-US"/>
           </a:p>
@@ -9943,7 +10454,7 @@
                 <a:ea typeface="Cambria" pitchFamily="34" charset="-122"/>
                 <a:cs typeface="Cambria" pitchFamily="34" charset="-120"/>
               </a:rPr>
-              <a:t>Beg &amp; Barker: una base sólida y recurrente</a:t>
+              <a:t>Brooklyn: el nuevo programa de email</a:t>
             </a:r>
             <a:endParaRPr lang="en-US" sz="2600" dirty="0"/>
           </a:p>
@@ -9951,18 +10462,112 @@
       </p:sp>
       <p:sp>
         <p:nvSpPr>
-          <p:cNvPr id="3" name="BB stat 1"/>
+          <p:cNvPr id="3" name="Journey step 1"/>
           <p:cNvSpPr/>
           <p:nvPr/>
         </p:nvSpPr>
         <p:spPr>
           <a:xfrm>
-            <a:off x="457200" y="1005840"/>
-            <a:ext cx="4206240" cy="1005840"/>
+            <a:off x="457200" y="960120"/>
+            <a:ext cx="987552" cy="566928"/>
           </a:xfrm>
           <a:prstGeom prst="roundRect">
             <a:avLst>
-              <a:gd name="adj" fmla="val 7273"/>
+              <a:gd name="adj" fmla="val 12903"/>
+            </a:avLst>
+          </a:prstGeom>
+          <a:solidFill>
+            <a:schemeClr val="tx1"/>
+          </a:solidFill>
+          <a:ln/>
+        </p:spPr>
+      </p:sp>
+      <p:sp>
+        <p:nvSpPr>
+          <p:cNvPr id="4" name="Text 2"/>
+          <p:cNvSpPr txBox="1"/>
+          <p:nvPr/>
+        </p:nvSpPr>
+        <p:spPr>
+          <a:xfrm>
+            <a:off x="493776" y="960120"/>
+            <a:ext cx="914400" cy="566928"/>
+          </a:xfrm>
+          <a:prstGeom prst="rect">
+            <a:avLst/>
+          </a:prstGeom>
+          <a:noFill/>
+          <a:ln/>
+        </p:spPr>
+        <p:txBody>
+          <a:bodyPr wrap="square" lIns="0" tIns="0" rIns="0" bIns="0" rtlCol="0" anchor="ctr"/>
+          <a:lstStyle/>
+          <a:p>
+            <a:pPr algn="ctr" indent="0" marL="0">
+              <a:buNone/>
+            </a:pPr>
+            <a:r>
+              <a:rPr lang="en-US" sz="950" b="1" dirty="0">
+                <a:solidFill>
+                  <a:schemeClr val="bg1"/>
+                </a:solidFill>
+              </a:rPr>
+              <a:t>1ª compra</a:t>
+            </a:r>
+            <a:endParaRPr lang="en-US" sz="950" dirty="0"/>
+          </a:p>
+        </p:txBody>
+      </p:sp>
+      <p:sp>
+        <p:nvSpPr>
+          <p:cNvPr id="5" name="Text 3"/>
+          <p:cNvSpPr txBox="1"/>
+          <p:nvPr/>
+        </p:nvSpPr>
+        <p:spPr>
+          <a:xfrm>
+            <a:off x="1444752" y="960120"/>
+            <a:ext cx="201168" cy="566928"/>
+          </a:xfrm>
+          <a:prstGeom prst="rect">
+            <a:avLst/>
+          </a:prstGeom>
+          <a:noFill/>
+          <a:ln/>
+        </p:spPr>
+        <p:txBody>
+          <a:bodyPr wrap="square" lIns="0" tIns="0" rIns="0" bIns="0" rtlCol="0" anchor="ctr"/>
+          <a:lstStyle/>
+          <a:p>
+            <a:pPr algn="ctr" indent="0" marL="0">
+              <a:buNone/>
+            </a:pPr>
+            <a:r>
+              <a:rPr lang="en-US" sz="1600" b="1" dirty="0">
+                <a:solidFill>
+                  <a:schemeClr val="accent1"/>
+                </a:solidFill>
+              </a:rPr>
+              <a:t>›</a:t>
+            </a:r>
+            <a:endParaRPr lang="en-US" sz="1600" dirty="0"/>
+          </a:p>
+        </p:txBody>
+      </p:sp>
+      <p:sp>
+        <p:nvSpPr>
+          <p:cNvPr id="6" name="Journey step 2"/>
+          <p:cNvSpPr/>
+          <p:nvPr/>
+        </p:nvSpPr>
+        <p:spPr>
+          <a:xfrm>
+            <a:off x="1645920" y="960120"/>
+            <a:ext cx="987552" cy="566928"/>
+          </a:xfrm>
+          <a:prstGeom prst="roundRect">
+            <a:avLst>
+              <a:gd name="adj" fmla="val 12903"/>
             </a:avLst>
           </a:prstGeom>
           <a:solidFill>
@@ -9973,14 +10578,14 @@
       </p:sp>
       <p:sp>
         <p:nvSpPr>
-          <p:cNvPr id="4" name="Text 2"/>
+          <p:cNvPr id="7" name="Text 5"/>
           <p:cNvSpPr txBox="1"/>
           <p:nvPr/>
         </p:nvSpPr>
         <p:spPr>
           <a:xfrm>
-            <a:off x="640080" y="1097280"/>
-            <a:ext cx="1463040" cy="822960"/>
+            <a:off x="1682496" y="960120"/>
+            <a:ext cx="914400" cy="566928"/>
           </a:xfrm>
           <a:prstGeom prst="rect">
             <a:avLst/>
@@ -9989,39 +10594,579 @@
           <a:ln/>
         </p:spPr>
         <p:txBody>
-          <a:bodyPr wrap="square" lIns="0" tIns="0" rIns="0" bIns="0" rtlCol="0" anchor="ctr">
-            <a:normAutofit/>
-          </a:bodyPr>
+          <a:bodyPr wrap="square" lIns="0" tIns="0" rIns="0" bIns="0" rtlCol="0" anchor="ctr"/>
+          <a:lstStyle/>
+          <a:p>
+            <a:pPr algn="ctr" indent="0" marL="0">
+              <a:buNone/>
+            </a:pPr>
+            <a:r>
+              <a:rPr lang="en-US" sz="950" dirty="0">
+                <a:solidFill>
+                  <a:schemeClr val="tx1"/>
+                </a:solidFill>
+              </a:rPr>
+              <a:t>First Purchase + Bounce-Back</a:t>
+            </a:r>
+            <a:endParaRPr lang="en-US" sz="950" dirty="0"/>
+          </a:p>
+        </p:txBody>
+      </p:sp>
+      <p:sp>
+        <p:nvSpPr>
+          <p:cNvPr id="8" name="Text 6"/>
+          <p:cNvSpPr txBox="1"/>
+          <p:nvPr/>
+        </p:nvSpPr>
+        <p:spPr>
+          <a:xfrm>
+            <a:off x="2633472" y="960120"/>
+            <a:ext cx="201168" cy="566928"/>
+          </a:xfrm>
+          <a:prstGeom prst="rect">
+            <a:avLst/>
+          </a:prstGeom>
+          <a:noFill/>
+          <a:ln/>
+        </p:spPr>
+        <p:txBody>
+          <a:bodyPr wrap="square" lIns="0" tIns="0" rIns="0" bIns="0" rtlCol="0" anchor="ctr"/>
+          <a:lstStyle/>
+          <a:p>
+            <a:pPr algn="ctr" indent="0" marL="0">
+              <a:buNone/>
+            </a:pPr>
+            <a:r>
+              <a:rPr lang="en-US" sz="1600" b="1" dirty="0">
+                <a:solidFill>
+                  <a:schemeClr val="accent1"/>
+                </a:solidFill>
+              </a:rPr>
+              <a:t>›</a:t>
+            </a:r>
+            <a:endParaRPr lang="en-US" sz="1600" dirty="0"/>
+          </a:p>
+        </p:txBody>
+      </p:sp>
+      <p:sp>
+        <p:nvSpPr>
+          <p:cNvPr id="9" name="Journey step 3"/>
+          <p:cNvSpPr/>
+          <p:nvPr/>
+        </p:nvSpPr>
+        <p:spPr>
+          <a:xfrm>
+            <a:off x="2834640" y="960120"/>
+            <a:ext cx="987552" cy="566928"/>
+          </a:xfrm>
+          <a:prstGeom prst="roundRect">
+            <a:avLst>
+              <a:gd name="adj" fmla="val 12903"/>
+            </a:avLst>
+          </a:prstGeom>
+          <a:solidFill>
+            <a:schemeClr val="tx1"/>
+          </a:solidFill>
+          <a:ln/>
+        </p:spPr>
+      </p:sp>
+      <p:sp>
+        <p:nvSpPr>
+          <p:cNvPr id="10" name="Text 8"/>
+          <p:cNvSpPr txBox="1"/>
+          <p:nvPr/>
+        </p:nvSpPr>
+        <p:spPr>
+          <a:xfrm>
+            <a:off x="2871216" y="960120"/>
+            <a:ext cx="914400" cy="566928"/>
+          </a:xfrm>
+          <a:prstGeom prst="rect">
+            <a:avLst/>
+          </a:prstGeom>
+          <a:noFill/>
+          <a:ln/>
+        </p:spPr>
+        <p:txBody>
+          <a:bodyPr wrap="square" lIns="0" tIns="0" rIns="0" bIns="0" rtlCol="0" anchor="ctr"/>
+          <a:lstStyle/>
+          <a:p>
+            <a:pPr algn="ctr" indent="0" marL="0">
+              <a:buNone/>
+            </a:pPr>
+            <a:r>
+              <a:rPr lang="en-US" sz="950" b="1" dirty="0">
+                <a:solidFill>
+                  <a:schemeClr val="bg1"/>
+                </a:solidFill>
+              </a:rPr>
+              <a:t>2ª compra</a:t>
+            </a:r>
+            <a:endParaRPr lang="en-US" sz="950" dirty="0"/>
+          </a:p>
+        </p:txBody>
+      </p:sp>
+      <p:sp>
+        <p:nvSpPr>
+          <p:cNvPr id="11" name="Text 9"/>
+          <p:cNvSpPr txBox="1"/>
+          <p:nvPr/>
+        </p:nvSpPr>
+        <p:spPr>
+          <a:xfrm>
+            <a:off x="3822192" y="960120"/>
+            <a:ext cx="201168" cy="566928"/>
+          </a:xfrm>
+          <a:prstGeom prst="rect">
+            <a:avLst/>
+          </a:prstGeom>
+          <a:noFill/>
+          <a:ln/>
+        </p:spPr>
+        <p:txBody>
+          <a:bodyPr wrap="square" lIns="0" tIns="0" rIns="0" bIns="0" rtlCol="0" anchor="ctr"/>
+          <a:lstStyle/>
+          <a:p>
+            <a:pPr algn="ctr" indent="0" marL="0">
+              <a:buNone/>
+            </a:pPr>
+            <a:r>
+              <a:rPr lang="en-US" sz="1600" b="1" dirty="0">
+                <a:solidFill>
+                  <a:schemeClr val="accent1"/>
+                </a:solidFill>
+              </a:rPr>
+              <a:t>›</a:t>
+            </a:r>
+            <a:endParaRPr lang="en-US" sz="1600" dirty="0"/>
+          </a:p>
+        </p:txBody>
+      </p:sp>
+      <p:sp>
+        <p:nvSpPr>
+          <p:cNvPr id="12" name="Journey step 4"/>
+          <p:cNvSpPr/>
+          <p:nvPr/>
+        </p:nvSpPr>
+        <p:spPr>
+          <a:xfrm>
+            <a:off x="4023360" y="960120"/>
+            <a:ext cx="987552" cy="566928"/>
+          </a:xfrm>
+          <a:prstGeom prst="roundRect">
+            <a:avLst>
+              <a:gd name="adj" fmla="val 12903"/>
+            </a:avLst>
+          </a:prstGeom>
+          <a:solidFill>
+            <a:schemeClr val="bg2"/>
+          </a:solidFill>
+          <a:ln/>
+        </p:spPr>
+      </p:sp>
+      <p:sp>
+        <p:nvSpPr>
+          <p:cNvPr id="13" name="Text 11"/>
+          <p:cNvSpPr txBox="1"/>
+          <p:nvPr/>
+        </p:nvSpPr>
+        <p:spPr>
+          <a:xfrm>
+            <a:off x="4059936" y="960120"/>
+            <a:ext cx="914400" cy="566928"/>
+          </a:xfrm>
+          <a:prstGeom prst="rect">
+            <a:avLst/>
+          </a:prstGeom>
+          <a:noFill/>
+          <a:ln/>
+        </p:spPr>
+        <p:txBody>
+          <a:bodyPr wrap="square" lIns="0" tIns="0" rIns="0" bIns="0" rtlCol="0" anchor="ctr"/>
+          <a:lstStyle/>
+          <a:p>
+            <a:pPr algn="ctr" indent="0" marL="0">
+              <a:buNone/>
+            </a:pPr>
+            <a:r>
+              <a:rPr lang="en-US" sz="950" dirty="0">
+                <a:solidFill>
+                  <a:schemeClr val="tx1"/>
+                </a:solidFill>
+              </a:rPr>
+              <a:t>Subscribe &amp; Save + Reposición</a:t>
+            </a:r>
+            <a:endParaRPr lang="en-US" sz="950" dirty="0"/>
+          </a:p>
+        </p:txBody>
+      </p:sp>
+      <p:sp>
+        <p:nvSpPr>
+          <p:cNvPr id="14" name="Text 12"/>
+          <p:cNvSpPr txBox="1"/>
+          <p:nvPr/>
+        </p:nvSpPr>
+        <p:spPr>
+          <a:xfrm>
+            <a:off x="5010912" y="960120"/>
+            <a:ext cx="201168" cy="566928"/>
+          </a:xfrm>
+          <a:prstGeom prst="rect">
+            <a:avLst/>
+          </a:prstGeom>
+          <a:noFill/>
+          <a:ln/>
+        </p:spPr>
+        <p:txBody>
+          <a:bodyPr wrap="square" lIns="0" tIns="0" rIns="0" bIns="0" rtlCol="0" anchor="ctr"/>
+          <a:lstStyle/>
+          <a:p>
+            <a:pPr algn="ctr" indent="0" marL="0">
+              <a:buNone/>
+            </a:pPr>
+            <a:r>
+              <a:rPr lang="en-US" sz="1600" b="1" dirty="0">
+                <a:solidFill>
+                  <a:schemeClr val="accent1"/>
+                </a:solidFill>
+              </a:rPr>
+              <a:t>›</a:t>
+            </a:r>
+            <a:endParaRPr lang="en-US" sz="1600" dirty="0"/>
+          </a:p>
+        </p:txBody>
+      </p:sp>
+      <p:sp>
+        <p:nvSpPr>
+          <p:cNvPr id="15" name="Journey step 5"/>
+          <p:cNvSpPr/>
+          <p:nvPr/>
+        </p:nvSpPr>
+        <p:spPr>
+          <a:xfrm>
+            <a:off x="5212080" y="960120"/>
+            <a:ext cx="987552" cy="566928"/>
+          </a:xfrm>
+          <a:prstGeom prst="roundRect">
+            <a:avLst>
+              <a:gd name="adj" fmla="val 12903"/>
+            </a:avLst>
+          </a:prstGeom>
+          <a:solidFill>
+            <a:schemeClr val="tx1"/>
+          </a:solidFill>
+          <a:ln/>
+        </p:spPr>
+      </p:sp>
+      <p:sp>
+        <p:nvSpPr>
+          <p:cNvPr id="16" name="Text 14"/>
+          <p:cNvSpPr txBox="1"/>
+          <p:nvPr/>
+        </p:nvSpPr>
+        <p:spPr>
+          <a:xfrm>
+            <a:off x="5248656" y="960120"/>
+            <a:ext cx="914400" cy="566928"/>
+          </a:xfrm>
+          <a:prstGeom prst="rect">
+            <a:avLst/>
+          </a:prstGeom>
+          <a:noFill/>
+          <a:ln/>
+        </p:spPr>
+        <p:txBody>
+          <a:bodyPr wrap="square" lIns="0" tIns="0" rIns="0" bIns="0" rtlCol="0" anchor="ctr"/>
+          <a:lstStyle/>
+          <a:p>
+            <a:pPr algn="ctr" indent="0" marL="0">
+              <a:buNone/>
+            </a:pPr>
+            <a:r>
+              <a:rPr lang="en-US" sz="950" b="1" dirty="0">
+                <a:solidFill>
+                  <a:schemeClr val="bg1"/>
+                </a:solidFill>
+              </a:rPr>
+              <a:t>3ª compra</a:t>
+            </a:r>
+            <a:endParaRPr lang="en-US" sz="950" dirty="0"/>
+          </a:p>
+        </p:txBody>
+      </p:sp>
+      <p:sp>
+        <p:nvSpPr>
+          <p:cNvPr id="17" name="Text 15"/>
+          <p:cNvSpPr txBox="1"/>
+          <p:nvPr/>
+        </p:nvSpPr>
+        <p:spPr>
+          <a:xfrm>
+            <a:off x="6199632" y="960120"/>
+            <a:ext cx="201168" cy="566928"/>
+          </a:xfrm>
+          <a:prstGeom prst="rect">
+            <a:avLst/>
+          </a:prstGeom>
+          <a:noFill/>
+          <a:ln/>
+        </p:spPr>
+        <p:txBody>
+          <a:bodyPr wrap="square" lIns="0" tIns="0" rIns="0" bIns="0" rtlCol="0" anchor="ctr"/>
+          <a:lstStyle/>
+          <a:p>
+            <a:pPr algn="ctr" indent="0" marL="0">
+              <a:buNone/>
+            </a:pPr>
+            <a:r>
+              <a:rPr lang="en-US" sz="1600" b="1" dirty="0">
+                <a:solidFill>
+                  <a:schemeClr val="accent1"/>
+                </a:solidFill>
+              </a:rPr>
+              <a:t>›</a:t>
+            </a:r>
+            <a:endParaRPr lang="en-US" sz="1600" dirty="0"/>
+          </a:p>
+        </p:txBody>
+      </p:sp>
+      <p:sp>
+        <p:nvSpPr>
+          <p:cNvPr id="18" name="Journey step 6"/>
+          <p:cNvSpPr/>
+          <p:nvPr/>
+        </p:nvSpPr>
+        <p:spPr>
+          <a:xfrm>
+            <a:off x="6400800" y="960120"/>
+            <a:ext cx="987552" cy="566928"/>
+          </a:xfrm>
+          <a:prstGeom prst="roundRect">
+            <a:avLst>
+              <a:gd name="adj" fmla="val 12903"/>
+            </a:avLst>
+          </a:prstGeom>
+          <a:solidFill>
+            <a:schemeClr val="bg2"/>
+          </a:solidFill>
+          <a:ln/>
+        </p:spPr>
+      </p:sp>
+      <p:sp>
+        <p:nvSpPr>
+          <p:cNvPr id="19" name="Text 17"/>
+          <p:cNvSpPr txBox="1"/>
+          <p:nvPr/>
+        </p:nvSpPr>
+        <p:spPr>
+          <a:xfrm>
+            <a:off x="6437376" y="960120"/>
+            <a:ext cx="914400" cy="566928"/>
+          </a:xfrm>
+          <a:prstGeom prst="rect">
+            <a:avLst/>
+          </a:prstGeom>
+          <a:noFill/>
+          <a:ln/>
+        </p:spPr>
+        <p:txBody>
+          <a:bodyPr wrap="square" lIns="0" tIns="0" rIns="0" bIns="0" rtlCol="0" anchor="ctr"/>
+          <a:lstStyle/>
+          <a:p>
+            <a:pPr algn="ctr" indent="0" marL="0">
+              <a:buNone/>
+            </a:pPr>
+            <a:r>
+              <a:rPr lang="en-US" sz="950" dirty="0">
+                <a:solidFill>
+                  <a:schemeClr val="tx1"/>
+                </a:solidFill>
+              </a:rPr>
+              <a:t>Bienvenida VIP</a:t>
+            </a:r>
+            <a:endParaRPr lang="en-US" sz="950" dirty="0"/>
+          </a:p>
+        </p:txBody>
+      </p:sp>
+      <p:sp>
+        <p:nvSpPr>
+          <p:cNvPr id="20" name="Text 18"/>
+          <p:cNvSpPr txBox="1"/>
+          <p:nvPr/>
+        </p:nvSpPr>
+        <p:spPr>
+          <a:xfrm>
+            <a:off x="7388352" y="960120"/>
+            <a:ext cx="201168" cy="566928"/>
+          </a:xfrm>
+          <a:prstGeom prst="rect">
+            <a:avLst/>
+          </a:prstGeom>
+          <a:noFill/>
+          <a:ln/>
+        </p:spPr>
+        <p:txBody>
+          <a:bodyPr wrap="square" lIns="0" tIns="0" rIns="0" bIns="0" rtlCol="0" anchor="ctr"/>
+          <a:lstStyle/>
+          <a:p>
+            <a:pPr algn="ctr" indent="0" marL="0">
+              <a:buNone/>
+            </a:pPr>
+            <a:r>
+              <a:rPr lang="en-US" sz="1600" b="1" dirty="0">
+                <a:solidFill>
+                  <a:schemeClr val="accent1"/>
+                </a:solidFill>
+              </a:rPr>
+              <a:t>›</a:t>
+            </a:r>
+            <a:endParaRPr lang="en-US" sz="1600" dirty="0"/>
+          </a:p>
+        </p:txBody>
+      </p:sp>
+      <p:sp>
+        <p:nvSpPr>
+          <p:cNvPr id="21" name="Journey step 7"/>
+          <p:cNvSpPr/>
+          <p:nvPr/>
+        </p:nvSpPr>
+        <p:spPr>
+          <a:xfrm>
+            <a:off x="7589520" y="960120"/>
+            <a:ext cx="987552" cy="566928"/>
+          </a:xfrm>
+          <a:prstGeom prst="roundRect">
+            <a:avLst>
+              <a:gd name="adj" fmla="val 12903"/>
+            </a:avLst>
+          </a:prstGeom>
+          <a:solidFill>
+            <a:schemeClr val="tx1"/>
+          </a:solidFill>
+          <a:ln/>
+        </p:spPr>
+      </p:sp>
+      <p:sp>
+        <p:nvSpPr>
+          <p:cNvPr id="22" name="Text 20"/>
+          <p:cNvSpPr txBox="1"/>
+          <p:nvPr/>
+        </p:nvSpPr>
+        <p:spPr>
+          <a:xfrm>
+            <a:off x="7626096" y="960120"/>
+            <a:ext cx="914400" cy="566928"/>
+          </a:xfrm>
+          <a:prstGeom prst="rect">
+            <a:avLst/>
+          </a:prstGeom>
+          <a:noFill/>
+          <a:ln/>
+        </p:spPr>
+        <p:txBody>
+          <a:bodyPr wrap="square" lIns="0" tIns="0" rIns="0" bIns="0" rtlCol="0" anchor="ctr"/>
+          <a:lstStyle/>
+          <a:p>
+            <a:pPr algn="ctr" indent="0" marL="0">
+              <a:buNone/>
+            </a:pPr>
+            <a:r>
+              <a:rPr lang="en-US" sz="950" b="1" dirty="0">
+                <a:solidFill>
+                  <a:schemeClr val="bg1"/>
+                </a:solidFill>
+              </a:rPr>
+              <a:t>Aniversario</a:t>
+            </a:r>
+            <a:endParaRPr lang="en-US" sz="950" dirty="0"/>
+          </a:p>
+        </p:txBody>
+      </p:sp>
+      <p:sp>
+        <p:nvSpPr>
+          <p:cNvPr id="23" name="Text 21"/>
+          <p:cNvSpPr txBox="1"/>
+          <p:nvPr/>
+        </p:nvSpPr>
+        <p:spPr>
+          <a:xfrm>
+            <a:off x="457200" y="1572768"/>
+            <a:ext cx="8229600" cy="256032"/>
+          </a:xfrm>
+          <a:prstGeom prst="rect">
+            <a:avLst/>
+          </a:prstGeom>
+          <a:noFill/>
+          <a:ln/>
+        </p:spPr>
+        <p:txBody>
+          <a:bodyPr wrap="square" lIns="0" tIns="0" rIns="0" bIns="0" rtlCol="0" anchor="ctr"/>
           <a:lstStyle/>
           <a:p>
             <a:pPr indent="0" marL="0">
               <a:buNone/>
             </a:pPr>
             <a:r>
-              <a:rPr lang="en-US" sz="3000" b="1" dirty="0">
-                <a:solidFill>
-                  <a:schemeClr val="tx2"/>
+              <a:rPr lang="en-US" sz="1100" i="1" dirty="0">
+                <a:solidFill>
+                  <a:schemeClr val="accent1"/>
+                </a:solidFill>
+              </a:rPr>
+              <a:t>Si deja de comprar: Win-Back A (una compra) o Win-Back B (dos o más compras)</a:t>
+            </a:r>
+            <a:endParaRPr lang="en-US" sz="1100" dirty="0"/>
+          </a:p>
+        </p:txBody>
+      </p:sp>
+      <p:sp>
+        <p:nvSpPr>
+          <p:cNvPr id="24" name="Text 22"/>
+          <p:cNvSpPr txBox="1"/>
+          <p:nvPr/>
+        </p:nvSpPr>
+        <p:spPr>
+          <a:xfrm>
+            <a:off x="457200" y="1920240"/>
+            <a:ext cx="4023360" cy="292608"/>
+          </a:xfrm>
+          <a:prstGeom prst="rect">
+            <a:avLst/>
+          </a:prstGeom>
+          <a:noFill/>
+          <a:ln/>
+        </p:spPr>
+        <p:txBody>
+          <a:bodyPr wrap="square" lIns="0" tIns="0" rIns="0" bIns="0" rtlCol="0" anchor="ctr"/>
+          <a:lstStyle/>
+          <a:p>
+            <a:pPr indent="0" marL="0">
+              <a:buNone/>
+            </a:pPr>
+            <a:r>
+              <a:rPr lang="en-US" sz="1500" b="1" dirty="0">
+                <a:solidFill>
+                  <a:schemeClr val="accent2"/>
                 </a:solidFill>
                 <a:latin typeface="Cambria" pitchFamily="34" charset="0"/>
                 <a:ea typeface="Cambria" pitchFamily="34" charset="-122"/>
                 <a:cs typeface="Cambria" pitchFamily="34" charset="-120"/>
               </a:rPr>
-              <a:t>$89,9K</a:t>
-            </a:r>
-            <a:endParaRPr lang="en-US" sz="3000" dirty="0"/>
-          </a:p>
-        </p:txBody>
-      </p:sp>
-      <p:sp>
-        <p:nvSpPr>
-          <p:cNvPr id="5" name="Text 3"/>
+              <a:t>Flujos nuevos</a:t>
+            </a:r>
+            <a:endParaRPr lang="en-US" sz="1500" dirty="0"/>
+          </a:p>
+        </p:txBody>
+      </p:sp>
+      <p:sp>
+        <p:nvSpPr>
+          <p:cNvPr id="25" name="Text 23"/>
           <p:cNvSpPr txBox="1"/>
           <p:nvPr/>
         </p:nvSpPr>
         <p:spPr>
           <a:xfrm>
-            <a:off x="2194560" y="1097280"/>
-            <a:ext cx="2331720" cy="822960"/>
+            <a:off x="457200" y="2240280"/>
+            <a:ext cx="4023360" cy="1737360"/>
           </a:xfrm>
           <a:prstGeom prst="rect">
             <a:avLst/>
@@ -10030,38 +11175,266 @@
           <a:ln/>
         </p:spPr>
         <p:txBody>
-          <a:bodyPr wrap="square" lIns="0" tIns="0" rIns="0" bIns="0" rtlCol="0" anchor="ctr"/>
-          <a:lstStyle/>
-          <a:p>
+          <a:bodyPr wrap="square" lIns="0" tIns="0" rIns="0" bIns="0" rtlCol="0" anchor="t"/>
+          <a:lstStyle/>
+          <a:p>
+            <a:pPr marL="342900" indent="-342900">
+              <a:spcAft>
+                <a:spcPts val="400"/>
+              </a:spcAft>
+              <a:buSzPct val="100000"/>
+              <a:buChar char="•"/>
+            </a:pPr>
+            <a:r>
+              <a:rPr lang="en-US" sz="1100" b="1" dirty="0">
+                <a:solidFill>
+                  <a:schemeClr val="tx1"/>
+                </a:solidFill>
+              </a:rPr>
+              <a:t>Browse Abandonment: </a:t>
+            </a:r>
             <a:pPr indent="0" marL="0">
               <a:buNone/>
             </a:pPr>
             <a:r>
-              <a:rPr lang="en-US" sz="1200" dirty="0">
+              <a:rPr lang="en-US" sz="1100" dirty="0">
                 <a:solidFill>
                   <a:schemeClr val="tx1"/>
                 </a:solidFill>
               </a:rPr>
-              <a:t>en ventas en lo que va del año, con 1.181 órdenes y ticket promedio de $76</a:t>
-            </a:r>
-            <a:endParaRPr lang="en-US" sz="1200" dirty="0"/>
-          </a:p>
-        </p:txBody>
-      </p:sp>
-      <p:sp>
-        <p:nvSpPr>
-          <p:cNvPr id="6" name="BB stat 2"/>
+              <a:t>a quien ve un producto y no lo agrega al carrito</a:t>
+            </a:r>
+            <a:endParaRPr lang="en-US" sz="1100" dirty="0"/>
+          </a:p>
+          <a:p>
+            <a:pPr marL="342900" indent="-342900">
+              <a:spcAft>
+                <a:spcPts val="400"/>
+              </a:spcAft>
+              <a:buSzPct val="100000"/>
+              <a:buChar char="•"/>
+            </a:pPr>
+            <a:r>
+              <a:rPr lang="en-US" sz="1100" b="1" dirty="0">
+                <a:solidFill>
+                  <a:schemeClr val="tx1"/>
+                </a:solidFill>
+              </a:rPr>
+              <a:t>Reposición: </a:t>
+            </a:r>
+            <a:pPr indent="0" marL="0">
+              <a:buNone/>
+            </a:pPr>
+            <a:r>
+              <a:rPr lang="en-US" sz="1100" dirty="0">
+                <a:solidFill>
+                  <a:schemeClr val="tx1"/>
+                </a:solidFill>
+              </a:rPr>
+              <a:t>"¿se te está acabando?" según el pack (3 bolsas a 21 días, 5 a 30, 7 a 40)</a:t>
+            </a:r>
+            <a:endParaRPr lang="en-US" sz="1100" dirty="0"/>
+          </a:p>
+          <a:p>
+            <a:pPr marL="342900" indent="-342900">
+              <a:spcAft>
+                <a:spcPts val="400"/>
+              </a:spcAft>
+              <a:buSzPct val="100000"/>
+              <a:buChar char="•"/>
+            </a:pPr>
+            <a:r>
+              <a:rPr lang="en-US" sz="1100" b="1" dirty="0">
+                <a:solidFill>
+                  <a:schemeClr val="tx1"/>
+                </a:solidFill>
+              </a:rPr>
+              <a:t>Bienvenida VIP: </a:t>
+            </a:r>
+            <a:pPr indent="0" marL="0">
+              <a:buNone/>
+            </a:pPr>
+            <a:r>
+              <a:rPr lang="en-US" sz="1100" dirty="0">
+                <a:solidFill>
+                  <a:schemeClr val="tx1"/>
+                </a:solidFill>
+              </a:rPr>
+              <a:t>en la 3ª compra, sin descuento: estatus, acceso anticipado y un sabor nuevo</a:t>
+            </a:r>
+            <a:endParaRPr lang="en-US" sz="1100" dirty="0"/>
+          </a:p>
+          <a:p>
+            <a:pPr marL="342900" indent="-342900">
+              <a:spcAft>
+                <a:spcPts val="400"/>
+              </a:spcAft>
+              <a:buSzPct val="100000"/>
+              <a:buChar char="•"/>
+            </a:pPr>
+            <a:r>
+              <a:rPr lang="en-US" sz="1100" b="1" dirty="0">
+                <a:solidFill>
+                  <a:schemeClr val="tx1"/>
+                </a:solidFill>
+              </a:rPr>
+              <a:t>Aniversario: </a:t>
+            </a:r>
+            <a:pPr indent="0" marL="0">
+              <a:buNone/>
+            </a:pPr>
+            <a:r>
+              <a:rPr lang="en-US" sz="1100" dirty="0">
+                <a:solidFill>
+                  <a:schemeClr val="tx1"/>
+                </a:solidFill>
+              </a:rPr>
+              <a:t>un año desde la primera compra</a:t>
+            </a:r>
+            <a:endParaRPr lang="en-US" sz="1100" dirty="0"/>
+          </a:p>
+          <a:p>
+            <a:pPr marL="342900" indent="-342900">
+              <a:spcAft>
+                <a:spcPts val="400"/>
+              </a:spcAft>
+              <a:buSzPct val="100000"/>
+              <a:buChar char="•"/>
+            </a:pPr>
+            <a:r>
+              <a:rPr lang="en-US" sz="1100" b="1" dirty="0">
+                <a:solidFill>
+                  <a:schemeClr val="tx1"/>
+                </a:solidFill>
+              </a:rPr>
+              <a:t>Win-Back B: </a:t>
+            </a:r>
+            <a:pPr indent="0" marL="0">
+              <a:buNone/>
+            </a:pPr>
+            <a:r>
+              <a:rPr lang="en-US" sz="1100" dirty="0">
+                <a:solidFill>
+                  <a:schemeClr val="tx1"/>
+                </a:solidFill>
+              </a:rPr>
+              <a:t>reactivar a 2.493 compradores repetidos inactivos</a:t>
+            </a:r>
+            <a:endParaRPr lang="en-US" sz="1100" dirty="0"/>
+          </a:p>
+        </p:txBody>
+      </p:sp>
+      <p:sp>
+        <p:nvSpPr>
+          <p:cNvPr id="26" name="Campaigns panel"/>
           <p:cNvSpPr/>
           <p:nvPr/>
         </p:nvSpPr>
         <p:spPr>
           <a:xfrm>
-            <a:off x="457200" y="2148840"/>
-            <a:ext cx="4206240" cy="1005840"/>
+            <a:off x="4663440" y="1920240"/>
+            <a:ext cx="4023360" cy="2057400"/>
           </a:xfrm>
           <a:prstGeom prst="roundRect">
             <a:avLst>
-              <a:gd name="adj" fmla="val 7273"/>
+              <a:gd name="adj" fmla="val 3556"/>
+            </a:avLst>
+          </a:prstGeom>
+          <a:solidFill>
+            <a:schemeClr val="tx1"/>
+          </a:solidFill>
+          <a:ln/>
+        </p:spPr>
+      </p:sp>
+      <p:sp>
+        <p:nvSpPr>
+          <p:cNvPr id="27" name="Text 25"/>
+          <p:cNvSpPr txBox="1"/>
+          <p:nvPr/>
+        </p:nvSpPr>
+        <p:spPr>
+          <a:xfrm>
+            <a:off x="4846320" y="2011680"/>
+            <a:ext cx="3657600" cy="365760"/>
+          </a:xfrm>
+          <a:prstGeom prst="rect">
+            <a:avLst/>
+          </a:prstGeom>
+          <a:noFill/>
+          <a:ln/>
+        </p:spPr>
+        <p:txBody>
+          <a:bodyPr wrap="square" lIns="0" tIns="0" rIns="0" bIns="0" rtlCol="0" anchor="ctr"/>
+          <a:lstStyle/>
+          <a:p>
+            <a:pPr indent="0" marL="0">
+              <a:buNone/>
+            </a:pPr>
+            <a:r>
+              <a:rPr lang="en-US" sz="1400" b="1" dirty="0">
+                <a:solidFill>
+                  <a:schemeClr val="accent6"/>
+                </a:solidFill>
+                <a:latin typeface="Cambria" pitchFamily="34" charset="0"/>
+                <a:ea typeface="Cambria" pitchFamily="34" charset="-122"/>
+                <a:cs typeface="Cambria" pitchFamily="34" charset="-120"/>
+              </a:rPr>
+              <a:t>Campañas simultáneas hipersegmentadas</a:t>
+            </a:r>
+            <a:endParaRPr lang="en-US" sz="1400" dirty="0"/>
+          </a:p>
+        </p:txBody>
+      </p:sp>
+      <p:sp>
+        <p:nvSpPr>
+          <p:cNvPr id="28" name="Text 26"/>
+          <p:cNvSpPr txBox="1"/>
+          <p:nvPr/>
+        </p:nvSpPr>
+        <p:spPr>
+          <a:xfrm>
+            <a:off x="4846320" y="2423160"/>
+            <a:ext cx="3657600" cy="1463040"/>
+          </a:xfrm>
+          <a:prstGeom prst="rect">
+            <a:avLst/>
+          </a:prstGeom>
+          <a:noFill/>
+          <a:ln/>
+        </p:spPr>
+        <p:txBody>
+          <a:bodyPr wrap="square" lIns="0" tIns="0" rIns="0" bIns="0" rtlCol="0" anchor="t"/>
+          <a:lstStyle/>
+          <a:p>
+            <a:pPr indent="0" marL="0">
+              <a:buNone/>
+            </a:pPr>
+            <a:r>
+              <a:rPr lang="en-US" sz="1100" dirty="0">
+                <a:solidFill>
+                  <a:schemeClr val="bg1"/>
+                </a:solidFill>
+              </a:rPr>
+              <a:t>El mismo día salen varias campañas, cada una a un microsegmento con su propio mensaje: suscriptores, VIP, clientes de una compra, quienes hacen clic sin comprar y la base fría. Cada cliente queda en un solo grupo, así nadie recibe dos campañas el mismo día.</a:t>
+            </a:r>
+            <a:endParaRPr lang="en-US" sz="1100" dirty="0"/>
+          </a:p>
+        </p:txBody>
+      </p:sp>
+      <p:sp>
+        <p:nvSpPr>
+          <p:cNvPr id="29" name="Email step 1"/>
+          <p:cNvSpPr/>
+          <p:nvPr/>
+        </p:nvSpPr>
+        <p:spPr>
+          <a:xfrm>
+            <a:off x="457200" y="4069080"/>
+            <a:ext cx="2651760" cy="594360"/>
+          </a:xfrm>
+          <a:prstGeom prst="roundRect">
+            <a:avLst>
+              <a:gd name="adj" fmla="val 12308"/>
             </a:avLst>
           </a:prstGeom>
           <a:solidFill>
@@ -10072,14 +11445,14 @@
       </p:sp>
       <p:sp>
         <p:nvSpPr>
-          <p:cNvPr id="7" name="Text 5"/>
+          <p:cNvPr id="30" name="Text 28"/>
           <p:cNvSpPr txBox="1"/>
           <p:nvPr/>
         </p:nvSpPr>
         <p:spPr>
           <a:xfrm>
-            <a:off x="640080" y="2240280"/>
-            <a:ext cx="1463040" cy="822960"/>
+            <a:off x="594360" y="4069080"/>
+            <a:ext cx="2423160" cy="594360"/>
           </a:xfrm>
           <a:prstGeom prst="rect">
             <a:avLst/>
@@ -10088,79 +11461,49 @@
           <a:ln/>
         </p:spPr>
         <p:txBody>
-          <a:bodyPr wrap="square" lIns="0" tIns="0" rIns="0" bIns="0" rtlCol="0" anchor="ctr">
-            <a:normAutofit/>
-          </a:bodyPr>
+          <a:bodyPr wrap="square" lIns="0" tIns="0" rIns="0" bIns="0" rtlCol="0" anchor="ctr"/>
           <a:lstStyle/>
           <a:p>
             <a:pPr indent="0" marL="0">
               <a:buNone/>
             </a:pPr>
             <a:r>
-              <a:rPr lang="en-US" sz="3000" b="1" dirty="0">
-                <a:solidFill>
-                  <a:schemeClr val="accent2"/>
-                </a:solidFill>
-                <a:latin typeface="Cambria" pitchFamily="34" charset="0"/>
-                <a:ea typeface="Cambria" pitchFamily="34" charset="-122"/>
-                <a:cs typeface="Cambria" pitchFamily="34" charset="-120"/>
-              </a:rPr>
-              <a:t>44%</a:t>
-            </a:r>
-            <a:endParaRPr lang="en-US" sz="3000" dirty="0"/>
-          </a:p>
-        </p:txBody>
-      </p:sp>
-      <p:sp>
-        <p:nvSpPr>
-          <p:cNvPr id="8" name="Text 6"/>
-          <p:cNvSpPr txBox="1"/>
-          <p:nvPr/>
-        </p:nvSpPr>
-        <p:spPr>
-          <a:xfrm>
-            <a:off x="2194560" y="2240280"/>
-            <a:ext cx="2331720" cy="822960"/>
-          </a:xfrm>
-          <a:prstGeom prst="rect">
-            <a:avLst/>
-          </a:prstGeom>
-          <a:noFill/>
-          <a:ln/>
-        </p:spPr>
-        <p:txBody>
-          <a:bodyPr wrap="square" lIns="0" tIns="0" rIns="0" bIns="0" rtlCol="0" anchor="ctr"/>
-          <a:lstStyle/>
-          <a:p>
+              <a:rPr lang="en-US" sz="1000" b="1" dirty="0">
+                <a:solidFill>
+                  <a:schemeClr val="accent1"/>
+                </a:solidFill>
+              </a:rPr>
+              <a:t>Esta semana  </a:t>
+            </a:r>
             <a:pPr indent="0" marL="0">
               <a:buNone/>
             </a:pPr>
             <a:r>
-              <a:rPr lang="en-US" sz="1200" dirty="0">
+              <a:rPr lang="en-US" sz="1000" dirty="0">
                 <a:solidFill>
                   <a:schemeClr val="tx1"/>
                 </a:solidFill>
               </a:rPr>
-              <a:t>de las ventas son renovaciones de suscripción: $40K de ingreso recurrente en el año</a:t>
-            </a:r>
-            <a:endParaRPr lang="en-US" sz="1200" dirty="0"/>
-          </a:p>
-        </p:txBody>
-      </p:sp>
-      <p:sp>
-        <p:nvSpPr>
-          <p:cNvPr id="9" name="BB stat 3"/>
+              <a:t>Microsegmentos y Browse Abandonment, después del Fast Sale</a:t>
+            </a:r>
+            <a:endParaRPr lang="en-US" sz="1000" dirty="0"/>
+          </a:p>
+        </p:txBody>
+      </p:sp>
+      <p:sp>
+        <p:nvSpPr>
+          <p:cNvPr id="31" name="Email step 2"/>
           <p:cNvSpPr/>
           <p:nvPr/>
         </p:nvSpPr>
         <p:spPr>
           <a:xfrm>
-            <a:off x="457200" y="3291840"/>
-            <a:ext cx="4206240" cy="1005840"/>
+            <a:off x="3246120" y="4069080"/>
+            <a:ext cx="2651760" cy="594360"/>
           </a:xfrm>
           <a:prstGeom prst="roundRect">
             <a:avLst>
-              <a:gd name="adj" fmla="val 7273"/>
+              <a:gd name="adj" fmla="val 12308"/>
             </a:avLst>
           </a:prstGeom>
           <a:solidFill>
@@ -10171,14 +11514,14 @@
       </p:sp>
       <p:sp>
         <p:nvSpPr>
-          <p:cNvPr id="10" name="Text 8"/>
+          <p:cNvPr id="32" name="Text 30"/>
           <p:cNvSpPr txBox="1"/>
           <p:nvPr/>
         </p:nvSpPr>
         <p:spPr>
           <a:xfrm>
-            <a:off x="640080" y="3383280"/>
-            <a:ext cx="1463040" cy="822960"/>
+            <a:off x="3383280" y="4069080"/>
+            <a:ext cx="2423160" cy="594360"/>
           </a:xfrm>
           <a:prstGeom prst="rect">
             <a:avLst/>
@@ -10187,79 +11530,49 @@
           <a:ln/>
         </p:spPr>
         <p:txBody>
-          <a:bodyPr wrap="square" lIns="0" tIns="0" rIns="0" bIns="0" rtlCol="0" anchor="ctr">
-            <a:normAutofit/>
-          </a:bodyPr>
+          <a:bodyPr wrap="square" lIns="0" tIns="0" rIns="0" bIns="0" rtlCol="0" anchor="ctr"/>
           <a:lstStyle/>
           <a:p>
             <a:pPr indent="0" marL="0">
               <a:buNone/>
             </a:pPr>
             <a:r>
-              <a:rPr lang="en-US" sz="3000" b="1" dirty="0">
+              <a:rPr lang="en-US" sz="1000" b="1" dirty="0">
                 <a:solidFill>
                   <a:schemeClr val="accent1"/>
                 </a:solidFill>
-                <a:latin typeface="Cambria" pitchFamily="34" charset="0"/>
-                <a:ea typeface="Cambria" pitchFamily="34" charset="-122"/>
-                <a:cs typeface="Cambria" pitchFamily="34" charset="-120"/>
-              </a:rPr>
-              <a:t>$2,21</a:t>
-            </a:r>
-            <a:endParaRPr lang="en-US" sz="3000" dirty="0"/>
-          </a:p>
-        </p:txBody>
-      </p:sp>
-      <p:sp>
-        <p:nvSpPr>
-          <p:cNvPr id="11" name="Text 9"/>
-          <p:cNvSpPr txBox="1"/>
-          <p:nvPr/>
-        </p:nvSpPr>
-        <p:spPr>
-          <a:xfrm>
-            <a:off x="2194560" y="3383280"/>
-            <a:ext cx="2331720" cy="822960"/>
-          </a:xfrm>
-          <a:prstGeom prst="rect">
-            <a:avLst/>
-          </a:prstGeom>
-          <a:noFill/>
-          <a:ln/>
-        </p:spPr>
-        <p:txBody>
-          <a:bodyPr wrap="square" lIns="0" tIns="0" rIns="0" bIns="0" rtlCol="0" anchor="ctr"/>
-          <a:lstStyle/>
-          <a:p>
+              </a:rPr>
+              <a:t>Semana del 19  </a:t>
+            </a:r>
             <a:pPr indent="0" marL="0">
               <a:buNone/>
             </a:pPr>
             <a:r>
-              <a:rPr lang="en-US" sz="1200" dirty="0">
+              <a:rPr lang="en-US" sz="1000" dirty="0">
                 <a:solidFill>
                   <a:schemeClr val="tx1"/>
                 </a:solidFill>
               </a:rPr>
-              <a:t>por destinatario en los flujos automáticos, 13 veces más que las campañas</a:t>
-            </a:r>
-            <a:endParaRPr lang="en-US" sz="1200" dirty="0"/>
-          </a:p>
-        </p:txBody>
-      </p:sp>
-      <p:sp>
-        <p:nvSpPr>
-          <p:cNvPr id="12" name="BB card 1"/>
+              <a:t>Primera tanda de campañas, Reposición y Bienvenida VIP</a:t>
+            </a:r>
+            <a:endParaRPr lang="en-US" sz="1000" dirty="0"/>
+          </a:p>
+        </p:txBody>
+      </p:sp>
+      <p:sp>
+        <p:nvSpPr>
+          <p:cNvPr id="33" name="Email step 3"/>
           <p:cNvSpPr/>
           <p:nvPr/>
         </p:nvSpPr>
         <p:spPr>
           <a:xfrm>
-            <a:off x="5029200" y="1005840"/>
-            <a:ext cx="1783080" cy="1554480"/>
+            <a:off x="6035040" y="4069080"/>
+            <a:ext cx="2651760" cy="594360"/>
           </a:xfrm>
           <a:prstGeom prst="roundRect">
             <a:avLst>
-              <a:gd name="adj" fmla="val 4706"/>
+              <a:gd name="adj" fmla="val 12308"/>
             </a:avLst>
           </a:prstGeom>
           <a:solidFill>
@@ -10270,34 +11583,14 @@
       </p:sp>
       <p:sp>
         <p:nvSpPr>
-          <p:cNvPr id="13" name="BB dot 1"/>
-          <p:cNvSpPr/>
-          <p:nvPr/>
-        </p:nvSpPr>
-        <p:spPr>
-          <a:xfrm>
-            <a:off x="5166360" y="1143000"/>
-            <a:ext cx="256032" cy="256032"/>
-          </a:xfrm>
-          <a:prstGeom prst="ellipse">
-            <a:avLst/>
-          </a:prstGeom>
-          <a:solidFill>
-            <a:schemeClr val="accent2"/>
-          </a:solidFill>
-          <a:ln/>
-        </p:spPr>
-      </p:sp>
-      <p:sp>
-        <p:nvSpPr>
-          <p:cNvPr id="14" name="Text 12"/>
+          <p:cNvPr id="34" name="Text 32"/>
           <p:cNvSpPr txBox="1"/>
           <p:nvPr/>
         </p:nvSpPr>
         <p:spPr>
           <a:xfrm>
-            <a:off x="5486400" y="1097280"/>
-            <a:ext cx="1261872" cy="365760"/>
+            <a:off x="6172200" y="4069080"/>
+            <a:ext cx="2423160" cy="594360"/>
           </a:xfrm>
           <a:prstGeom prst="rect">
             <a:avLst/>
@@ -10306,455 +11599,32 @@
           <a:ln/>
         </p:spPr>
         <p:txBody>
-          <a:bodyPr wrap="square" lIns="0" tIns="0" rIns="0" bIns="0" rtlCol="0" anchor="ctr">
-            <a:normAutofit/>
-          </a:bodyPr>
+          <a:bodyPr wrap="square" lIns="0" tIns="0" rIns="0" bIns="0" rtlCol="0" anchor="ctr"/>
           <a:lstStyle/>
           <a:p>
             <a:pPr indent="0" marL="0">
               <a:buNone/>
             </a:pPr>
             <a:r>
-              <a:rPr lang="en-US" sz="1200" b="1" dirty="0">
-                <a:solidFill>
-                  <a:schemeClr val="tx1"/>
-                </a:solidFill>
-                <a:latin typeface="Cambria" pitchFamily="34" charset="0"/>
-                <a:ea typeface="Cambria" pitchFamily="34" charset="-122"/>
-                <a:cs typeface="Cambria" pitchFamily="34" charset="-120"/>
-              </a:rPr>
-              <a:t>Ventas estables</a:t>
-            </a:r>
-            <a:endParaRPr lang="en-US" sz="1200" dirty="0"/>
-          </a:p>
-        </p:txBody>
-      </p:sp>
-      <p:sp>
-        <p:nvSpPr>
-          <p:cNvPr id="15" name="Text 13"/>
-          <p:cNvSpPr txBox="1"/>
-          <p:nvPr/>
-        </p:nvSpPr>
-        <p:spPr>
-          <a:xfrm>
-            <a:off x="5166360" y="1508760"/>
-            <a:ext cx="1536192" cy="987552"/>
-          </a:xfrm>
-          <a:prstGeom prst="rect">
-            <a:avLst/>
-          </a:prstGeom>
-          <a:noFill/>
-          <a:ln/>
-        </p:spPr>
-        <p:txBody>
-          <a:bodyPr wrap="square" lIns="0" tIns="0" rIns="0" bIns="0" rtlCol="0" anchor="t"/>
-          <a:lstStyle/>
-          <a:p>
+              <a:rPr lang="en-US" sz="1000" b="1" dirty="0">
+                <a:solidFill>
+                  <a:schemeClr val="accent1"/>
+                </a:solidFill>
+              </a:rPr>
+              <a:t>Desde el 25  </a:t>
+            </a:r>
             <a:pPr indent="0" marL="0">
               <a:buNone/>
             </a:pPr>
             <a:r>
-              <a:rPr lang="en-US" sz="1100" dirty="0">
+              <a:rPr lang="en-US" sz="1000" dirty="0">
                 <a:solidFill>
                   <a:schemeClr val="tx1"/>
                 </a:solidFill>
               </a:rPr>
-              <a:t>~$9,3K al mes en el primer trimestre y ~$9,7K de abril a septiembre</a:t>
-            </a:r>
-            <a:endParaRPr lang="en-US" sz="1100" dirty="0"/>
-          </a:p>
-        </p:txBody>
-      </p:sp>
-      <p:sp>
-        <p:nvSpPr>
-          <p:cNvPr id="16" name="BB card 2"/>
-          <p:cNvSpPr/>
-          <p:nvPr/>
-        </p:nvSpPr>
-        <p:spPr>
-          <a:xfrm>
-            <a:off x="6903720" y="1005840"/>
-            <a:ext cx="1783080" cy="1554480"/>
-          </a:xfrm>
-          <a:prstGeom prst="roundRect">
-            <a:avLst>
-              <a:gd name="adj" fmla="val 4706"/>
-            </a:avLst>
-          </a:prstGeom>
-          <a:solidFill>
-            <a:schemeClr val="bg2"/>
-          </a:solidFill>
-          <a:ln/>
-        </p:spPr>
-      </p:sp>
-      <p:sp>
-        <p:nvSpPr>
-          <p:cNvPr id="17" name="BB dot 2"/>
-          <p:cNvSpPr/>
-          <p:nvPr/>
-        </p:nvSpPr>
-        <p:spPr>
-          <a:xfrm>
-            <a:off x="7040880" y="1143000"/>
-            <a:ext cx="256032" cy="256032"/>
-          </a:xfrm>
-          <a:prstGeom prst="ellipse">
-            <a:avLst/>
-          </a:prstGeom>
-          <a:solidFill>
-            <a:schemeClr val="accent2"/>
-          </a:solidFill>
-          <a:ln/>
-        </p:spPr>
-      </p:sp>
-      <p:sp>
-        <p:nvSpPr>
-          <p:cNvPr id="18" name="Text 16"/>
-          <p:cNvSpPr txBox="1"/>
-          <p:nvPr/>
-        </p:nvSpPr>
-        <p:spPr>
-          <a:xfrm>
-            <a:off x="7360920" y="1097280"/>
-            <a:ext cx="1261872" cy="365760"/>
-          </a:xfrm>
-          <a:prstGeom prst="rect">
-            <a:avLst/>
-          </a:prstGeom>
-          <a:noFill/>
-          <a:ln/>
-        </p:spPr>
-        <p:txBody>
-          <a:bodyPr wrap="square" lIns="0" tIns="0" rIns="0" bIns="0" rtlCol="0" anchor="ctr">
-            <a:normAutofit/>
-          </a:bodyPr>
-          <a:lstStyle/>
-          <a:p>
-            <a:pPr indent="0" marL="0">
-              <a:buNone/>
-            </a:pPr>
-            <a:r>
-              <a:rPr lang="en-US" sz="1200" b="1" dirty="0">
-                <a:solidFill>
-                  <a:schemeClr val="tx1"/>
-                </a:solidFill>
-                <a:latin typeface="Cambria" pitchFamily="34" charset="0"/>
-                <a:ea typeface="Cambria" pitchFamily="34" charset="-122"/>
-                <a:cs typeface="Cambria" pitchFamily="34" charset="-120"/>
-              </a:rPr>
-              <a:t>Búsqueda de marca</a:t>
-            </a:r>
-            <a:endParaRPr lang="en-US" sz="1200" dirty="0"/>
-          </a:p>
-        </p:txBody>
-      </p:sp>
-      <p:sp>
-        <p:nvSpPr>
-          <p:cNvPr id="19" name="Text 17"/>
-          <p:cNvSpPr txBox="1"/>
-          <p:nvPr/>
-        </p:nvSpPr>
-        <p:spPr>
-          <a:xfrm>
-            <a:off x="7040880" y="1508760"/>
-            <a:ext cx="1536192" cy="987552"/>
-          </a:xfrm>
-          <a:prstGeom prst="rect">
-            <a:avLst/>
-          </a:prstGeom>
-          <a:noFill/>
-          <a:ln/>
-        </p:spPr>
-        <p:txBody>
-          <a:bodyPr wrap="square" lIns="0" tIns="0" rIns="0" bIns="0" rtlCol="0" anchor="t"/>
-          <a:lstStyle/>
-          <a:p>
-            <a:pPr indent="0" marL="0">
-              <a:buNone/>
-            </a:pPr>
-            <a:r>
-              <a:rPr lang="en-US" sz="1100" dirty="0">
-                <a:solidFill>
-                  <a:schemeClr val="tx1"/>
-                </a:solidFill>
-              </a:rPr>
-              <a:t>La línea más rentable de Google, con un retorno cercano a 3x</a:t>
-            </a:r>
-            <a:endParaRPr lang="en-US" sz="1100" dirty="0"/>
-          </a:p>
-        </p:txBody>
-      </p:sp>
-      <p:sp>
-        <p:nvSpPr>
-          <p:cNvPr id="20" name="BB card 3"/>
-          <p:cNvSpPr/>
-          <p:nvPr/>
-        </p:nvSpPr>
-        <p:spPr>
-          <a:xfrm>
-            <a:off x="5029200" y="2697480"/>
-            <a:ext cx="1783080" cy="1554480"/>
-          </a:xfrm>
-          <a:prstGeom prst="roundRect">
-            <a:avLst>
-              <a:gd name="adj" fmla="val 4706"/>
-            </a:avLst>
-          </a:prstGeom>
-          <a:solidFill>
-            <a:schemeClr val="bg2"/>
-          </a:solidFill>
-          <a:ln/>
-        </p:spPr>
-      </p:sp>
-      <p:sp>
-        <p:nvSpPr>
-          <p:cNvPr id="21" name="BB dot 3"/>
-          <p:cNvSpPr/>
-          <p:nvPr/>
-        </p:nvSpPr>
-        <p:spPr>
-          <a:xfrm>
-            <a:off x="5166360" y="2834640"/>
-            <a:ext cx="256032" cy="256032"/>
-          </a:xfrm>
-          <a:prstGeom prst="ellipse">
-            <a:avLst/>
-          </a:prstGeom>
-          <a:solidFill>
-            <a:schemeClr val="accent2"/>
-          </a:solidFill>
-          <a:ln/>
-        </p:spPr>
-      </p:sp>
-      <p:sp>
-        <p:nvSpPr>
-          <p:cNvPr id="22" name="Text 20"/>
-          <p:cNvSpPr txBox="1"/>
-          <p:nvPr/>
-        </p:nvSpPr>
-        <p:spPr>
-          <a:xfrm>
-            <a:off x="5486400" y="2788920"/>
-            <a:ext cx="1261872" cy="365760"/>
-          </a:xfrm>
-          <a:prstGeom prst="rect">
-            <a:avLst/>
-          </a:prstGeom>
-          <a:noFill/>
-          <a:ln/>
-        </p:spPr>
-        <p:txBody>
-          <a:bodyPr wrap="square" lIns="0" tIns="0" rIns="0" bIns="0" rtlCol="0" anchor="ctr">
-            <a:normAutofit/>
-          </a:bodyPr>
-          <a:lstStyle/>
-          <a:p>
-            <a:pPr indent="0" marL="0">
-              <a:buNone/>
-            </a:pPr>
-            <a:r>
-              <a:rPr lang="en-US" sz="1200" b="1" dirty="0">
-                <a:solidFill>
-                  <a:schemeClr val="tx1"/>
-                </a:solidFill>
-                <a:latin typeface="Cambria" pitchFamily="34" charset="0"/>
-                <a:ea typeface="Cambria" pitchFamily="34" charset="-122"/>
-                <a:cs typeface="Cambria" pitchFamily="34" charset="-120"/>
-              </a:rPr>
-              <a:t>Retargeting dinámico</a:t>
-            </a:r>
-            <a:endParaRPr lang="en-US" sz="1200" dirty="0"/>
-          </a:p>
-        </p:txBody>
-      </p:sp>
-      <p:sp>
-        <p:nvSpPr>
-          <p:cNvPr id="23" name="Text 21"/>
-          <p:cNvSpPr txBox="1"/>
-          <p:nvPr/>
-        </p:nvSpPr>
-        <p:spPr>
-          <a:xfrm>
-            <a:off x="5166360" y="3200400"/>
-            <a:ext cx="1536192" cy="987552"/>
-          </a:xfrm>
-          <a:prstGeom prst="rect">
-            <a:avLst/>
-          </a:prstGeom>
-          <a:noFill/>
-          <a:ln/>
-        </p:spPr>
-        <p:txBody>
-          <a:bodyPr wrap="square" lIns="0" tIns="0" rIns="0" bIns="0" rtlCol="0" anchor="t"/>
-          <a:lstStyle/>
-          <a:p>
-            <a:pPr indent="0" marL="0">
-              <a:buNone/>
-            </a:pPr>
-            <a:r>
-              <a:rPr lang="en-US" sz="1100" dirty="0">
-                <a:solidFill>
-                  <a:schemeClr val="tx1"/>
-                </a:solidFill>
-              </a:rPr>
-              <a:t>Retorno de 3,1x en Meta antes de la reestructura del 10 oct</a:t>
-            </a:r>
-            <a:endParaRPr lang="en-US" sz="1100" dirty="0"/>
-          </a:p>
-        </p:txBody>
-      </p:sp>
-      <p:sp>
-        <p:nvSpPr>
-          <p:cNvPr id="24" name="BB card 4"/>
-          <p:cNvSpPr/>
-          <p:nvPr/>
-        </p:nvSpPr>
-        <p:spPr>
-          <a:xfrm>
-            <a:off x="6903720" y="2697480"/>
-            <a:ext cx="1783080" cy="1554480"/>
-          </a:xfrm>
-          <a:prstGeom prst="roundRect">
-            <a:avLst>
-              <a:gd name="adj" fmla="val 4706"/>
-            </a:avLst>
-          </a:prstGeom>
-          <a:solidFill>
-            <a:schemeClr val="bg2"/>
-          </a:solidFill>
-          <a:ln/>
-        </p:spPr>
-      </p:sp>
-      <p:sp>
-        <p:nvSpPr>
-          <p:cNvPr id="25" name="BB dot 4"/>
-          <p:cNvSpPr/>
-          <p:nvPr/>
-        </p:nvSpPr>
-        <p:spPr>
-          <a:xfrm>
-            <a:off x="7040880" y="2834640"/>
-            <a:ext cx="256032" cy="256032"/>
-          </a:xfrm>
-          <a:prstGeom prst="ellipse">
-            <a:avLst/>
-          </a:prstGeom>
-          <a:solidFill>
-            <a:schemeClr val="accent2"/>
-          </a:solidFill>
-          <a:ln/>
-        </p:spPr>
-      </p:sp>
-      <p:sp>
-        <p:nvSpPr>
-          <p:cNvPr id="26" name="Text 24"/>
-          <p:cNvSpPr txBox="1"/>
-          <p:nvPr/>
-        </p:nvSpPr>
-        <p:spPr>
-          <a:xfrm>
-            <a:off x="7360920" y="2788920"/>
-            <a:ext cx="1261872" cy="365760"/>
-          </a:xfrm>
-          <a:prstGeom prst="rect">
-            <a:avLst/>
-          </a:prstGeom>
-          <a:noFill/>
-          <a:ln/>
-        </p:spPr>
-        <p:txBody>
-          <a:bodyPr wrap="square" lIns="0" tIns="0" rIns="0" bIns="0" rtlCol="0" anchor="ctr">
-            <a:normAutofit/>
-          </a:bodyPr>
-          <a:lstStyle/>
-          <a:p>
-            <a:pPr indent="0" marL="0">
-              <a:buNone/>
-            </a:pPr>
-            <a:r>
-              <a:rPr lang="en-US" sz="1200" b="1" dirty="0">
-                <a:solidFill>
-                  <a:schemeClr val="tx1"/>
-                </a:solidFill>
-                <a:latin typeface="Cambria" pitchFamily="34" charset="0"/>
-                <a:ea typeface="Cambria" pitchFamily="34" charset="-122"/>
-                <a:cs typeface="Cambria" pitchFamily="34" charset="-120"/>
-              </a:rPr>
-              <a:t>Bienvenida renovada</a:t>
-            </a:r>
-            <a:endParaRPr lang="en-US" sz="1200" dirty="0"/>
-          </a:p>
-        </p:txBody>
-      </p:sp>
-      <p:sp>
-        <p:nvSpPr>
-          <p:cNvPr id="27" name="Text 25"/>
-          <p:cNvSpPr txBox="1"/>
-          <p:nvPr/>
-        </p:nvSpPr>
-        <p:spPr>
-          <a:xfrm>
-            <a:off x="7040880" y="3200400"/>
-            <a:ext cx="1536192" cy="987552"/>
-          </a:xfrm>
-          <a:prstGeom prst="rect">
-            <a:avLst/>
-          </a:prstGeom>
-          <a:noFill/>
-          <a:ln/>
-        </p:spPr>
-        <p:txBody>
-          <a:bodyPr wrap="square" lIns="0" tIns="0" rIns="0" bIns="0" rtlCol="0" anchor="t"/>
-          <a:lstStyle/>
-          <a:p>
-            <a:pPr indent="0" marL="0">
-              <a:buNone/>
-            </a:pPr>
-            <a:r>
-              <a:rPr lang="en-US" sz="1100" dirty="0">
-                <a:solidFill>
-                  <a:schemeClr val="tx1"/>
-                </a:solidFill>
-              </a:rPr>
-              <a:t>Welcome BARK15 activa desde el 6 oct; SMS Welcome en camino</a:t>
-            </a:r>
-            <a:endParaRPr lang="en-US" sz="1100" dirty="0"/>
-          </a:p>
-        </p:txBody>
-      </p:sp>
-      <p:sp>
-        <p:nvSpPr>
-          <p:cNvPr id="28" name="Text 26"/>
-          <p:cNvSpPr txBox="1"/>
-          <p:nvPr/>
-        </p:nvSpPr>
-        <p:spPr>
-          <a:xfrm>
-            <a:off x="457200" y="4434840"/>
-            <a:ext cx="8229600" cy="274320"/>
-          </a:xfrm>
-          <a:prstGeom prst="rect">
-            <a:avLst/>
-          </a:prstGeom>
-          <a:noFill/>
-          <a:ln/>
-        </p:spPr>
-        <p:txBody>
-          <a:bodyPr wrap="square" lIns="0" tIns="0" rIns="0" bIns="0" rtlCol="0" anchor="ctr"/>
-          <a:lstStyle/>
-          <a:p>
-            <a:pPr indent="0" marL="0">
-              <a:buNone/>
-            </a:pPr>
-            <a:r>
-              <a:rPr lang="en-US" sz="900" i="1" dirty="0">
-                <a:solidFill>
-                  <a:schemeClr val="accent4"/>
-                </a:solidFill>
-              </a:rPr>
-              <a:t>Fuente: dashboard de la tienda (1 ene – 13 oct 2026), Klaviyo, Google Ads (retorno de marca estimado) y Meta Ads Manager.</a:t>
-            </a:r>
-            <a:endParaRPr lang="en-US" sz="900" dirty="0"/>
+              <a:t>Win-Back B para compradores repetidos inactivos</a:t>
+            </a:r>
+            <a:endParaRPr lang="en-US" sz="1000" dirty="0"/>
           </a:p>
         </p:txBody>
       </p:sp>
@@ -10863,7 +11733,7 @@
                 <a:ea typeface="Cambria" pitchFamily="34" charset="-122"/>
                 <a:cs typeface="Cambria" pitchFamily="34" charset="-120"/>
               </a:rPr>
-              <a:t>Beg &amp; Barker: clientes nuevos y Amazon</a:t>
+              <a:t>Beg &amp; Barker: una base sólida y recurrente</a:t>
             </a:r>
             <a:endParaRPr lang="en-US" sz="2600" dirty="0"/>
           </a:p>
@@ -10871,18 +11741,18 @@
       </p:sp>
       <p:sp>
         <p:nvSpPr>
-          <p:cNvPr id="3" name="BB now panel"/>
+          <p:cNvPr id="3" name="BB stat 1"/>
           <p:cNvSpPr/>
           <p:nvPr/>
         </p:nvSpPr>
         <p:spPr>
           <a:xfrm>
             <a:off x="457200" y="1005840"/>
-            <a:ext cx="4023360" cy="3383280"/>
+            <a:ext cx="4206240" cy="1005840"/>
           </a:xfrm>
           <a:prstGeom prst="roundRect">
             <a:avLst>
-              <a:gd name="adj" fmla="val 2162"/>
+              <a:gd name="adj" fmla="val 7273"/>
             </a:avLst>
           </a:prstGeom>
           <a:solidFill>
@@ -10893,36 +11763,14 @@
       </p:sp>
       <p:sp>
         <p:nvSpPr>
-          <p:cNvPr id="4" name="BB next panel"/>
-          <p:cNvSpPr/>
-          <p:nvPr/>
-        </p:nvSpPr>
-        <p:spPr>
-          <a:xfrm>
-            <a:off x="4663440" y="1005840"/>
-            <a:ext cx="4023360" cy="3383280"/>
-          </a:xfrm>
-          <a:prstGeom prst="roundRect">
-            <a:avLst>
-              <a:gd name="adj" fmla="val 2162"/>
-            </a:avLst>
-          </a:prstGeom>
-          <a:solidFill>
-            <a:schemeClr val="tx1"/>
-          </a:solidFill>
-          <a:ln/>
-        </p:spPr>
-      </p:sp>
-      <p:sp>
-        <p:nvSpPr>
-          <p:cNvPr id="5" name="Text 3"/>
+          <p:cNvPr id="4" name="Text 2"/>
           <p:cNvSpPr txBox="1"/>
           <p:nvPr/>
         </p:nvSpPr>
         <p:spPr>
           <a:xfrm>
-            <a:off x="685800" y="1188720"/>
-            <a:ext cx="3566160" cy="365760"/>
+            <a:off x="640080" y="1097280"/>
+            <a:ext cx="1463040" cy="822960"/>
           </a:xfrm>
           <a:prstGeom prst="rect">
             <a:avLst/>
@@ -10931,37 +11779,39 @@
           <a:ln/>
         </p:spPr>
         <p:txBody>
-          <a:bodyPr wrap="square" lIns="0" tIns="0" rIns="0" bIns="0" rtlCol="0" anchor="ctr"/>
+          <a:bodyPr wrap="square" lIns="0" tIns="0" rIns="0" bIns="0" rtlCol="0" anchor="ctr">
+            <a:normAutofit/>
+          </a:bodyPr>
           <a:lstStyle/>
           <a:p>
             <a:pPr indent="0" marL="0">
               <a:buNone/>
             </a:pPr>
             <a:r>
-              <a:rPr lang="en-US" sz="1700" b="1" dirty="0">
-                <a:solidFill>
-                  <a:schemeClr val="accent1"/>
+              <a:rPr lang="en-US" sz="3000" b="1" dirty="0">
+                <a:solidFill>
+                  <a:schemeClr val="tx2"/>
                 </a:solidFill>
                 <a:latin typeface="Cambria" pitchFamily="34" charset="0"/>
                 <a:ea typeface="Cambria" pitchFamily="34" charset="-122"/>
                 <a:cs typeface="Cambria" pitchFamily="34" charset="-120"/>
               </a:rPr>
-              <a:t>Dónde estamos</a:t>
-            </a:r>
-            <a:endParaRPr lang="en-US" sz="1700" dirty="0"/>
-          </a:p>
-        </p:txBody>
-      </p:sp>
-      <p:sp>
-        <p:nvSpPr>
-          <p:cNvPr id="6" name="Text 4"/>
+              <a:t>$89,9K</a:t>
+            </a:r>
+            <a:endParaRPr lang="en-US" sz="3000" dirty="0"/>
+          </a:p>
+        </p:txBody>
+      </p:sp>
+      <p:sp>
+        <p:nvSpPr>
+          <p:cNvPr id="5" name="Text 3"/>
           <p:cNvSpPr txBox="1"/>
           <p:nvPr/>
         </p:nvSpPr>
         <p:spPr>
           <a:xfrm>
-            <a:off x="4892040" y="1188720"/>
-            <a:ext cx="3566160" cy="365760"/>
+            <a:off x="2194560" y="1097280"/>
+            <a:ext cx="2331720" cy="822960"/>
           </a:xfrm>
           <a:prstGeom prst="rect">
             <a:avLst/>
@@ -10977,111 +11827,77 @@
               <a:buNone/>
             </a:pPr>
             <a:r>
-              <a:rPr lang="en-US" sz="1700" b="1" dirty="0">
-                <a:solidFill>
-                  <a:schemeClr val="accent6"/>
+              <a:rPr lang="en-US" sz="1200" dirty="0">
+                <a:solidFill>
+                  <a:schemeClr val="tx1"/>
+                </a:solidFill>
+              </a:rPr>
+              <a:t>en ventas en lo que va del año, con 1.181 órdenes y ticket promedio de $76</a:t>
+            </a:r>
+            <a:endParaRPr lang="en-US" sz="1200" dirty="0"/>
+          </a:p>
+        </p:txBody>
+      </p:sp>
+      <p:sp>
+        <p:nvSpPr>
+          <p:cNvPr id="6" name="BB stat 2"/>
+          <p:cNvSpPr/>
+          <p:nvPr/>
+        </p:nvSpPr>
+        <p:spPr>
+          <a:xfrm>
+            <a:off x="457200" y="2148840"/>
+            <a:ext cx="4206240" cy="1005840"/>
+          </a:xfrm>
+          <a:prstGeom prst="roundRect">
+            <a:avLst>
+              <a:gd name="adj" fmla="val 7273"/>
+            </a:avLst>
+          </a:prstGeom>
+          <a:solidFill>
+            <a:schemeClr val="bg2"/>
+          </a:solidFill>
+          <a:ln/>
+        </p:spPr>
+      </p:sp>
+      <p:sp>
+        <p:nvSpPr>
+          <p:cNvPr id="7" name="Text 5"/>
+          <p:cNvSpPr txBox="1"/>
+          <p:nvPr/>
+        </p:nvSpPr>
+        <p:spPr>
+          <a:xfrm>
+            <a:off x="640080" y="2240280"/>
+            <a:ext cx="1463040" cy="822960"/>
+          </a:xfrm>
+          <a:prstGeom prst="rect">
+            <a:avLst/>
+          </a:prstGeom>
+          <a:noFill/>
+          <a:ln/>
+        </p:spPr>
+        <p:txBody>
+          <a:bodyPr wrap="square" lIns="0" tIns="0" rIns="0" bIns="0" rtlCol="0" anchor="ctr">
+            <a:normAutofit/>
+          </a:bodyPr>
+          <a:lstStyle/>
+          <a:p>
+            <a:pPr indent="0" marL="0">
+              <a:buNone/>
+            </a:pPr>
+            <a:r>
+              <a:rPr lang="en-US" sz="3000" b="1" dirty="0">
+                <a:solidFill>
+                  <a:schemeClr val="accent2"/>
                 </a:solidFill>
                 <a:latin typeface="Cambria" pitchFamily="34" charset="0"/>
                 <a:ea typeface="Cambria" pitchFamily="34" charset="-122"/>
                 <a:cs typeface="Cambria" pitchFamily="34" charset="-120"/>
               </a:rPr>
-              <a:t>Hacia dónde vamos</a:t>
-            </a:r>
-            <a:endParaRPr lang="en-US" sz="1700" dirty="0"/>
-          </a:p>
-        </p:txBody>
-      </p:sp>
-      <p:sp>
-        <p:nvSpPr>
-          <p:cNvPr id="7" name="Text 5"/>
-          <p:cNvSpPr txBox="1"/>
-          <p:nvPr/>
-        </p:nvSpPr>
-        <p:spPr>
-          <a:xfrm>
-            <a:off x="685800" y="1691640"/>
-            <a:ext cx="3611880" cy="2560320"/>
-          </a:xfrm>
-          <a:prstGeom prst="rect">
-            <a:avLst/>
-          </a:prstGeom>
-          <a:noFill/>
-          <a:ln/>
-        </p:spPr>
-        <p:txBody>
-          <a:bodyPr wrap="square" lIns="0" tIns="0" rIns="0" bIns="0" rtlCol="0" anchor="t"/>
-          <a:lstStyle/>
-          <a:p>
-            <a:pPr marL="342900" indent="-342900">
-              <a:spcAft>
-                <a:spcPts val="800"/>
-              </a:spcAft>
-              <a:buSzPct val="100000"/>
-              <a:buChar char="•"/>
-            </a:pPr>
-            <a:r>
-              <a:rPr lang="en-US" sz="1300" dirty="0">
-                <a:solidFill>
-                  <a:schemeClr val="tx1"/>
-                </a:solidFill>
-              </a:rPr>
-              <a:t>Ventas 35% por debajo del mes pasado</a:t>
-            </a:r>
-            <a:endParaRPr lang="en-US" sz="1300" dirty="0"/>
-          </a:p>
-          <a:p>
-            <a:pPr marL="342900" indent="-342900">
-              <a:spcAft>
-                <a:spcPts val="800"/>
-              </a:spcAft>
-              <a:buSzPct val="100000"/>
-              <a:buChar char="•"/>
-            </a:pPr>
-            <a:r>
-              <a:rPr lang="en-US" sz="1300" dirty="0">
-                <a:solidFill>
-                  <a:schemeClr val="tx1"/>
-                </a:solidFill>
-              </a:rPr>
-              <a:t>La eficiencia es buena, pero con una inversión baja</a:t>
-            </a:r>
-            <a:endParaRPr lang="en-US" sz="1300" dirty="0"/>
-          </a:p>
-          <a:p>
-            <a:pPr marL="342900" indent="-342900">
-              <a:spcAft>
-                <a:spcPts val="800"/>
-              </a:spcAft>
-              <a:buSzPct val="100000"/>
-              <a:buChar char="•"/>
-            </a:pPr>
-            <a:r>
-              <a:rPr lang="en-US" sz="1300" dirty="0">
-                <a:solidFill>
-                  <a:schemeClr val="tx1"/>
-                </a:solidFill>
-              </a:rPr>
-              <a:t>En búsqueda es muy difícil competir</a:t>
-            </a:r>
-            <a:endParaRPr lang="en-US" sz="1300" dirty="0"/>
-          </a:p>
-          <a:p>
-            <a:pPr marL="342900" indent="-342900">
-              <a:spcAft>
-                <a:spcPts val="800"/>
-              </a:spcAft>
-              <a:buSzPct val="100000"/>
-              <a:buChar char="•"/>
-            </a:pPr>
-            <a:r>
-              <a:rPr lang="en-US" sz="1300" dirty="0">
-                <a:solidFill>
-                  <a:schemeClr val="tx1"/>
-                </a:solidFill>
-              </a:rPr>
-              <a:t>Meta pesa el doble que Google ($1.019 vs. $507) con bajo retorno</a:t>
-            </a:r>
-            <a:endParaRPr lang="en-US" sz="1300" dirty="0"/>
+              <a:t>44%</a:t>
+            </a:r>
+            <a:endParaRPr lang="en-US" sz="3000" dirty="0"/>
           </a:p>
         </p:txBody>
       </p:sp>
@@ -11093,8 +11909,8 @@
         </p:nvSpPr>
         <p:spPr>
           <a:xfrm>
-            <a:off x="4892040" y="1691640"/>
-            <a:ext cx="3611880" cy="2560320"/>
+            <a:off x="2194560" y="2240280"/>
+            <a:ext cx="2331720" cy="822960"/>
           </a:xfrm>
           <a:prstGeom prst="rect">
             <a:avLst/>
@@ -11103,79 +11919,632 @@
           <a:ln/>
         </p:spPr>
         <p:txBody>
+          <a:bodyPr wrap="square" lIns="0" tIns="0" rIns="0" bIns="0" rtlCol="0" anchor="ctr"/>
+          <a:lstStyle/>
+          <a:p>
+            <a:pPr indent="0" marL="0">
+              <a:buNone/>
+            </a:pPr>
+            <a:r>
+              <a:rPr lang="en-US" sz="1200" dirty="0">
+                <a:solidFill>
+                  <a:schemeClr val="tx1"/>
+                </a:solidFill>
+              </a:rPr>
+              <a:t>de las ventas son renovaciones de suscripción: $40K de ingreso recurrente en el año</a:t>
+            </a:r>
+            <a:endParaRPr lang="en-US" sz="1200" dirty="0"/>
+          </a:p>
+        </p:txBody>
+      </p:sp>
+      <p:sp>
+        <p:nvSpPr>
+          <p:cNvPr id="9" name="BB stat 3"/>
+          <p:cNvSpPr/>
+          <p:nvPr/>
+        </p:nvSpPr>
+        <p:spPr>
+          <a:xfrm>
+            <a:off x="457200" y="3291840"/>
+            <a:ext cx="4206240" cy="1005840"/>
+          </a:xfrm>
+          <a:prstGeom prst="roundRect">
+            <a:avLst>
+              <a:gd name="adj" fmla="val 7273"/>
+            </a:avLst>
+          </a:prstGeom>
+          <a:solidFill>
+            <a:schemeClr val="bg2"/>
+          </a:solidFill>
+          <a:ln/>
+        </p:spPr>
+      </p:sp>
+      <p:sp>
+        <p:nvSpPr>
+          <p:cNvPr id="10" name="Text 8"/>
+          <p:cNvSpPr txBox="1"/>
+          <p:nvPr/>
+        </p:nvSpPr>
+        <p:spPr>
+          <a:xfrm>
+            <a:off x="640080" y="3383280"/>
+            <a:ext cx="1463040" cy="822960"/>
+          </a:xfrm>
+          <a:prstGeom prst="rect">
+            <a:avLst/>
+          </a:prstGeom>
+          <a:noFill/>
+          <a:ln/>
+        </p:spPr>
+        <p:txBody>
+          <a:bodyPr wrap="square" lIns="0" tIns="0" rIns="0" bIns="0" rtlCol="0" anchor="ctr">
+            <a:normAutofit/>
+          </a:bodyPr>
+          <a:lstStyle/>
+          <a:p>
+            <a:pPr indent="0" marL="0">
+              <a:buNone/>
+            </a:pPr>
+            <a:r>
+              <a:rPr lang="en-US" sz="3000" b="1" dirty="0">
+                <a:solidFill>
+                  <a:schemeClr val="accent1"/>
+                </a:solidFill>
+                <a:latin typeface="Cambria" pitchFamily="34" charset="0"/>
+                <a:ea typeface="Cambria" pitchFamily="34" charset="-122"/>
+                <a:cs typeface="Cambria" pitchFamily="34" charset="-120"/>
+              </a:rPr>
+              <a:t>$2,21</a:t>
+            </a:r>
+            <a:endParaRPr lang="en-US" sz="3000" dirty="0"/>
+          </a:p>
+        </p:txBody>
+      </p:sp>
+      <p:sp>
+        <p:nvSpPr>
+          <p:cNvPr id="11" name="Text 9"/>
+          <p:cNvSpPr txBox="1"/>
+          <p:nvPr/>
+        </p:nvSpPr>
+        <p:spPr>
+          <a:xfrm>
+            <a:off x="2194560" y="3383280"/>
+            <a:ext cx="2331720" cy="822960"/>
+          </a:xfrm>
+          <a:prstGeom prst="rect">
+            <a:avLst/>
+          </a:prstGeom>
+          <a:noFill/>
+          <a:ln/>
+        </p:spPr>
+        <p:txBody>
+          <a:bodyPr wrap="square" lIns="0" tIns="0" rIns="0" bIns="0" rtlCol="0" anchor="ctr"/>
+          <a:lstStyle/>
+          <a:p>
+            <a:pPr indent="0" marL="0">
+              <a:buNone/>
+            </a:pPr>
+            <a:r>
+              <a:rPr lang="en-US" sz="1200" dirty="0">
+                <a:solidFill>
+                  <a:schemeClr val="tx1"/>
+                </a:solidFill>
+              </a:rPr>
+              <a:t>por destinatario en los flujos automáticos, 13 veces más que las campañas</a:t>
+            </a:r>
+            <a:endParaRPr lang="en-US" sz="1200" dirty="0"/>
+          </a:p>
+        </p:txBody>
+      </p:sp>
+      <p:sp>
+        <p:nvSpPr>
+          <p:cNvPr id="12" name="BB card 1"/>
+          <p:cNvSpPr/>
+          <p:nvPr/>
+        </p:nvSpPr>
+        <p:spPr>
+          <a:xfrm>
+            <a:off x="5029200" y="1005840"/>
+            <a:ext cx="1783080" cy="1554480"/>
+          </a:xfrm>
+          <a:prstGeom prst="roundRect">
+            <a:avLst>
+              <a:gd name="adj" fmla="val 4706"/>
+            </a:avLst>
+          </a:prstGeom>
+          <a:solidFill>
+            <a:schemeClr val="bg2"/>
+          </a:solidFill>
+          <a:ln/>
+        </p:spPr>
+      </p:sp>
+      <p:sp>
+        <p:nvSpPr>
+          <p:cNvPr id="13" name="BB dot 1"/>
+          <p:cNvSpPr/>
+          <p:nvPr/>
+        </p:nvSpPr>
+        <p:spPr>
+          <a:xfrm>
+            <a:off x="5166360" y="1143000"/>
+            <a:ext cx="256032" cy="256032"/>
+          </a:xfrm>
+          <a:prstGeom prst="ellipse">
+            <a:avLst/>
+          </a:prstGeom>
+          <a:solidFill>
+            <a:schemeClr val="accent2"/>
+          </a:solidFill>
+          <a:ln/>
+        </p:spPr>
+      </p:sp>
+      <p:sp>
+        <p:nvSpPr>
+          <p:cNvPr id="14" name="Text 12"/>
+          <p:cNvSpPr txBox="1"/>
+          <p:nvPr/>
+        </p:nvSpPr>
+        <p:spPr>
+          <a:xfrm>
+            <a:off x="5486400" y="1097280"/>
+            <a:ext cx="1261872" cy="365760"/>
+          </a:xfrm>
+          <a:prstGeom prst="rect">
+            <a:avLst/>
+          </a:prstGeom>
+          <a:noFill/>
+          <a:ln/>
+        </p:spPr>
+        <p:txBody>
+          <a:bodyPr wrap="square" lIns="0" tIns="0" rIns="0" bIns="0" rtlCol="0" anchor="ctr">
+            <a:normAutofit/>
+          </a:bodyPr>
+          <a:lstStyle/>
+          <a:p>
+            <a:pPr indent="0" marL="0">
+              <a:buNone/>
+            </a:pPr>
+            <a:r>
+              <a:rPr lang="en-US" sz="1200" b="1" dirty="0">
+                <a:solidFill>
+                  <a:schemeClr val="tx1"/>
+                </a:solidFill>
+                <a:latin typeface="Cambria" pitchFamily="34" charset="0"/>
+                <a:ea typeface="Cambria" pitchFamily="34" charset="-122"/>
+                <a:cs typeface="Cambria" pitchFamily="34" charset="-120"/>
+              </a:rPr>
+              <a:t>Ventas estables</a:t>
+            </a:r>
+            <a:endParaRPr lang="en-US" sz="1200" dirty="0"/>
+          </a:p>
+        </p:txBody>
+      </p:sp>
+      <p:sp>
+        <p:nvSpPr>
+          <p:cNvPr id="15" name="Text 13"/>
+          <p:cNvSpPr txBox="1"/>
+          <p:nvPr/>
+        </p:nvSpPr>
+        <p:spPr>
+          <a:xfrm>
+            <a:off x="5166360" y="1508760"/>
+            <a:ext cx="1536192" cy="987552"/>
+          </a:xfrm>
+          <a:prstGeom prst="rect">
+            <a:avLst/>
+          </a:prstGeom>
+          <a:noFill/>
+          <a:ln/>
+        </p:spPr>
+        <p:txBody>
           <a:bodyPr wrap="square" lIns="0" tIns="0" rIns="0" bIns="0" rtlCol="0" anchor="t"/>
           <a:lstStyle/>
           <a:p>
-            <a:pPr marL="342900" indent="-342900">
-              <a:spcAft>
-                <a:spcPts val="800"/>
-              </a:spcAft>
-              <a:buSzPct val="100000"/>
-              <a:buChar char="•"/>
-            </a:pPr>
-            <a:r>
-              <a:rPr lang="en-US" sz="1300" dirty="0">
-                <a:solidFill>
-                  <a:schemeClr val="bg1"/>
-                </a:solidFill>
-              </a:rPr>
-              <a:t>Campañas de clientes nuevos con promo, no de marca</a:t>
-            </a:r>
-            <a:endParaRPr lang="en-US" sz="1300" dirty="0"/>
-          </a:p>
-          <a:p>
-            <a:pPr marL="342900" indent="-342900">
-              <a:spcAft>
-                <a:spcPts val="800"/>
-              </a:spcAft>
-              <a:buSzPct val="100000"/>
-              <a:buChar char="•"/>
-            </a:pPr>
-            <a:r>
-              <a:rPr lang="en-US" sz="1300" dirty="0">
-                <a:solidFill>
-                  <a:schemeClr val="bg1"/>
-                </a:solidFill>
-              </a:rPr>
-              <a:t>Llevar la pauta hacia Amazon y medir cuánto contribuye</a:t>
-            </a:r>
-            <a:endParaRPr lang="en-US" sz="1300" dirty="0"/>
-          </a:p>
-          <a:p>
-            <a:pPr marL="342900" indent="-342900">
-              <a:spcAft>
-                <a:spcPts val="800"/>
-              </a:spcAft>
-              <a:buSzPct val="100000"/>
-              <a:buChar char="•"/>
-            </a:pPr>
-            <a:r>
-              <a:rPr lang="en-US" sz="1300" dirty="0">
-                <a:solidFill>
-                  <a:schemeClr val="bg1"/>
-                </a:solidFill>
-              </a:rPr>
-              <a:t>Branding con página completa que lleva directo a Amazon, más catálogo y retargeting</a:t>
-            </a:r>
-            <a:endParaRPr lang="en-US" sz="1300" dirty="0"/>
-          </a:p>
-          <a:p>
-            <a:pPr marL="342900" indent="-342900">
-              <a:spcAft>
-                <a:spcPts val="800"/>
-              </a:spcAft>
-              <a:buSzPct val="100000"/>
-              <a:buChar char="•"/>
-            </a:pPr>
-            <a:r>
-              <a:rPr lang="en-US" sz="1300" dirty="0">
-                <a:solidFill>
-                  <a:schemeClr val="bg1"/>
-                </a:solidFill>
-              </a:rPr>
-              <a:t>Bajar el presupuesto de Meta y monitorear su retorno indirecto</a:t>
-            </a:r>
-            <a:endParaRPr lang="en-US" sz="1300" dirty="0"/>
+            <a:pPr indent="0" marL="0">
+              <a:buNone/>
+            </a:pPr>
+            <a:r>
+              <a:rPr lang="en-US" sz="1100" dirty="0">
+                <a:solidFill>
+                  <a:schemeClr val="tx1"/>
+                </a:solidFill>
+              </a:rPr>
+              <a:t>~$9,3K al mes en el primer trimestre y ~$9,7K de abril a septiembre</a:t>
+            </a:r>
+            <a:endParaRPr lang="en-US" sz="1100" dirty="0"/>
+          </a:p>
+        </p:txBody>
+      </p:sp>
+      <p:sp>
+        <p:nvSpPr>
+          <p:cNvPr id="16" name="BB card 2"/>
+          <p:cNvSpPr/>
+          <p:nvPr/>
+        </p:nvSpPr>
+        <p:spPr>
+          <a:xfrm>
+            <a:off x="6903720" y="1005840"/>
+            <a:ext cx="1783080" cy="1554480"/>
+          </a:xfrm>
+          <a:prstGeom prst="roundRect">
+            <a:avLst>
+              <a:gd name="adj" fmla="val 4706"/>
+            </a:avLst>
+          </a:prstGeom>
+          <a:solidFill>
+            <a:schemeClr val="bg2"/>
+          </a:solidFill>
+          <a:ln/>
+        </p:spPr>
+      </p:sp>
+      <p:sp>
+        <p:nvSpPr>
+          <p:cNvPr id="17" name="BB dot 2"/>
+          <p:cNvSpPr/>
+          <p:nvPr/>
+        </p:nvSpPr>
+        <p:spPr>
+          <a:xfrm>
+            <a:off x="7040880" y="1143000"/>
+            <a:ext cx="256032" cy="256032"/>
+          </a:xfrm>
+          <a:prstGeom prst="ellipse">
+            <a:avLst/>
+          </a:prstGeom>
+          <a:solidFill>
+            <a:schemeClr val="accent2"/>
+          </a:solidFill>
+          <a:ln/>
+        </p:spPr>
+      </p:sp>
+      <p:sp>
+        <p:nvSpPr>
+          <p:cNvPr id="18" name="Text 16"/>
+          <p:cNvSpPr txBox="1"/>
+          <p:nvPr/>
+        </p:nvSpPr>
+        <p:spPr>
+          <a:xfrm>
+            <a:off x="7360920" y="1097280"/>
+            <a:ext cx="1261872" cy="365760"/>
+          </a:xfrm>
+          <a:prstGeom prst="rect">
+            <a:avLst/>
+          </a:prstGeom>
+          <a:noFill/>
+          <a:ln/>
+        </p:spPr>
+        <p:txBody>
+          <a:bodyPr wrap="square" lIns="0" tIns="0" rIns="0" bIns="0" rtlCol="0" anchor="ctr">
+            <a:normAutofit/>
+          </a:bodyPr>
+          <a:lstStyle/>
+          <a:p>
+            <a:pPr indent="0" marL="0">
+              <a:buNone/>
+            </a:pPr>
+            <a:r>
+              <a:rPr lang="en-US" sz="1200" b="1" dirty="0">
+                <a:solidFill>
+                  <a:schemeClr val="tx1"/>
+                </a:solidFill>
+                <a:latin typeface="Cambria" pitchFamily="34" charset="0"/>
+                <a:ea typeface="Cambria" pitchFamily="34" charset="-122"/>
+                <a:cs typeface="Cambria" pitchFamily="34" charset="-120"/>
+              </a:rPr>
+              <a:t>Búsqueda de marca</a:t>
+            </a:r>
+            <a:endParaRPr lang="en-US" sz="1200" dirty="0"/>
+          </a:p>
+        </p:txBody>
+      </p:sp>
+      <p:sp>
+        <p:nvSpPr>
+          <p:cNvPr id="19" name="Text 17"/>
+          <p:cNvSpPr txBox="1"/>
+          <p:nvPr/>
+        </p:nvSpPr>
+        <p:spPr>
+          <a:xfrm>
+            <a:off x="7040880" y="1508760"/>
+            <a:ext cx="1536192" cy="987552"/>
+          </a:xfrm>
+          <a:prstGeom prst="rect">
+            <a:avLst/>
+          </a:prstGeom>
+          <a:noFill/>
+          <a:ln/>
+        </p:spPr>
+        <p:txBody>
+          <a:bodyPr wrap="square" lIns="0" tIns="0" rIns="0" bIns="0" rtlCol="0" anchor="t"/>
+          <a:lstStyle/>
+          <a:p>
+            <a:pPr indent="0" marL="0">
+              <a:buNone/>
+            </a:pPr>
+            <a:r>
+              <a:rPr lang="en-US" sz="1100" dirty="0">
+                <a:solidFill>
+                  <a:schemeClr val="tx1"/>
+                </a:solidFill>
+              </a:rPr>
+              <a:t>La línea más rentable de Google, con un retorno cercano a 3x</a:t>
+            </a:r>
+            <a:endParaRPr lang="en-US" sz="1100" dirty="0"/>
+          </a:p>
+        </p:txBody>
+      </p:sp>
+      <p:sp>
+        <p:nvSpPr>
+          <p:cNvPr id="20" name="BB card 3"/>
+          <p:cNvSpPr/>
+          <p:nvPr/>
+        </p:nvSpPr>
+        <p:spPr>
+          <a:xfrm>
+            <a:off x="5029200" y="2697480"/>
+            <a:ext cx="1783080" cy="1554480"/>
+          </a:xfrm>
+          <a:prstGeom prst="roundRect">
+            <a:avLst>
+              <a:gd name="adj" fmla="val 4706"/>
+            </a:avLst>
+          </a:prstGeom>
+          <a:solidFill>
+            <a:schemeClr val="bg2"/>
+          </a:solidFill>
+          <a:ln/>
+        </p:spPr>
+      </p:sp>
+      <p:sp>
+        <p:nvSpPr>
+          <p:cNvPr id="21" name="BB dot 3"/>
+          <p:cNvSpPr/>
+          <p:nvPr/>
+        </p:nvSpPr>
+        <p:spPr>
+          <a:xfrm>
+            <a:off x="5166360" y="2834640"/>
+            <a:ext cx="256032" cy="256032"/>
+          </a:xfrm>
+          <a:prstGeom prst="ellipse">
+            <a:avLst/>
+          </a:prstGeom>
+          <a:solidFill>
+            <a:schemeClr val="accent2"/>
+          </a:solidFill>
+          <a:ln/>
+        </p:spPr>
+      </p:sp>
+      <p:sp>
+        <p:nvSpPr>
+          <p:cNvPr id="22" name="Text 20"/>
+          <p:cNvSpPr txBox="1"/>
+          <p:nvPr/>
+        </p:nvSpPr>
+        <p:spPr>
+          <a:xfrm>
+            <a:off x="5486400" y="2788920"/>
+            <a:ext cx="1261872" cy="365760"/>
+          </a:xfrm>
+          <a:prstGeom prst="rect">
+            <a:avLst/>
+          </a:prstGeom>
+          <a:noFill/>
+          <a:ln/>
+        </p:spPr>
+        <p:txBody>
+          <a:bodyPr wrap="square" lIns="0" tIns="0" rIns="0" bIns="0" rtlCol="0" anchor="ctr">
+            <a:normAutofit/>
+          </a:bodyPr>
+          <a:lstStyle/>
+          <a:p>
+            <a:pPr indent="0" marL="0">
+              <a:buNone/>
+            </a:pPr>
+            <a:r>
+              <a:rPr lang="en-US" sz="1200" b="1" dirty="0">
+                <a:solidFill>
+                  <a:schemeClr val="tx1"/>
+                </a:solidFill>
+                <a:latin typeface="Cambria" pitchFamily="34" charset="0"/>
+                <a:ea typeface="Cambria" pitchFamily="34" charset="-122"/>
+                <a:cs typeface="Cambria" pitchFamily="34" charset="-120"/>
+              </a:rPr>
+              <a:t>Retargeting dinámico</a:t>
+            </a:r>
+            <a:endParaRPr lang="en-US" sz="1200" dirty="0"/>
+          </a:p>
+        </p:txBody>
+      </p:sp>
+      <p:sp>
+        <p:nvSpPr>
+          <p:cNvPr id="23" name="Text 21"/>
+          <p:cNvSpPr txBox="1"/>
+          <p:nvPr/>
+        </p:nvSpPr>
+        <p:spPr>
+          <a:xfrm>
+            <a:off x="5166360" y="3200400"/>
+            <a:ext cx="1536192" cy="987552"/>
+          </a:xfrm>
+          <a:prstGeom prst="rect">
+            <a:avLst/>
+          </a:prstGeom>
+          <a:noFill/>
+          <a:ln/>
+        </p:spPr>
+        <p:txBody>
+          <a:bodyPr wrap="square" lIns="0" tIns="0" rIns="0" bIns="0" rtlCol="0" anchor="t"/>
+          <a:lstStyle/>
+          <a:p>
+            <a:pPr indent="0" marL="0">
+              <a:buNone/>
+            </a:pPr>
+            <a:r>
+              <a:rPr lang="en-US" sz="1100" dirty="0">
+                <a:solidFill>
+                  <a:schemeClr val="tx1"/>
+                </a:solidFill>
+              </a:rPr>
+              <a:t>Retorno de 3,1x en Meta antes de la reestructura del 10 oct</a:t>
+            </a:r>
+            <a:endParaRPr lang="en-US" sz="1100" dirty="0"/>
+          </a:p>
+        </p:txBody>
+      </p:sp>
+      <p:sp>
+        <p:nvSpPr>
+          <p:cNvPr id="24" name="BB card 4"/>
+          <p:cNvSpPr/>
+          <p:nvPr/>
+        </p:nvSpPr>
+        <p:spPr>
+          <a:xfrm>
+            <a:off x="6903720" y="2697480"/>
+            <a:ext cx="1783080" cy="1554480"/>
+          </a:xfrm>
+          <a:prstGeom prst="roundRect">
+            <a:avLst>
+              <a:gd name="adj" fmla="val 4706"/>
+            </a:avLst>
+          </a:prstGeom>
+          <a:solidFill>
+            <a:schemeClr val="bg2"/>
+          </a:solidFill>
+          <a:ln/>
+        </p:spPr>
+      </p:sp>
+      <p:sp>
+        <p:nvSpPr>
+          <p:cNvPr id="25" name="BB dot 4"/>
+          <p:cNvSpPr/>
+          <p:nvPr/>
+        </p:nvSpPr>
+        <p:spPr>
+          <a:xfrm>
+            <a:off x="7040880" y="2834640"/>
+            <a:ext cx="256032" cy="256032"/>
+          </a:xfrm>
+          <a:prstGeom prst="ellipse">
+            <a:avLst/>
+          </a:prstGeom>
+          <a:solidFill>
+            <a:schemeClr val="accent2"/>
+          </a:solidFill>
+          <a:ln/>
+        </p:spPr>
+      </p:sp>
+      <p:sp>
+        <p:nvSpPr>
+          <p:cNvPr id="26" name="Text 24"/>
+          <p:cNvSpPr txBox="1"/>
+          <p:nvPr/>
+        </p:nvSpPr>
+        <p:spPr>
+          <a:xfrm>
+            <a:off x="7360920" y="2788920"/>
+            <a:ext cx="1261872" cy="365760"/>
+          </a:xfrm>
+          <a:prstGeom prst="rect">
+            <a:avLst/>
+          </a:prstGeom>
+          <a:noFill/>
+          <a:ln/>
+        </p:spPr>
+        <p:txBody>
+          <a:bodyPr wrap="square" lIns="0" tIns="0" rIns="0" bIns="0" rtlCol="0" anchor="ctr">
+            <a:normAutofit/>
+          </a:bodyPr>
+          <a:lstStyle/>
+          <a:p>
+            <a:pPr indent="0" marL="0">
+              <a:buNone/>
+            </a:pPr>
+            <a:r>
+              <a:rPr lang="en-US" sz="1200" b="1" dirty="0">
+                <a:solidFill>
+                  <a:schemeClr val="tx1"/>
+                </a:solidFill>
+                <a:latin typeface="Cambria" pitchFamily="34" charset="0"/>
+                <a:ea typeface="Cambria" pitchFamily="34" charset="-122"/>
+                <a:cs typeface="Cambria" pitchFamily="34" charset="-120"/>
+              </a:rPr>
+              <a:t>Bienvenida renovada</a:t>
+            </a:r>
+            <a:endParaRPr lang="en-US" sz="1200" dirty="0"/>
+          </a:p>
+        </p:txBody>
+      </p:sp>
+      <p:sp>
+        <p:nvSpPr>
+          <p:cNvPr id="27" name="Text 25"/>
+          <p:cNvSpPr txBox="1"/>
+          <p:nvPr/>
+        </p:nvSpPr>
+        <p:spPr>
+          <a:xfrm>
+            <a:off x="7040880" y="3200400"/>
+            <a:ext cx="1536192" cy="987552"/>
+          </a:xfrm>
+          <a:prstGeom prst="rect">
+            <a:avLst/>
+          </a:prstGeom>
+          <a:noFill/>
+          <a:ln/>
+        </p:spPr>
+        <p:txBody>
+          <a:bodyPr wrap="square" lIns="0" tIns="0" rIns="0" bIns="0" rtlCol="0" anchor="t"/>
+          <a:lstStyle/>
+          <a:p>
+            <a:pPr indent="0" marL="0">
+              <a:buNone/>
+            </a:pPr>
+            <a:r>
+              <a:rPr lang="en-US" sz="1100" dirty="0">
+                <a:solidFill>
+                  <a:schemeClr val="tx1"/>
+                </a:solidFill>
+              </a:rPr>
+              <a:t>Welcome BARK15 activa desde el 6 oct; SMS Welcome en camino</a:t>
+            </a:r>
+            <a:endParaRPr lang="en-US" sz="1100" dirty="0"/>
+          </a:p>
+        </p:txBody>
+      </p:sp>
+      <p:sp>
+        <p:nvSpPr>
+          <p:cNvPr id="28" name="Text 26"/>
+          <p:cNvSpPr txBox="1"/>
+          <p:nvPr/>
+        </p:nvSpPr>
+        <p:spPr>
+          <a:xfrm>
+            <a:off x="457200" y="4434840"/>
+            <a:ext cx="8229600" cy="274320"/>
+          </a:xfrm>
+          <a:prstGeom prst="rect">
+            <a:avLst/>
+          </a:prstGeom>
+          <a:noFill/>
+          <a:ln/>
+        </p:spPr>
+        <p:txBody>
+          <a:bodyPr wrap="square" lIns="0" tIns="0" rIns="0" bIns="0" rtlCol="0" anchor="ctr"/>
+          <a:lstStyle/>
+          <a:p>
+            <a:pPr indent="0" marL="0">
+              <a:buNone/>
+            </a:pPr>
+            <a:r>
+              <a:rPr lang="en-US" sz="900" i="1" dirty="0">
+                <a:solidFill>
+                  <a:schemeClr val="accent4"/>
+                </a:solidFill>
+              </a:rPr>
+              <a:t>Fuente: dashboard de la tienda (1 ene – 13 oct 2026), Klaviyo, Google Ads (retorno de marca estimado) y Meta Ads Manager.</a:t>
+            </a:r>
+            <a:endParaRPr lang="en-US" sz="900" dirty="0"/>
           </a:p>
         </p:txBody>
       </p:sp>
@@ -11284,7 +12653,7 @@
                 <a:ea typeface="Cambria" pitchFamily="34" charset="-122"/>
                 <a:cs typeface="Cambria" pitchFamily="34" charset="-120"/>
               </a:rPr>
-              <a:t>Ayoba: ticket alto y una operación rentable</a:t>
+              <a:t>Beg &amp; Barker: clientes nuevos y Amazon</a:t>
             </a:r>
             <a:endParaRPr lang="en-US" sz="2600" dirty="0"/>
           </a:p>
@@ -11292,18 +12661,18 @@
       </p:sp>
       <p:sp>
         <p:nvSpPr>
-          <p:cNvPr id="3" name="AY stat 1"/>
+          <p:cNvPr id="3" name="BB now panel"/>
           <p:cNvSpPr/>
           <p:nvPr/>
         </p:nvSpPr>
         <p:spPr>
           <a:xfrm>
             <a:off x="457200" y="1005840"/>
-            <a:ext cx="4206240" cy="1005840"/>
+            <a:ext cx="4023360" cy="3383280"/>
           </a:xfrm>
           <a:prstGeom prst="roundRect">
             <a:avLst>
-              <a:gd name="adj" fmla="val 7273"/>
+              <a:gd name="adj" fmla="val 2162"/>
             </a:avLst>
           </a:prstGeom>
           <a:solidFill>
@@ -11314,14 +12683,36 @@
       </p:sp>
       <p:sp>
         <p:nvSpPr>
-          <p:cNvPr id="4" name="Text 2"/>
+          <p:cNvPr id="4" name="BB next panel"/>
+          <p:cNvSpPr/>
+          <p:nvPr/>
+        </p:nvSpPr>
+        <p:spPr>
+          <a:xfrm>
+            <a:off x="4663440" y="1005840"/>
+            <a:ext cx="4023360" cy="3383280"/>
+          </a:xfrm>
+          <a:prstGeom prst="roundRect">
+            <a:avLst>
+              <a:gd name="adj" fmla="val 2162"/>
+            </a:avLst>
+          </a:prstGeom>
+          <a:solidFill>
+            <a:schemeClr val="tx1"/>
+          </a:solidFill>
+          <a:ln/>
+        </p:spPr>
+      </p:sp>
+      <p:sp>
+        <p:nvSpPr>
+          <p:cNvPr id="5" name="Text 3"/>
           <p:cNvSpPr txBox="1"/>
           <p:nvPr/>
         </p:nvSpPr>
         <p:spPr>
           <a:xfrm>
-            <a:off x="640080" y="1097280"/>
-            <a:ext cx="1463040" cy="822960"/>
+            <a:off x="685800" y="1188720"/>
+            <a:ext cx="3566160" cy="365760"/>
           </a:xfrm>
           <a:prstGeom prst="rect">
             <a:avLst/>
@@ -11330,39 +12721,37 @@
           <a:ln/>
         </p:spPr>
         <p:txBody>
-          <a:bodyPr wrap="square" lIns="0" tIns="0" rIns="0" bIns="0" rtlCol="0" anchor="ctr">
-            <a:normAutofit/>
-          </a:bodyPr>
+          <a:bodyPr wrap="square" lIns="0" tIns="0" rIns="0" bIns="0" rtlCol="0" anchor="ctr"/>
           <a:lstStyle/>
           <a:p>
             <a:pPr indent="0" marL="0">
               <a:buNone/>
             </a:pPr>
             <a:r>
-              <a:rPr lang="en-US" sz="3000" b="1" dirty="0">
-                <a:solidFill>
-                  <a:schemeClr val="tx2"/>
+              <a:rPr lang="en-US" sz="1700" b="1" dirty="0">
+                <a:solidFill>
+                  <a:schemeClr val="accent1"/>
                 </a:solidFill>
                 <a:latin typeface="Cambria" pitchFamily="34" charset="0"/>
                 <a:ea typeface="Cambria" pitchFamily="34" charset="-122"/>
                 <a:cs typeface="Cambria" pitchFamily="34" charset="-120"/>
               </a:rPr>
-              <a:t>$107,8K</a:t>
-            </a:r>
-            <a:endParaRPr lang="en-US" sz="3000" dirty="0"/>
-          </a:p>
-        </p:txBody>
-      </p:sp>
-      <p:sp>
-        <p:nvSpPr>
-          <p:cNvPr id="5" name="Text 3"/>
+              <a:t>Dónde estamos</a:t>
+            </a:r>
+            <a:endParaRPr lang="en-US" sz="1700" dirty="0"/>
+          </a:p>
+        </p:txBody>
+      </p:sp>
+      <p:sp>
+        <p:nvSpPr>
+          <p:cNvPr id="6" name="Text 4"/>
           <p:cNvSpPr txBox="1"/>
           <p:nvPr/>
         </p:nvSpPr>
         <p:spPr>
           <a:xfrm>
-            <a:off x="2194560" y="1097280"/>
-            <a:ext cx="2331720" cy="822960"/>
+            <a:off x="4892040" y="1188720"/>
+            <a:ext cx="3566160" cy="365760"/>
           </a:xfrm>
           <a:prstGeom prst="rect">
             <a:avLst/>
@@ -11378,77 +12767,111 @@
               <a:buNone/>
             </a:pPr>
             <a:r>
-              <a:rPr lang="en-US" sz="1200" dirty="0">
-                <a:solidFill>
-                  <a:schemeClr val="tx1"/>
-                </a:solidFill>
-              </a:rPr>
-              <a:t>en ventas brutas en lo que va del año, con 1.188 órdenes</a:t>
-            </a:r>
-            <a:endParaRPr lang="en-US" sz="1200" dirty="0"/>
-          </a:p>
-        </p:txBody>
-      </p:sp>
-      <p:sp>
-        <p:nvSpPr>
-          <p:cNvPr id="6" name="AY stat 2"/>
-          <p:cNvSpPr/>
-          <p:nvPr/>
-        </p:nvSpPr>
-        <p:spPr>
-          <a:xfrm>
-            <a:off x="457200" y="2148840"/>
-            <a:ext cx="4206240" cy="1005840"/>
-          </a:xfrm>
-          <a:prstGeom prst="roundRect">
-            <a:avLst>
-              <a:gd name="adj" fmla="val 7273"/>
-            </a:avLst>
-          </a:prstGeom>
-          <a:solidFill>
-            <a:schemeClr val="bg2"/>
-          </a:solidFill>
-          <a:ln/>
-        </p:spPr>
-      </p:sp>
-      <p:sp>
-        <p:nvSpPr>
-          <p:cNvPr id="7" name="Text 5"/>
-          <p:cNvSpPr txBox="1"/>
-          <p:nvPr/>
-        </p:nvSpPr>
-        <p:spPr>
-          <a:xfrm>
-            <a:off x="640080" y="2240280"/>
-            <a:ext cx="1463040" cy="822960"/>
-          </a:xfrm>
-          <a:prstGeom prst="rect">
-            <a:avLst/>
-          </a:prstGeom>
-          <a:noFill/>
-          <a:ln/>
-        </p:spPr>
-        <p:txBody>
-          <a:bodyPr wrap="square" lIns="0" tIns="0" rIns="0" bIns="0" rtlCol="0" anchor="ctr">
-            <a:normAutofit/>
-          </a:bodyPr>
-          <a:lstStyle/>
-          <a:p>
-            <a:pPr indent="0" marL="0">
-              <a:buNone/>
-            </a:pPr>
-            <a:r>
-              <a:rPr lang="en-US" sz="3000" b="1" dirty="0">
-                <a:solidFill>
-                  <a:schemeClr val="accent2"/>
+              <a:rPr lang="en-US" sz="1700" b="1" dirty="0">
+                <a:solidFill>
+                  <a:schemeClr val="accent6"/>
                 </a:solidFill>
                 <a:latin typeface="Cambria" pitchFamily="34" charset="0"/>
                 <a:ea typeface="Cambria" pitchFamily="34" charset="-122"/>
                 <a:cs typeface="Cambria" pitchFamily="34" charset="-120"/>
               </a:rPr>
-              <a:t>60%</a:t>
-            </a:r>
-            <a:endParaRPr lang="en-US" sz="3000" dirty="0"/>
+              <a:t>Hacia dónde vamos</a:t>
+            </a:r>
+            <a:endParaRPr lang="en-US" sz="1700" dirty="0"/>
+          </a:p>
+        </p:txBody>
+      </p:sp>
+      <p:sp>
+        <p:nvSpPr>
+          <p:cNvPr id="7" name="Text 5"/>
+          <p:cNvSpPr txBox="1"/>
+          <p:nvPr/>
+        </p:nvSpPr>
+        <p:spPr>
+          <a:xfrm>
+            <a:off x="685800" y="1691640"/>
+            <a:ext cx="3611880" cy="2560320"/>
+          </a:xfrm>
+          <a:prstGeom prst="rect">
+            <a:avLst/>
+          </a:prstGeom>
+          <a:noFill/>
+          <a:ln/>
+        </p:spPr>
+        <p:txBody>
+          <a:bodyPr wrap="square" lIns="0" tIns="0" rIns="0" bIns="0" rtlCol="0" anchor="t"/>
+          <a:lstStyle/>
+          <a:p>
+            <a:pPr marL="342900" indent="-342900">
+              <a:spcAft>
+                <a:spcPts val="800"/>
+              </a:spcAft>
+              <a:buSzPct val="100000"/>
+              <a:buChar char="•"/>
+            </a:pPr>
+            <a:r>
+              <a:rPr lang="en-US" sz="1300" dirty="0">
+                <a:solidFill>
+                  <a:schemeClr val="tx1"/>
+                </a:solidFill>
+              </a:rPr>
+              <a:t>Ventas 35% por debajo del mes pasado</a:t>
+            </a:r>
+            <a:endParaRPr lang="en-US" sz="1300" dirty="0"/>
+          </a:p>
+          <a:p>
+            <a:pPr marL="342900" indent="-342900">
+              <a:spcAft>
+                <a:spcPts val="800"/>
+              </a:spcAft>
+              <a:buSzPct val="100000"/>
+              <a:buChar char="•"/>
+            </a:pPr>
+            <a:r>
+              <a:rPr lang="en-US" sz="1300" dirty="0">
+                <a:solidFill>
+                  <a:schemeClr val="tx1"/>
+                </a:solidFill>
+              </a:rPr>
+              <a:t>La eficiencia es buena, pero con una inversión baja</a:t>
+            </a:r>
+            <a:endParaRPr lang="en-US" sz="1300" dirty="0"/>
+          </a:p>
+          <a:p>
+            <a:pPr marL="342900" indent="-342900">
+              <a:spcAft>
+                <a:spcPts val="800"/>
+              </a:spcAft>
+              <a:buSzPct val="100000"/>
+              <a:buChar char="•"/>
+            </a:pPr>
+            <a:r>
+              <a:rPr lang="en-US" sz="1300" dirty="0">
+                <a:solidFill>
+                  <a:schemeClr val="tx1"/>
+                </a:solidFill>
+              </a:rPr>
+              <a:t>En búsqueda es muy difícil competir</a:t>
+            </a:r>
+            <a:endParaRPr lang="en-US" sz="1300" dirty="0"/>
+          </a:p>
+          <a:p>
+            <a:pPr marL="342900" indent="-342900">
+              <a:spcAft>
+                <a:spcPts val="800"/>
+              </a:spcAft>
+              <a:buSzPct val="100000"/>
+              <a:buChar char="•"/>
+            </a:pPr>
+            <a:r>
+              <a:rPr lang="en-US" sz="1300" dirty="0">
+                <a:solidFill>
+                  <a:schemeClr val="tx1"/>
+                </a:solidFill>
+              </a:rPr>
+              <a:t>Meta pesa el doble que Google ($1.019 vs. $507) con bajo retorno</a:t>
+            </a:r>
+            <a:endParaRPr lang="en-US" sz="1300" dirty="0"/>
           </a:p>
         </p:txBody>
       </p:sp>
@@ -11460,8 +12883,8 @@
         </p:nvSpPr>
         <p:spPr>
           <a:xfrm>
-            <a:off x="2194560" y="2240280"/>
-            <a:ext cx="2331720" cy="822960"/>
+            <a:off x="4892040" y="1691640"/>
+            <a:ext cx="3611880" cy="2560320"/>
           </a:xfrm>
           <a:prstGeom prst="rect">
             <a:avLst/>
@@ -11470,632 +12893,79 @@
           <a:ln/>
         </p:spPr>
         <p:txBody>
-          <a:bodyPr wrap="square" lIns="0" tIns="0" rIns="0" bIns="0" rtlCol="0" anchor="ctr"/>
-          <a:lstStyle/>
-          <a:p>
-            <a:pPr indent="0" marL="0">
-              <a:buNone/>
-            </a:pPr>
-            <a:r>
-              <a:rPr lang="en-US" sz="1200" dirty="0">
-                <a:solidFill>
-                  <a:schemeClr val="tx1"/>
-                </a:solidFill>
-              </a:rPr>
-              <a:t>de margen bruto después del costo de producto: $64,7K de contribución</a:t>
-            </a:r>
-            <a:endParaRPr lang="en-US" sz="1200" dirty="0"/>
-          </a:p>
-        </p:txBody>
-      </p:sp>
-      <p:sp>
-        <p:nvSpPr>
-          <p:cNvPr id="9" name="AY stat 3"/>
-          <p:cNvSpPr/>
-          <p:nvPr/>
-        </p:nvSpPr>
-        <p:spPr>
-          <a:xfrm>
-            <a:off x="457200" y="3291840"/>
-            <a:ext cx="4206240" cy="1005840"/>
-          </a:xfrm>
-          <a:prstGeom prst="roundRect">
-            <a:avLst>
-              <a:gd name="adj" fmla="val 7273"/>
-            </a:avLst>
-          </a:prstGeom>
-          <a:solidFill>
-            <a:schemeClr val="bg2"/>
-          </a:solidFill>
-          <a:ln/>
-        </p:spPr>
-      </p:sp>
-      <p:sp>
-        <p:nvSpPr>
-          <p:cNvPr id="10" name="Text 8"/>
-          <p:cNvSpPr txBox="1"/>
-          <p:nvPr/>
-        </p:nvSpPr>
-        <p:spPr>
-          <a:xfrm>
-            <a:off x="640080" y="3383280"/>
-            <a:ext cx="1463040" cy="822960"/>
-          </a:xfrm>
-          <a:prstGeom prst="rect">
-            <a:avLst/>
-          </a:prstGeom>
-          <a:noFill/>
-          <a:ln/>
-        </p:spPr>
-        <p:txBody>
-          <a:bodyPr wrap="square" lIns="0" tIns="0" rIns="0" bIns="0" rtlCol="0" anchor="ctr">
-            <a:normAutofit/>
-          </a:bodyPr>
-          <a:lstStyle/>
-          <a:p>
-            <a:pPr indent="0" marL="0">
-              <a:buNone/>
-            </a:pPr>
-            <a:r>
-              <a:rPr lang="en-US" sz="3000" b="1" dirty="0">
-                <a:solidFill>
-                  <a:schemeClr val="accent1"/>
-                </a:solidFill>
-                <a:latin typeface="Cambria" pitchFamily="34" charset="0"/>
-                <a:ea typeface="Cambria" pitchFamily="34" charset="-122"/>
-                <a:cs typeface="Cambria" pitchFamily="34" charset="-120"/>
-              </a:rPr>
-              <a:t>4,2x</a:t>
-            </a:r>
-            <a:endParaRPr lang="en-US" sz="3000" dirty="0"/>
-          </a:p>
-        </p:txBody>
-      </p:sp>
-      <p:sp>
-        <p:nvSpPr>
-          <p:cNvPr id="11" name="Text 9"/>
-          <p:cNvSpPr txBox="1"/>
-          <p:nvPr/>
-        </p:nvSpPr>
-        <p:spPr>
-          <a:xfrm>
-            <a:off x="2194560" y="3383280"/>
-            <a:ext cx="2331720" cy="822960"/>
-          </a:xfrm>
-          <a:prstGeom prst="rect">
-            <a:avLst/>
-          </a:prstGeom>
-          <a:noFill/>
-          <a:ln/>
-        </p:spPr>
-        <p:txBody>
-          <a:bodyPr wrap="square" lIns="0" tIns="0" rIns="0" bIns="0" rtlCol="0" anchor="ctr"/>
-          <a:lstStyle/>
-          <a:p>
-            <a:pPr indent="0" marL="0">
-              <a:buNone/>
-            </a:pPr>
-            <a:r>
-              <a:rPr lang="en-US" sz="1200" dirty="0">
-                <a:solidFill>
-                  <a:schemeClr val="tx1"/>
-                </a:solidFill>
-              </a:rPr>
-              <a:t>en ventas por cada dólar invertido en medios pagados en el año</a:t>
-            </a:r>
-            <a:endParaRPr lang="en-US" sz="1200" dirty="0"/>
-          </a:p>
-        </p:txBody>
-      </p:sp>
-      <p:sp>
-        <p:nvSpPr>
-          <p:cNvPr id="12" name="AY card 1"/>
-          <p:cNvSpPr/>
-          <p:nvPr/>
-        </p:nvSpPr>
-        <p:spPr>
-          <a:xfrm>
-            <a:off x="5029200" y="1005840"/>
-            <a:ext cx="1783080" cy="1554480"/>
-          </a:xfrm>
-          <a:prstGeom prst="roundRect">
-            <a:avLst>
-              <a:gd name="adj" fmla="val 4706"/>
-            </a:avLst>
-          </a:prstGeom>
-          <a:solidFill>
-            <a:schemeClr val="bg2"/>
-          </a:solidFill>
-          <a:ln/>
-        </p:spPr>
-      </p:sp>
-      <p:sp>
-        <p:nvSpPr>
-          <p:cNvPr id="13" name="AY dot 1"/>
-          <p:cNvSpPr/>
-          <p:nvPr/>
-        </p:nvSpPr>
-        <p:spPr>
-          <a:xfrm>
-            <a:off x="5166360" y="1143000"/>
-            <a:ext cx="256032" cy="256032"/>
-          </a:xfrm>
-          <a:prstGeom prst="ellipse">
-            <a:avLst/>
-          </a:prstGeom>
-          <a:solidFill>
-            <a:schemeClr val="accent2"/>
-          </a:solidFill>
-          <a:ln/>
-        </p:spPr>
-      </p:sp>
-      <p:sp>
-        <p:nvSpPr>
-          <p:cNvPr id="14" name="Text 12"/>
-          <p:cNvSpPr txBox="1"/>
-          <p:nvPr/>
-        </p:nvSpPr>
-        <p:spPr>
-          <a:xfrm>
-            <a:off x="5486400" y="1097280"/>
-            <a:ext cx="1261872" cy="365760"/>
-          </a:xfrm>
-          <a:prstGeom prst="rect">
-            <a:avLst/>
-          </a:prstGeom>
-          <a:noFill/>
-          <a:ln/>
-        </p:spPr>
-        <p:txBody>
-          <a:bodyPr wrap="square" lIns="0" tIns="0" rIns="0" bIns="0" rtlCol="0" anchor="ctr">
-            <a:normAutofit/>
-          </a:bodyPr>
-          <a:lstStyle/>
-          <a:p>
-            <a:pPr indent="0" marL="0">
-              <a:buNone/>
-            </a:pPr>
-            <a:r>
-              <a:rPr lang="en-US" sz="1200" b="1" dirty="0">
-                <a:solidFill>
-                  <a:schemeClr val="tx1"/>
-                </a:solidFill>
-                <a:latin typeface="Cambria" pitchFamily="34" charset="0"/>
-                <a:ea typeface="Cambria" pitchFamily="34" charset="-122"/>
-                <a:cs typeface="Cambria" pitchFamily="34" charset="-120"/>
-              </a:rPr>
-              <a:t>Ticket más alto</a:t>
-            </a:r>
-            <a:endParaRPr lang="en-US" sz="1200" dirty="0"/>
-          </a:p>
-        </p:txBody>
-      </p:sp>
-      <p:sp>
-        <p:nvSpPr>
-          <p:cNvPr id="15" name="Text 13"/>
-          <p:cNvSpPr txBox="1"/>
-          <p:nvPr/>
-        </p:nvSpPr>
-        <p:spPr>
-          <a:xfrm>
-            <a:off x="5166360" y="1508760"/>
-            <a:ext cx="1536192" cy="987552"/>
-          </a:xfrm>
-          <a:prstGeom prst="rect">
-            <a:avLst/>
-          </a:prstGeom>
-          <a:noFill/>
-          <a:ln/>
-        </p:spPr>
-        <p:txBody>
           <a:bodyPr wrap="square" lIns="0" tIns="0" rIns="0" bIns="0" rtlCol="0" anchor="t"/>
           <a:lstStyle/>
           <a:p>
-            <a:pPr indent="0" marL="0">
-              <a:buNone/>
-            </a:pPr>
-            <a:r>
-              <a:rPr lang="en-US" sz="1100" dirty="0">
-                <a:solidFill>
-                  <a:schemeClr val="tx1"/>
-                </a:solidFill>
-              </a:rPr>
-              <a:t>$91 promedio por orden, el más alto del portafolio</a:t>
-            </a:r>
-            <a:endParaRPr lang="en-US" sz="1100" dirty="0"/>
-          </a:p>
-        </p:txBody>
-      </p:sp>
-      <p:sp>
-        <p:nvSpPr>
-          <p:cNvPr id="16" name="AY card 2"/>
-          <p:cNvSpPr/>
-          <p:nvPr/>
-        </p:nvSpPr>
-        <p:spPr>
-          <a:xfrm>
-            <a:off x="6903720" y="1005840"/>
-            <a:ext cx="1783080" cy="1554480"/>
-          </a:xfrm>
-          <a:prstGeom prst="roundRect">
-            <a:avLst>
-              <a:gd name="adj" fmla="val 4706"/>
-            </a:avLst>
-          </a:prstGeom>
-          <a:solidFill>
-            <a:schemeClr val="bg2"/>
-          </a:solidFill>
-          <a:ln/>
-        </p:spPr>
-      </p:sp>
-      <p:sp>
-        <p:nvSpPr>
-          <p:cNvPr id="17" name="AY dot 2"/>
-          <p:cNvSpPr/>
-          <p:nvPr/>
-        </p:nvSpPr>
-        <p:spPr>
-          <a:xfrm>
-            <a:off x="7040880" y="1143000"/>
-            <a:ext cx="256032" cy="256032"/>
-          </a:xfrm>
-          <a:prstGeom prst="ellipse">
-            <a:avLst/>
-          </a:prstGeom>
-          <a:solidFill>
-            <a:schemeClr val="accent2"/>
-          </a:solidFill>
-          <a:ln/>
-        </p:spPr>
-      </p:sp>
-      <p:sp>
-        <p:nvSpPr>
-          <p:cNvPr id="18" name="Text 16"/>
-          <p:cNvSpPr txBox="1"/>
-          <p:nvPr/>
-        </p:nvSpPr>
-        <p:spPr>
-          <a:xfrm>
-            <a:off x="7360920" y="1097280"/>
-            <a:ext cx="1261872" cy="365760"/>
-          </a:xfrm>
-          <a:prstGeom prst="rect">
-            <a:avLst/>
-          </a:prstGeom>
-          <a:noFill/>
-          <a:ln/>
-        </p:spPr>
-        <p:txBody>
-          <a:bodyPr wrap="square" lIns="0" tIns="0" rIns="0" bIns="0" rtlCol="0" anchor="ctr">
-            <a:normAutofit/>
-          </a:bodyPr>
-          <a:lstStyle/>
-          <a:p>
-            <a:pPr indent="0" marL="0">
-              <a:buNone/>
-            </a:pPr>
-            <a:r>
-              <a:rPr lang="en-US" sz="1200" b="1" dirty="0">
-                <a:solidFill>
-                  <a:schemeClr val="tx1"/>
-                </a:solidFill>
-                <a:latin typeface="Cambria" pitchFamily="34" charset="0"/>
-                <a:ea typeface="Cambria" pitchFamily="34" charset="-122"/>
-                <a:cs typeface="Cambria" pitchFamily="34" charset="-120"/>
-              </a:rPr>
-              <a:t>Clientes nuevos</a:t>
-            </a:r>
-            <a:endParaRPr lang="en-US" sz="1200" dirty="0"/>
-          </a:p>
-        </p:txBody>
-      </p:sp>
-      <p:sp>
-        <p:nvSpPr>
-          <p:cNvPr id="19" name="Text 17"/>
-          <p:cNvSpPr txBox="1"/>
-          <p:nvPr/>
-        </p:nvSpPr>
-        <p:spPr>
-          <a:xfrm>
-            <a:off x="7040880" y="1508760"/>
-            <a:ext cx="1536192" cy="987552"/>
-          </a:xfrm>
-          <a:prstGeom prst="rect">
-            <a:avLst/>
-          </a:prstGeom>
-          <a:noFill/>
-          <a:ln/>
-        </p:spPr>
-        <p:txBody>
-          <a:bodyPr wrap="square" lIns="0" tIns="0" rIns="0" bIns="0" rtlCol="0" anchor="t"/>
-          <a:lstStyle/>
-          <a:p>
-            <a:pPr indent="0" marL="0">
-              <a:buNone/>
-            </a:pPr>
-            <a:r>
-              <a:rPr lang="en-US" sz="1100" dirty="0">
-                <a:solidFill>
-                  <a:schemeClr val="tx1"/>
-                </a:solidFill>
-              </a:rPr>
-              <a:t>523 en el año, a unos $49 cada uno</a:t>
-            </a:r>
-            <a:endParaRPr lang="en-US" sz="1100" dirty="0"/>
-          </a:p>
-        </p:txBody>
-      </p:sp>
-      <p:sp>
-        <p:nvSpPr>
-          <p:cNvPr id="20" name="AY card 3"/>
-          <p:cNvSpPr/>
-          <p:nvPr/>
-        </p:nvSpPr>
-        <p:spPr>
-          <a:xfrm>
-            <a:off x="5029200" y="2697480"/>
-            <a:ext cx="1783080" cy="1554480"/>
-          </a:xfrm>
-          <a:prstGeom prst="roundRect">
-            <a:avLst>
-              <a:gd name="adj" fmla="val 4706"/>
-            </a:avLst>
-          </a:prstGeom>
-          <a:solidFill>
-            <a:schemeClr val="bg2"/>
-          </a:solidFill>
-          <a:ln/>
-        </p:spPr>
-      </p:sp>
-      <p:sp>
-        <p:nvSpPr>
-          <p:cNvPr id="21" name="AY dot 3"/>
-          <p:cNvSpPr/>
-          <p:nvPr/>
-        </p:nvSpPr>
-        <p:spPr>
-          <a:xfrm>
-            <a:off x="5166360" y="2834640"/>
-            <a:ext cx="256032" cy="256032"/>
-          </a:xfrm>
-          <a:prstGeom prst="ellipse">
-            <a:avLst/>
-          </a:prstGeom>
-          <a:solidFill>
-            <a:schemeClr val="accent2"/>
-          </a:solidFill>
-          <a:ln/>
-        </p:spPr>
-      </p:sp>
-      <p:sp>
-        <p:nvSpPr>
-          <p:cNvPr id="22" name="Text 20"/>
-          <p:cNvSpPr txBox="1"/>
-          <p:nvPr/>
-        </p:nvSpPr>
-        <p:spPr>
-          <a:xfrm>
-            <a:off x="5486400" y="2788920"/>
-            <a:ext cx="1261872" cy="365760"/>
-          </a:xfrm>
-          <a:prstGeom prst="rect">
-            <a:avLst/>
-          </a:prstGeom>
-          <a:noFill/>
-          <a:ln/>
-        </p:spPr>
-        <p:txBody>
-          <a:bodyPr wrap="square" lIns="0" tIns="0" rIns="0" bIns="0" rtlCol="0" anchor="ctr">
-            <a:normAutofit/>
-          </a:bodyPr>
-          <a:lstStyle/>
-          <a:p>
-            <a:pPr indent="0" marL="0">
-              <a:buNone/>
-            </a:pPr>
-            <a:r>
-              <a:rPr lang="en-US" sz="1200" b="1" dirty="0">
-                <a:solidFill>
-                  <a:schemeClr val="tx1"/>
-                </a:solidFill>
-                <a:latin typeface="Cambria" pitchFamily="34" charset="0"/>
-                <a:ea typeface="Cambria" pitchFamily="34" charset="-122"/>
-                <a:cs typeface="Cambria" pitchFamily="34" charset="-120"/>
-              </a:rPr>
-              <a:t>Ventas sanas</a:t>
-            </a:r>
-            <a:endParaRPr lang="en-US" sz="1200" dirty="0"/>
-          </a:p>
-        </p:txBody>
-      </p:sp>
-      <p:sp>
-        <p:nvSpPr>
-          <p:cNvPr id="23" name="Text 21"/>
-          <p:cNvSpPr txBox="1"/>
-          <p:nvPr/>
-        </p:nvSpPr>
-        <p:spPr>
-          <a:xfrm>
-            <a:off x="5166360" y="3200400"/>
-            <a:ext cx="1536192" cy="987552"/>
-          </a:xfrm>
-          <a:prstGeom prst="rect">
-            <a:avLst/>
-          </a:prstGeom>
-          <a:noFill/>
-          <a:ln/>
-        </p:spPr>
-        <p:txBody>
-          <a:bodyPr wrap="square" lIns="0" tIns="0" rIns="0" bIns="0" rtlCol="0" anchor="t"/>
-          <a:lstStyle/>
-          <a:p>
-            <a:pPr indent="0" marL="0">
-              <a:buNone/>
-            </a:pPr>
-            <a:r>
-              <a:rPr lang="en-US" sz="1100" dirty="0">
-                <a:solidFill>
-                  <a:schemeClr val="tx1"/>
-                </a:solidFill>
-              </a:rPr>
-              <a:t>Descuentos de solo 5,7% y devoluciones de 3,5% sobre ventas</a:t>
-            </a:r>
-            <a:endParaRPr lang="en-US" sz="1100" dirty="0"/>
-          </a:p>
-        </p:txBody>
-      </p:sp>
-      <p:sp>
-        <p:nvSpPr>
-          <p:cNvPr id="24" name="AY card 4"/>
-          <p:cNvSpPr/>
-          <p:nvPr/>
-        </p:nvSpPr>
-        <p:spPr>
-          <a:xfrm>
-            <a:off x="6903720" y="2697480"/>
-            <a:ext cx="1783080" cy="1554480"/>
-          </a:xfrm>
-          <a:prstGeom prst="roundRect">
-            <a:avLst>
-              <a:gd name="adj" fmla="val 4706"/>
-            </a:avLst>
-          </a:prstGeom>
-          <a:solidFill>
-            <a:schemeClr val="bg2"/>
-          </a:solidFill>
-          <a:ln/>
-        </p:spPr>
-      </p:sp>
-      <p:sp>
-        <p:nvSpPr>
-          <p:cNvPr id="25" name="AY dot 4"/>
-          <p:cNvSpPr/>
-          <p:nvPr/>
-        </p:nvSpPr>
-        <p:spPr>
-          <a:xfrm>
-            <a:off x="7040880" y="2834640"/>
-            <a:ext cx="256032" cy="256032"/>
-          </a:xfrm>
-          <a:prstGeom prst="ellipse">
-            <a:avLst/>
-          </a:prstGeom>
-          <a:solidFill>
-            <a:schemeClr val="accent2"/>
-          </a:solidFill>
-          <a:ln/>
-        </p:spPr>
-      </p:sp>
-      <p:sp>
-        <p:nvSpPr>
-          <p:cNvPr id="26" name="Text 24"/>
-          <p:cNvSpPr txBox="1"/>
-          <p:nvPr/>
-        </p:nvSpPr>
-        <p:spPr>
-          <a:xfrm>
-            <a:off x="7360920" y="2788920"/>
-            <a:ext cx="1261872" cy="365760"/>
-          </a:xfrm>
-          <a:prstGeom prst="rect">
-            <a:avLst/>
-          </a:prstGeom>
-          <a:noFill/>
-          <a:ln/>
-        </p:spPr>
-        <p:txBody>
-          <a:bodyPr wrap="square" lIns="0" tIns="0" rIns="0" bIns="0" rtlCol="0" anchor="ctr">
-            <a:normAutofit/>
-          </a:bodyPr>
-          <a:lstStyle/>
-          <a:p>
-            <a:pPr indent="0" marL="0">
-              <a:buNone/>
-            </a:pPr>
-            <a:r>
-              <a:rPr lang="en-US" sz="1200" b="1" dirty="0">
-                <a:solidFill>
-                  <a:schemeClr val="tx1"/>
-                </a:solidFill>
-                <a:latin typeface="Cambria" pitchFamily="34" charset="0"/>
-                <a:ea typeface="Cambria" pitchFamily="34" charset="-122"/>
-                <a:cs typeface="Cambria" pitchFamily="34" charset="-120"/>
-              </a:rPr>
-              <a:t>Meta en octubre</a:t>
-            </a:r>
-            <a:endParaRPr lang="en-US" sz="1200" dirty="0"/>
-          </a:p>
-        </p:txBody>
-      </p:sp>
-      <p:sp>
-        <p:nvSpPr>
-          <p:cNvPr id="27" name="Text 25"/>
-          <p:cNvSpPr txBox="1"/>
-          <p:nvPr/>
-        </p:nvSpPr>
-        <p:spPr>
-          <a:xfrm>
-            <a:off x="7040880" y="3200400"/>
-            <a:ext cx="1536192" cy="987552"/>
-          </a:xfrm>
-          <a:prstGeom prst="rect">
-            <a:avLst/>
-          </a:prstGeom>
-          <a:noFill/>
-          <a:ln/>
-        </p:spPr>
-        <p:txBody>
-          <a:bodyPr wrap="square" lIns="0" tIns="0" rIns="0" bIns="0" rtlCol="0" anchor="t"/>
-          <a:lstStyle/>
-          <a:p>
-            <a:pPr indent="0" marL="0">
-              <a:buNone/>
-            </a:pPr>
-            <a:r>
-              <a:rPr lang="en-US" sz="1100" dirty="0">
-                <a:solidFill>
-                  <a:schemeClr val="tx1"/>
-                </a:solidFill>
-              </a:rPr>
-              <a:t>Clientes nuevos a $26 por compra, la campaña más eficiente del portafolio</a:t>
-            </a:r>
-            <a:endParaRPr lang="en-US" sz="1100" dirty="0"/>
-          </a:p>
-        </p:txBody>
-      </p:sp>
-      <p:sp>
-        <p:nvSpPr>
-          <p:cNvPr id="28" name="Text 26"/>
-          <p:cNvSpPr txBox="1"/>
-          <p:nvPr/>
-        </p:nvSpPr>
-        <p:spPr>
-          <a:xfrm>
-            <a:off x="457200" y="4434840"/>
-            <a:ext cx="8229600" cy="274320"/>
-          </a:xfrm>
-          <a:prstGeom prst="rect">
-            <a:avLst/>
-          </a:prstGeom>
-          <a:noFill/>
-          <a:ln/>
-        </p:spPr>
-        <p:txBody>
-          <a:bodyPr wrap="square" lIns="0" tIns="0" rIns="0" bIns="0" rtlCol="0" anchor="ctr"/>
-          <a:lstStyle/>
-          <a:p>
-            <a:pPr indent="0" marL="0">
-              <a:buNone/>
-            </a:pPr>
-            <a:r>
-              <a:rPr lang="en-US" sz="900" i="1" dirty="0">
-                <a:solidFill>
-                  <a:schemeClr val="accent4"/>
-                </a:solidFill>
-              </a:rPr>
-              <a:t>Fuente: dashboard Shopify DTC de Ayoba (1 ene – 13 oct 2026) y Meta Ads Manager (6–13 oct).</a:t>
-            </a:r>
-            <a:endParaRPr lang="en-US" sz="900" dirty="0"/>
+            <a:pPr marL="342900" indent="-342900">
+              <a:spcAft>
+                <a:spcPts val="800"/>
+              </a:spcAft>
+              <a:buSzPct val="100000"/>
+              <a:buChar char="•"/>
+            </a:pPr>
+            <a:r>
+              <a:rPr lang="en-US" sz="1300" dirty="0">
+                <a:solidFill>
+                  <a:schemeClr val="bg1"/>
+                </a:solidFill>
+              </a:rPr>
+              <a:t>Campañas de clientes nuevos con promo, no de marca</a:t>
+            </a:r>
+            <a:endParaRPr lang="en-US" sz="1300" dirty="0"/>
+          </a:p>
+          <a:p>
+            <a:pPr marL="342900" indent="-342900">
+              <a:spcAft>
+                <a:spcPts val="800"/>
+              </a:spcAft>
+              <a:buSzPct val="100000"/>
+              <a:buChar char="•"/>
+            </a:pPr>
+            <a:r>
+              <a:rPr lang="en-US" sz="1300" dirty="0">
+                <a:solidFill>
+                  <a:schemeClr val="bg1"/>
+                </a:solidFill>
+              </a:rPr>
+              <a:t>Llevar la pauta hacia Amazon y medir cuánto contribuye</a:t>
+            </a:r>
+            <a:endParaRPr lang="en-US" sz="1300" dirty="0"/>
+          </a:p>
+          <a:p>
+            <a:pPr marL="342900" indent="-342900">
+              <a:spcAft>
+                <a:spcPts val="800"/>
+              </a:spcAft>
+              <a:buSzPct val="100000"/>
+              <a:buChar char="•"/>
+            </a:pPr>
+            <a:r>
+              <a:rPr lang="en-US" sz="1300" dirty="0">
+                <a:solidFill>
+                  <a:schemeClr val="bg1"/>
+                </a:solidFill>
+              </a:rPr>
+              <a:t>Branding con página completa que lleva directo a Amazon, más catálogo y retargeting</a:t>
+            </a:r>
+            <a:endParaRPr lang="en-US" sz="1300" dirty="0"/>
+          </a:p>
+          <a:p>
+            <a:pPr marL="342900" indent="-342900">
+              <a:spcAft>
+                <a:spcPts val="800"/>
+              </a:spcAft>
+              <a:buSzPct val="100000"/>
+              <a:buChar char="•"/>
+            </a:pPr>
+            <a:r>
+              <a:rPr lang="en-US" sz="1300" dirty="0">
+                <a:solidFill>
+                  <a:schemeClr val="bg1"/>
+                </a:solidFill>
+              </a:rPr>
+              <a:t>Bajar el presupuesto de Meta y monitorear su retorno indirecto</a:t>
+            </a:r>
+            <a:endParaRPr lang="en-US" sz="1300" dirty="0"/>
           </a:p>
         </p:txBody>
       </p:sp>
@@ -12204,7 +13074,7 @@
                 <a:ea typeface="Cambria" pitchFamily="34" charset="-122"/>
                 <a:cs typeface="Cambria" pitchFamily="34" charset="-120"/>
               </a:rPr>
-              <a:t>Ayoba: buen tráfico, el foco es Amazon</a:t>
+              <a:t>Ayoba: ticket alto y una operación rentable</a:t>
             </a:r>
             <a:endParaRPr lang="en-US" sz="2600" dirty="0"/>
           </a:p>
@@ -12212,18 +13082,18 @@
       </p:sp>
       <p:sp>
         <p:nvSpPr>
-          <p:cNvPr id="3" name="AY now panel"/>
+          <p:cNvPr id="3" name="AY stat 1"/>
           <p:cNvSpPr/>
           <p:nvPr/>
         </p:nvSpPr>
         <p:spPr>
           <a:xfrm>
             <a:off x="457200" y="1005840"/>
-            <a:ext cx="4023360" cy="3383280"/>
+            <a:ext cx="4206240" cy="1005840"/>
           </a:xfrm>
           <a:prstGeom prst="roundRect">
             <a:avLst>
-              <a:gd name="adj" fmla="val 2162"/>
+              <a:gd name="adj" fmla="val 7273"/>
             </a:avLst>
           </a:prstGeom>
           <a:solidFill>
@@ -12234,36 +13104,14 @@
       </p:sp>
       <p:sp>
         <p:nvSpPr>
-          <p:cNvPr id="4" name="AY next panel"/>
-          <p:cNvSpPr/>
-          <p:nvPr/>
-        </p:nvSpPr>
-        <p:spPr>
-          <a:xfrm>
-            <a:off x="4663440" y="1005840"/>
-            <a:ext cx="4023360" cy="3383280"/>
-          </a:xfrm>
-          <a:prstGeom prst="roundRect">
-            <a:avLst>
-              <a:gd name="adj" fmla="val 2162"/>
-            </a:avLst>
-          </a:prstGeom>
-          <a:solidFill>
-            <a:schemeClr val="tx1"/>
-          </a:solidFill>
-          <a:ln/>
-        </p:spPr>
-      </p:sp>
-      <p:sp>
-        <p:nvSpPr>
-          <p:cNvPr id="5" name="Text 3"/>
+          <p:cNvPr id="4" name="Text 2"/>
           <p:cNvSpPr txBox="1"/>
           <p:nvPr/>
         </p:nvSpPr>
         <p:spPr>
           <a:xfrm>
-            <a:off x="685800" y="1188720"/>
-            <a:ext cx="3566160" cy="365760"/>
+            <a:off x="640080" y="1097280"/>
+            <a:ext cx="1463040" cy="822960"/>
           </a:xfrm>
           <a:prstGeom prst="rect">
             <a:avLst/>
@@ -12272,37 +13120,39 @@
           <a:ln/>
         </p:spPr>
         <p:txBody>
-          <a:bodyPr wrap="square" lIns="0" tIns="0" rIns="0" bIns="0" rtlCol="0" anchor="ctr"/>
+          <a:bodyPr wrap="square" lIns="0" tIns="0" rIns="0" bIns="0" rtlCol="0" anchor="ctr">
+            <a:normAutofit/>
+          </a:bodyPr>
           <a:lstStyle/>
           <a:p>
             <a:pPr indent="0" marL="0">
               <a:buNone/>
             </a:pPr>
             <a:r>
-              <a:rPr lang="en-US" sz="1700" b="1" dirty="0">
-                <a:solidFill>
-                  <a:schemeClr val="accent1"/>
+              <a:rPr lang="en-US" sz="3000" b="1" dirty="0">
+                <a:solidFill>
+                  <a:schemeClr val="tx2"/>
                 </a:solidFill>
                 <a:latin typeface="Cambria" pitchFamily="34" charset="0"/>
                 <a:ea typeface="Cambria" pitchFamily="34" charset="-122"/>
                 <a:cs typeface="Cambria" pitchFamily="34" charset="-120"/>
               </a:rPr>
-              <a:t>Dónde estamos</a:t>
-            </a:r>
-            <a:endParaRPr lang="en-US" sz="1700" dirty="0"/>
-          </a:p>
-        </p:txBody>
-      </p:sp>
-      <p:sp>
-        <p:nvSpPr>
-          <p:cNvPr id="6" name="Text 4"/>
+              <a:t>$107,8K</a:t>
+            </a:r>
+            <a:endParaRPr lang="en-US" sz="3000" dirty="0"/>
+          </a:p>
+        </p:txBody>
+      </p:sp>
+      <p:sp>
+        <p:nvSpPr>
+          <p:cNvPr id="5" name="Text 3"/>
           <p:cNvSpPr txBox="1"/>
           <p:nvPr/>
         </p:nvSpPr>
         <p:spPr>
           <a:xfrm>
-            <a:off x="4892040" y="1188720"/>
-            <a:ext cx="3566160" cy="365760"/>
+            <a:off x="2194560" y="1097280"/>
+            <a:ext cx="2331720" cy="822960"/>
           </a:xfrm>
           <a:prstGeom prst="rect">
             <a:avLst/>
@@ -12318,111 +13168,77 @@
               <a:buNone/>
             </a:pPr>
             <a:r>
-              <a:rPr lang="en-US" sz="1700" b="1" dirty="0">
-                <a:solidFill>
-                  <a:schemeClr val="accent6"/>
+              <a:rPr lang="en-US" sz="1200" dirty="0">
+                <a:solidFill>
+                  <a:schemeClr val="tx1"/>
+                </a:solidFill>
+              </a:rPr>
+              <a:t>en ventas brutas en lo que va del año, con 1.188 órdenes</a:t>
+            </a:r>
+            <a:endParaRPr lang="en-US" sz="1200" dirty="0"/>
+          </a:p>
+        </p:txBody>
+      </p:sp>
+      <p:sp>
+        <p:nvSpPr>
+          <p:cNvPr id="6" name="AY stat 2"/>
+          <p:cNvSpPr/>
+          <p:nvPr/>
+        </p:nvSpPr>
+        <p:spPr>
+          <a:xfrm>
+            <a:off x="457200" y="2148840"/>
+            <a:ext cx="4206240" cy="1005840"/>
+          </a:xfrm>
+          <a:prstGeom prst="roundRect">
+            <a:avLst>
+              <a:gd name="adj" fmla="val 7273"/>
+            </a:avLst>
+          </a:prstGeom>
+          <a:solidFill>
+            <a:schemeClr val="bg2"/>
+          </a:solidFill>
+          <a:ln/>
+        </p:spPr>
+      </p:sp>
+      <p:sp>
+        <p:nvSpPr>
+          <p:cNvPr id="7" name="Text 5"/>
+          <p:cNvSpPr txBox="1"/>
+          <p:nvPr/>
+        </p:nvSpPr>
+        <p:spPr>
+          <a:xfrm>
+            <a:off x="640080" y="2240280"/>
+            <a:ext cx="1463040" cy="822960"/>
+          </a:xfrm>
+          <a:prstGeom prst="rect">
+            <a:avLst/>
+          </a:prstGeom>
+          <a:noFill/>
+          <a:ln/>
+        </p:spPr>
+        <p:txBody>
+          <a:bodyPr wrap="square" lIns="0" tIns="0" rIns="0" bIns="0" rtlCol="0" anchor="ctr">
+            <a:normAutofit/>
+          </a:bodyPr>
+          <a:lstStyle/>
+          <a:p>
+            <a:pPr indent="0" marL="0">
+              <a:buNone/>
+            </a:pPr>
+            <a:r>
+              <a:rPr lang="en-US" sz="3000" b="1" dirty="0">
+                <a:solidFill>
+                  <a:schemeClr val="accent2"/>
                 </a:solidFill>
                 <a:latin typeface="Cambria" pitchFamily="34" charset="0"/>
                 <a:ea typeface="Cambria" pitchFamily="34" charset="-122"/>
                 <a:cs typeface="Cambria" pitchFamily="34" charset="-120"/>
               </a:rPr>
-              <a:t>Hacia dónde vamos</a:t>
-            </a:r>
-            <a:endParaRPr lang="en-US" sz="1700" dirty="0"/>
-          </a:p>
-        </p:txBody>
-      </p:sp>
-      <p:sp>
-        <p:nvSpPr>
-          <p:cNvPr id="7" name="Text 5"/>
-          <p:cNvSpPr txBox="1"/>
-          <p:nvPr/>
-        </p:nvSpPr>
-        <p:spPr>
-          <a:xfrm>
-            <a:off x="685800" y="1691640"/>
-            <a:ext cx="3611880" cy="2560320"/>
-          </a:xfrm>
-          <a:prstGeom prst="rect">
-            <a:avLst/>
-          </a:prstGeom>
-          <a:noFill/>
-          <a:ln/>
-        </p:spPr>
-        <p:txBody>
-          <a:bodyPr wrap="square" lIns="0" tIns="0" rIns="0" bIns="0" rtlCol="0" anchor="t"/>
-          <a:lstStyle/>
-          <a:p>
-            <a:pPr marL="342900" indent="-342900">
-              <a:spcAft>
-                <a:spcPts val="800"/>
-              </a:spcAft>
-              <a:buSzPct val="100000"/>
-              <a:buChar char="•"/>
-            </a:pPr>
-            <a:r>
-              <a:rPr lang="en-US" sz="1300" dirty="0">
-                <a:solidFill>
-                  <a:schemeClr val="tx1"/>
-                </a:solidFill>
-              </a:rPr>
-              <a:t>Vende muy poco en la web</a:t>
-            </a:r>
-            <a:endParaRPr lang="en-US" sz="1300" dirty="0"/>
-          </a:p>
-          <a:p>
-            <a:pPr marL="342900" indent="-342900">
-              <a:spcAft>
-                <a:spcPts val="800"/>
-              </a:spcAft>
-              <a:buSzPct val="100000"/>
-              <a:buChar char="•"/>
-            </a:pPr>
-            <a:r>
-              <a:rPr lang="en-US" sz="1300" dirty="0">
-                <a:solidFill>
-                  <a:schemeClr val="tx1"/>
-                </a:solidFill>
-              </a:rPr>
-              <a:t>El tráfico que llega es bueno, pero la experiencia de compra frena la conversión</a:t>
-            </a:r>
-            <a:endParaRPr lang="en-US" sz="1300" dirty="0"/>
-          </a:p>
-          <a:p>
-            <a:pPr marL="342900" indent="-342900">
-              <a:spcAft>
-                <a:spcPts val="800"/>
-              </a:spcAft>
-              <a:buSzPct val="100000"/>
-              <a:buChar char="•"/>
-            </a:pPr>
-            <a:r>
-              <a:rPr lang="en-US" sz="1300" dirty="0">
-                <a:solidFill>
-                  <a:schemeClr val="tx1"/>
-                </a:solidFill>
-              </a:rPr>
-              <a:t>Octubre: $3,1K en ventas con un retorno blended de 3,6x</a:t>
-            </a:r>
-            <a:endParaRPr lang="en-US" sz="1300" dirty="0"/>
-          </a:p>
-          <a:p>
-            <a:pPr marL="342900" indent="-342900">
-              <a:spcAft>
-                <a:spcPts val="800"/>
-              </a:spcAft>
-              <a:buSzPct val="100000"/>
-              <a:buChar char="•"/>
-            </a:pPr>
-            <a:r>
-              <a:rPr lang="en-US" sz="1300" dirty="0">
-                <a:solidFill>
-                  <a:schemeClr val="tx1"/>
-                </a:solidFill>
-              </a:rPr>
-              <a:t>58% de los clientes son recurrentes: el reto es el volumen de nuevos</a:t>
-            </a:r>
-            <a:endParaRPr lang="en-US" sz="1300" dirty="0"/>
+              <a:t>60%</a:t>
+            </a:r>
+            <a:endParaRPr lang="en-US" sz="3000" dirty="0"/>
           </a:p>
         </p:txBody>
       </p:sp>
@@ -12434,8 +13250,8 @@
         </p:nvSpPr>
         <p:spPr>
           <a:xfrm>
-            <a:off x="4892040" y="1691640"/>
-            <a:ext cx="3611880" cy="2560320"/>
+            <a:off x="2194560" y="2240280"/>
+            <a:ext cx="2331720" cy="822960"/>
           </a:xfrm>
           <a:prstGeom prst="rect">
             <a:avLst/>
@@ -12444,79 +13260,632 @@
           <a:ln/>
         </p:spPr>
         <p:txBody>
+          <a:bodyPr wrap="square" lIns="0" tIns="0" rIns="0" bIns="0" rtlCol="0" anchor="ctr"/>
+          <a:lstStyle/>
+          <a:p>
+            <a:pPr indent="0" marL="0">
+              <a:buNone/>
+            </a:pPr>
+            <a:r>
+              <a:rPr lang="en-US" sz="1200" dirty="0">
+                <a:solidFill>
+                  <a:schemeClr val="tx1"/>
+                </a:solidFill>
+              </a:rPr>
+              <a:t>de margen bruto después del costo de producto: $64,7K de contribución</a:t>
+            </a:r>
+            <a:endParaRPr lang="en-US" sz="1200" dirty="0"/>
+          </a:p>
+        </p:txBody>
+      </p:sp>
+      <p:sp>
+        <p:nvSpPr>
+          <p:cNvPr id="9" name="AY stat 3"/>
+          <p:cNvSpPr/>
+          <p:nvPr/>
+        </p:nvSpPr>
+        <p:spPr>
+          <a:xfrm>
+            <a:off x="457200" y="3291840"/>
+            <a:ext cx="4206240" cy="1005840"/>
+          </a:xfrm>
+          <a:prstGeom prst="roundRect">
+            <a:avLst>
+              <a:gd name="adj" fmla="val 7273"/>
+            </a:avLst>
+          </a:prstGeom>
+          <a:solidFill>
+            <a:schemeClr val="bg2"/>
+          </a:solidFill>
+          <a:ln/>
+        </p:spPr>
+      </p:sp>
+      <p:sp>
+        <p:nvSpPr>
+          <p:cNvPr id="10" name="Text 8"/>
+          <p:cNvSpPr txBox="1"/>
+          <p:nvPr/>
+        </p:nvSpPr>
+        <p:spPr>
+          <a:xfrm>
+            <a:off x="640080" y="3383280"/>
+            <a:ext cx="1463040" cy="822960"/>
+          </a:xfrm>
+          <a:prstGeom prst="rect">
+            <a:avLst/>
+          </a:prstGeom>
+          <a:noFill/>
+          <a:ln/>
+        </p:spPr>
+        <p:txBody>
+          <a:bodyPr wrap="square" lIns="0" tIns="0" rIns="0" bIns="0" rtlCol="0" anchor="ctr">
+            <a:normAutofit/>
+          </a:bodyPr>
+          <a:lstStyle/>
+          <a:p>
+            <a:pPr indent="0" marL="0">
+              <a:buNone/>
+            </a:pPr>
+            <a:r>
+              <a:rPr lang="en-US" sz="3000" b="1" dirty="0">
+                <a:solidFill>
+                  <a:schemeClr val="accent1"/>
+                </a:solidFill>
+                <a:latin typeface="Cambria" pitchFamily="34" charset="0"/>
+                <a:ea typeface="Cambria" pitchFamily="34" charset="-122"/>
+                <a:cs typeface="Cambria" pitchFamily="34" charset="-120"/>
+              </a:rPr>
+              <a:t>4,2x</a:t>
+            </a:r>
+            <a:endParaRPr lang="en-US" sz="3000" dirty="0"/>
+          </a:p>
+        </p:txBody>
+      </p:sp>
+      <p:sp>
+        <p:nvSpPr>
+          <p:cNvPr id="11" name="Text 9"/>
+          <p:cNvSpPr txBox="1"/>
+          <p:nvPr/>
+        </p:nvSpPr>
+        <p:spPr>
+          <a:xfrm>
+            <a:off x="2194560" y="3383280"/>
+            <a:ext cx="2331720" cy="822960"/>
+          </a:xfrm>
+          <a:prstGeom prst="rect">
+            <a:avLst/>
+          </a:prstGeom>
+          <a:noFill/>
+          <a:ln/>
+        </p:spPr>
+        <p:txBody>
+          <a:bodyPr wrap="square" lIns="0" tIns="0" rIns="0" bIns="0" rtlCol="0" anchor="ctr"/>
+          <a:lstStyle/>
+          <a:p>
+            <a:pPr indent="0" marL="0">
+              <a:buNone/>
+            </a:pPr>
+            <a:r>
+              <a:rPr lang="en-US" sz="1200" dirty="0">
+                <a:solidFill>
+                  <a:schemeClr val="tx1"/>
+                </a:solidFill>
+              </a:rPr>
+              <a:t>en ventas por cada dólar invertido en medios pagados en el año</a:t>
+            </a:r>
+            <a:endParaRPr lang="en-US" sz="1200" dirty="0"/>
+          </a:p>
+        </p:txBody>
+      </p:sp>
+      <p:sp>
+        <p:nvSpPr>
+          <p:cNvPr id="12" name="AY card 1"/>
+          <p:cNvSpPr/>
+          <p:nvPr/>
+        </p:nvSpPr>
+        <p:spPr>
+          <a:xfrm>
+            <a:off x="5029200" y="1005840"/>
+            <a:ext cx="1783080" cy="1554480"/>
+          </a:xfrm>
+          <a:prstGeom prst="roundRect">
+            <a:avLst>
+              <a:gd name="adj" fmla="val 4706"/>
+            </a:avLst>
+          </a:prstGeom>
+          <a:solidFill>
+            <a:schemeClr val="bg2"/>
+          </a:solidFill>
+          <a:ln/>
+        </p:spPr>
+      </p:sp>
+      <p:sp>
+        <p:nvSpPr>
+          <p:cNvPr id="13" name="AY dot 1"/>
+          <p:cNvSpPr/>
+          <p:nvPr/>
+        </p:nvSpPr>
+        <p:spPr>
+          <a:xfrm>
+            <a:off x="5166360" y="1143000"/>
+            <a:ext cx="256032" cy="256032"/>
+          </a:xfrm>
+          <a:prstGeom prst="ellipse">
+            <a:avLst/>
+          </a:prstGeom>
+          <a:solidFill>
+            <a:schemeClr val="accent2"/>
+          </a:solidFill>
+          <a:ln/>
+        </p:spPr>
+      </p:sp>
+      <p:sp>
+        <p:nvSpPr>
+          <p:cNvPr id="14" name="Text 12"/>
+          <p:cNvSpPr txBox="1"/>
+          <p:nvPr/>
+        </p:nvSpPr>
+        <p:spPr>
+          <a:xfrm>
+            <a:off x="5486400" y="1097280"/>
+            <a:ext cx="1261872" cy="365760"/>
+          </a:xfrm>
+          <a:prstGeom prst="rect">
+            <a:avLst/>
+          </a:prstGeom>
+          <a:noFill/>
+          <a:ln/>
+        </p:spPr>
+        <p:txBody>
+          <a:bodyPr wrap="square" lIns="0" tIns="0" rIns="0" bIns="0" rtlCol="0" anchor="ctr">
+            <a:normAutofit/>
+          </a:bodyPr>
+          <a:lstStyle/>
+          <a:p>
+            <a:pPr indent="0" marL="0">
+              <a:buNone/>
+            </a:pPr>
+            <a:r>
+              <a:rPr lang="en-US" sz="1200" b="1" dirty="0">
+                <a:solidFill>
+                  <a:schemeClr val="tx1"/>
+                </a:solidFill>
+                <a:latin typeface="Cambria" pitchFamily="34" charset="0"/>
+                <a:ea typeface="Cambria" pitchFamily="34" charset="-122"/>
+                <a:cs typeface="Cambria" pitchFamily="34" charset="-120"/>
+              </a:rPr>
+              <a:t>Ticket más alto</a:t>
+            </a:r>
+            <a:endParaRPr lang="en-US" sz="1200" dirty="0"/>
+          </a:p>
+        </p:txBody>
+      </p:sp>
+      <p:sp>
+        <p:nvSpPr>
+          <p:cNvPr id="15" name="Text 13"/>
+          <p:cNvSpPr txBox="1"/>
+          <p:nvPr/>
+        </p:nvSpPr>
+        <p:spPr>
+          <a:xfrm>
+            <a:off x="5166360" y="1508760"/>
+            <a:ext cx="1536192" cy="987552"/>
+          </a:xfrm>
+          <a:prstGeom prst="rect">
+            <a:avLst/>
+          </a:prstGeom>
+          <a:noFill/>
+          <a:ln/>
+        </p:spPr>
+        <p:txBody>
           <a:bodyPr wrap="square" lIns="0" tIns="0" rIns="0" bIns="0" rtlCol="0" anchor="t"/>
           <a:lstStyle/>
           <a:p>
-            <a:pPr marL="342900" indent="-342900">
-              <a:spcAft>
-                <a:spcPts val="800"/>
-              </a:spcAft>
-              <a:buSzPct val="100000"/>
-              <a:buChar char="•"/>
-            </a:pPr>
-            <a:r>
-              <a:rPr lang="en-US" sz="1300" dirty="0">
-                <a:solidFill>
-                  <a:schemeClr val="bg1"/>
-                </a:solidFill>
-              </a:rPr>
-              <a:t>Test A/B: campaña de marca hacia Amazon para medir el resultado</a:t>
-            </a:r>
-            <a:endParaRPr lang="en-US" sz="1300" dirty="0"/>
-          </a:p>
-          <a:p>
-            <a:pPr marL="342900" indent="-342900">
-              <a:spcAft>
-                <a:spcPts val="800"/>
-              </a:spcAft>
-              <a:buSzPct val="100000"/>
-              <a:buChar char="•"/>
-            </a:pPr>
-            <a:r>
-              <a:rPr lang="en-US" sz="1300" dirty="0">
-                <a:solidFill>
-                  <a:schemeClr val="bg1"/>
-                </a:solidFill>
-              </a:rPr>
-              <a:t>Objetivo: sumar 10% a las ventas de Amazon (si vende $10K, +$1K)</a:t>
-            </a:r>
-            <a:endParaRPr lang="en-US" sz="1300" dirty="0"/>
-          </a:p>
-          <a:p>
-            <a:pPr marL="342900" indent="-342900">
-              <a:spcAft>
-                <a:spcPts val="800"/>
-              </a:spcAft>
-              <a:buSzPct val="100000"/>
-              <a:buChar char="•"/>
-            </a:pPr>
-            <a:r>
-              <a:rPr lang="en-US" sz="1300" dirty="0">
-                <a:solidFill>
-                  <a:schemeClr val="bg1"/>
-                </a:solidFill>
-              </a:rPr>
-              <a:t>Pauta web baja y optimizada por performance</a:t>
-            </a:r>
-            <a:endParaRPr lang="en-US" sz="1300" dirty="0"/>
-          </a:p>
-          <a:p>
-            <a:pPr marL="342900" indent="-342900">
-              <a:spcAft>
-                <a:spcPts val="800"/>
-              </a:spcAft>
-              <a:buSzPct val="100000"/>
-              <a:buChar char="•"/>
-            </a:pPr>
-            <a:r>
-              <a:rPr lang="en-US" sz="1300" dirty="0">
-                <a:solidFill>
-                  <a:schemeClr val="bg1"/>
-                </a:solidFill>
-              </a:rPr>
-              <a:t>Replicar la estrategia de Brooklyn: suscripción y recurrencia</a:t>
-            </a:r>
-            <a:endParaRPr lang="en-US" sz="1300" dirty="0"/>
+            <a:pPr indent="0" marL="0">
+              <a:buNone/>
+            </a:pPr>
+            <a:r>
+              <a:rPr lang="en-US" sz="1100" dirty="0">
+                <a:solidFill>
+                  <a:schemeClr val="tx1"/>
+                </a:solidFill>
+              </a:rPr>
+              <a:t>$91 promedio por orden, el más alto del portafolio</a:t>
+            </a:r>
+            <a:endParaRPr lang="en-US" sz="1100" dirty="0"/>
+          </a:p>
+        </p:txBody>
+      </p:sp>
+      <p:sp>
+        <p:nvSpPr>
+          <p:cNvPr id="16" name="AY card 2"/>
+          <p:cNvSpPr/>
+          <p:nvPr/>
+        </p:nvSpPr>
+        <p:spPr>
+          <a:xfrm>
+            <a:off x="6903720" y="1005840"/>
+            <a:ext cx="1783080" cy="1554480"/>
+          </a:xfrm>
+          <a:prstGeom prst="roundRect">
+            <a:avLst>
+              <a:gd name="adj" fmla="val 4706"/>
+            </a:avLst>
+          </a:prstGeom>
+          <a:solidFill>
+            <a:schemeClr val="bg2"/>
+          </a:solidFill>
+          <a:ln/>
+        </p:spPr>
+      </p:sp>
+      <p:sp>
+        <p:nvSpPr>
+          <p:cNvPr id="17" name="AY dot 2"/>
+          <p:cNvSpPr/>
+          <p:nvPr/>
+        </p:nvSpPr>
+        <p:spPr>
+          <a:xfrm>
+            <a:off x="7040880" y="1143000"/>
+            <a:ext cx="256032" cy="256032"/>
+          </a:xfrm>
+          <a:prstGeom prst="ellipse">
+            <a:avLst/>
+          </a:prstGeom>
+          <a:solidFill>
+            <a:schemeClr val="accent2"/>
+          </a:solidFill>
+          <a:ln/>
+        </p:spPr>
+      </p:sp>
+      <p:sp>
+        <p:nvSpPr>
+          <p:cNvPr id="18" name="Text 16"/>
+          <p:cNvSpPr txBox="1"/>
+          <p:nvPr/>
+        </p:nvSpPr>
+        <p:spPr>
+          <a:xfrm>
+            <a:off x="7360920" y="1097280"/>
+            <a:ext cx="1261872" cy="365760"/>
+          </a:xfrm>
+          <a:prstGeom prst="rect">
+            <a:avLst/>
+          </a:prstGeom>
+          <a:noFill/>
+          <a:ln/>
+        </p:spPr>
+        <p:txBody>
+          <a:bodyPr wrap="square" lIns="0" tIns="0" rIns="0" bIns="0" rtlCol="0" anchor="ctr">
+            <a:normAutofit/>
+          </a:bodyPr>
+          <a:lstStyle/>
+          <a:p>
+            <a:pPr indent="0" marL="0">
+              <a:buNone/>
+            </a:pPr>
+            <a:r>
+              <a:rPr lang="en-US" sz="1200" b="1" dirty="0">
+                <a:solidFill>
+                  <a:schemeClr val="tx1"/>
+                </a:solidFill>
+                <a:latin typeface="Cambria" pitchFamily="34" charset="0"/>
+                <a:ea typeface="Cambria" pitchFamily="34" charset="-122"/>
+                <a:cs typeface="Cambria" pitchFamily="34" charset="-120"/>
+              </a:rPr>
+              <a:t>Clientes nuevos</a:t>
+            </a:r>
+            <a:endParaRPr lang="en-US" sz="1200" dirty="0"/>
+          </a:p>
+        </p:txBody>
+      </p:sp>
+      <p:sp>
+        <p:nvSpPr>
+          <p:cNvPr id="19" name="Text 17"/>
+          <p:cNvSpPr txBox="1"/>
+          <p:nvPr/>
+        </p:nvSpPr>
+        <p:spPr>
+          <a:xfrm>
+            <a:off x="7040880" y="1508760"/>
+            <a:ext cx="1536192" cy="987552"/>
+          </a:xfrm>
+          <a:prstGeom prst="rect">
+            <a:avLst/>
+          </a:prstGeom>
+          <a:noFill/>
+          <a:ln/>
+        </p:spPr>
+        <p:txBody>
+          <a:bodyPr wrap="square" lIns="0" tIns="0" rIns="0" bIns="0" rtlCol="0" anchor="t"/>
+          <a:lstStyle/>
+          <a:p>
+            <a:pPr indent="0" marL="0">
+              <a:buNone/>
+            </a:pPr>
+            <a:r>
+              <a:rPr lang="en-US" sz="1100" dirty="0">
+                <a:solidFill>
+                  <a:schemeClr val="tx1"/>
+                </a:solidFill>
+              </a:rPr>
+              <a:t>523 en el año, a unos $49 cada uno</a:t>
+            </a:r>
+            <a:endParaRPr lang="en-US" sz="1100" dirty="0"/>
+          </a:p>
+        </p:txBody>
+      </p:sp>
+      <p:sp>
+        <p:nvSpPr>
+          <p:cNvPr id="20" name="AY card 3"/>
+          <p:cNvSpPr/>
+          <p:nvPr/>
+        </p:nvSpPr>
+        <p:spPr>
+          <a:xfrm>
+            <a:off x="5029200" y="2697480"/>
+            <a:ext cx="1783080" cy="1554480"/>
+          </a:xfrm>
+          <a:prstGeom prst="roundRect">
+            <a:avLst>
+              <a:gd name="adj" fmla="val 4706"/>
+            </a:avLst>
+          </a:prstGeom>
+          <a:solidFill>
+            <a:schemeClr val="bg2"/>
+          </a:solidFill>
+          <a:ln/>
+        </p:spPr>
+      </p:sp>
+      <p:sp>
+        <p:nvSpPr>
+          <p:cNvPr id="21" name="AY dot 3"/>
+          <p:cNvSpPr/>
+          <p:nvPr/>
+        </p:nvSpPr>
+        <p:spPr>
+          <a:xfrm>
+            <a:off x="5166360" y="2834640"/>
+            <a:ext cx="256032" cy="256032"/>
+          </a:xfrm>
+          <a:prstGeom prst="ellipse">
+            <a:avLst/>
+          </a:prstGeom>
+          <a:solidFill>
+            <a:schemeClr val="accent2"/>
+          </a:solidFill>
+          <a:ln/>
+        </p:spPr>
+      </p:sp>
+      <p:sp>
+        <p:nvSpPr>
+          <p:cNvPr id="22" name="Text 20"/>
+          <p:cNvSpPr txBox="1"/>
+          <p:nvPr/>
+        </p:nvSpPr>
+        <p:spPr>
+          <a:xfrm>
+            <a:off x="5486400" y="2788920"/>
+            <a:ext cx="1261872" cy="365760"/>
+          </a:xfrm>
+          <a:prstGeom prst="rect">
+            <a:avLst/>
+          </a:prstGeom>
+          <a:noFill/>
+          <a:ln/>
+        </p:spPr>
+        <p:txBody>
+          <a:bodyPr wrap="square" lIns="0" tIns="0" rIns="0" bIns="0" rtlCol="0" anchor="ctr">
+            <a:normAutofit/>
+          </a:bodyPr>
+          <a:lstStyle/>
+          <a:p>
+            <a:pPr indent="0" marL="0">
+              <a:buNone/>
+            </a:pPr>
+            <a:r>
+              <a:rPr lang="en-US" sz="1200" b="1" dirty="0">
+                <a:solidFill>
+                  <a:schemeClr val="tx1"/>
+                </a:solidFill>
+                <a:latin typeface="Cambria" pitchFamily="34" charset="0"/>
+                <a:ea typeface="Cambria" pitchFamily="34" charset="-122"/>
+                <a:cs typeface="Cambria" pitchFamily="34" charset="-120"/>
+              </a:rPr>
+              <a:t>Ventas sanas</a:t>
+            </a:r>
+            <a:endParaRPr lang="en-US" sz="1200" dirty="0"/>
+          </a:p>
+        </p:txBody>
+      </p:sp>
+      <p:sp>
+        <p:nvSpPr>
+          <p:cNvPr id="23" name="Text 21"/>
+          <p:cNvSpPr txBox="1"/>
+          <p:nvPr/>
+        </p:nvSpPr>
+        <p:spPr>
+          <a:xfrm>
+            <a:off x="5166360" y="3200400"/>
+            <a:ext cx="1536192" cy="987552"/>
+          </a:xfrm>
+          <a:prstGeom prst="rect">
+            <a:avLst/>
+          </a:prstGeom>
+          <a:noFill/>
+          <a:ln/>
+        </p:spPr>
+        <p:txBody>
+          <a:bodyPr wrap="square" lIns="0" tIns="0" rIns="0" bIns="0" rtlCol="0" anchor="t"/>
+          <a:lstStyle/>
+          <a:p>
+            <a:pPr indent="0" marL="0">
+              <a:buNone/>
+            </a:pPr>
+            <a:r>
+              <a:rPr lang="en-US" sz="1100" dirty="0">
+                <a:solidFill>
+                  <a:schemeClr val="tx1"/>
+                </a:solidFill>
+              </a:rPr>
+              <a:t>Descuentos de solo 5,7% y devoluciones de 3,5% sobre ventas</a:t>
+            </a:r>
+            <a:endParaRPr lang="en-US" sz="1100" dirty="0"/>
+          </a:p>
+        </p:txBody>
+      </p:sp>
+      <p:sp>
+        <p:nvSpPr>
+          <p:cNvPr id="24" name="AY card 4"/>
+          <p:cNvSpPr/>
+          <p:nvPr/>
+        </p:nvSpPr>
+        <p:spPr>
+          <a:xfrm>
+            <a:off x="6903720" y="2697480"/>
+            <a:ext cx="1783080" cy="1554480"/>
+          </a:xfrm>
+          <a:prstGeom prst="roundRect">
+            <a:avLst>
+              <a:gd name="adj" fmla="val 4706"/>
+            </a:avLst>
+          </a:prstGeom>
+          <a:solidFill>
+            <a:schemeClr val="bg2"/>
+          </a:solidFill>
+          <a:ln/>
+        </p:spPr>
+      </p:sp>
+      <p:sp>
+        <p:nvSpPr>
+          <p:cNvPr id="25" name="AY dot 4"/>
+          <p:cNvSpPr/>
+          <p:nvPr/>
+        </p:nvSpPr>
+        <p:spPr>
+          <a:xfrm>
+            <a:off x="7040880" y="2834640"/>
+            <a:ext cx="256032" cy="256032"/>
+          </a:xfrm>
+          <a:prstGeom prst="ellipse">
+            <a:avLst/>
+          </a:prstGeom>
+          <a:solidFill>
+            <a:schemeClr val="accent2"/>
+          </a:solidFill>
+          <a:ln/>
+        </p:spPr>
+      </p:sp>
+      <p:sp>
+        <p:nvSpPr>
+          <p:cNvPr id="26" name="Text 24"/>
+          <p:cNvSpPr txBox="1"/>
+          <p:nvPr/>
+        </p:nvSpPr>
+        <p:spPr>
+          <a:xfrm>
+            <a:off x="7360920" y="2788920"/>
+            <a:ext cx="1261872" cy="365760"/>
+          </a:xfrm>
+          <a:prstGeom prst="rect">
+            <a:avLst/>
+          </a:prstGeom>
+          <a:noFill/>
+          <a:ln/>
+        </p:spPr>
+        <p:txBody>
+          <a:bodyPr wrap="square" lIns="0" tIns="0" rIns="0" bIns="0" rtlCol="0" anchor="ctr">
+            <a:normAutofit/>
+          </a:bodyPr>
+          <a:lstStyle/>
+          <a:p>
+            <a:pPr indent="0" marL="0">
+              <a:buNone/>
+            </a:pPr>
+            <a:r>
+              <a:rPr lang="en-US" sz="1200" b="1" dirty="0">
+                <a:solidFill>
+                  <a:schemeClr val="tx1"/>
+                </a:solidFill>
+                <a:latin typeface="Cambria" pitchFamily="34" charset="0"/>
+                <a:ea typeface="Cambria" pitchFamily="34" charset="-122"/>
+                <a:cs typeface="Cambria" pitchFamily="34" charset="-120"/>
+              </a:rPr>
+              <a:t>Meta en octubre</a:t>
+            </a:r>
+            <a:endParaRPr lang="en-US" sz="1200" dirty="0"/>
+          </a:p>
+        </p:txBody>
+      </p:sp>
+      <p:sp>
+        <p:nvSpPr>
+          <p:cNvPr id="27" name="Text 25"/>
+          <p:cNvSpPr txBox="1"/>
+          <p:nvPr/>
+        </p:nvSpPr>
+        <p:spPr>
+          <a:xfrm>
+            <a:off x="7040880" y="3200400"/>
+            <a:ext cx="1536192" cy="987552"/>
+          </a:xfrm>
+          <a:prstGeom prst="rect">
+            <a:avLst/>
+          </a:prstGeom>
+          <a:noFill/>
+          <a:ln/>
+        </p:spPr>
+        <p:txBody>
+          <a:bodyPr wrap="square" lIns="0" tIns="0" rIns="0" bIns="0" rtlCol="0" anchor="t"/>
+          <a:lstStyle/>
+          <a:p>
+            <a:pPr indent="0" marL="0">
+              <a:buNone/>
+            </a:pPr>
+            <a:r>
+              <a:rPr lang="en-US" sz="1100" dirty="0">
+                <a:solidFill>
+                  <a:schemeClr val="tx1"/>
+                </a:solidFill>
+              </a:rPr>
+              <a:t>Clientes nuevos a $26 por compra, la campaña más eficiente del portafolio</a:t>
+            </a:r>
+            <a:endParaRPr lang="en-US" sz="1100" dirty="0"/>
+          </a:p>
+        </p:txBody>
+      </p:sp>
+      <p:sp>
+        <p:nvSpPr>
+          <p:cNvPr id="28" name="Text 26"/>
+          <p:cNvSpPr txBox="1"/>
+          <p:nvPr/>
+        </p:nvSpPr>
+        <p:spPr>
+          <a:xfrm>
+            <a:off x="457200" y="4434840"/>
+            <a:ext cx="8229600" cy="274320"/>
+          </a:xfrm>
+          <a:prstGeom prst="rect">
+            <a:avLst/>
+          </a:prstGeom>
+          <a:noFill/>
+          <a:ln/>
+        </p:spPr>
+        <p:txBody>
+          <a:bodyPr wrap="square" lIns="0" tIns="0" rIns="0" bIns="0" rtlCol="0" anchor="ctr"/>
+          <a:lstStyle/>
+          <a:p>
+            <a:pPr indent="0" marL="0">
+              <a:buNone/>
+            </a:pPr>
+            <a:r>
+              <a:rPr lang="en-US" sz="900" i="1" dirty="0">
+                <a:solidFill>
+                  <a:schemeClr val="accent4"/>
+                </a:solidFill>
+              </a:rPr>
+              <a:t>Fuente: dashboard Shopify DTC de Ayoba (1 ene – 13 oct 2026) y Meta Ads Manager (6–13 oct).</a:t>
+            </a:r>
+            <a:endParaRPr lang="en-US" sz="900" dirty="0"/>
           </a:p>
         </p:txBody>
       </p:sp>
